--- a/docs/First_Solar_Demo_Narrative.pptx
+++ b/docs/First_Solar_Demo_Narrative.pptx
@@ -3095,7 +3095,7 @@
     <p:bg>
       <p:bgPr>
         <a:solidFill>
-          <a:srgbClr val="11273F"/>
+          <a:srgbClr val="05142B"/>
         </a:solidFill>
         <a:effectLst/>
       </p:bgPr>
@@ -3107,123 +3107,42 @@
         <p:nvPr/>
       </p:nvGrpSpPr>
       <p:grpSpPr/>
-      <p:sp>
-        <p:nvSpPr>
-          <p:cNvPr id="2" name="TextBox 1"/>
-          <p:cNvSpPr txBox="1"/>
-          <p:nvPr/>
-        </p:nvSpPr>
-        <p:spPr>
-          <a:xfrm>
-            <a:off x="914400" y="1371600"/>
-            <a:ext cx="10058400" cy="914400"/>
-          </a:xfrm>
-          <a:prstGeom prst="rect">
-            <a:avLst/>
-          </a:prstGeom>
-          <a:noFill/>
-        </p:spPr>
-        <p:txBody>
-          <a:bodyPr wrap="square">
-            <a:spAutoFit/>
-          </a:bodyPr>
-          <a:lstStyle/>
-          <a:p>
-            <a:pPr algn="l">
-              <a:defRPr sz="4800" b="1">
-                <a:solidFill>
-                  <a:srgbClr val="29B5E8"/>
-                </a:solidFill>
-              </a:defRPr>
-            </a:pPr>
-            <a:r>
-              <a:t>First Solar</a:t>
-            </a:r>
-          </a:p>
-        </p:txBody>
-      </p:sp>
-      <p:sp>
-        <p:nvSpPr>
-          <p:cNvPr id="3" name="TextBox 2"/>
-          <p:cNvSpPr txBox="1"/>
-          <p:nvPr/>
-        </p:nvSpPr>
-        <p:spPr>
-          <a:xfrm>
-            <a:off x="914400" y="2286000"/>
-            <a:ext cx="10058400" cy="914400"/>
-          </a:xfrm>
-          <a:prstGeom prst="rect">
-            <a:avLst/>
-          </a:prstGeom>
-          <a:noFill/>
-        </p:spPr>
-        <p:txBody>
-          <a:bodyPr wrap="square">
-            <a:spAutoFit/>
-          </a:bodyPr>
-          <a:lstStyle/>
-          <a:p>
-            <a:pPr algn="l">
-              <a:defRPr sz="3600" b="1">
-                <a:solidFill>
-                  <a:srgbClr val="FFFFFF"/>
-                </a:solidFill>
-              </a:defRPr>
-            </a:pPr>
-            <a:r>
-              <a:t>Supply Chain Intelligence Agent</a:t>
-            </a:r>
-          </a:p>
-        </p:txBody>
-      </p:sp>
-      <p:sp>
-        <p:nvSpPr>
-          <p:cNvPr id="4" name="TextBox 3"/>
-          <p:cNvSpPr txBox="1"/>
-          <p:nvPr/>
-        </p:nvSpPr>
-        <p:spPr>
-          <a:xfrm>
-            <a:off x="914400" y="3291840"/>
-            <a:ext cx="10058400" cy="731520"/>
-          </a:xfrm>
-          <a:prstGeom prst="rect">
-            <a:avLst/>
-          </a:prstGeom>
-          <a:noFill/>
-        </p:spPr>
-        <p:txBody>
-          <a:bodyPr wrap="square">
-            <a:spAutoFit/>
-          </a:bodyPr>
-          <a:lstStyle/>
-          <a:p>
-            <a:pPr algn="l">
-              <a:defRPr sz="2000" b="0">
-                <a:solidFill>
-                  <a:srgbClr val="6B7B8D"/>
-                </a:solidFill>
-              </a:defRPr>
-            </a:pPr>
-            <a:r>
-              <a:t>Snowflake Intelligence Demo  |  4-Act Narrative</a:t>
-            </a:r>
-          </a:p>
-        </p:txBody>
-      </p:sp>
-      <p:sp>
-        <p:nvSpPr>
-          <p:cNvPr id="5" name="Rounded Rectangle 4"/>
+      <p:pic>
+        <p:nvPicPr>
+          <p:cNvPr id="2" name="Picture 1" descr="snowflake_logo_white.png"/>
+          <p:cNvPicPr>
+            <a:picLocks noChangeAspect="1"/>
+          </p:cNvPicPr>
+          <p:nvPr/>
+        </p:nvPicPr>
+        <p:blipFill>
+          <a:blip r:embed="rId2"/>
+          <a:stretch>
+            <a:fillRect/>
+          </a:stretch>
+        </p:blipFill>
+        <p:spPr>
+          <a:xfrm>
+            <a:off x="457200" y="274320"/>
+            <a:ext cx="457200" cy="457200"/>
+          </a:xfrm>
+          <a:prstGeom prst="rect">
+            <a:avLst/>
+          </a:prstGeom>
+        </p:spPr>
+      </p:pic>
+      <p:sp>
+        <p:nvSpPr>
+          <p:cNvPr id="3" name="Rectangle 2"/>
           <p:cNvSpPr/>
           <p:nvPr/>
         </p:nvSpPr>
         <p:spPr>
           <a:xfrm>
-            <a:off x="914400" y="5029200"/>
-            <a:ext cx="2926080" cy="914400"/>
-          </a:xfrm>
-          <a:prstGeom prst="roundRect">
+            <a:off x="457200" y="6446520"/>
+            <a:ext cx="11247120" cy="27432"/>
+          </a:xfrm>
+          <a:prstGeom prst="rect">
             <a:avLst/>
           </a:prstGeom>
           <a:solidFill>
@@ -3248,45 +3167,198 @@
           </a:fontRef>
         </p:style>
         <p:txBody>
-          <a:bodyPr rtlCol="0" anchor="ctr" wrap="square"/>
-          <a:lstStyle/>
-          <a:p>
-            <a:pPr algn="ctr">
-              <a:defRPr sz="1400" b="1">
+          <a:bodyPr rtlCol="0" anchor="ctr"/>
+          <a:lstStyle/>
+          <a:p>
+            <a:pPr algn="ctr"/>
+          </a:p>
+        </p:txBody>
+      </p:sp>
+      <p:pic>
+        <p:nvPicPr>
+          <p:cNvPr id="4" name="Picture 3" descr="snowflake_logo_white.png"/>
+          <p:cNvPicPr>
+            <a:picLocks noChangeAspect="1"/>
+          </p:cNvPicPr>
+          <p:nvPr/>
+        </p:nvPicPr>
+        <p:blipFill>
+          <a:blip r:embed="rId2"/>
+          <a:stretch>
+            <a:fillRect/>
+          </a:stretch>
+        </p:blipFill>
+        <p:spPr>
+          <a:xfrm>
+            <a:off x="7772400" y="1371600"/>
+            <a:ext cx="4114800" cy="4114800"/>
+          </a:xfrm>
+          <a:prstGeom prst="rect">
+            <a:avLst/>
+          </a:prstGeom>
+        </p:spPr>
+      </p:pic>
+      <p:sp>
+        <p:nvSpPr>
+          <p:cNvPr id="5" name="TextBox 4"/>
+          <p:cNvSpPr txBox="1"/>
+          <p:nvPr/>
+        </p:nvSpPr>
+        <p:spPr>
+          <a:xfrm>
+            <a:off x="731520" y="1645920"/>
+            <a:ext cx="6400800" cy="914400"/>
+          </a:xfrm>
+          <a:prstGeom prst="rect">
+            <a:avLst/>
+          </a:prstGeom>
+          <a:noFill/>
+        </p:spPr>
+        <p:txBody>
+          <a:bodyPr wrap="square">
+            <a:spAutoFit/>
+          </a:bodyPr>
+          <a:lstStyle/>
+          <a:p>
+            <a:pPr algn="l">
+              <a:defRPr sz="5200" b="1">
                 <a:solidFill>
                   <a:srgbClr val="FFFFFF"/>
                 </a:solidFill>
               </a:defRPr>
             </a:pPr>
             <a:r>
-              <a:t>Alabama</a:t>
-            </a:r>
-            <a:br/>
-            <a:r>
-              <a:t>3,500 MW</a:t>
-            </a:r>
-          </a:p>
-        </p:txBody>
-      </p:sp>
-      <p:sp>
-        <p:nvSpPr>
-          <p:cNvPr id="6" name="Rounded Rectangle 5"/>
+              <a:t>First Solar</a:t>
+            </a:r>
+          </a:p>
+        </p:txBody>
+      </p:sp>
+      <p:sp>
+        <p:nvSpPr>
+          <p:cNvPr id="6" name="TextBox 5"/>
+          <p:cNvSpPr txBox="1"/>
+          <p:nvPr/>
+        </p:nvSpPr>
+        <p:spPr>
+          <a:xfrm>
+            <a:off x="731520" y="2560320"/>
+            <a:ext cx="6400800" cy="914400"/>
+          </a:xfrm>
+          <a:prstGeom prst="rect">
+            <a:avLst/>
+          </a:prstGeom>
+          <a:noFill/>
+        </p:spPr>
+        <p:txBody>
+          <a:bodyPr wrap="square">
+            <a:spAutoFit/>
+          </a:bodyPr>
+          <a:lstStyle/>
+          <a:p>
+            <a:pPr algn="l">
+              <a:defRPr sz="3200" b="1">
+                <a:solidFill>
+                  <a:srgbClr val="29B5E8"/>
+                </a:solidFill>
+              </a:defRPr>
+            </a:pPr>
+            <a:r>
+              <a:t>Supply Chain Intelligence Agent</a:t>
+            </a:r>
+          </a:p>
+        </p:txBody>
+      </p:sp>
+      <p:sp>
+        <p:nvSpPr>
+          <p:cNvPr id="7" name="TextBox 6"/>
+          <p:cNvSpPr txBox="1"/>
+          <p:nvPr/>
+        </p:nvSpPr>
+        <p:spPr>
+          <a:xfrm>
+            <a:off x="731520" y="3474720"/>
+            <a:ext cx="6400800" cy="731520"/>
+          </a:xfrm>
+          <a:prstGeom prst="rect">
+            <a:avLst/>
+          </a:prstGeom>
+          <a:noFill/>
+        </p:spPr>
+        <p:txBody>
+          <a:bodyPr wrap="square">
+            <a:spAutoFit/>
+          </a:bodyPr>
+          <a:lstStyle/>
+          <a:p>
+            <a:pPr algn="l">
+              <a:defRPr sz="1800" b="0">
+                <a:solidFill>
+                  <a:srgbClr val="8E9EAB"/>
+                </a:solidFill>
+              </a:defRPr>
+            </a:pPr>
+            <a:r>
+              <a:t>Snowflake Intelligence  |  CdTe Manufacturing</a:t>
+            </a:r>
+          </a:p>
+        </p:txBody>
+      </p:sp>
+      <p:sp>
+        <p:nvSpPr>
+          <p:cNvPr id="8" name="TextBox 7"/>
+          <p:cNvSpPr txBox="1"/>
+          <p:nvPr/>
+        </p:nvSpPr>
+        <p:spPr>
+          <a:xfrm>
+            <a:off x="731520" y="4206240"/>
+            <a:ext cx="6400800" cy="457200"/>
+          </a:xfrm>
+          <a:prstGeom prst="rect">
+            <a:avLst/>
+          </a:prstGeom>
+          <a:noFill/>
+        </p:spPr>
+        <p:txBody>
+          <a:bodyPr wrap="square">
+            <a:spAutoFit/>
+          </a:bodyPr>
+          <a:lstStyle/>
+          <a:p>
+            <a:pPr algn="l">
+              <a:defRPr sz="1600" b="0">
+                <a:solidFill>
+                  <a:srgbClr val="8E9EAB"/>
+                </a:solidFill>
+              </a:defRPr>
+            </a:pPr>
+            <a:r>
+              <a:t>4-Act Demo Narrative</a:t>
+            </a:r>
+          </a:p>
+        </p:txBody>
+      </p:sp>
+      <p:sp>
+        <p:nvSpPr>
+          <p:cNvPr id="9" name="Rounded Rectangle 8"/>
           <p:cNvSpPr/>
           <p:nvPr/>
         </p:nvSpPr>
         <p:spPr>
           <a:xfrm>
-            <a:off x="4389120" y="5029200"/>
-            <a:ext cx="2926080" cy="914400"/>
+            <a:off x="731520" y="5303520"/>
+            <a:ext cx="3200400" cy="822960"/>
           </a:xfrm>
           <a:prstGeom prst="roundRect">
             <a:avLst/>
           </a:prstGeom>
           <a:solidFill>
-            <a:srgbClr val="29B5E8"/>
+            <a:srgbClr val="11273F"/>
           </a:solidFill>
-          <a:ln>
-            <a:noFill/>
+          <a:ln w="25400">
+            <a:solidFill>
+              <a:srgbClr val="29B5E8"/>
+            </a:solidFill>
           </a:ln>
         </p:spPr>
         <p:style>
@@ -3308,41 +3380,39 @@
           <a:lstStyle/>
           <a:p>
             <a:pPr algn="ctr">
-              <a:defRPr sz="1400" b="1">
+              <a:defRPr sz="1300" b="1">
                 <a:solidFill>
                   <a:srgbClr val="FFFFFF"/>
                 </a:solidFill>
               </a:defRPr>
             </a:pPr>
             <a:r>
-              <a:t>Ohio</a:t>
-            </a:r>
-            <a:br/>
-            <a:r>
-              <a:t>3,300 MW</a:t>
-            </a:r>
-          </a:p>
-        </p:txBody>
-      </p:sp>
-      <p:sp>
-        <p:nvSpPr>
-          <p:cNvPr id="7" name="Rounded Rectangle 6"/>
+              <a:t>Alabama | 3,500 MW</a:t>
+            </a:r>
+          </a:p>
+        </p:txBody>
+      </p:sp>
+      <p:sp>
+        <p:nvSpPr>
+          <p:cNvPr id="10" name="Rounded Rectangle 9"/>
           <p:cNvSpPr/>
           <p:nvPr/>
         </p:nvSpPr>
         <p:spPr>
           <a:xfrm>
-            <a:off x="7863840" y="5029200"/>
-            <a:ext cx="2926080" cy="914400"/>
+            <a:off x="4206240" y="5303520"/>
+            <a:ext cx="3200400" cy="822960"/>
           </a:xfrm>
           <a:prstGeom prst="roundRect">
             <a:avLst/>
           </a:prstGeom>
           <a:solidFill>
-            <a:srgbClr val="29B5E8"/>
+            <a:srgbClr val="11273F"/>
           </a:solidFill>
-          <a:ln>
-            <a:noFill/>
+          <a:ln w="25400">
+            <a:solidFill>
+              <a:srgbClr val="29B5E8"/>
+            </a:solidFill>
           </a:ln>
         </p:spPr>
         <p:style>
@@ -3364,18 +3434,68 @@
           <a:lstStyle/>
           <a:p>
             <a:pPr algn="ctr">
-              <a:defRPr sz="1400" b="1">
+              <a:defRPr sz="1300" b="1">
                 <a:solidFill>
                   <a:srgbClr val="FFFFFF"/>
                 </a:solidFill>
               </a:defRPr>
             </a:pPr>
             <a:r>
-              <a:t>Louisiana</a:t>
-            </a:r>
-            <a:br/>
-            <a:r>
-              <a:t>3,500 MW</a:t>
+              <a:t>Ohio | 3,300 MW</a:t>
+            </a:r>
+          </a:p>
+        </p:txBody>
+      </p:sp>
+      <p:sp>
+        <p:nvSpPr>
+          <p:cNvPr id="11" name="Rounded Rectangle 10"/>
+          <p:cNvSpPr/>
+          <p:nvPr/>
+        </p:nvSpPr>
+        <p:spPr>
+          <a:xfrm>
+            <a:off x="7680960" y="5303520"/>
+            <a:ext cx="3200400" cy="822960"/>
+          </a:xfrm>
+          <a:prstGeom prst="roundRect">
+            <a:avLst/>
+          </a:prstGeom>
+          <a:solidFill>
+            <a:srgbClr val="11273F"/>
+          </a:solidFill>
+          <a:ln w="25400">
+            <a:solidFill>
+              <a:srgbClr val="29B5E8"/>
+            </a:solidFill>
+          </a:ln>
+        </p:spPr>
+        <p:style>
+          <a:lnRef idx="1">
+            <a:schemeClr val="accent1"/>
+          </a:lnRef>
+          <a:fillRef idx="3">
+            <a:schemeClr val="accent1"/>
+          </a:fillRef>
+          <a:effectRef idx="2">
+            <a:schemeClr val="accent1"/>
+          </a:effectRef>
+          <a:fontRef idx="minor">
+            <a:schemeClr val="lt1"/>
+          </a:fontRef>
+        </p:style>
+        <p:txBody>
+          <a:bodyPr rtlCol="0" anchor="ctr" wrap="square"/>
+          <a:lstStyle/>
+          <a:p>
+            <a:pPr algn="ctr">
+              <a:defRPr sz="1300" b="1">
+                <a:solidFill>
+                  <a:srgbClr val="FFFFFF"/>
+                </a:solidFill>
+              </a:defRPr>
+            </a:pPr>
+            <a:r>
+              <a:t>Louisiana | 3,500 MW</a:t>
             </a:r>
           </a:p>
         </p:txBody>
@@ -3394,7 +3514,7 @@
     <p:bg>
       <p:bgPr>
         <a:solidFill>
-          <a:srgbClr val="11273F"/>
+          <a:srgbClr val="05142B"/>
         </a:solidFill>
         <a:effectLst/>
       </p:bgPr>
@@ -3406,16 +3526,83 @@
         <p:nvPr/>
       </p:nvGrpSpPr>
       <p:grpSpPr/>
-      <p:sp>
-        <p:nvSpPr>
-          <p:cNvPr id="2" name="TextBox 1"/>
+      <p:pic>
+        <p:nvPicPr>
+          <p:cNvPr id="2" name="Picture 1" descr="snowflake_logo_white.png"/>
+          <p:cNvPicPr>
+            <a:picLocks noChangeAspect="1"/>
+          </p:cNvPicPr>
+          <p:nvPr/>
+        </p:nvPicPr>
+        <p:blipFill>
+          <a:blip r:embed="rId2"/>
+          <a:stretch>
+            <a:fillRect/>
+          </a:stretch>
+        </p:blipFill>
+        <p:spPr>
+          <a:xfrm>
+            <a:off x="457200" y="274320"/>
+            <a:ext cx="457200" cy="457200"/>
+          </a:xfrm>
+          <a:prstGeom prst="rect">
+            <a:avLst/>
+          </a:prstGeom>
+        </p:spPr>
+      </p:pic>
+      <p:sp>
+        <p:nvSpPr>
+          <p:cNvPr id="3" name="Rectangle 2"/>
+          <p:cNvSpPr/>
+          <p:nvPr/>
+        </p:nvSpPr>
+        <p:spPr>
+          <a:xfrm>
+            <a:off x="457200" y="6446520"/>
+            <a:ext cx="11247120" cy="27432"/>
+          </a:xfrm>
+          <a:prstGeom prst="rect">
+            <a:avLst/>
+          </a:prstGeom>
+          <a:solidFill>
+            <a:srgbClr val="29B5E8"/>
+          </a:solidFill>
+          <a:ln>
+            <a:noFill/>
+          </a:ln>
+        </p:spPr>
+        <p:style>
+          <a:lnRef idx="1">
+            <a:schemeClr val="accent1"/>
+          </a:lnRef>
+          <a:fillRef idx="3">
+            <a:schemeClr val="accent1"/>
+          </a:fillRef>
+          <a:effectRef idx="2">
+            <a:schemeClr val="accent1"/>
+          </a:effectRef>
+          <a:fontRef idx="minor">
+            <a:schemeClr val="lt1"/>
+          </a:fontRef>
+        </p:style>
+        <p:txBody>
+          <a:bodyPr rtlCol="0" anchor="ctr"/>
+          <a:lstStyle/>
+          <a:p>
+            <a:pPr algn="ctr"/>
+          </a:p>
+        </p:txBody>
+      </p:sp>
+      <p:sp>
+        <p:nvSpPr>
+          <p:cNvPr id="4" name="TextBox 3"/>
           <p:cNvSpPr txBox="1"/>
           <p:nvPr/>
         </p:nvSpPr>
         <p:spPr>
           <a:xfrm>
-            <a:off x="914400" y="457200"/>
-            <a:ext cx="10058400" cy="731520"/>
+            <a:off x="731520" y="731520"/>
+            <a:ext cx="10058400" cy="548640"/>
           </a:xfrm>
           <a:prstGeom prst="rect">
             <a:avLst/>
@@ -3436,21 +3623,21 @@
               </a:defRPr>
             </a:pPr>
             <a:r>
-              <a:t>Demo Flow -- The Arc</a:t>
-            </a:r>
-          </a:p>
-        </p:txBody>
-      </p:sp>
-      <p:sp>
-        <p:nvSpPr>
-          <p:cNvPr id="3" name="Rounded Rectangle 2"/>
+              <a:t>Demo Flow</a:t>
+            </a:r>
+          </a:p>
+        </p:txBody>
+      </p:sp>
+      <p:sp>
+        <p:nvSpPr>
+          <p:cNvPr id="5" name="Rounded Rectangle 4"/>
           <p:cNvSpPr/>
           <p:nvPr/>
         </p:nvSpPr>
         <p:spPr>
           <a:xfrm>
-            <a:off x="457200" y="1828800"/>
-            <a:ext cx="2651760" cy="1645920"/>
+            <a:off x="457200" y="1645920"/>
+            <a:ext cx="2560320" cy="1828800"/>
           </a:xfrm>
           <a:prstGeom prst="roundRect">
             <a:avLst/>
@@ -3488,11 +3675,11 @@
               </a:defRPr>
             </a:pPr>
             <a:r>
-              <a:t>Act 1</a:t>
+              <a:t>ACT 1</a:t>
             </a:r>
             <a:br/>
             <a:r>
-              <a:t>Oracle says</a:t>
+              <a:t>Oracle:</a:t>
             </a:r>
             <a:br/>
             <a:r>
@@ -3503,51 +3690,16 @@
       </p:sp>
       <p:sp>
         <p:nvSpPr>
-          <p:cNvPr id="4" name="TextBox 3"/>
-          <p:cNvSpPr txBox="1"/>
-          <p:nvPr/>
-        </p:nvSpPr>
-        <p:spPr>
-          <a:xfrm>
-            <a:off x="2926080" y="2377440"/>
-            <a:ext cx="457200" cy="457200"/>
-          </a:xfrm>
-          <a:prstGeom prst="rect">
-            <a:avLst/>
-          </a:prstGeom>
-          <a:noFill/>
-        </p:spPr>
-        <p:txBody>
-          <a:bodyPr wrap="square">
-            <a:spAutoFit/>
-          </a:bodyPr>
-          <a:lstStyle/>
-          <a:p>
-            <a:pPr algn="ctr">
-              <a:defRPr sz="2800" b="1">
-                <a:solidFill>
-                  <a:srgbClr val="FFFFFF"/>
-                </a:solidFill>
-              </a:defRPr>
-            </a:pPr>
-            <a:r>
-              <a:t>&gt;</a:t>
-            </a:r>
-          </a:p>
-        </p:txBody>
-      </p:sp>
-      <p:sp>
-        <p:nvSpPr>
-          <p:cNvPr id="5" name="Rounded Rectangle 4"/>
+          <p:cNvPr id="6" name="Right Arrow 5"/>
           <p:cNvSpPr/>
           <p:nvPr/>
         </p:nvSpPr>
         <p:spPr>
           <a:xfrm>
-            <a:off x="3383280" y="1828800"/>
-            <a:ext cx="2651760" cy="1645920"/>
-          </a:xfrm>
-          <a:prstGeom prst="roundRect">
+            <a:off x="3063240" y="2377440"/>
+            <a:ext cx="274320" cy="274320"/>
+          </a:xfrm>
+          <a:prstGeom prst="rightArrow">
             <a:avLst/>
           </a:prstGeom>
           <a:solidFill>
@@ -3572,6 +3724,49 @@
           </a:fontRef>
         </p:style>
         <p:txBody>
+          <a:bodyPr rtlCol="0" anchor="ctr"/>
+          <a:lstStyle/>
+          <a:p>
+            <a:pPr algn="ctr"/>
+          </a:p>
+        </p:txBody>
+      </p:sp>
+      <p:sp>
+        <p:nvSpPr>
+          <p:cNvPr id="7" name="Rounded Rectangle 6"/>
+          <p:cNvSpPr/>
+          <p:nvPr/>
+        </p:nvSpPr>
+        <p:spPr>
+          <a:xfrm>
+            <a:off x="3383280" y="1645920"/>
+            <a:ext cx="2560320" cy="1828800"/>
+          </a:xfrm>
+          <a:prstGeom prst="roundRect">
+            <a:avLst/>
+          </a:prstGeom>
+          <a:solidFill>
+            <a:srgbClr val="29B5E8"/>
+          </a:solidFill>
+          <a:ln>
+            <a:noFill/>
+          </a:ln>
+        </p:spPr>
+        <p:style>
+          <a:lnRef idx="1">
+            <a:schemeClr val="accent1"/>
+          </a:lnRef>
+          <a:fillRef idx="3">
+            <a:schemeClr val="accent1"/>
+          </a:fillRef>
+          <a:effectRef idx="2">
+            <a:schemeClr val="accent1"/>
+          </a:effectRef>
+          <a:fontRef idx="minor">
+            <a:schemeClr val="lt1"/>
+          </a:fontRef>
+        </p:style>
+        <p:txBody>
           <a:bodyPr rtlCol="0" anchor="ctr" wrap="square"/>
           <a:lstStyle/>
           <a:p>
@@ -3583,11 +3778,11 @@
               </a:defRPr>
             </a:pPr>
             <a:r>
-              <a:t>Act 2</a:t>
+              <a:t>ACT 2</a:t>
             </a:r>
             <a:br/>
             <a:r>
-              <a:t>Add mfg</a:t>
+              <a:t>+ Mfg</a:t>
             </a:r>
             <a:br/>
             <a:r>
@@ -3598,49 +3793,57 @@
       </p:sp>
       <p:sp>
         <p:nvSpPr>
-          <p:cNvPr id="6" name="TextBox 5"/>
-          <p:cNvSpPr txBox="1"/>
-          <p:nvPr/>
-        </p:nvSpPr>
-        <p:spPr>
-          <a:xfrm>
-            <a:off x="5852160" y="2377440"/>
-            <a:ext cx="457200" cy="457200"/>
-          </a:xfrm>
-          <a:prstGeom prst="rect">
-            <a:avLst/>
-          </a:prstGeom>
-          <a:noFill/>
-        </p:spPr>
-        <p:txBody>
-          <a:bodyPr wrap="square">
-            <a:spAutoFit/>
-          </a:bodyPr>
-          <a:lstStyle/>
-          <a:p>
-            <a:pPr algn="ctr">
-              <a:defRPr sz="2800" b="1">
-                <a:solidFill>
-                  <a:srgbClr val="FFFFFF"/>
-                </a:solidFill>
-              </a:defRPr>
-            </a:pPr>
-            <a:r>
-              <a:t>&gt;</a:t>
-            </a:r>
-          </a:p>
-        </p:txBody>
-      </p:sp>
-      <p:sp>
-        <p:nvSpPr>
-          <p:cNvPr id="7" name="Rounded Rectangle 6"/>
+          <p:cNvPr id="8" name="Right Arrow 7"/>
           <p:cNvSpPr/>
           <p:nvPr/>
         </p:nvSpPr>
         <p:spPr>
           <a:xfrm>
-            <a:off x="6309360" y="1828800"/>
-            <a:ext cx="2651760" cy="1645920"/>
+            <a:off x="5989320" y="2377440"/>
+            <a:ext cx="274320" cy="274320"/>
+          </a:xfrm>
+          <a:prstGeom prst="rightArrow">
+            <a:avLst/>
+          </a:prstGeom>
+          <a:solidFill>
+            <a:srgbClr val="29B5E8"/>
+          </a:solidFill>
+          <a:ln>
+            <a:noFill/>
+          </a:ln>
+        </p:spPr>
+        <p:style>
+          <a:lnRef idx="1">
+            <a:schemeClr val="accent1"/>
+          </a:lnRef>
+          <a:fillRef idx="3">
+            <a:schemeClr val="accent1"/>
+          </a:fillRef>
+          <a:effectRef idx="2">
+            <a:schemeClr val="accent1"/>
+          </a:effectRef>
+          <a:fontRef idx="minor">
+            <a:schemeClr val="lt1"/>
+          </a:fontRef>
+        </p:style>
+        <p:txBody>
+          <a:bodyPr rtlCol="0" anchor="ctr"/>
+          <a:lstStyle/>
+          <a:p>
+            <a:pPr algn="ctr"/>
+          </a:p>
+        </p:txBody>
+      </p:sp>
+      <p:sp>
+        <p:nvSpPr>
+          <p:cNvPr id="9" name="Rounded Rectangle 8"/>
+          <p:cNvSpPr/>
+          <p:nvPr/>
+        </p:nvSpPr>
+        <p:spPr>
+          <a:xfrm>
+            <a:off x="6309360" y="1645920"/>
+            <a:ext cx="2560320" cy="1828800"/>
           </a:xfrm>
           <a:prstGeom prst="roundRect">
             <a:avLst/>
@@ -3678,11 +3881,11 @@
               </a:defRPr>
             </a:pPr>
             <a:r>
-              <a:t>Act 3</a:t>
+              <a:t>ACT 3</a:t>
             </a:r>
             <a:br/>
             <a:r>
-              <a:t>External</a:t>
+              <a:t>+ External:</a:t>
             </a:r>
             <a:br/>
             <a:r>
@@ -3693,49 +3896,57 @@
       </p:sp>
       <p:sp>
         <p:nvSpPr>
-          <p:cNvPr id="8" name="TextBox 7"/>
-          <p:cNvSpPr txBox="1"/>
-          <p:nvPr/>
-        </p:nvSpPr>
-        <p:spPr>
-          <a:xfrm>
-            <a:off x="8778240" y="2377440"/>
-            <a:ext cx="457200" cy="457200"/>
-          </a:xfrm>
-          <a:prstGeom prst="rect">
-            <a:avLst/>
-          </a:prstGeom>
-          <a:noFill/>
-        </p:spPr>
-        <p:txBody>
-          <a:bodyPr wrap="square">
-            <a:spAutoFit/>
-          </a:bodyPr>
-          <a:lstStyle/>
-          <a:p>
-            <a:pPr algn="ctr">
-              <a:defRPr sz="2800" b="1">
-                <a:solidFill>
-                  <a:srgbClr val="FFFFFF"/>
-                </a:solidFill>
-              </a:defRPr>
-            </a:pPr>
-            <a:r>
-              <a:t>&gt;</a:t>
-            </a:r>
-          </a:p>
-        </p:txBody>
-      </p:sp>
-      <p:sp>
-        <p:nvSpPr>
-          <p:cNvPr id="9" name="Rounded Rectangle 8"/>
+          <p:cNvPr id="10" name="Right Arrow 9"/>
           <p:cNvSpPr/>
           <p:nvPr/>
         </p:nvSpPr>
         <p:spPr>
           <a:xfrm>
-            <a:off x="9235440" y="1828800"/>
-            <a:ext cx="2651760" cy="1645920"/>
+            <a:off x="8915400" y="2377440"/>
+            <a:ext cx="274320" cy="274320"/>
+          </a:xfrm>
+          <a:prstGeom prst="rightArrow">
+            <a:avLst/>
+          </a:prstGeom>
+          <a:solidFill>
+            <a:srgbClr val="29B5E8"/>
+          </a:solidFill>
+          <a:ln>
+            <a:noFill/>
+          </a:ln>
+        </p:spPr>
+        <p:style>
+          <a:lnRef idx="1">
+            <a:schemeClr val="accent1"/>
+          </a:lnRef>
+          <a:fillRef idx="3">
+            <a:schemeClr val="accent1"/>
+          </a:fillRef>
+          <a:effectRef idx="2">
+            <a:schemeClr val="accent1"/>
+          </a:effectRef>
+          <a:fontRef idx="minor">
+            <a:schemeClr val="lt1"/>
+          </a:fontRef>
+        </p:style>
+        <p:txBody>
+          <a:bodyPr rtlCol="0" anchor="ctr"/>
+          <a:lstStyle/>
+          <a:p>
+            <a:pPr algn="ctr"/>
+          </a:p>
+        </p:txBody>
+      </p:sp>
+      <p:sp>
+        <p:nvSpPr>
+          <p:cNvPr id="11" name="Rounded Rectangle 10"/>
+          <p:cNvSpPr/>
+          <p:nvPr/>
+        </p:nvSpPr>
+        <p:spPr>
+          <a:xfrm>
+            <a:off x="9235440" y="1645920"/>
+            <a:ext cx="2560320" cy="1828800"/>
           </a:xfrm>
           <a:prstGeom prst="roundRect">
             <a:avLst/>
@@ -3773,7 +3984,7 @@
               </a:defRPr>
             </a:pPr>
             <a:r>
-              <a:t>Act 4</a:t>
+              <a:t>ACT 4</a:t>
             </a:r>
             <a:br/>
             <a:r>
@@ -3788,14 +3999,59 @@
       </p:sp>
       <p:sp>
         <p:nvSpPr>
-          <p:cNvPr id="10" name="TextBox 9"/>
+          <p:cNvPr id="12" name="Rounded Rectangle 11"/>
+          <p:cNvSpPr/>
+          <p:nvPr/>
+        </p:nvSpPr>
+        <p:spPr>
+          <a:xfrm>
+            <a:off x="457200" y="3931920"/>
+            <a:ext cx="11155680" cy="2011680"/>
+          </a:xfrm>
+          <a:prstGeom prst="roundRect">
+            <a:avLst/>
+          </a:prstGeom>
+          <a:solidFill>
+            <a:srgbClr val="0A1E38"/>
+          </a:solidFill>
+          <a:ln w="25400">
+            <a:solidFill>
+              <a:srgbClr val="29B5E8"/>
+            </a:solidFill>
+          </a:ln>
+        </p:spPr>
+        <p:style>
+          <a:lnRef idx="1">
+            <a:schemeClr val="accent1"/>
+          </a:lnRef>
+          <a:fillRef idx="3">
+            <a:schemeClr val="accent1"/>
+          </a:fillRef>
+          <a:effectRef idx="2">
+            <a:schemeClr val="accent1"/>
+          </a:effectRef>
+          <a:fontRef idx="minor">
+            <a:schemeClr val="lt1"/>
+          </a:fontRef>
+        </p:style>
+        <p:txBody>
+          <a:bodyPr rtlCol="0" anchor="ctr"/>
+          <a:lstStyle/>
+          <a:p>
+            <a:pPr algn="ctr"/>
+          </a:p>
+        </p:txBody>
+      </p:sp>
+      <p:sp>
+        <p:nvSpPr>
+          <p:cNvPr id="13" name="TextBox 12"/>
           <p:cNvSpPr txBox="1"/>
           <p:nvPr/>
         </p:nvSpPr>
         <p:spPr>
           <a:xfrm>
-            <a:off x="914400" y="4114800"/>
-            <a:ext cx="10058400" cy="1828800"/>
+            <a:off x="914400" y="4023360"/>
+            <a:ext cx="10241280" cy="1828800"/>
           </a:xfrm>
           <a:prstGeom prst="rect">
             <a:avLst/>
@@ -3809,18 +4065,23 @@
           <a:lstStyle/>
           <a:p>
             <a:pPr algn="l">
-              <a:defRPr sz="1500" b="0">
+              <a:defRPr sz="1400" b="0">
                 <a:solidFill>
                   <a:srgbClr val="FFFFFF"/>
                 </a:solidFill>
               </a:defRPr>
             </a:pPr>
             <a:r>
-              <a:t>Oracle says no risk  &gt;  add manufacturing + external context  &gt;  same question,</a:t>
+              <a:t>The arc in one line:</a:t>
             </a:r>
             <a:br/>
-            <a:r>
-              <a:t>real risk surfaced and quantified  &gt;  agent recommends action across sites  &gt;</a:t>
+            <a:br/>
+            <a:r>
+              <a:t>Oracle says no risk → add manufacturing + external context → same question,</a:t>
+            </a:r>
+            <a:br/>
+            <a:r>
+              <a:t>real risk surfaced and quantified → agent recommends cross-site action →</a:t>
             </a:r>
             <a:br/>
             <a:r>
@@ -3843,7 +4104,7 @@
     <p:bg>
       <p:bgPr>
         <a:solidFill>
-          <a:srgbClr val="11273F"/>
+          <a:srgbClr val="05142B"/>
         </a:solidFill>
         <a:effectLst/>
       </p:bgPr>
@@ -3855,16 +4116,83 @@
         <p:nvPr/>
       </p:nvGrpSpPr>
       <p:grpSpPr/>
-      <p:sp>
-        <p:nvSpPr>
-          <p:cNvPr id="2" name="TextBox 1"/>
+      <p:pic>
+        <p:nvPicPr>
+          <p:cNvPr id="2" name="Picture 1" descr="snowflake_logo_white.png"/>
+          <p:cNvPicPr>
+            <a:picLocks noChangeAspect="1"/>
+          </p:cNvPicPr>
+          <p:nvPr/>
+        </p:nvPicPr>
+        <p:blipFill>
+          <a:blip r:embed="rId2"/>
+          <a:stretch>
+            <a:fillRect/>
+          </a:stretch>
+        </p:blipFill>
+        <p:spPr>
+          <a:xfrm>
+            <a:off x="457200" y="274320"/>
+            <a:ext cx="457200" cy="457200"/>
+          </a:xfrm>
+          <a:prstGeom prst="rect">
+            <a:avLst/>
+          </a:prstGeom>
+        </p:spPr>
+      </p:pic>
+      <p:sp>
+        <p:nvSpPr>
+          <p:cNvPr id="3" name="Rectangle 2"/>
+          <p:cNvSpPr/>
+          <p:nvPr/>
+        </p:nvSpPr>
+        <p:spPr>
+          <a:xfrm>
+            <a:off x="457200" y="6446520"/>
+            <a:ext cx="11247120" cy="27432"/>
+          </a:xfrm>
+          <a:prstGeom prst="rect">
+            <a:avLst/>
+          </a:prstGeom>
+          <a:solidFill>
+            <a:srgbClr val="29B5E8"/>
+          </a:solidFill>
+          <a:ln>
+            <a:noFill/>
+          </a:ln>
+        </p:spPr>
+        <p:style>
+          <a:lnRef idx="1">
+            <a:schemeClr val="accent1"/>
+          </a:lnRef>
+          <a:fillRef idx="3">
+            <a:schemeClr val="accent1"/>
+          </a:fillRef>
+          <a:effectRef idx="2">
+            <a:schemeClr val="accent1"/>
+          </a:effectRef>
+          <a:fontRef idx="minor">
+            <a:schemeClr val="lt1"/>
+          </a:fontRef>
+        </p:style>
+        <p:txBody>
+          <a:bodyPr rtlCol="0" anchor="ctr"/>
+          <a:lstStyle/>
+          <a:p>
+            <a:pPr algn="ctr"/>
+          </a:p>
+        </p:txBody>
+      </p:sp>
+      <p:sp>
+        <p:nvSpPr>
+          <p:cNvPr id="4" name="TextBox 3"/>
           <p:cNvSpPr txBox="1"/>
           <p:nvPr/>
         </p:nvSpPr>
         <p:spPr>
           <a:xfrm>
-            <a:off x="914400" y="457200"/>
-            <a:ext cx="10058400" cy="731520"/>
+            <a:off x="731520" y="731520"/>
+            <a:ext cx="10058400" cy="548640"/>
           </a:xfrm>
           <a:prstGeom prst="rect">
             <a:avLst/>
@@ -3892,14 +4220,14 @@
       </p:sp>
       <p:sp>
         <p:nvSpPr>
-          <p:cNvPr id="3" name="TextBox 2"/>
+          <p:cNvPr id="5" name="TextBox 4"/>
           <p:cNvSpPr txBox="1"/>
           <p:nvPr/>
         </p:nvSpPr>
         <p:spPr>
           <a:xfrm>
-            <a:off x="1097280" y="1463040"/>
-            <a:ext cx="10058400" cy="457200"/>
+            <a:off x="914400" y="1463040"/>
+            <a:ext cx="2286000" cy="457200"/>
           </a:xfrm>
           <a:prstGeom prst="rect">
             <a:avLst/>
@@ -3913,28 +4241,28 @@
           <a:lstStyle/>
           <a:p>
             <a:pPr algn="l">
-              <a:defRPr sz="1400" b="0">
-                <a:solidFill>
-                  <a:srgbClr val="FFFFFF"/>
-                </a:solidFill>
-              </a:defRPr>
-            </a:pPr>
-            <a:r>
-              <a:t>Persona: VP of Global Supply Chain / Manufacturing</a:t>
-            </a:r>
-          </a:p>
-        </p:txBody>
-      </p:sp>
-      <p:sp>
-        <p:nvSpPr>
-          <p:cNvPr id="4" name="TextBox 3"/>
+              <a:defRPr sz="1200" b="1">
+                <a:solidFill>
+                  <a:srgbClr val="29B5E8"/>
+                </a:solidFill>
+              </a:defRPr>
+            </a:pPr>
+            <a:r>
+              <a:t>Persona</a:t>
+            </a:r>
+          </a:p>
+        </p:txBody>
+      </p:sp>
+      <p:sp>
+        <p:nvSpPr>
+          <p:cNvPr id="6" name="TextBox 5"/>
           <p:cNvSpPr txBox="1"/>
           <p:nvPr/>
         </p:nvSpPr>
         <p:spPr>
           <a:xfrm>
-            <a:off x="1097280" y="2011680"/>
-            <a:ext cx="10058400" cy="457200"/>
+            <a:off x="3200400" y="1463040"/>
+            <a:ext cx="8229600" cy="457200"/>
           </a:xfrm>
           <a:prstGeom prst="rect">
             <a:avLst/>
@@ -3948,28 +4276,28 @@
           <a:lstStyle/>
           <a:p>
             <a:pPr algn="l">
-              <a:defRPr sz="1400" b="0">
+              <a:defRPr sz="1200" b="0">
                 <a:solidFill>
                   <a:srgbClr val="FFFFFF"/>
                 </a:solidFill>
               </a:defRPr>
             </a:pPr>
             <a:r>
-              <a:t>Open and close with the core message (Slide 2)</a:t>
-            </a:r>
-          </a:p>
-        </p:txBody>
-      </p:sp>
-      <p:sp>
-        <p:nvSpPr>
-          <p:cNvPr id="5" name="TextBox 4"/>
+              <a:t>VP Global Supply Chain / Manufacturing</a:t>
+            </a:r>
+          </a:p>
+        </p:txBody>
+      </p:sp>
+      <p:sp>
+        <p:nvSpPr>
+          <p:cNvPr id="7" name="TextBox 6"/>
           <p:cNvSpPr txBox="1"/>
           <p:nvPr/>
         </p:nvSpPr>
         <p:spPr>
           <a:xfrm>
-            <a:off x="1097280" y="2560320"/>
-            <a:ext cx="10058400" cy="457200"/>
+            <a:off x="914400" y="2011680"/>
+            <a:ext cx="2286000" cy="457200"/>
           </a:xfrm>
           <a:prstGeom prst="rect">
             <a:avLst/>
@@ -3983,28 +4311,28 @@
           <a:lstStyle/>
           <a:p>
             <a:pPr algn="l">
-              <a:defRPr sz="1400" b="0">
-                <a:solidFill>
-                  <a:srgbClr val="FFFFFF"/>
-                </a:solidFill>
-              </a:defRPr>
-            </a:pPr>
-            <a:r>
-              <a:t>Protect Oracle: That is a data boundary, not a failure</a:t>
-            </a:r>
-          </a:p>
-        </p:txBody>
-      </p:sp>
-      <p:sp>
-        <p:nvSpPr>
-          <p:cNvPr id="6" name="TextBox 5"/>
+              <a:defRPr sz="1200" b="1">
+                <a:solidFill>
+                  <a:srgbClr val="29B5E8"/>
+                </a:solidFill>
+              </a:defRPr>
+            </a:pPr>
+            <a:r>
+              <a:t>Open/Close</a:t>
+            </a:r>
+          </a:p>
+        </p:txBody>
+      </p:sp>
+      <p:sp>
+        <p:nvSpPr>
+          <p:cNvPr id="8" name="TextBox 7"/>
           <p:cNvSpPr txBox="1"/>
           <p:nvPr/>
         </p:nvSpPr>
         <p:spPr>
           <a:xfrm>
-            <a:off x="1097280" y="3108960"/>
-            <a:ext cx="10058400" cy="457200"/>
+            <a:off x="3200400" y="2011680"/>
+            <a:ext cx="8229600" cy="457200"/>
           </a:xfrm>
           <a:prstGeom prst="rect">
             <a:avLst/>
@@ -4018,28 +4346,28 @@
           <a:lstStyle/>
           <a:p>
             <a:pPr algn="l">
-              <a:defRPr sz="1400" b="0">
+              <a:defRPr sz="1200" b="0">
                 <a:solidFill>
                   <a:srgbClr val="FFFFFF"/>
                 </a:solidFill>
               </a:defRPr>
             </a:pPr>
             <a:r>
-              <a:t>Flag synthetic: External shipping signal is simulated</a:t>
-            </a:r>
-          </a:p>
-        </p:txBody>
-      </p:sp>
-      <p:sp>
-        <p:nvSpPr>
-          <p:cNvPr id="7" name="TextBox 6"/>
+              <a:t>Core message slide 2</a:t>
+            </a:r>
+          </a:p>
+        </p:txBody>
+      </p:sp>
+      <p:sp>
+        <p:nvSpPr>
+          <p:cNvPr id="9" name="TextBox 8"/>
           <p:cNvSpPr txBox="1"/>
           <p:nvPr/>
         </p:nvSpPr>
         <p:spPr>
           <a:xfrm>
-            <a:off x="1097280" y="3657600"/>
-            <a:ext cx="10058400" cy="457200"/>
+            <a:off x="914400" y="2560320"/>
+            <a:ext cx="2286000" cy="457200"/>
           </a:xfrm>
           <a:prstGeom prst="rect">
             <a:avLst/>
@@ -4053,28 +4381,28 @@
           <a:lstStyle/>
           <a:p>
             <a:pPr algn="l">
-              <a:defRPr sz="1400" b="0">
-                <a:solidFill>
-                  <a:srgbClr val="FFFFFF"/>
-                </a:solidFill>
-              </a:defRPr>
-            </a:pPr>
-            <a:r>
-              <a:t>Quantify in MW and dollars -- makes the CSCO lean in</a:t>
-            </a:r>
-          </a:p>
-        </p:txBody>
-      </p:sp>
-      <p:sp>
-        <p:nvSpPr>
-          <p:cNvPr id="8" name="TextBox 7"/>
+              <a:defRPr sz="1200" b="1">
+                <a:solidFill>
+                  <a:srgbClr val="29B5E8"/>
+                </a:solidFill>
+              </a:defRPr>
+            </a:pPr>
+            <a:r>
+              <a:t>Protect Oracle</a:t>
+            </a:r>
+          </a:p>
+        </p:txBody>
+      </p:sp>
+      <p:sp>
+        <p:nvSpPr>
+          <p:cNvPr id="10" name="TextBox 9"/>
           <p:cNvSpPr txBox="1"/>
           <p:nvPr/>
         </p:nvSpPr>
         <p:spPr>
           <a:xfrm>
-            <a:off x="1097280" y="4206240"/>
-            <a:ext cx="10058400" cy="457200"/>
+            <a:off x="3200400" y="2560320"/>
+            <a:ext cx="8229600" cy="457200"/>
           </a:xfrm>
           <a:prstGeom prst="rect">
             <a:avLst/>
@@ -4088,28 +4416,28 @@
           <a:lstStyle/>
           <a:p>
             <a:pPr algn="l">
-              <a:defRPr sz="1400" b="0">
+              <a:defRPr sz="1200" b="0">
                 <a:solidFill>
                   <a:srgbClr val="FFFFFF"/>
                 </a:solidFill>
               </a:defRPr>
             </a:pPr>
             <a:r>
-              <a:t>Close: You choose the model, control cost, human in the loop</a:t>
-            </a:r>
-          </a:p>
-        </p:txBody>
-      </p:sp>
-      <p:sp>
-        <p:nvSpPr>
-          <p:cNvPr id="9" name="TextBox 8"/>
+              <a:t>Data boundary, not failure</a:t>
+            </a:r>
+          </a:p>
+        </p:txBody>
+      </p:sp>
+      <p:sp>
+        <p:nvSpPr>
+          <p:cNvPr id="11" name="TextBox 10"/>
           <p:cNvSpPr txBox="1"/>
           <p:nvPr/>
         </p:nvSpPr>
         <p:spPr>
           <a:xfrm>
-            <a:off x="1097280" y="4754879"/>
-            <a:ext cx="10058400" cy="457200"/>
+            <a:off x="914400" y="3108960"/>
+            <a:ext cx="2286000" cy="457200"/>
           </a:xfrm>
           <a:prstGeom prst="rect">
             <a:avLst/>
@@ -4123,28 +4451,28 @@
           <a:lstStyle/>
           <a:p>
             <a:pPr algn="l">
-              <a:defRPr sz="1400" b="0">
-                <a:solidFill>
-                  <a:srgbClr val="FFFFFF"/>
-                </a:solidFill>
-              </a:defRPr>
-            </a:pPr>
-            <a:r>
-              <a:t>Plants are real (AL, OH, LA) -- data is simulated but labeled</a:t>
-            </a:r>
-          </a:p>
-        </p:txBody>
-      </p:sp>
-      <p:sp>
-        <p:nvSpPr>
-          <p:cNvPr id="10" name="TextBox 9"/>
+              <a:defRPr sz="1200" b="1">
+                <a:solidFill>
+                  <a:srgbClr val="29B5E8"/>
+                </a:solidFill>
+              </a:defRPr>
+            </a:pPr>
+            <a:r>
+              <a:t>Flag Synthetic</a:t>
+            </a:r>
+          </a:p>
+        </p:txBody>
+      </p:sp>
+      <p:sp>
+        <p:nvSpPr>
+          <p:cNvPr id="12" name="TextBox 11"/>
           <p:cNvSpPr txBox="1"/>
           <p:nvPr/>
         </p:nvSpPr>
         <p:spPr>
           <a:xfrm>
-            <a:off x="1097280" y="5303520"/>
-            <a:ext cx="10058400" cy="457200"/>
+            <a:off x="3200400" y="3108960"/>
+            <a:ext cx="8229600" cy="457200"/>
           </a:xfrm>
           <a:prstGeom prst="rect">
             <a:avLst/>
@@ -4158,14 +4486,294 @@
           <a:lstStyle/>
           <a:p>
             <a:pPr algn="l">
-              <a:defRPr sz="1400" b="0">
+              <a:defRPr sz="1200" b="0">
                 <a:solidFill>
                   <a:srgbClr val="FFFFFF"/>
                 </a:solidFill>
               </a:defRPr>
             </a:pPr>
             <a:r>
-              <a:t>Substrate glass + tellurium = 10-K risk factors (public)</a:t>
+              <a:t>External = simulated Marketplace</a:t>
+            </a:r>
+          </a:p>
+        </p:txBody>
+      </p:sp>
+      <p:sp>
+        <p:nvSpPr>
+          <p:cNvPr id="13" name="TextBox 12"/>
+          <p:cNvSpPr txBox="1"/>
+          <p:nvPr/>
+        </p:nvSpPr>
+        <p:spPr>
+          <a:xfrm>
+            <a:off x="914400" y="3657600"/>
+            <a:ext cx="2286000" cy="457200"/>
+          </a:xfrm>
+          <a:prstGeom prst="rect">
+            <a:avLst/>
+          </a:prstGeom>
+          <a:noFill/>
+        </p:spPr>
+        <p:txBody>
+          <a:bodyPr wrap="square">
+            <a:spAutoFit/>
+          </a:bodyPr>
+          <a:lstStyle/>
+          <a:p>
+            <a:pPr algn="l">
+              <a:defRPr sz="1200" b="1">
+                <a:solidFill>
+                  <a:srgbClr val="29B5E8"/>
+                </a:solidFill>
+              </a:defRPr>
+            </a:pPr>
+            <a:r>
+              <a:t>Quantify</a:t>
+            </a:r>
+          </a:p>
+        </p:txBody>
+      </p:sp>
+      <p:sp>
+        <p:nvSpPr>
+          <p:cNvPr id="14" name="TextBox 13"/>
+          <p:cNvSpPr txBox="1"/>
+          <p:nvPr/>
+        </p:nvSpPr>
+        <p:spPr>
+          <a:xfrm>
+            <a:off x="3200400" y="3657600"/>
+            <a:ext cx="8229600" cy="457200"/>
+          </a:xfrm>
+          <a:prstGeom prst="rect">
+            <a:avLst/>
+          </a:prstGeom>
+          <a:noFill/>
+        </p:spPr>
+        <p:txBody>
+          <a:bodyPr wrap="square">
+            <a:spAutoFit/>
+          </a:bodyPr>
+          <a:lstStyle/>
+          <a:p>
+            <a:pPr algn="l">
+              <a:defRPr sz="1200" b="0">
+                <a:solidFill>
+                  <a:srgbClr val="FFFFFF"/>
+                </a:solidFill>
+              </a:defRPr>
+            </a:pPr>
+            <a:r>
+              <a:t>MW and $ always</a:t>
+            </a:r>
+          </a:p>
+        </p:txBody>
+      </p:sp>
+      <p:sp>
+        <p:nvSpPr>
+          <p:cNvPr id="15" name="TextBox 14"/>
+          <p:cNvSpPr txBox="1"/>
+          <p:nvPr/>
+        </p:nvSpPr>
+        <p:spPr>
+          <a:xfrm>
+            <a:off x="914400" y="4206240"/>
+            <a:ext cx="2286000" cy="457200"/>
+          </a:xfrm>
+          <a:prstGeom prst="rect">
+            <a:avLst/>
+          </a:prstGeom>
+          <a:noFill/>
+        </p:spPr>
+        <p:txBody>
+          <a:bodyPr wrap="square">
+            <a:spAutoFit/>
+          </a:bodyPr>
+          <a:lstStyle/>
+          <a:p>
+            <a:pPr algn="l">
+              <a:defRPr sz="1200" b="1">
+                <a:solidFill>
+                  <a:srgbClr val="29B5E8"/>
+                </a:solidFill>
+              </a:defRPr>
+            </a:pPr>
+            <a:r>
+              <a:t>Close</a:t>
+            </a:r>
+          </a:p>
+        </p:txBody>
+      </p:sp>
+      <p:sp>
+        <p:nvSpPr>
+          <p:cNvPr id="16" name="TextBox 15"/>
+          <p:cNvSpPr txBox="1"/>
+          <p:nvPr/>
+        </p:nvSpPr>
+        <p:spPr>
+          <a:xfrm>
+            <a:off x="3200400" y="4206240"/>
+            <a:ext cx="8229600" cy="457200"/>
+          </a:xfrm>
+          <a:prstGeom prst="rect">
+            <a:avLst/>
+          </a:prstGeom>
+          <a:noFill/>
+        </p:spPr>
+        <p:txBody>
+          <a:bodyPr wrap="square">
+            <a:spAutoFit/>
+          </a:bodyPr>
+          <a:lstStyle/>
+          <a:p>
+            <a:pPr algn="l">
+              <a:defRPr sz="1200" b="0">
+                <a:solidFill>
+                  <a:srgbClr val="FFFFFF"/>
+                </a:solidFill>
+              </a:defRPr>
+            </a:pPr>
+            <a:r>
+              <a:t>Model choice, cost control, human loop</a:t>
+            </a:r>
+          </a:p>
+        </p:txBody>
+      </p:sp>
+      <p:sp>
+        <p:nvSpPr>
+          <p:cNvPr id="17" name="TextBox 16"/>
+          <p:cNvSpPr txBox="1"/>
+          <p:nvPr/>
+        </p:nvSpPr>
+        <p:spPr>
+          <a:xfrm>
+            <a:off x="914400" y="4754879"/>
+            <a:ext cx="2286000" cy="457200"/>
+          </a:xfrm>
+          <a:prstGeom prst="rect">
+            <a:avLst/>
+          </a:prstGeom>
+          <a:noFill/>
+        </p:spPr>
+        <p:txBody>
+          <a:bodyPr wrap="square">
+            <a:spAutoFit/>
+          </a:bodyPr>
+          <a:lstStyle/>
+          <a:p>
+            <a:pPr algn="l">
+              <a:defRPr sz="1200" b="1">
+                <a:solidFill>
+                  <a:srgbClr val="29B5E8"/>
+                </a:solidFill>
+              </a:defRPr>
+            </a:pPr>
+            <a:r>
+              <a:t>Label</a:t>
+            </a:r>
+          </a:p>
+        </p:txBody>
+      </p:sp>
+      <p:sp>
+        <p:nvSpPr>
+          <p:cNvPr id="18" name="TextBox 17"/>
+          <p:cNvSpPr txBox="1"/>
+          <p:nvPr/>
+        </p:nvSpPr>
+        <p:spPr>
+          <a:xfrm>
+            <a:off x="3200400" y="4754879"/>
+            <a:ext cx="8229600" cy="457200"/>
+          </a:xfrm>
+          <a:prstGeom prst="rect">
+            <a:avLst/>
+          </a:prstGeom>
+          <a:noFill/>
+        </p:spPr>
+        <p:txBody>
+          <a:bodyPr wrap="square">
+            <a:spAutoFit/>
+          </a:bodyPr>
+          <a:lstStyle/>
+          <a:p>
+            <a:pPr algn="l">
+              <a:defRPr sz="1200" b="0">
+                <a:solidFill>
+                  <a:srgbClr val="FFFFFF"/>
+                </a:solidFill>
+              </a:defRPr>
+            </a:pPr>
+            <a:r>
+              <a:t>Plants real, data simulated</a:t>
+            </a:r>
+          </a:p>
+        </p:txBody>
+      </p:sp>
+      <p:sp>
+        <p:nvSpPr>
+          <p:cNvPr id="19" name="TextBox 18"/>
+          <p:cNvSpPr txBox="1"/>
+          <p:nvPr/>
+        </p:nvSpPr>
+        <p:spPr>
+          <a:xfrm>
+            <a:off x="914400" y="5303520"/>
+            <a:ext cx="2286000" cy="457200"/>
+          </a:xfrm>
+          <a:prstGeom prst="rect">
+            <a:avLst/>
+          </a:prstGeom>
+          <a:noFill/>
+        </p:spPr>
+        <p:txBody>
+          <a:bodyPr wrap="square">
+            <a:spAutoFit/>
+          </a:bodyPr>
+          <a:lstStyle/>
+          <a:p>
+            <a:pPr algn="l">
+              <a:defRPr sz="1200" b="1">
+                <a:solidFill>
+                  <a:srgbClr val="29B5E8"/>
+                </a:solidFill>
+              </a:defRPr>
+            </a:pPr>
+            <a:r>
+              <a:t>10-K</a:t>
+            </a:r>
+          </a:p>
+        </p:txBody>
+      </p:sp>
+      <p:sp>
+        <p:nvSpPr>
+          <p:cNvPr id="20" name="TextBox 19"/>
+          <p:cNvSpPr txBox="1"/>
+          <p:nvPr/>
+        </p:nvSpPr>
+        <p:spPr>
+          <a:xfrm>
+            <a:off x="3200400" y="5303520"/>
+            <a:ext cx="8229600" cy="457200"/>
+          </a:xfrm>
+          <a:prstGeom prst="rect">
+            <a:avLst/>
+          </a:prstGeom>
+          <a:noFill/>
+        </p:spPr>
+        <p:txBody>
+          <a:bodyPr wrap="square">
+            <a:spAutoFit/>
+          </a:bodyPr>
+          <a:lstStyle/>
+          <a:p>
+            <a:pPr algn="l">
+              <a:defRPr sz="1200" b="0">
+                <a:solidFill>
+                  <a:srgbClr val="FFFFFF"/>
+                </a:solidFill>
+              </a:defRPr>
+            </a:pPr>
+            <a:r>
+              <a:t>Glass + tellurium = public risk</a:t>
             </a:r>
           </a:p>
         </p:txBody>
@@ -4184,7 +4792,7 @@
     <p:bg>
       <p:bgPr>
         <a:solidFill>
-          <a:srgbClr val="11273F"/>
+          <a:srgbClr val="05142B"/>
         </a:solidFill>
         <a:effectLst/>
       </p:bgPr>
@@ -4196,16 +4804,107 @@
         <p:nvPr/>
       </p:nvGrpSpPr>
       <p:grpSpPr/>
-      <p:sp>
-        <p:nvSpPr>
-          <p:cNvPr id="2" name="TextBox 1"/>
+      <p:pic>
+        <p:nvPicPr>
+          <p:cNvPr id="2" name="Picture 1" descr="snowflake_logo_white.png"/>
+          <p:cNvPicPr>
+            <a:picLocks noChangeAspect="1"/>
+          </p:cNvPicPr>
+          <p:nvPr/>
+        </p:nvPicPr>
+        <p:blipFill>
+          <a:blip r:embed="rId2"/>
+          <a:stretch>
+            <a:fillRect/>
+          </a:stretch>
+        </p:blipFill>
+        <p:spPr>
+          <a:xfrm>
+            <a:off x="457200" y="274320"/>
+            <a:ext cx="457200" cy="457200"/>
+          </a:xfrm>
+          <a:prstGeom prst="rect">
+            <a:avLst/>
+          </a:prstGeom>
+        </p:spPr>
+      </p:pic>
+      <p:sp>
+        <p:nvSpPr>
+          <p:cNvPr id="3" name="Rectangle 2"/>
+          <p:cNvSpPr/>
+          <p:nvPr/>
+        </p:nvSpPr>
+        <p:spPr>
+          <a:xfrm>
+            <a:off x="457200" y="6446520"/>
+            <a:ext cx="11247120" cy="27432"/>
+          </a:xfrm>
+          <a:prstGeom prst="rect">
+            <a:avLst/>
+          </a:prstGeom>
+          <a:solidFill>
+            <a:srgbClr val="29B5E8"/>
+          </a:solidFill>
+          <a:ln>
+            <a:noFill/>
+          </a:ln>
+        </p:spPr>
+        <p:style>
+          <a:lnRef idx="1">
+            <a:schemeClr val="accent1"/>
+          </a:lnRef>
+          <a:fillRef idx="3">
+            <a:schemeClr val="accent1"/>
+          </a:fillRef>
+          <a:effectRef idx="2">
+            <a:schemeClr val="accent1"/>
+          </a:effectRef>
+          <a:fontRef idx="minor">
+            <a:schemeClr val="lt1"/>
+          </a:fontRef>
+        </p:style>
+        <p:txBody>
+          <a:bodyPr rtlCol="0" anchor="ctr"/>
+          <a:lstStyle/>
+          <a:p>
+            <a:pPr algn="ctr"/>
+          </a:p>
+        </p:txBody>
+      </p:sp>
+      <p:pic>
+        <p:nvPicPr>
+          <p:cNvPr id="4" name="Picture 3" descr="snowflake_logo_white.png"/>
+          <p:cNvPicPr>
+            <a:picLocks noChangeAspect="1"/>
+          </p:cNvPicPr>
+          <p:nvPr/>
+        </p:nvPicPr>
+        <p:blipFill>
+          <a:blip r:embed="rId2"/>
+          <a:stretch>
+            <a:fillRect/>
+          </a:stretch>
+        </p:blipFill>
+        <p:spPr>
+          <a:xfrm>
+            <a:off x="8229600" y="1828800"/>
+            <a:ext cx="3200400" cy="3200400"/>
+          </a:xfrm>
+          <a:prstGeom prst="rect">
+            <a:avLst/>
+          </a:prstGeom>
+        </p:spPr>
+      </p:pic>
+      <p:sp>
+        <p:nvSpPr>
+          <p:cNvPr id="5" name="TextBox 4"/>
           <p:cNvSpPr txBox="1"/>
           <p:nvPr/>
         </p:nvSpPr>
         <p:spPr>
           <a:xfrm>
-            <a:off x="914400" y="457200"/>
-            <a:ext cx="10058400" cy="731520"/>
+            <a:off x="731520" y="731520"/>
+            <a:ext cx="10058400" cy="548640"/>
           </a:xfrm>
           <a:prstGeom prst="rect">
             <a:avLst/>
@@ -4233,14 +4932,14 @@
       </p:sp>
       <p:sp>
         <p:nvSpPr>
-          <p:cNvPr id="3" name="TextBox 2"/>
+          <p:cNvPr id="6" name="TextBox 5"/>
           <p:cNvSpPr txBox="1"/>
           <p:nvPr/>
         </p:nvSpPr>
         <p:spPr>
           <a:xfrm>
-            <a:off x="914400" y="1463040"/>
-            <a:ext cx="10058400" cy="5029200"/>
+            <a:off x="731520" y="1463040"/>
+            <a:ext cx="7315200" cy="5029200"/>
           </a:xfrm>
           <a:prstGeom prst="rect">
             <a:avLst/>
@@ -4254,19 +4953,35 @@
           <a:lstStyle/>
           <a:p>
             <a:pPr algn="l">
-              <a:defRPr sz="1400" b="0">
+              <a:defRPr sz="1300" b="0">
                 <a:solidFill>
                   <a:srgbClr val="FFFFFF"/>
                 </a:solidFill>
               </a:defRPr>
             </a:pPr>
             <a:r>
-              <a:t>Account: AWS161  |  DB: FS_INTELLIGENCE  |  WH: FIRST_SOLAR_WH</a:t>
+              <a:t>Account: AWS161</a:t>
+            </a:r>
+            <a:br/>
+            <a:r>
+              <a:t>Database: FS_INTELLIGENCE</a:t>
+            </a:r>
+            <a:br/>
+            <a:r>
+              <a:t>Warehouse: FIRST_SOLAR_WH</a:t>
             </a:r>
             <a:br/>
             <a:br/>
             <a:r>
-              <a:t>Agent: FIRST_SOLAR_AGENT (11 tools, 15 sample questions)</a:t>
+              <a:t>Agent: FIRST_SOLAR_AGENT</a:t>
+            </a:r>
+            <a:br/>
+            <a:r>
+              <a:t>  11 tools | 15 sample questions</a:t>
+            </a:r>
+            <a:br/>
+            <a:r>
+              <a:t>  Budget: 60s / 32K tokens</a:t>
             </a:r>
             <a:br/>
             <a:br/>
@@ -4283,25 +4998,29 @@
             </a:r>
             <a:br/>
             <a:r>
-              <a:t>  RISK_INTELLIGENCE_SV (8 tables + external signals)</a:t>
+              <a:t>  RISK_INTELLIGENCE_SV (8 tables + ext)</a:t>
             </a:r>
             <a:br/>
             <a:br/>
             <a:r>
-              <a:t>Key Data:</a:t>
+              <a:t>Scenario Data:</a:t>
             </a:r>
             <a:br/>
             <a:r>
-              <a:t>  Alabama glass: 18 days (tight)  |  Ohio: 45 days (surplus)</a:t>
+              <a:t>  Alabama glass: 18d | Ohio: 45d</a:t>
             </a:r>
             <a:br/>
             <a:r>
-              <a:t>  ABC Glass OTD: 97%  |  External: -19% vol, +71% dwell</a:t>
+              <a:t>  ABC Glass OTD: 97%</a:t>
+            </a:r>
+            <a:br/>
+            <a:r>
+              <a:t>  External: -19% vol, +71% dwell</a:t>
             </a:r>
             <a:br/>
             <a:br/>
             <a:r>
-              <a:t>GitHub: github.com/sfc-gh-sdickson/First-Solar</a:t>
+              <a:t>GitHub: sfc-gh-sdickson/First-Solar</a:t>
             </a:r>
           </a:p>
         </p:txBody>
@@ -4320,7 +5039,7 @@
     <p:bg>
       <p:bgPr>
         <a:solidFill>
-          <a:srgbClr val="11273F"/>
+          <a:srgbClr val="05142B"/>
         </a:solidFill>
         <a:effectLst/>
       </p:bgPr>
@@ -4332,15 +5051,82 @@
         <p:nvPr/>
       </p:nvGrpSpPr>
       <p:grpSpPr/>
-      <p:sp>
-        <p:nvSpPr>
-          <p:cNvPr id="2" name="TextBox 1"/>
+      <p:pic>
+        <p:nvPicPr>
+          <p:cNvPr id="2" name="Picture 1" descr="snowflake_logo_white.png"/>
+          <p:cNvPicPr>
+            <a:picLocks noChangeAspect="1"/>
+          </p:cNvPicPr>
+          <p:nvPr/>
+        </p:nvPicPr>
+        <p:blipFill>
+          <a:blip r:embed="rId2"/>
+          <a:stretch>
+            <a:fillRect/>
+          </a:stretch>
+        </p:blipFill>
+        <p:spPr>
+          <a:xfrm>
+            <a:off x="457200" y="274320"/>
+            <a:ext cx="457200" cy="457200"/>
+          </a:xfrm>
+          <a:prstGeom prst="rect">
+            <a:avLst/>
+          </a:prstGeom>
+        </p:spPr>
+      </p:pic>
+      <p:sp>
+        <p:nvSpPr>
+          <p:cNvPr id="3" name="Rectangle 2"/>
+          <p:cNvSpPr/>
+          <p:nvPr/>
+        </p:nvSpPr>
+        <p:spPr>
+          <a:xfrm>
+            <a:off x="457200" y="6446520"/>
+            <a:ext cx="11247120" cy="27432"/>
+          </a:xfrm>
+          <a:prstGeom prst="rect">
+            <a:avLst/>
+          </a:prstGeom>
+          <a:solidFill>
+            <a:srgbClr val="29B5E8"/>
+          </a:solidFill>
+          <a:ln>
+            <a:noFill/>
+          </a:ln>
+        </p:spPr>
+        <p:style>
+          <a:lnRef idx="1">
+            <a:schemeClr val="accent1"/>
+          </a:lnRef>
+          <a:fillRef idx="3">
+            <a:schemeClr val="accent1"/>
+          </a:fillRef>
+          <a:effectRef idx="2">
+            <a:schemeClr val="accent1"/>
+          </a:effectRef>
+          <a:fontRef idx="minor">
+            <a:schemeClr val="lt1"/>
+          </a:fontRef>
+        </p:style>
+        <p:txBody>
+          <a:bodyPr rtlCol="0" anchor="ctr"/>
+          <a:lstStyle/>
+          <a:p>
+            <a:pPr algn="ctr"/>
+          </a:p>
+        </p:txBody>
+      </p:sp>
+      <p:sp>
+        <p:nvSpPr>
+          <p:cNvPr id="4" name="TextBox 3"/>
           <p:cNvSpPr txBox="1"/>
           <p:nvPr/>
         </p:nvSpPr>
         <p:spPr>
           <a:xfrm>
-            <a:off x="914400" y="731520"/>
+            <a:off x="731520" y="914400"/>
             <a:ext cx="10058400" cy="731520"/>
           </a:xfrm>
           <a:prstGeom prst="rect">
@@ -4355,7 +5141,7 @@
           <a:lstStyle/>
           <a:p>
             <a:pPr algn="l">
-              <a:defRPr sz="3200" b="1">
+              <a:defRPr sz="3600" b="1">
                 <a:solidFill>
                   <a:srgbClr val="29B5E8"/>
                 </a:solidFill>
@@ -4369,14 +5155,59 @@
       </p:sp>
       <p:sp>
         <p:nvSpPr>
-          <p:cNvPr id="3" name="TextBox 2"/>
+          <p:cNvPr id="5" name="Rounded Rectangle 4"/>
+          <p:cNvSpPr/>
+          <p:nvPr/>
+        </p:nvSpPr>
+        <p:spPr>
+          <a:xfrm>
+            <a:off x="731520" y="1828800"/>
+            <a:ext cx="10515600" cy="3474720"/>
+          </a:xfrm>
+          <a:prstGeom prst="roundRect">
+            <a:avLst/>
+          </a:prstGeom>
+          <a:solidFill>
+            <a:srgbClr val="0A1E38"/>
+          </a:solidFill>
+          <a:ln w="25400">
+            <a:solidFill>
+              <a:srgbClr val="29B5E8"/>
+            </a:solidFill>
+          </a:ln>
+        </p:spPr>
+        <p:style>
+          <a:lnRef idx="1">
+            <a:schemeClr val="accent1"/>
+          </a:lnRef>
+          <a:fillRef idx="3">
+            <a:schemeClr val="accent1"/>
+          </a:fillRef>
+          <a:effectRef idx="2">
+            <a:schemeClr val="accent1"/>
+          </a:effectRef>
+          <a:fontRef idx="minor">
+            <a:schemeClr val="lt1"/>
+          </a:fontRef>
+        </p:style>
+        <p:txBody>
+          <a:bodyPr rtlCol="0" anchor="ctr"/>
+          <a:lstStyle/>
+          <a:p>
+            <a:pPr algn="ctr"/>
+          </a:p>
+        </p:txBody>
+      </p:sp>
+      <p:sp>
+        <p:nvSpPr>
+          <p:cNvPr id="6" name="TextBox 5"/>
           <p:cNvSpPr txBox="1"/>
           <p:nvPr/>
         </p:nvSpPr>
         <p:spPr>
           <a:xfrm>
-            <a:off x="914400" y="1828800"/>
-            <a:ext cx="10058400" cy="3200400"/>
+            <a:off x="1188720" y="2103120"/>
+            <a:ext cx="9601200" cy="3200400"/>
           </a:xfrm>
           <a:prstGeom prst="rect">
             <a:avLst/>
@@ -4390,14 +5221,14 @@
           <a:lstStyle/>
           <a:p>
             <a:pPr algn="l">
-              <a:defRPr sz="1800" b="0">
+              <a:defRPr sz="1700" b="0">
                 <a:solidFill>
                   <a:srgbClr val="FFFFFF"/>
                 </a:solidFill>
               </a:defRPr>
             </a:pPr>
             <a:r>
-              <a:t>The point is not that Snowflake's LLM is smarter than Oracle's.</a:t>
+              <a:t>"The point isn't that Snowflake's LLM is smarter than Oracle's.</a:t>
             </a:r>
             <a:br/>
             <a:br/>
@@ -4412,20 +5243,92 @@
             <a:br/>
             <a:br/>
             <a:r>
-              <a:t>Same question + broader context = better decision.</a:t>
-            </a:r>
-          </a:p>
-        </p:txBody>
-      </p:sp>
-      <p:sp>
-        <p:nvSpPr>
-          <p:cNvPr id="4" name="TextBox 3"/>
+              <a:t>Same question + broader context = better decision."</a:t>
+            </a:r>
+          </a:p>
+        </p:txBody>
+      </p:sp>
+      <p:pic>
+        <p:nvPicPr>
+          <p:cNvPr id="7" name="Picture 6" descr="icon_oracle.png"/>
+          <p:cNvPicPr>
+            <a:picLocks noChangeAspect="1"/>
+          </p:cNvPicPr>
+          <p:nvPr/>
+        </p:nvPicPr>
+        <p:blipFill>
+          <a:blip r:embed="rId3"/>
+          <a:stretch>
+            <a:fillRect/>
+          </a:stretch>
+        </p:blipFill>
+        <p:spPr>
+          <a:xfrm>
+            <a:off x="9601200" y="2103120"/>
+            <a:ext cx="548640" cy="548640"/>
+          </a:xfrm>
+          <a:prstGeom prst="rect">
+            <a:avLst/>
+          </a:prstGeom>
+        </p:spPr>
+      </p:pic>
+      <p:pic>
+        <p:nvPicPr>
+          <p:cNvPr id="8" name="Picture 7" descr="icon_mfg.png"/>
+          <p:cNvPicPr>
+            <a:picLocks noChangeAspect="1"/>
+          </p:cNvPicPr>
+          <p:nvPr/>
+        </p:nvPicPr>
+        <p:blipFill>
+          <a:blip r:embed="rId4"/>
+          <a:stretch>
+            <a:fillRect/>
+          </a:stretch>
+        </p:blipFill>
+        <p:spPr>
+          <a:xfrm>
+            <a:off x="9601200" y="2926080"/>
+            <a:ext cx="548640" cy="548640"/>
+          </a:xfrm>
+          <a:prstGeom prst="rect">
+            <a:avLst/>
+          </a:prstGeom>
+        </p:spPr>
+      </p:pic>
+      <p:pic>
+        <p:nvPicPr>
+          <p:cNvPr id="9" name="Picture 8" descr="icon_external.png"/>
+          <p:cNvPicPr>
+            <a:picLocks noChangeAspect="1"/>
+          </p:cNvPicPr>
+          <p:nvPr/>
+        </p:nvPicPr>
+        <p:blipFill>
+          <a:blip r:embed="rId5"/>
+          <a:stretch>
+            <a:fillRect/>
+          </a:stretch>
+        </p:blipFill>
+        <p:spPr>
+          <a:xfrm>
+            <a:off x="9601200" y="3749039"/>
+            <a:ext cx="548640" cy="548640"/>
+          </a:xfrm>
+          <a:prstGeom prst="rect">
+            <a:avLst/>
+          </a:prstGeom>
+        </p:spPr>
+      </p:pic>
+      <p:sp>
+        <p:nvSpPr>
+          <p:cNvPr id="10" name="TextBox 9"/>
           <p:cNvSpPr txBox="1"/>
           <p:nvPr/>
         </p:nvSpPr>
         <p:spPr>
           <a:xfrm>
-            <a:off x="914400" y="5486400"/>
+            <a:off x="731520" y="5669280"/>
             <a:ext cx="10058400" cy="457200"/>
           </a:xfrm>
           <a:prstGeom prst="rect">
@@ -4440,14 +5343,14 @@
           <a:lstStyle/>
           <a:p>
             <a:pPr algn="l">
-              <a:defRPr sz="1400" b="1">
+              <a:defRPr sz="1300" b="1">
                 <a:solidFill>
                   <a:srgbClr val="E65100"/>
                 </a:solidFill>
               </a:defRPr>
             </a:pPr>
             <a:r>
-              <a:t>Say this at the TOP and the CLOSE of the demo.</a:t>
+              <a:t>SAY THIS AT THE OPEN AND THE CLOSE</a:t>
             </a:r>
           </a:p>
         </p:txBody>
@@ -4466,7 +5369,7 @@
     <p:bg>
       <p:bgPr>
         <a:solidFill>
-          <a:srgbClr val="11273F"/>
+          <a:srgbClr val="05142B"/>
         </a:solidFill>
         <a:effectLst/>
       </p:bgPr>
@@ -4478,92 +5381,46 @@
         <p:nvPr/>
       </p:nvGrpSpPr>
       <p:grpSpPr/>
-      <p:sp>
-        <p:nvSpPr>
-          <p:cNvPr id="2" name="TextBox 1"/>
-          <p:cNvSpPr txBox="1"/>
-          <p:nvPr/>
-        </p:nvSpPr>
-        <p:spPr>
-          <a:xfrm>
-            <a:off x="914400" y="731520"/>
-            <a:ext cx="10058400" cy="731520"/>
-          </a:xfrm>
-          <a:prstGeom prst="rect">
-            <a:avLst/>
-          </a:prstGeom>
-          <a:noFill/>
-        </p:spPr>
-        <p:txBody>
-          <a:bodyPr wrap="square">
-            <a:spAutoFit/>
-          </a:bodyPr>
-          <a:lstStyle/>
-          <a:p>
-            <a:pPr algn="l">
-              <a:defRPr sz="3200" b="1">
-                <a:solidFill>
-                  <a:srgbClr val="29B5E8"/>
-                </a:solidFill>
-              </a:defRPr>
-            </a:pPr>
-            <a:r>
-              <a:t>The Primary Question</a:t>
-            </a:r>
-          </a:p>
-        </p:txBody>
-      </p:sp>
-      <p:sp>
-        <p:nvSpPr>
-          <p:cNvPr id="3" name="TextBox 2"/>
-          <p:cNvSpPr txBox="1"/>
-          <p:nvPr/>
-        </p:nvSpPr>
-        <p:spPr>
-          <a:xfrm>
-            <a:off x="914400" y="1645920"/>
-            <a:ext cx="10058400" cy="457200"/>
-          </a:xfrm>
-          <a:prstGeom prst="rect">
-            <a:avLst/>
-          </a:prstGeom>
-          <a:noFill/>
-        </p:spPr>
-        <p:txBody>
-          <a:bodyPr wrap="square">
-            <a:spAutoFit/>
-          </a:bodyPr>
-          <a:lstStyle/>
-          <a:p>
-            <a:pPr algn="l">
-              <a:defRPr sz="1600" b="0">
-                <a:solidFill>
-                  <a:srgbClr val="6B7B8D"/>
-                </a:solidFill>
-              </a:defRPr>
-            </a:pPr>
-            <a:r>
-              <a:t>Ask this three times through the demo:</a:t>
-            </a:r>
-          </a:p>
-        </p:txBody>
-      </p:sp>
-      <p:sp>
-        <p:nvSpPr>
-          <p:cNvPr id="4" name="Rounded Rectangle 3"/>
+      <p:pic>
+        <p:nvPicPr>
+          <p:cNvPr id="2" name="Picture 1" descr="snowflake_logo_white.png"/>
+          <p:cNvPicPr>
+            <a:picLocks noChangeAspect="1"/>
+          </p:cNvPicPr>
+          <p:nvPr/>
+        </p:nvPicPr>
+        <p:blipFill>
+          <a:blip r:embed="rId2"/>
+          <a:stretch>
+            <a:fillRect/>
+          </a:stretch>
+        </p:blipFill>
+        <p:spPr>
+          <a:xfrm>
+            <a:off x="457200" y="274320"/>
+            <a:ext cx="457200" cy="457200"/>
+          </a:xfrm>
+          <a:prstGeom prst="rect">
+            <a:avLst/>
+          </a:prstGeom>
+        </p:spPr>
+      </p:pic>
+      <p:sp>
+        <p:nvSpPr>
+          <p:cNvPr id="3" name="Rectangle 2"/>
           <p:cNvSpPr/>
           <p:nvPr/>
         </p:nvSpPr>
         <p:spPr>
           <a:xfrm>
-            <a:off x="731520" y="2560320"/>
-            <a:ext cx="10515600" cy="1371600"/>
-          </a:xfrm>
-          <a:prstGeom prst="roundRect">
+            <a:off x="457200" y="6446520"/>
+            <a:ext cx="11247120" cy="27432"/>
+          </a:xfrm>
+          <a:prstGeom prst="rect">
             <a:avLst/>
           </a:prstGeom>
           <a:solidFill>
-            <a:srgbClr val="1B3A5C"/>
+            <a:srgbClr val="29B5E8"/>
           </a:solidFill>
           <a:ln>
             <a:noFill/>
@@ -4584,36 +5441,23 @@
           </a:fontRef>
         </p:style>
         <p:txBody>
-          <a:bodyPr rtlCol="0" anchor="ctr" wrap="square"/>
-          <a:lstStyle/>
-          <a:p>
-            <a:pPr algn="ctr">
-              <a:defRPr sz="2000" b="1">
-                <a:solidFill>
-                  <a:srgbClr val="FFFFFF"/>
-                </a:solidFill>
-              </a:defRPr>
-            </a:pPr>
-            <a:r>
-              <a:t>Are there any emerging supply-chain risks that could</a:t>
-            </a:r>
-            <a:br/>
-            <a:r>
-              <a:t>cause us to miss our production plan over the next 90 days?</a:t>
-            </a:r>
-          </a:p>
-        </p:txBody>
-      </p:sp>
-      <p:sp>
-        <p:nvSpPr>
-          <p:cNvPr id="5" name="TextBox 4"/>
+          <a:bodyPr rtlCol="0" anchor="ctr"/>
+          <a:lstStyle/>
+          <a:p>
+            <a:pPr algn="ctr"/>
+          </a:p>
+        </p:txBody>
+      </p:sp>
+      <p:sp>
+        <p:nvSpPr>
+          <p:cNvPr id="4" name="TextBox 3"/>
           <p:cNvSpPr txBox="1"/>
           <p:nvPr/>
         </p:nvSpPr>
         <p:spPr>
           <a:xfrm>
-            <a:off x="914400" y="4572000"/>
-            <a:ext cx="10058400" cy="2286000"/>
+            <a:off x="731520" y="822960"/>
+            <a:ext cx="10058400" cy="731520"/>
           </a:xfrm>
           <a:prstGeom prst="rect">
             <a:avLst/>
@@ -4627,22 +5471,310 @@
           <a:lstStyle/>
           <a:p>
             <a:pPr algn="l">
-              <a:defRPr sz="1600" b="0">
+              <a:defRPr sz="3600" b="1">
+                <a:solidFill>
+                  <a:srgbClr val="29B5E8"/>
+                </a:solidFill>
+              </a:defRPr>
+            </a:pPr>
+            <a:r>
+              <a:t>The Primary Question</a:t>
+            </a:r>
+          </a:p>
+        </p:txBody>
+      </p:sp>
+      <p:sp>
+        <p:nvSpPr>
+          <p:cNvPr id="5" name="TextBox 4"/>
+          <p:cNvSpPr txBox="1"/>
+          <p:nvPr/>
+        </p:nvSpPr>
+        <p:spPr>
+          <a:xfrm>
+            <a:off x="731520" y="1554480"/>
+            <a:ext cx="10058400" cy="457200"/>
+          </a:xfrm>
+          <a:prstGeom prst="rect">
+            <a:avLst/>
+          </a:prstGeom>
+          <a:noFill/>
+        </p:spPr>
+        <p:txBody>
+          <a:bodyPr wrap="square">
+            <a:spAutoFit/>
+          </a:bodyPr>
+          <a:lstStyle/>
+          <a:p>
+            <a:pPr algn="l">
+              <a:defRPr sz="1500" b="0">
+                <a:solidFill>
+                  <a:srgbClr val="8E9EAB"/>
+                </a:solidFill>
+              </a:defRPr>
+            </a:pPr>
+            <a:r>
+              <a:t>Ask this THREE TIMES through the demo:</a:t>
+            </a:r>
+          </a:p>
+        </p:txBody>
+      </p:sp>
+      <p:sp>
+        <p:nvSpPr>
+          <p:cNvPr id="6" name="Rounded Rectangle 5"/>
+          <p:cNvSpPr/>
+          <p:nvPr/>
+        </p:nvSpPr>
+        <p:spPr>
+          <a:xfrm>
+            <a:off x="548640" y="2286000"/>
+            <a:ext cx="10972800" cy="1463040"/>
+          </a:xfrm>
+          <a:prstGeom prst="roundRect">
+            <a:avLst/>
+          </a:prstGeom>
+          <a:solidFill>
+            <a:srgbClr val="0A1E38"/>
+          </a:solidFill>
+          <a:ln w="25400">
+            <a:solidFill>
+              <a:srgbClr val="29B5E8"/>
+            </a:solidFill>
+          </a:ln>
+        </p:spPr>
+        <p:style>
+          <a:lnRef idx="1">
+            <a:schemeClr val="accent1"/>
+          </a:lnRef>
+          <a:fillRef idx="3">
+            <a:schemeClr val="accent1"/>
+          </a:fillRef>
+          <a:effectRef idx="2">
+            <a:schemeClr val="accent1"/>
+          </a:effectRef>
+          <a:fontRef idx="minor">
+            <a:schemeClr val="lt1"/>
+          </a:fontRef>
+        </p:style>
+        <p:txBody>
+          <a:bodyPr rtlCol="0" anchor="ctr"/>
+          <a:lstStyle/>
+          <a:p>
+            <a:pPr algn="ctr"/>
+          </a:p>
+        </p:txBody>
+      </p:sp>
+      <p:sp>
+        <p:nvSpPr>
+          <p:cNvPr id="7" name="TextBox 6"/>
+          <p:cNvSpPr txBox="1"/>
+          <p:nvPr/>
+        </p:nvSpPr>
+        <p:spPr>
+          <a:xfrm>
+            <a:off x="1097280" y="2560320"/>
+            <a:ext cx="10058400" cy="1097280"/>
+          </a:xfrm>
+          <a:prstGeom prst="rect">
+            <a:avLst/>
+          </a:prstGeom>
+          <a:noFill/>
+        </p:spPr>
+        <p:txBody>
+          <a:bodyPr wrap="square">
+            <a:spAutoFit/>
+          </a:bodyPr>
+          <a:lstStyle/>
+          <a:p>
+            <a:pPr algn="ctr">
+              <a:defRPr sz="2200" b="1">
                 <a:solidFill>
                   <a:srgbClr val="FFFFFF"/>
                 </a:solidFill>
               </a:defRPr>
             </a:pPr>
             <a:r>
-              <a:t>Act 1:  No risk identified (Oracle data alone)</a:t>
+              <a:t>"Are there any emerging supply-chain risks that could cause us</a:t>
             </a:r>
             <a:br/>
             <a:r>
-              <a:t>Act 3:  Risk surfaced (external shipping signals)</a:t>
-            </a:r>
-            <a:br/>
-            <a:r>
-              <a:t>Act 4:  Actionable recommendations across sites</a:t>
+              <a:t>to miss our production plan over the next 90 days?"</a:t>
+            </a:r>
+          </a:p>
+        </p:txBody>
+      </p:sp>
+      <p:pic>
+        <p:nvPicPr>
+          <p:cNvPr id="8" name="Picture 7" descr="icon_check.png"/>
+          <p:cNvPicPr>
+            <a:picLocks noChangeAspect="1"/>
+          </p:cNvPicPr>
+          <p:nvPr/>
+        </p:nvPicPr>
+        <p:blipFill>
+          <a:blip r:embed="rId3"/>
+          <a:stretch>
+            <a:fillRect/>
+          </a:stretch>
+        </p:blipFill>
+        <p:spPr>
+          <a:xfrm>
+            <a:off x="914400" y="4206240"/>
+            <a:ext cx="457200" cy="457200"/>
+          </a:xfrm>
+          <a:prstGeom prst="rect">
+            <a:avLst/>
+          </a:prstGeom>
+        </p:spPr>
+      </p:pic>
+      <p:sp>
+        <p:nvSpPr>
+          <p:cNvPr id="9" name="TextBox 8"/>
+          <p:cNvSpPr txBox="1"/>
+          <p:nvPr/>
+        </p:nvSpPr>
+        <p:spPr>
+          <a:xfrm>
+            <a:off x="1463040" y="4206240"/>
+            <a:ext cx="9144000" cy="457200"/>
+          </a:xfrm>
+          <a:prstGeom prst="rect">
+            <a:avLst/>
+          </a:prstGeom>
+          <a:noFill/>
+        </p:spPr>
+        <p:txBody>
+          <a:bodyPr wrap="square">
+            <a:spAutoFit/>
+          </a:bodyPr>
+          <a:lstStyle/>
+          <a:p>
+            <a:pPr algn="l">
+              <a:defRPr sz="1500" b="0">
+                <a:solidFill>
+                  <a:srgbClr val="2E7D32"/>
+                </a:solidFill>
+              </a:defRPr>
+            </a:pPr>
+            <a:r>
+              <a:t>Act 1:  "No material risk identified."</a:t>
+            </a:r>
+          </a:p>
+        </p:txBody>
+      </p:sp>
+      <p:pic>
+        <p:nvPicPr>
+          <p:cNvPr id="10" name="Picture 9" descr="icon_alert.png"/>
+          <p:cNvPicPr>
+            <a:picLocks noChangeAspect="1"/>
+          </p:cNvPicPr>
+          <p:nvPr/>
+        </p:nvPicPr>
+        <p:blipFill>
+          <a:blip r:embed="rId4"/>
+          <a:stretch>
+            <a:fillRect/>
+          </a:stretch>
+        </p:blipFill>
+        <p:spPr>
+          <a:xfrm>
+            <a:off x="914400" y="4846320"/>
+            <a:ext cx="457200" cy="457200"/>
+          </a:xfrm>
+          <a:prstGeom prst="rect">
+            <a:avLst/>
+          </a:prstGeom>
+        </p:spPr>
+      </p:pic>
+      <p:sp>
+        <p:nvSpPr>
+          <p:cNvPr id="11" name="TextBox 10"/>
+          <p:cNvSpPr txBox="1"/>
+          <p:nvPr/>
+        </p:nvSpPr>
+        <p:spPr>
+          <a:xfrm>
+            <a:off x="1463040" y="4846320"/>
+            <a:ext cx="9144000" cy="457200"/>
+          </a:xfrm>
+          <a:prstGeom prst="rect">
+            <a:avLst/>
+          </a:prstGeom>
+          <a:noFill/>
+        </p:spPr>
+        <p:txBody>
+          <a:bodyPr wrap="square">
+            <a:spAutoFit/>
+          </a:bodyPr>
+          <a:lstStyle/>
+          <a:p>
+            <a:pPr algn="l">
+              <a:defRPr sz="1500" b="0">
+                <a:solidFill>
+                  <a:srgbClr val="E65100"/>
+                </a:solidFill>
+              </a:defRPr>
+            </a:pPr>
+            <a:r>
+              <a:t>Act 3:  "ELEVATED RISK — 134 MW at risk at Alabama"</a:t>
+            </a:r>
+          </a:p>
+        </p:txBody>
+      </p:sp>
+      <p:pic>
+        <p:nvPicPr>
+          <p:cNvPr id="12" name="Picture 11" descr="icon_transfer.png"/>
+          <p:cNvPicPr>
+            <a:picLocks noChangeAspect="1"/>
+          </p:cNvPicPr>
+          <p:nvPr/>
+        </p:nvPicPr>
+        <p:blipFill>
+          <a:blip r:embed="rId5"/>
+          <a:stretch>
+            <a:fillRect/>
+          </a:stretch>
+        </p:blipFill>
+        <p:spPr>
+          <a:xfrm>
+            <a:off x="914400" y="5486400"/>
+            <a:ext cx="457200" cy="457200"/>
+          </a:xfrm>
+          <a:prstGeom prst="rect">
+            <a:avLst/>
+          </a:prstGeom>
+        </p:spPr>
+      </p:pic>
+      <p:sp>
+        <p:nvSpPr>
+          <p:cNvPr id="13" name="TextBox 12"/>
+          <p:cNvSpPr txBox="1"/>
+          <p:nvPr/>
+        </p:nvSpPr>
+        <p:spPr>
+          <a:xfrm>
+            <a:off x="1463040" y="5486400"/>
+            <a:ext cx="9144000" cy="457200"/>
+          </a:xfrm>
+          <a:prstGeom prst="rect">
+            <a:avLst/>
+          </a:prstGeom>
+          <a:noFill/>
+        </p:spPr>
+        <p:txBody>
+          <a:bodyPr wrap="square">
+            <a:spAutoFit/>
+          </a:bodyPr>
+          <a:lstStyle/>
+          <a:p>
+            <a:pPr algn="l">
+              <a:defRPr sz="1500" b="0">
+                <a:solidFill>
+                  <a:srgbClr val="6A1B9A"/>
+                </a:solidFill>
+              </a:defRPr>
+            </a:pPr>
+            <a:r>
+              <a:t>Act 4:  "Expedite, transfer from Ohio, qualify Guardian Glass"</a:t>
             </a:r>
           </a:p>
         </p:txBody>
@@ -4661,7 +5793,7 @@
     <p:bg>
       <p:bgPr>
         <a:solidFill>
-          <a:srgbClr val="11273F"/>
+          <a:srgbClr val="05142B"/>
         </a:solidFill>
         <a:effectLst/>
       </p:bgPr>
@@ -4673,267 +5805,46 @@
         <p:nvPr/>
       </p:nvGrpSpPr>
       <p:grpSpPr/>
-      <p:sp>
-        <p:nvSpPr>
-          <p:cNvPr id="2" name="TextBox 1"/>
-          <p:cNvSpPr txBox="1"/>
-          <p:nvPr/>
-        </p:nvSpPr>
-        <p:spPr>
-          <a:xfrm>
-            <a:off x="914400" y="457200"/>
-            <a:ext cx="10058400" cy="731520"/>
-          </a:xfrm>
-          <a:prstGeom prst="rect">
-            <a:avLst/>
-          </a:prstGeom>
-          <a:noFill/>
-        </p:spPr>
-        <p:txBody>
-          <a:bodyPr wrap="square">
-            <a:spAutoFit/>
-          </a:bodyPr>
-          <a:lstStyle/>
-          <a:p>
-            <a:pPr algn="l">
-              <a:defRPr sz="3200" b="1">
-                <a:solidFill>
-                  <a:srgbClr val="2E7D32"/>
-                </a:solidFill>
-              </a:defRPr>
-            </a:pPr>
-            <a:r>
-              <a:t>Act 1 -- Oracle / ERP View</a:t>
-            </a:r>
-          </a:p>
-        </p:txBody>
-      </p:sp>
-      <p:sp>
-        <p:nvSpPr>
-          <p:cNvPr id="3" name="TextBox 2"/>
-          <p:cNvSpPr txBox="1"/>
-          <p:nvPr/>
-        </p:nvSpPr>
-        <p:spPr>
-          <a:xfrm>
-            <a:off x="914400" y="1188720"/>
-            <a:ext cx="10058400" cy="457200"/>
-          </a:xfrm>
-          <a:prstGeom prst="rect">
-            <a:avLst/>
-          </a:prstGeom>
-          <a:noFill/>
-        </p:spPr>
-        <p:txBody>
-          <a:bodyPr wrap="square">
-            <a:spAutoFit/>
-          </a:bodyPr>
-          <a:lstStyle/>
-          <a:p>
-            <a:pPr algn="l">
-              <a:defRPr sz="1800" b="0">
-                <a:solidFill>
-                  <a:srgbClr val="6B7B8D"/>
-                </a:solidFill>
-              </a:defRPr>
-            </a:pPr>
-            <a:r>
-              <a:t>Everything looks healthy. No risk visible.</a:t>
-            </a:r>
-          </a:p>
-        </p:txBody>
-      </p:sp>
-      <p:sp>
-        <p:nvSpPr>
-          <p:cNvPr id="4" name="TextBox 3"/>
-          <p:cNvSpPr txBox="1"/>
-          <p:nvPr/>
-        </p:nvSpPr>
-        <p:spPr>
-          <a:xfrm>
-            <a:off x="1097280" y="2011680"/>
-            <a:ext cx="10058400" cy="457200"/>
-          </a:xfrm>
-          <a:prstGeom prst="rect">
-            <a:avLst/>
-          </a:prstGeom>
-          <a:noFill/>
-        </p:spPr>
-        <p:txBody>
-          <a:bodyPr wrap="square">
-            <a:spAutoFit/>
-          </a:bodyPr>
-          <a:lstStyle/>
-          <a:p>
-            <a:pPr algn="l">
-              <a:defRPr sz="1500" b="0">
-                <a:solidFill>
-                  <a:srgbClr val="FFFFFF"/>
-                </a:solidFill>
-              </a:defRPr>
-            </a:pPr>
-            <a:r>
-              <a:t>ABC Glass (Monterrey, MX) -- Primary substrate glass supplier</a:t>
-            </a:r>
-          </a:p>
-        </p:txBody>
-      </p:sp>
-      <p:sp>
-        <p:nvSpPr>
-          <p:cNvPr id="5" name="TextBox 4"/>
-          <p:cNvSpPr txBox="1"/>
-          <p:nvPr/>
-        </p:nvSpPr>
-        <p:spPr>
-          <a:xfrm>
-            <a:off x="1097280" y="2514600"/>
-            <a:ext cx="10058400" cy="457200"/>
-          </a:xfrm>
-          <a:prstGeom prst="rect">
-            <a:avLst/>
-          </a:prstGeom>
-          <a:noFill/>
-        </p:spPr>
-        <p:txBody>
-          <a:bodyPr wrap="square">
-            <a:spAutoFit/>
-          </a:bodyPr>
-          <a:lstStyle/>
-          <a:p>
-            <a:pPr algn="l">
-              <a:defRPr sz="1500" b="0">
-                <a:solidFill>
-                  <a:srgbClr val="FFFFFF"/>
-                </a:solidFill>
-              </a:defRPr>
-            </a:pPr>
-            <a:r>
-              <a:t>Historical OTD: 97%  |  Quality: 99.5%  |  Risk Score: 2.0/10</a:t>
-            </a:r>
-          </a:p>
-        </p:txBody>
-      </p:sp>
-      <p:sp>
-        <p:nvSpPr>
-          <p:cNvPr id="6" name="TextBox 5"/>
-          <p:cNvSpPr txBox="1"/>
-          <p:nvPr/>
-        </p:nvSpPr>
-        <p:spPr>
-          <a:xfrm>
-            <a:off x="1097280" y="3017520"/>
-            <a:ext cx="10058400" cy="457200"/>
-          </a:xfrm>
-          <a:prstGeom prst="rect">
-            <a:avLst/>
-          </a:prstGeom>
-          <a:noFill/>
-        </p:spPr>
-        <p:txBody>
-          <a:bodyPr wrap="square">
-            <a:spAutoFit/>
-          </a:bodyPr>
-          <a:lstStyle/>
-          <a:p>
-            <a:pPr algn="l">
-              <a:defRPr sz="1500" b="0">
-                <a:solidFill>
-                  <a:srgbClr val="FFFFFF"/>
-                </a:solidFill>
-              </a:defRPr>
-            </a:pPr>
-            <a:r>
-              <a:t>Open POs: All on schedule, expected delivery dates on track</a:t>
-            </a:r>
-          </a:p>
-        </p:txBody>
-      </p:sp>
-      <p:sp>
-        <p:nvSpPr>
-          <p:cNvPr id="7" name="TextBox 6"/>
-          <p:cNvSpPr txBox="1"/>
-          <p:nvPr/>
-        </p:nvSpPr>
-        <p:spPr>
-          <a:xfrm>
-            <a:off x="1097280" y="3520440"/>
-            <a:ext cx="10058400" cy="457200"/>
-          </a:xfrm>
-          <a:prstGeom prst="rect">
-            <a:avLst/>
-          </a:prstGeom>
-          <a:noFill/>
-        </p:spPr>
-        <p:txBody>
-          <a:bodyPr wrap="square">
-            <a:spAutoFit/>
-          </a:bodyPr>
-          <a:lstStyle/>
-          <a:p>
-            <a:pPr algn="l">
-              <a:defRPr sz="1500" b="0">
-                <a:solidFill>
-                  <a:srgbClr val="FFFFFF"/>
-                </a:solidFill>
-              </a:defRPr>
-            </a:pPr>
-            <a:r>
-              <a:t>Alabama glass inventory: 18 days forward coverage</a:t>
-            </a:r>
-          </a:p>
-        </p:txBody>
-      </p:sp>
-      <p:sp>
-        <p:nvSpPr>
-          <p:cNvPr id="8" name="TextBox 7"/>
-          <p:cNvSpPr txBox="1"/>
-          <p:nvPr/>
-        </p:nvSpPr>
-        <p:spPr>
-          <a:xfrm>
-            <a:off x="1097280" y="4023360"/>
-            <a:ext cx="10058400" cy="457200"/>
-          </a:xfrm>
-          <a:prstGeom prst="rect">
-            <a:avLst/>
-          </a:prstGeom>
-          <a:noFill/>
-        </p:spPr>
-        <p:txBody>
-          <a:bodyPr wrap="square">
-            <a:spAutoFit/>
-          </a:bodyPr>
-          <a:lstStyle/>
-          <a:p>
-            <a:pPr algn="l">
-              <a:defRPr sz="1500" b="0">
-                <a:solidFill>
-                  <a:srgbClr val="FFFFFF"/>
-                </a:solidFill>
-              </a:defRPr>
-            </a:pPr>
-            <a:r>
-              <a:t>WMS / TMS: All shipments in transit, no flags</a:t>
-            </a:r>
-          </a:p>
-        </p:txBody>
-      </p:sp>
-      <p:sp>
-        <p:nvSpPr>
-          <p:cNvPr id="9" name="Rounded Rectangle 8"/>
+      <p:pic>
+        <p:nvPicPr>
+          <p:cNvPr id="2" name="Picture 1" descr="snowflake_logo_white.png"/>
+          <p:cNvPicPr>
+            <a:picLocks noChangeAspect="1"/>
+          </p:cNvPicPr>
+          <p:nvPr/>
+        </p:nvPicPr>
+        <p:blipFill>
+          <a:blip r:embed="rId2"/>
+          <a:stretch>
+            <a:fillRect/>
+          </a:stretch>
+        </p:blipFill>
+        <p:spPr>
+          <a:xfrm>
+            <a:off x="457200" y="274320"/>
+            <a:ext cx="457200" cy="457200"/>
+          </a:xfrm>
+          <a:prstGeom prst="rect">
+            <a:avLst/>
+          </a:prstGeom>
+        </p:spPr>
+      </p:pic>
+      <p:sp>
+        <p:nvSpPr>
+          <p:cNvPr id="3" name="Rectangle 2"/>
           <p:cNvSpPr/>
           <p:nvPr/>
         </p:nvSpPr>
         <p:spPr>
           <a:xfrm>
-            <a:off x="914400" y="4846320"/>
-            <a:ext cx="10058400" cy="1097280"/>
-          </a:xfrm>
-          <a:prstGeom prst="roundRect">
+            <a:off x="457200" y="6446520"/>
+            <a:ext cx="11247120" cy="27432"/>
+          </a:xfrm>
+          <a:prstGeom prst="rect">
             <a:avLst/>
           </a:prstGeom>
           <a:solidFill>
-            <a:srgbClr val="1B5E20"/>
+            <a:srgbClr val="29B5E8"/>
           </a:solidFill>
           <a:ln>
             <a:noFill/>
@@ -4954,36 +5865,75 @@
           </a:fontRef>
         </p:style>
         <p:txBody>
+          <a:bodyPr rtlCol="0" anchor="ctr"/>
+          <a:lstStyle/>
+          <a:p>
+            <a:pPr algn="ctr"/>
+          </a:p>
+        </p:txBody>
+      </p:sp>
+      <p:sp>
+        <p:nvSpPr>
+          <p:cNvPr id="4" name="Rounded Rectangle 3"/>
+          <p:cNvSpPr/>
+          <p:nvPr/>
+        </p:nvSpPr>
+        <p:spPr>
+          <a:xfrm>
+            <a:off x="731520" y="731520"/>
+            <a:ext cx="1645920" cy="548640"/>
+          </a:xfrm>
+          <a:prstGeom prst="roundRect">
+            <a:avLst/>
+          </a:prstGeom>
+          <a:solidFill>
+            <a:srgbClr val="2E7D32"/>
+          </a:solidFill>
+          <a:ln>
+            <a:noFill/>
+          </a:ln>
+        </p:spPr>
+        <p:style>
+          <a:lnRef idx="1">
+            <a:schemeClr val="accent1"/>
+          </a:lnRef>
+          <a:fillRef idx="3">
+            <a:schemeClr val="accent1"/>
+          </a:fillRef>
+          <a:effectRef idx="2">
+            <a:schemeClr val="accent1"/>
+          </a:effectRef>
+          <a:fontRef idx="minor">
+            <a:schemeClr val="lt1"/>
+          </a:fontRef>
+        </p:style>
+        <p:txBody>
           <a:bodyPr rtlCol="0" anchor="ctr" wrap="square"/>
           <a:lstStyle/>
           <a:p>
             <a:pPr algn="ctr">
-              <a:defRPr sz="1500" b="1">
+              <a:defRPr sz="1600" b="1">
                 <a:solidFill>
                   <a:srgbClr val="FFFFFF"/>
                 </a:solidFill>
               </a:defRPr>
             </a:pPr>
             <a:r>
-              <a:t>Agent: No material supply risk identified.</a:t>
-            </a:r>
-            <a:br/>
-            <a:r>
-              <a:t>Inventory coverage adequate. Deliveries on schedule.</a:t>
-            </a:r>
-          </a:p>
-        </p:txBody>
-      </p:sp>
-      <p:sp>
-        <p:nvSpPr>
-          <p:cNvPr id="10" name="TextBox 9"/>
+              <a:t>ACT 1</a:t>
+            </a:r>
+          </a:p>
+        </p:txBody>
+      </p:sp>
+      <p:sp>
+        <p:nvSpPr>
+          <p:cNvPr id="5" name="TextBox 4"/>
           <p:cNvSpPr txBox="1"/>
           <p:nvPr/>
         </p:nvSpPr>
         <p:spPr>
           <a:xfrm>
-            <a:off x="914400" y="6126480"/>
-            <a:ext cx="10058400" cy="548640"/>
+            <a:off x="2560320" y="731520"/>
+            <a:ext cx="8229600" cy="548640"/>
           </a:xfrm>
           <a:prstGeom prst="rect">
             <a:avLst/>
@@ -4997,14 +5947,611 @@
           <a:lstStyle/>
           <a:p>
             <a:pPr algn="l">
-              <a:defRPr sz="1200" b="1">
+              <a:defRPr sz="2400" b="1">
+                <a:solidFill>
+                  <a:srgbClr val="FFFFFF"/>
+                </a:solidFill>
+              </a:defRPr>
+            </a:pPr>
+            <a:r>
+              <a:t>Oracle / ERP View — Everything Looks Healthy</a:t>
+            </a:r>
+          </a:p>
+        </p:txBody>
+      </p:sp>
+      <p:pic>
+        <p:nvPicPr>
+          <p:cNvPr id="6" name="Picture 5" descr="icon_oracle.png"/>
+          <p:cNvPicPr>
+            <a:picLocks noChangeAspect="1"/>
+          </p:cNvPicPr>
+          <p:nvPr/>
+        </p:nvPicPr>
+        <p:blipFill>
+          <a:blip r:embed="rId3"/>
+          <a:stretch>
+            <a:fillRect/>
+          </a:stretch>
+        </p:blipFill>
+        <p:spPr>
+          <a:xfrm>
+            <a:off x="10515600" y="640080"/>
+            <a:ext cx="731520" cy="731520"/>
+          </a:xfrm>
+          <a:prstGeom prst="rect">
+            <a:avLst/>
+          </a:prstGeom>
+        </p:spPr>
+      </p:pic>
+      <p:sp>
+        <p:nvSpPr>
+          <p:cNvPr id="7" name="Rounded Rectangle 6"/>
+          <p:cNvSpPr/>
+          <p:nvPr/>
+        </p:nvSpPr>
+        <p:spPr>
+          <a:xfrm>
+            <a:off x="731520" y="1645920"/>
+            <a:ext cx="5303520" cy="1371600"/>
+          </a:xfrm>
+          <a:prstGeom prst="roundRect">
+            <a:avLst/>
+          </a:prstGeom>
+          <a:solidFill>
+            <a:srgbClr val="0A1E38"/>
+          </a:solidFill>
+          <a:ln w="25400">
+            <a:solidFill>
+              <a:srgbClr val="29B5E8"/>
+            </a:solidFill>
+          </a:ln>
+        </p:spPr>
+        <p:style>
+          <a:lnRef idx="1">
+            <a:schemeClr val="accent1"/>
+          </a:lnRef>
+          <a:fillRef idx="3">
+            <a:schemeClr val="accent1"/>
+          </a:fillRef>
+          <a:effectRef idx="2">
+            <a:schemeClr val="accent1"/>
+          </a:effectRef>
+          <a:fontRef idx="minor">
+            <a:schemeClr val="lt1"/>
+          </a:fontRef>
+        </p:style>
+        <p:txBody>
+          <a:bodyPr rtlCol="0" anchor="ctr"/>
+          <a:lstStyle/>
+          <a:p>
+            <a:pPr algn="ctr"/>
+          </a:p>
+        </p:txBody>
+      </p:sp>
+      <p:sp>
+        <p:nvSpPr>
+          <p:cNvPr id="8" name="TextBox 7"/>
+          <p:cNvSpPr txBox="1"/>
+          <p:nvPr/>
+        </p:nvSpPr>
+        <p:spPr>
+          <a:xfrm>
+            <a:off x="1005840" y="1737360"/>
+            <a:ext cx="4754880" cy="457200"/>
+          </a:xfrm>
+          <a:prstGeom prst="rect">
+            <a:avLst/>
+          </a:prstGeom>
+          <a:noFill/>
+        </p:spPr>
+        <p:txBody>
+          <a:bodyPr wrap="square">
+            <a:spAutoFit/>
+          </a:bodyPr>
+          <a:lstStyle/>
+          <a:p>
+            <a:pPr algn="l">
+              <a:defRPr sz="1500" b="1">
+                <a:solidFill>
+                  <a:srgbClr val="29B5E8"/>
+                </a:solidFill>
+              </a:defRPr>
+            </a:pPr>
+            <a:r>
+              <a:t>ABC Glass Industries</a:t>
+            </a:r>
+          </a:p>
+        </p:txBody>
+      </p:sp>
+      <p:sp>
+        <p:nvSpPr>
+          <p:cNvPr id="9" name="TextBox 8"/>
+          <p:cNvSpPr txBox="1"/>
+          <p:nvPr/>
+        </p:nvSpPr>
+        <p:spPr>
+          <a:xfrm>
+            <a:off x="1005840" y="2194560"/>
+            <a:ext cx="4754880" cy="457200"/>
+          </a:xfrm>
+          <a:prstGeom prst="rect">
+            <a:avLst/>
+          </a:prstGeom>
+          <a:noFill/>
+        </p:spPr>
+        <p:txBody>
+          <a:bodyPr wrap="square">
+            <a:spAutoFit/>
+          </a:bodyPr>
+          <a:lstStyle/>
+          <a:p>
+            <a:pPr algn="l">
+              <a:defRPr sz="1200" b="0">
+                <a:solidFill>
+                  <a:srgbClr val="FFFFFF"/>
+                </a:solidFill>
+              </a:defRPr>
+            </a:pPr>
+            <a:r>
+              <a:t>Primary glass | Monterrey MX</a:t>
+            </a:r>
+          </a:p>
+        </p:txBody>
+      </p:sp>
+      <p:sp>
+        <p:nvSpPr>
+          <p:cNvPr id="10" name="Rounded Rectangle 9"/>
+          <p:cNvSpPr/>
+          <p:nvPr/>
+        </p:nvSpPr>
+        <p:spPr>
+          <a:xfrm>
+            <a:off x="6400800" y="1645920"/>
+            <a:ext cx="5303520" cy="1371600"/>
+          </a:xfrm>
+          <a:prstGeom prst="roundRect">
+            <a:avLst/>
+          </a:prstGeom>
+          <a:solidFill>
+            <a:srgbClr val="0A1E38"/>
+          </a:solidFill>
+          <a:ln w="25400">
+            <a:solidFill>
+              <a:srgbClr val="2E7D32"/>
+            </a:solidFill>
+          </a:ln>
+        </p:spPr>
+        <p:style>
+          <a:lnRef idx="1">
+            <a:schemeClr val="accent1"/>
+          </a:lnRef>
+          <a:fillRef idx="3">
+            <a:schemeClr val="accent1"/>
+          </a:fillRef>
+          <a:effectRef idx="2">
+            <a:schemeClr val="accent1"/>
+          </a:effectRef>
+          <a:fontRef idx="minor">
+            <a:schemeClr val="lt1"/>
+          </a:fontRef>
+        </p:style>
+        <p:txBody>
+          <a:bodyPr rtlCol="0" anchor="ctr"/>
+          <a:lstStyle/>
+          <a:p>
+            <a:pPr algn="ctr"/>
+          </a:p>
+        </p:txBody>
+      </p:sp>
+      <p:sp>
+        <p:nvSpPr>
+          <p:cNvPr id="11" name="TextBox 10"/>
+          <p:cNvSpPr txBox="1"/>
+          <p:nvPr/>
+        </p:nvSpPr>
+        <p:spPr>
+          <a:xfrm>
+            <a:off x="6675120" y="1737360"/>
+            <a:ext cx="4754880" cy="457200"/>
+          </a:xfrm>
+          <a:prstGeom prst="rect">
+            <a:avLst/>
+          </a:prstGeom>
+          <a:noFill/>
+        </p:spPr>
+        <p:txBody>
+          <a:bodyPr wrap="square">
+            <a:spAutoFit/>
+          </a:bodyPr>
+          <a:lstStyle/>
+          <a:p>
+            <a:pPr algn="l">
+              <a:defRPr sz="1500" b="1">
+                <a:solidFill>
+                  <a:srgbClr val="2E7D32"/>
+                </a:solidFill>
+              </a:defRPr>
+            </a:pPr>
+            <a:r>
+              <a:t>On-Time: 97%</a:t>
+            </a:r>
+          </a:p>
+        </p:txBody>
+      </p:sp>
+      <p:sp>
+        <p:nvSpPr>
+          <p:cNvPr id="12" name="TextBox 11"/>
+          <p:cNvSpPr txBox="1"/>
+          <p:nvPr/>
+        </p:nvSpPr>
+        <p:spPr>
+          <a:xfrm>
+            <a:off x="6675120" y="2194560"/>
+            <a:ext cx="4754880" cy="457200"/>
+          </a:xfrm>
+          <a:prstGeom prst="rect">
+            <a:avLst/>
+          </a:prstGeom>
+          <a:noFill/>
+        </p:spPr>
+        <p:txBody>
+          <a:bodyPr wrap="square">
+            <a:spAutoFit/>
+          </a:bodyPr>
+          <a:lstStyle/>
+          <a:p>
+            <a:pPr algn="l">
+              <a:defRPr sz="1200" b="0">
+                <a:solidFill>
+                  <a:srgbClr val="FFFFFF"/>
+                </a:solidFill>
+              </a:defRPr>
+            </a:pPr>
+            <a:r>
+              <a:t>Quality: 99.5% | Risk: 2.0</a:t>
+            </a:r>
+          </a:p>
+        </p:txBody>
+      </p:sp>
+      <p:sp>
+        <p:nvSpPr>
+          <p:cNvPr id="13" name="Rounded Rectangle 12"/>
+          <p:cNvSpPr/>
+          <p:nvPr/>
+        </p:nvSpPr>
+        <p:spPr>
+          <a:xfrm>
+            <a:off x="731520" y="3200400"/>
+            <a:ext cx="5303520" cy="1371600"/>
+          </a:xfrm>
+          <a:prstGeom prst="roundRect">
+            <a:avLst/>
+          </a:prstGeom>
+          <a:solidFill>
+            <a:srgbClr val="0A1E38"/>
+          </a:solidFill>
+          <a:ln w="25400">
+            <a:solidFill>
+              <a:srgbClr val="29B5E8"/>
+            </a:solidFill>
+          </a:ln>
+        </p:spPr>
+        <p:style>
+          <a:lnRef idx="1">
+            <a:schemeClr val="accent1"/>
+          </a:lnRef>
+          <a:fillRef idx="3">
+            <a:schemeClr val="accent1"/>
+          </a:fillRef>
+          <a:effectRef idx="2">
+            <a:schemeClr val="accent1"/>
+          </a:effectRef>
+          <a:fontRef idx="minor">
+            <a:schemeClr val="lt1"/>
+          </a:fontRef>
+        </p:style>
+        <p:txBody>
+          <a:bodyPr rtlCol="0" anchor="ctr"/>
+          <a:lstStyle/>
+          <a:p>
+            <a:pPr algn="ctr"/>
+          </a:p>
+        </p:txBody>
+      </p:sp>
+      <p:sp>
+        <p:nvSpPr>
+          <p:cNvPr id="14" name="TextBox 13"/>
+          <p:cNvSpPr txBox="1"/>
+          <p:nvPr/>
+        </p:nvSpPr>
+        <p:spPr>
+          <a:xfrm>
+            <a:off x="1005840" y="3291839"/>
+            <a:ext cx="4754880" cy="457200"/>
+          </a:xfrm>
+          <a:prstGeom prst="rect">
+            <a:avLst/>
+          </a:prstGeom>
+          <a:noFill/>
+        </p:spPr>
+        <p:txBody>
+          <a:bodyPr wrap="square">
+            <a:spAutoFit/>
+          </a:bodyPr>
+          <a:lstStyle/>
+          <a:p>
+            <a:pPr algn="l">
+              <a:defRPr sz="1500" b="1">
+                <a:solidFill>
+                  <a:srgbClr val="29B5E8"/>
+                </a:solidFill>
+              </a:defRPr>
+            </a:pPr>
+            <a:r>
+              <a:t>Open POs: On Schedule</a:t>
+            </a:r>
+          </a:p>
+        </p:txBody>
+      </p:sp>
+      <p:sp>
+        <p:nvSpPr>
+          <p:cNvPr id="15" name="TextBox 14"/>
+          <p:cNvSpPr txBox="1"/>
+          <p:nvPr/>
+        </p:nvSpPr>
+        <p:spPr>
+          <a:xfrm>
+            <a:off x="1005840" y="3749039"/>
+            <a:ext cx="4754880" cy="457200"/>
+          </a:xfrm>
+          <a:prstGeom prst="rect">
+            <a:avLst/>
+          </a:prstGeom>
+          <a:noFill/>
+        </p:spPr>
+        <p:txBody>
+          <a:bodyPr wrap="square">
+            <a:spAutoFit/>
+          </a:bodyPr>
+          <a:lstStyle/>
+          <a:p>
+            <a:pPr algn="l">
+              <a:defRPr sz="1200" b="0">
+                <a:solidFill>
+                  <a:srgbClr val="FFFFFF"/>
+                </a:solidFill>
+              </a:defRPr>
+            </a:pPr>
+            <a:r>
+              <a:t>All delivery dates confirmed</a:t>
+            </a:r>
+          </a:p>
+        </p:txBody>
+      </p:sp>
+      <p:sp>
+        <p:nvSpPr>
+          <p:cNvPr id="16" name="Rounded Rectangle 15"/>
+          <p:cNvSpPr/>
+          <p:nvPr/>
+        </p:nvSpPr>
+        <p:spPr>
+          <a:xfrm>
+            <a:off x="6400800" y="3200400"/>
+            <a:ext cx="5303520" cy="1371600"/>
+          </a:xfrm>
+          <a:prstGeom prst="roundRect">
+            <a:avLst/>
+          </a:prstGeom>
+          <a:solidFill>
+            <a:srgbClr val="0A1E38"/>
+          </a:solidFill>
+          <a:ln w="25400">
+            <a:solidFill>
+              <a:srgbClr val="2E7D32"/>
+            </a:solidFill>
+          </a:ln>
+        </p:spPr>
+        <p:style>
+          <a:lnRef idx="1">
+            <a:schemeClr val="accent1"/>
+          </a:lnRef>
+          <a:fillRef idx="3">
+            <a:schemeClr val="accent1"/>
+          </a:fillRef>
+          <a:effectRef idx="2">
+            <a:schemeClr val="accent1"/>
+          </a:effectRef>
+          <a:fontRef idx="minor">
+            <a:schemeClr val="lt1"/>
+          </a:fontRef>
+        </p:style>
+        <p:txBody>
+          <a:bodyPr rtlCol="0" anchor="ctr"/>
+          <a:lstStyle/>
+          <a:p>
+            <a:pPr algn="ctr"/>
+          </a:p>
+        </p:txBody>
+      </p:sp>
+      <p:sp>
+        <p:nvSpPr>
+          <p:cNvPr id="17" name="TextBox 16"/>
+          <p:cNvSpPr txBox="1"/>
+          <p:nvPr/>
+        </p:nvSpPr>
+        <p:spPr>
+          <a:xfrm>
+            <a:off x="6675120" y="3291839"/>
+            <a:ext cx="4754880" cy="457200"/>
+          </a:xfrm>
+          <a:prstGeom prst="rect">
+            <a:avLst/>
+          </a:prstGeom>
+          <a:noFill/>
+        </p:spPr>
+        <p:txBody>
+          <a:bodyPr wrap="square">
+            <a:spAutoFit/>
+          </a:bodyPr>
+          <a:lstStyle/>
+          <a:p>
+            <a:pPr algn="l">
+              <a:defRPr sz="1500" b="1">
+                <a:solidFill>
+                  <a:srgbClr val="2E7D32"/>
+                </a:solidFill>
+              </a:defRPr>
+            </a:pPr>
+            <a:r>
+              <a:t>Inventory: 18 Days</a:t>
+            </a:r>
+          </a:p>
+        </p:txBody>
+      </p:sp>
+      <p:sp>
+        <p:nvSpPr>
+          <p:cNvPr id="18" name="TextBox 17"/>
+          <p:cNvSpPr txBox="1"/>
+          <p:nvPr/>
+        </p:nvSpPr>
+        <p:spPr>
+          <a:xfrm>
+            <a:off x="6675120" y="3749039"/>
+            <a:ext cx="4754880" cy="457200"/>
+          </a:xfrm>
+          <a:prstGeom prst="rect">
+            <a:avLst/>
+          </a:prstGeom>
+          <a:noFill/>
+        </p:spPr>
+        <p:txBody>
+          <a:bodyPr wrap="square">
+            <a:spAutoFit/>
+          </a:bodyPr>
+          <a:lstStyle/>
+          <a:p>
+            <a:pPr algn="l">
+              <a:defRPr sz="1200" b="0">
+                <a:solidFill>
+                  <a:srgbClr val="FFFFFF"/>
+                </a:solidFill>
+              </a:defRPr>
+            </a:pPr>
+            <a:r>
+              <a:t>Alabama forward coverage</a:t>
+            </a:r>
+          </a:p>
+        </p:txBody>
+      </p:sp>
+      <p:sp>
+        <p:nvSpPr>
+          <p:cNvPr id="19" name="Rounded Rectangle 18"/>
+          <p:cNvSpPr/>
+          <p:nvPr/>
+        </p:nvSpPr>
+        <p:spPr>
+          <a:xfrm>
+            <a:off x="731520" y="4846320"/>
+            <a:ext cx="10515600" cy="914400"/>
+          </a:xfrm>
+          <a:prstGeom prst="roundRect">
+            <a:avLst/>
+          </a:prstGeom>
+          <a:solidFill>
+            <a:srgbClr val="2E7D32"/>
+          </a:solidFill>
+          <a:ln>
+            <a:noFill/>
+          </a:ln>
+        </p:spPr>
+        <p:style>
+          <a:lnRef idx="1">
+            <a:schemeClr val="accent1"/>
+          </a:lnRef>
+          <a:fillRef idx="3">
+            <a:schemeClr val="accent1"/>
+          </a:fillRef>
+          <a:effectRef idx="2">
+            <a:schemeClr val="accent1"/>
+          </a:effectRef>
+          <a:fontRef idx="minor">
+            <a:schemeClr val="lt1"/>
+          </a:fontRef>
+        </p:style>
+        <p:txBody>
+          <a:bodyPr rtlCol="0" anchor="ctr"/>
+          <a:lstStyle/>
+          <a:p>
+            <a:pPr algn="ctr"/>
+          </a:p>
+        </p:txBody>
+      </p:sp>
+      <p:sp>
+        <p:nvSpPr>
+          <p:cNvPr id="20" name="TextBox 19"/>
+          <p:cNvSpPr txBox="1"/>
+          <p:nvPr/>
+        </p:nvSpPr>
+        <p:spPr>
+          <a:xfrm>
+            <a:off x="1188720" y="4937760"/>
+            <a:ext cx="9601200" cy="822960"/>
+          </a:xfrm>
+          <a:prstGeom prst="rect">
+            <a:avLst/>
+          </a:prstGeom>
+          <a:noFill/>
+        </p:spPr>
+        <p:txBody>
+          <a:bodyPr wrap="square">
+            <a:spAutoFit/>
+          </a:bodyPr>
+          <a:lstStyle/>
+          <a:p>
+            <a:pPr algn="l">
+              <a:defRPr sz="1400" b="1">
+                <a:solidFill>
+                  <a:srgbClr val="FFFFFF"/>
+                </a:solidFill>
+              </a:defRPr>
+            </a:pPr>
+            <a:r>
+              <a:t>Agent: "No material supply risk identified. Inventory coverage adequate."</a:t>
+            </a:r>
+          </a:p>
+        </p:txBody>
+      </p:sp>
+      <p:sp>
+        <p:nvSpPr>
+          <p:cNvPr id="21" name="TextBox 20"/>
+          <p:cNvSpPr txBox="1"/>
+          <p:nvPr/>
+        </p:nvSpPr>
+        <p:spPr>
+          <a:xfrm>
+            <a:off x="731520" y="5943600"/>
+            <a:ext cx="10058400" cy="457200"/>
+          </a:xfrm>
+          <a:prstGeom prst="rect">
+            <a:avLst/>
+          </a:prstGeom>
+          <a:noFill/>
+        </p:spPr>
+        <p:txBody>
+          <a:bodyPr wrap="square">
+            <a:spAutoFit/>
+          </a:bodyPr>
+          <a:lstStyle/>
+          <a:p>
+            <a:pPr algn="l">
+              <a:defRPr sz="1100" b="1">
                 <a:solidFill>
                   <a:srgbClr val="E65100"/>
                 </a:solidFill>
               </a:defRPr>
             </a:pPr>
             <a:r>
-              <a:t>Note: Oracle is RIGHT here. Within its data, there genuinely is no risk. Data boundary, not failure.</a:t>
+              <a:t>Oracle is RIGHT here. Data boundary, not failure.</a:t>
             </a:r>
           </a:p>
         </p:txBody>
@@ -5023,7 +6570,7 @@
     <p:bg>
       <p:bgPr>
         <a:solidFill>
-          <a:srgbClr val="11273F"/>
+          <a:srgbClr val="05142B"/>
         </a:solidFill>
         <a:effectLst/>
       </p:bgPr>
@@ -5035,267 +6582,46 @@
         <p:nvPr/>
       </p:nvGrpSpPr>
       <p:grpSpPr/>
-      <p:sp>
-        <p:nvSpPr>
-          <p:cNvPr id="2" name="TextBox 1"/>
-          <p:cNvSpPr txBox="1"/>
-          <p:nvPr/>
-        </p:nvSpPr>
-        <p:spPr>
-          <a:xfrm>
-            <a:off x="914400" y="457200"/>
-            <a:ext cx="10058400" cy="731520"/>
-          </a:xfrm>
-          <a:prstGeom prst="rect">
-            <a:avLst/>
-          </a:prstGeom>
-          <a:noFill/>
-        </p:spPr>
-        <p:txBody>
-          <a:bodyPr wrap="square">
-            <a:spAutoFit/>
-          </a:bodyPr>
-          <a:lstStyle/>
-          <a:p>
-            <a:pPr algn="l">
-              <a:defRPr sz="3200" b="1">
-                <a:solidFill>
-                  <a:srgbClr val="29B5E8"/>
-                </a:solidFill>
-              </a:defRPr>
-            </a:pPr>
-            <a:r>
-              <a:t>Act 2 -- Add Manufacturing Context</a:t>
-            </a:r>
-          </a:p>
-        </p:txBody>
-      </p:sp>
-      <p:sp>
-        <p:nvSpPr>
-          <p:cNvPr id="3" name="TextBox 2"/>
-          <p:cNvSpPr txBox="1"/>
-          <p:nvPr/>
-        </p:nvSpPr>
-        <p:spPr>
-          <a:xfrm>
-            <a:off x="914400" y="1188720"/>
-            <a:ext cx="10058400" cy="457200"/>
-          </a:xfrm>
-          <a:prstGeom prst="rect">
-            <a:avLst/>
-          </a:prstGeom>
-          <a:noFill/>
-        </p:spPr>
-        <p:txBody>
-          <a:bodyPr wrap="square">
-            <a:spAutoFit/>
-          </a:bodyPr>
-          <a:lstStyle/>
-          <a:p>
-            <a:pPr algn="l">
-              <a:defRPr sz="1800" b="0">
-                <a:solidFill>
-                  <a:srgbClr val="6B7B8D"/>
-                </a:solidFill>
-              </a:defRPr>
-            </a:pPr>
-            <a:r>
-              <a:t>Still manageable, but context shows why external matters.</a:t>
-            </a:r>
-          </a:p>
-        </p:txBody>
-      </p:sp>
-      <p:sp>
-        <p:nvSpPr>
-          <p:cNvPr id="4" name="TextBox 3"/>
-          <p:cNvSpPr txBox="1"/>
-          <p:nvPr/>
-        </p:nvSpPr>
-        <p:spPr>
-          <a:xfrm>
-            <a:off x="1097280" y="2011680"/>
-            <a:ext cx="10058400" cy="457200"/>
-          </a:xfrm>
-          <a:prstGeom prst="rect">
-            <a:avLst/>
-          </a:prstGeom>
-          <a:noFill/>
-        </p:spPr>
-        <p:txBody>
-          <a:bodyPr wrap="square">
-            <a:spAutoFit/>
-          </a:bodyPr>
-          <a:lstStyle/>
-          <a:p>
-            <a:pPr algn="l">
-              <a:defRPr sz="1500" b="0">
-                <a:solidFill>
-                  <a:srgbClr val="FFFFFF"/>
-                </a:solidFill>
-              </a:defRPr>
-            </a:pPr>
-            <a:r>
-              <a:t>Daily glass consumption: ~530 panels/day at Alabama</a:t>
-            </a:r>
-          </a:p>
-        </p:txBody>
-      </p:sp>
-      <p:sp>
-        <p:nvSpPr>
-          <p:cNvPr id="5" name="TextBox 4"/>
-          <p:cNvSpPr txBox="1"/>
-          <p:nvPr/>
-        </p:nvSpPr>
-        <p:spPr>
-          <a:xfrm>
-            <a:off x="1097280" y="2514600"/>
-            <a:ext cx="10058400" cy="457200"/>
-          </a:xfrm>
-          <a:prstGeom prst="rect">
-            <a:avLst/>
-          </a:prstGeom>
-          <a:noFill/>
-        </p:spPr>
-        <p:txBody>
-          <a:bodyPr wrap="square">
-            <a:spAutoFit/>
-          </a:bodyPr>
-          <a:lstStyle/>
-          <a:p>
-            <a:pPr algn="l">
-              <a:defRPr sz="1500" b="0">
-                <a:solidFill>
-                  <a:srgbClr val="FFFFFF"/>
-                </a:solidFill>
-              </a:defRPr>
-            </a:pPr>
-            <a:r>
-              <a:t>Series 7 ramping for Q2 -- NextEra, Invenergy commitments</a:t>
-            </a:r>
-          </a:p>
-        </p:txBody>
-      </p:sp>
-      <p:sp>
-        <p:nvSpPr>
-          <p:cNvPr id="6" name="TextBox 5"/>
-          <p:cNvSpPr txBox="1"/>
-          <p:nvPr/>
-        </p:nvSpPr>
-        <p:spPr>
-          <a:xfrm>
-            <a:off x="1097280" y="3017520"/>
-            <a:ext cx="10058400" cy="457200"/>
-          </a:xfrm>
-          <a:prstGeom prst="rect">
-            <a:avLst/>
-          </a:prstGeom>
-          <a:noFill/>
-        </p:spPr>
-        <p:txBody>
-          <a:bodyPr wrap="square">
-            <a:spAutoFit/>
-          </a:bodyPr>
-          <a:lstStyle/>
-          <a:p>
-            <a:pPr algn="l">
-              <a:defRPr sz="1500" b="0">
-                <a:solidFill>
-                  <a:srgbClr val="FFFFFF"/>
-                </a:solidFill>
-              </a:defRPr>
-            </a:pPr>
-            <a:r>
-              <a:t>BOM: 1 substrate glass per module, no substitute exists</a:t>
-            </a:r>
-          </a:p>
-        </p:txBody>
-      </p:sp>
-      <p:sp>
-        <p:nvSpPr>
-          <p:cNvPr id="7" name="TextBox 6"/>
-          <p:cNvSpPr txBox="1"/>
-          <p:nvPr/>
-        </p:nvSpPr>
-        <p:spPr>
-          <a:xfrm>
-            <a:off x="1097280" y="3520440"/>
-            <a:ext cx="10058400" cy="457200"/>
-          </a:xfrm>
-          <a:prstGeom prst="rect">
-            <a:avLst/>
-          </a:prstGeom>
-          <a:noFill/>
-        </p:spPr>
-        <p:txBody>
-          <a:bodyPr wrap="square">
-            <a:spAutoFit/>
-          </a:bodyPr>
-          <a:lstStyle/>
-          <a:p>
-            <a:pPr algn="l">
-              <a:defRPr sz="1500" b="0">
-                <a:solidFill>
-                  <a:srgbClr val="FFFFFF"/>
-                </a:solidFill>
-              </a:defRPr>
-            </a:pPr>
-            <a:r>
-              <a:t>18 days coverage at burn rate = tight, no buffer for disruption</a:t>
-            </a:r>
-          </a:p>
-        </p:txBody>
-      </p:sp>
-      <p:sp>
-        <p:nvSpPr>
-          <p:cNvPr id="8" name="TextBox 7"/>
-          <p:cNvSpPr txBox="1"/>
-          <p:nvPr/>
-        </p:nvSpPr>
-        <p:spPr>
-          <a:xfrm>
-            <a:off x="1097280" y="4023360"/>
-            <a:ext cx="10058400" cy="457200"/>
-          </a:xfrm>
-          <a:prstGeom prst="rect">
-            <a:avLst/>
-          </a:prstGeom>
-          <a:noFill/>
-        </p:spPr>
-        <p:txBody>
-          <a:bodyPr wrap="square">
-            <a:spAutoFit/>
-          </a:bodyPr>
-          <a:lstStyle/>
-          <a:p>
-            <a:pPr algn="l">
-              <a:defRPr sz="1500" b="0">
-                <a:solidFill>
-                  <a:srgbClr val="FFFFFF"/>
-                </a:solidFill>
-              </a:defRPr>
-            </a:pPr>
-            <a:r>
-              <a:t>Scheduled deliveries MUST arrive on time to maintain plan</a:t>
-            </a:r>
-          </a:p>
-        </p:txBody>
-      </p:sp>
-      <p:sp>
-        <p:nvSpPr>
-          <p:cNvPr id="9" name="Rounded Rectangle 8"/>
+      <p:pic>
+        <p:nvPicPr>
+          <p:cNvPr id="2" name="Picture 1" descr="snowflake_logo_white.png"/>
+          <p:cNvPicPr>
+            <a:picLocks noChangeAspect="1"/>
+          </p:cNvPicPr>
+          <p:nvPr/>
+        </p:nvPicPr>
+        <p:blipFill>
+          <a:blip r:embed="rId2"/>
+          <a:stretch>
+            <a:fillRect/>
+          </a:stretch>
+        </p:blipFill>
+        <p:spPr>
+          <a:xfrm>
+            <a:off x="457200" y="274320"/>
+            <a:ext cx="457200" cy="457200"/>
+          </a:xfrm>
+          <a:prstGeom prst="rect">
+            <a:avLst/>
+          </a:prstGeom>
+        </p:spPr>
+      </p:pic>
+      <p:sp>
+        <p:nvSpPr>
+          <p:cNvPr id="3" name="Rectangle 2"/>
           <p:cNvSpPr/>
           <p:nvPr/>
         </p:nvSpPr>
         <p:spPr>
           <a:xfrm>
-            <a:off x="914400" y="4846320"/>
-            <a:ext cx="10058400" cy="1097280"/>
-          </a:xfrm>
-          <a:prstGeom prst="roundRect">
+            <a:off x="457200" y="6446520"/>
+            <a:ext cx="11247120" cy="27432"/>
+          </a:xfrm>
+          <a:prstGeom prst="rect">
             <a:avLst/>
           </a:prstGeom>
           <a:solidFill>
-            <a:srgbClr val="1565C0"/>
+            <a:srgbClr val="29B5E8"/>
           </a:solidFill>
           <a:ln>
             <a:noFill/>
@@ -5316,22 +6642,408 @@
           </a:fontRef>
         </p:style>
         <p:txBody>
+          <a:bodyPr rtlCol="0" anchor="ctr"/>
+          <a:lstStyle/>
+          <a:p>
+            <a:pPr algn="ctr"/>
+          </a:p>
+        </p:txBody>
+      </p:sp>
+      <p:sp>
+        <p:nvSpPr>
+          <p:cNvPr id="4" name="Rounded Rectangle 3"/>
+          <p:cNvSpPr/>
+          <p:nvPr/>
+        </p:nvSpPr>
+        <p:spPr>
+          <a:xfrm>
+            <a:off x="731520" y="731520"/>
+            <a:ext cx="1645920" cy="548640"/>
+          </a:xfrm>
+          <a:prstGeom prst="roundRect">
+            <a:avLst/>
+          </a:prstGeom>
+          <a:solidFill>
+            <a:srgbClr val="29B5E8"/>
+          </a:solidFill>
+          <a:ln>
+            <a:noFill/>
+          </a:ln>
+        </p:spPr>
+        <p:style>
+          <a:lnRef idx="1">
+            <a:schemeClr val="accent1"/>
+          </a:lnRef>
+          <a:fillRef idx="3">
+            <a:schemeClr val="accent1"/>
+          </a:fillRef>
+          <a:effectRef idx="2">
+            <a:schemeClr val="accent1"/>
+          </a:effectRef>
+          <a:fontRef idx="minor">
+            <a:schemeClr val="lt1"/>
+          </a:fontRef>
+        </p:style>
+        <p:txBody>
           <a:bodyPr rtlCol="0" anchor="ctr" wrap="square"/>
           <a:lstStyle/>
           <a:p>
             <a:pPr algn="ctr">
-              <a:defRPr sz="1500" b="1">
+              <a:defRPr sz="1600" b="1">
                 <a:solidFill>
                   <a:srgbClr val="FFFFFF"/>
                 </a:solidFill>
               </a:defRPr>
             </a:pPr>
             <a:r>
-              <a:t>Agent: Coverage is tight at 18 days given consumption rates,</a:t>
-            </a:r>
-            <a:br/>
-            <a:r>
-              <a:t>but scheduled deliveries maintain the production plan.</a:t>
+              <a:t>ACT 2</a:t>
+            </a:r>
+          </a:p>
+        </p:txBody>
+      </p:sp>
+      <p:sp>
+        <p:nvSpPr>
+          <p:cNvPr id="5" name="TextBox 4"/>
+          <p:cNvSpPr txBox="1"/>
+          <p:nvPr/>
+        </p:nvSpPr>
+        <p:spPr>
+          <a:xfrm>
+            <a:off x="2560320" y="731520"/>
+            <a:ext cx="8229600" cy="548640"/>
+          </a:xfrm>
+          <a:prstGeom prst="rect">
+            <a:avLst/>
+          </a:prstGeom>
+          <a:noFill/>
+        </p:spPr>
+        <p:txBody>
+          <a:bodyPr wrap="square">
+            <a:spAutoFit/>
+          </a:bodyPr>
+          <a:lstStyle/>
+          <a:p>
+            <a:pPr algn="l">
+              <a:defRPr sz="2400" b="1">
+                <a:solidFill>
+                  <a:srgbClr val="FFFFFF"/>
+                </a:solidFill>
+              </a:defRPr>
+            </a:pPr>
+            <a:r>
+              <a:t>+ Manufacturing Context — Still Manageable</a:t>
+            </a:r>
+          </a:p>
+        </p:txBody>
+      </p:sp>
+      <p:pic>
+        <p:nvPicPr>
+          <p:cNvPr id="6" name="Picture 5" descr="icon_mfg.png"/>
+          <p:cNvPicPr>
+            <a:picLocks noChangeAspect="1"/>
+          </p:cNvPicPr>
+          <p:nvPr/>
+        </p:nvPicPr>
+        <p:blipFill>
+          <a:blip r:embed="rId3"/>
+          <a:stretch>
+            <a:fillRect/>
+          </a:stretch>
+        </p:blipFill>
+        <p:spPr>
+          <a:xfrm>
+            <a:off x="10515600" y="640080"/>
+            <a:ext cx="731520" cy="731520"/>
+          </a:xfrm>
+          <a:prstGeom prst="rect">
+            <a:avLst/>
+          </a:prstGeom>
+        </p:spPr>
+      </p:pic>
+      <p:sp>
+        <p:nvSpPr>
+          <p:cNvPr id="7" name="TextBox 6"/>
+          <p:cNvSpPr txBox="1"/>
+          <p:nvPr/>
+        </p:nvSpPr>
+        <p:spPr>
+          <a:xfrm>
+            <a:off x="1097280" y="1645920"/>
+            <a:ext cx="9144000" cy="457200"/>
+          </a:xfrm>
+          <a:prstGeom prst="rect">
+            <a:avLst/>
+          </a:prstGeom>
+          <a:noFill/>
+        </p:spPr>
+        <p:txBody>
+          <a:bodyPr wrap="square">
+            <a:spAutoFit/>
+          </a:bodyPr>
+          <a:lstStyle/>
+          <a:p>
+            <a:pPr algn="l">
+              <a:defRPr sz="1400" b="0">
+                <a:solidFill>
+                  <a:srgbClr val="FFFFFF"/>
+                </a:solidFill>
+              </a:defRPr>
+            </a:pPr>
+            <a:r>
+              <a:t>Daily consumption: 530 panels/day at Alabama</a:t>
+            </a:r>
+          </a:p>
+        </p:txBody>
+      </p:sp>
+      <p:sp>
+        <p:nvSpPr>
+          <p:cNvPr id="8" name="TextBox 7"/>
+          <p:cNvSpPr txBox="1"/>
+          <p:nvPr/>
+        </p:nvSpPr>
+        <p:spPr>
+          <a:xfrm>
+            <a:off x="1097280" y="2286000"/>
+            <a:ext cx="9144000" cy="457200"/>
+          </a:xfrm>
+          <a:prstGeom prst="rect">
+            <a:avLst/>
+          </a:prstGeom>
+          <a:noFill/>
+        </p:spPr>
+        <p:txBody>
+          <a:bodyPr wrap="square">
+            <a:spAutoFit/>
+          </a:bodyPr>
+          <a:lstStyle/>
+          <a:p>
+            <a:pPr algn="l">
+              <a:defRPr sz="1400" b="0">
+                <a:solidFill>
+                  <a:srgbClr val="FFFFFF"/>
+                </a:solidFill>
+              </a:defRPr>
+            </a:pPr>
+            <a:r>
+              <a:t>Series 7 ramping — NextEra, Invenergy Q2 commitments</a:t>
+            </a:r>
+          </a:p>
+        </p:txBody>
+      </p:sp>
+      <p:sp>
+        <p:nvSpPr>
+          <p:cNvPr id="9" name="TextBox 8"/>
+          <p:cNvSpPr txBox="1"/>
+          <p:nvPr/>
+        </p:nvSpPr>
+        <p:spPr>
+          <a:xfrm>
+            <a:off x="1097280" y="2926080"/>
+            <a:ext cx="9144000" cy="457200"/>
+          </a:xfrm>
+          <a:prstGeom prst="rect">
+            <a:avLst/>
+          </a:prstGeom>
+          <a:noFill/>
+        </p:spPr>
+        <p:txBody>
+          <a:bodyPr wrap="square">
+            <a:spAutoFit/>
+          </a:bodyPr>
+          <a:lstStyle/>
+          <a:p>
+            <a:pPr algn="l">
+              <a:defRPr sz="1400" b="0">
+                <a:solidFill>
+                  <a:srgbClr val="FFFFFF"/>
+                </a:solidFill>
+              </a:defRPr>
+            </a:pPr>
+            <a:r>
+              <a:t>BOM: 1 glass/module, NO substitute exists</a:t>
+            </a:r>
+          </a:p>
+        </p:txBody>
+      </p:sp>
+      <p:sp>
+        <p:nvSpPr>
+          <p:cNvPr id="10" name="TextBox 9"/>
+          <p:cNvSpPr txBox="1"/>
+          <p:nvPr/>
+        </p:nvSpPr>
+        <p:spPr>
+          <a:xfrm>
+            <a:off x="1097280" y="3566159"/>
+            <a:ext cx="9144000" cy="457200"/>
+          </a:xfrm>
+          <a:prstGeom prst="rect">
+            <a:avLst/>
+          </a:prstGeom>
+          <a:noFill/>
+        </p:spPr>
+        <p:txBody>
+          <a:bodyPr wrap="square">
+            <a:spAutoFit/>
+          </a:bodyPr>
+          <a:lstStyle/>
+          <a:p>
+            <a:pPr algn="l">
+              <a:defRPr sz="1400" b="0">
+                <a:solidFill>
+                  <a:srgbClr val="FFFFFF"/>
+                </a:solidFill>
+              </a:defRPr>
+            </a:pPr>
+            <a:r>
+              <a:t>18 days coverage = zero buffer for disruption</a:t>
+            </a:r>
+          </a:p>
+        </p:txBody>
+      </p:sp>
+      <p:sp>
+        <p:nvSpPr>
+          <p:cNvPr id="11" name="TextBox 10"/>
+          <p:cNvSpPr txBox="1"/>
+          <p:nvPr/>
+        </p:nvSpPr>
+        <p:spPr>
+          <a:xfrm>
+            <a:off x="1097280" y="4206240"/>
+            <a:ext cx="9144000" cy="457200"/>
+          </a:xfrm>
+          <a:prstGeom prst="rect">
+            <a:avLst/>
+          </a:prstGeom>
+          <a:noFill/>
+        </p:spPr>
+        <p:txBody>
+          <a:bodyPr wrap="square">
+            <a:spAutoFit/>
+          </a:bodyPr>
+          <a:lstStyle/>
+          <a:p>
+            <a:pPr algn="l">
+              <a:defRPr sz="1400" b="0">
+                <a:solidFill>
+                  <a:srgbClr val="FFFFFF"/>
+                </a:solidFill>
+              </a:defRPr>
+            </a:pPr>
+            <a:r>
+              <a:t>Deliveries MUST arrive on time to maintain plan</a:t>
+            </a:r>
+          </a:p>
+        </p:txBody>
+      </p:sp>
+      <p:sp>
+        <p:nvSpPr>
+          <p:cNvPr id="12" name="Rounded Rectangle 11"/>
+          <p:cNvSpPr/>
+          <p:nvPr/>
+        </p:nvSpPr>
+        <p:spPr>
+          <a:xfrm>
+            <a:off x="731520" y="5029200"/>
+            <a:ext cx="10515600" cy="914400"/>
+          </a:xfrm>
+          <a:prstGeom prst="roundRect">
+            <a:avLst/>
+          </a:prstGeom>
+          <a:solidFill>
+            <a:srgbClr val="29B5E8"/>
+          </a:solidFill>
+          <a:ln>
+            <a:noFill/>
+          </a:ln>
+        </p:spPr>
+        <p:style>
+          <a:lnRef idx="1">
+            <a:schemeClr val="accent1"/>
+          </a:lnRef>
+          <a:fillRef idx="3">
+            <a:schemeClr val="accent1"/>
+          </a:fillRef>
+          <a:effectRef idx="2">
+            <a:schemeClr val="accent1"/>
+          </a:effectRef>
+          <a:fontRef idx="minor">
+            <a:schemeClr val="lt1"/>
+          </a:fontRef>
+        </p:style>
+        <p:txBody>
+          <a:bodyPr rtlCol="0" anchor="ctr"/>
+          <a:lstStyle/>
+          <a:p>
+            <a:pPr algn="ctr"/>
+          </a:p>
+        </p:txBody>
+      </p:sp>
+      <p:sp>
+        <p:nvSpPr>
+          <p:cNvPr id="13" name="TextBox 12"/>
+          <p:cNvSpPr txBox="1"/>
+          <p:nvPr/>
+        </p:nvSpPr>
+        <p:spPr>
+          <a:xfrm>
+            <a:off x="1188720" y="5120640"/>
+            <a:ext cx="9601200" cy="822960"/>
+          </a:xfrm>
+          <a:prstGeom prst="rect">
+            <a:avLst/>
+          </a:prstGeom>
+          <a:noFill/>
+        </p:spPr>
+        <p:txBody>
+          <a:bodyPr wrap="square">
+            <a:spAutoFit/>
+          </a:bodyPr>
+          <a:lstStyle/>
+          <a:p>
+            <a:pPr algn="l">
+              <a:defRPr sz="1400" b="1">
+                <a:solidFill>
+                  <a:srgbClr val="FFFFFF"/>
+                </a:solidFill>
+              </a:defRPr>
+            </a:pPr>
+            <a:r>
+              <a:t>Agent: "Tight but manageable if deliveries arrive on time."</a:t>
+            </a:r>
+          </a:p>
+        </p:txBody>
+      </p:sp>
+      <p:sp>
+        <p:nvSpPr>
+          <p:cNvPr id="14" name="TextBox 13"/>
+          <p:cNvSpPr txBox="1"/>
+          <p:nvPr/>
+        </p:nvSpPr>
+        <p:spPr>
+          <a:xfrm>
+            <a:off x="731520" y="6126480"/>
+            <a:ext cx="10058400" cy="365760"/>
+          </a:xfrm>
+          <a:prstGeom prst="rect">
+            <a:avLst/>
+          </a:prstGeom>
+          <a:noFill/>
+        </p:spPr>
+        <p:txBody>
+          <a:bodyPr wrap="square">
+            <a:spAutoFit/>
+          </a:bodyPr>
+          <a:lstStyle/>
+          <a:p>
+            <a:pPr algn="l">
+              <a:defRPr sz="1100" b="1">
+                <a:solidFill>
+                  <a:srgbClr val="E65100"/>
+                </a:solidFill>
+              </a:defRPr>
+            </a:pPr>
+            <a:r>
+              <a:t>Sets up WHY external layer is the unlock.</a:t>
             </a:r>
           </a:p>
         </p:txBody>
@@ -5350,7 +7062,7 @@
     <p:bg>
       <p:bgPr>
         <a:solidFill>
-          <a:srgbClr val="11273F"/>
+          <a:srgbClr val="05142B"/>
         </a:solidFill>
         <a:effectLst/>
       </p:bgPr>
@@ -5362,267 +7074,46 @@
         <p:nvPr/>
       </p:nvGrpSpPr>
       <p:grpSpPr/>
-      <p:sp>
-        <p:nvSpPr>
-          <p:cNvPr id="2" name="TextBox 1"/>
-          <p:cNvSpPr txBox="1"/>
-          <p:nvPr/>
-        </p:nvSpPr>
-        <p:spPr>
-          <a:xfrm>
-            <a:off x="914400" y="365760"/>
-            <a:ext cx="10058400" cy="731520"/>
-          </a:xfrm>
-          <a:prstGeom prst="rect">
-            <a:avLst/>
-          </a:prstGeom>
-          <a:noFill/>
-        </p:spPr>
-        <p:txBody>
-          <a:bodyPr wrap="square">
-            <a:spAutoFit/>
-          </a:bodyPr>
-          <a:lstStyle/>
-          <a:p>
-            <a:pPr algn="l">
-              <a:defRPr sz="3200" b="1">
-                <a:solidFill>
-                  <a:srgbClr val="E65100"/>
-                </a:solidFill>
-              </a:defRPr>
-            </a:pPr>
-            <a:r>
-              <a:t>Act 3 -- External Marketplace Signal</a:t>
-            </a:r>
-          </a:p>
-        </p:txBody>
-      </p:sp>
-      <p:sp>
-        <p:nvSpPr>
-          <p:cNvPr id="3" name="TextBox 2"/>
-          <p:cNvSpPr txBox="1"/>
-          <p:nvPr/>
-        </p:nvSpPr>
-        <p:spPr>
-          <a:xfrm>
-            <a:off x="914400" y="1005840"/>
-            <a:ext cx="10058400" cy="457200"/>
-          </a:xfrm>
-          <a:prstGeom prst="rect">
-            <a:avLst/>
-          </a:prstGeom>
-          <a:noFill/>
-        </p:spPr>
-        <p:txBody>
-          <a:bodyPr wrap="square">
-            <a:spAutoFit/>
-          </a:bodyPr>
-          <a:lstStyle/>
-          <a:p>
-            <a:pPr algn="l">
-              <a:defRPr sz="1600" b="1">
-                <a:solidFill>
-                  <a:srgbClr val="C62828"/>
-                </a:solidFill>
-              </a:defRPr>
-            </a:pPr>
-            <a:r>
-              <a:t>THE REVEAL -- Snowflake Marketplace trade data surfaces the risk</a:t>
-            </a:r>
-          </a:p>
-        </p:txBody>
-      </p:sp>
-      <p:sp>
-        <p:nvSpPr>
-          <p:cNvPr id="4" name="TextBox 3"/>
-          <p:cNvSpPr txBox="1"/>
-          <p:nvPr/>
-        </p:nvSpPr>
-        <p:spPr>
-          <a:xfrm>
-            <a:off x="1097280" y="1645920"/>
-            <a:ext cx="10058400" cy="457200"/>
-          </a:xfrm>
-          <a:prstGeom prst="rect">
-            <a:avLst/>
-          </a:prstGeom>
-          <a:noFill/>
-        </p:spPr>
-        <p:txBody>
-          <a:bodyPr wrap="square">
-            <a:spAutoFit/>
-          </a:bodyPr>
-          <a:lstStyle/>
-          <a:p>
-            <a:pPr algn="l">
-              <a:defRPr sz="1400" b="0">
-                <a:solidFill>
-                  <a:srgbClr val="FFFFFF"/>
-                </a:solidFill>
-              </a:defRPr>
-            </a:pPr>
-            <a:r>
-              <a:t>Export volume on ABC Glass lane: DOWN 19% (100 to 82)</a:t>
-            </a:r>
-          </a:p>
-        </p:txBody>
-      </p:sp>
-      <p:sp>
-        <p:nvSpPr>
-          <p:cNvPr id="5" name="TextBox 4"/>
-          <p:cNvSpPr txBox="1"/>
-          <p:nvPr/>
-        </p:nvSpPr>
-        <p:spPr>
-          <a:xfrm>
-            <a:off x="1097280" y="2103120"/>
-            <a:ext cx="10058400" cy="457200"/>
-          </a:xfrm>
-          <a:prstGeom prst="rect">
-            <a:avLst/>
-          </a:prstGeom>
-          <a:noFill/>
-        </p:spPr>
-        <p:txBody>
-          <a:bodyPr wrap="square">
-            <a:spAutoFit/>
-          </a:bodyPr>
-          <a:lstStyle/>
-          <a:p>
-            <a:pPr algn="l">
-              <a:defRPr sz="1400" b="0">
-                <a:solidFill>
-                  <a:srgbClr val="FFFFFF"/>
-                </a:solidFill>
-              </a:defRPr>
-            </a:pPr>
-            <a:r>
-              <a:t>Port dwell times at Laredo: UP 71% (25hr to 43hr)</a:t>
-            </a:r>
-          </a:p>
-        </p:txBody>
-      </p:sp>
-      <p:sp>
-        <p:nvSpPr>
-          <p:cNvPr id="6" name="TextBox 5"/>
-          <p:cNvSpPr txBox="1"/>
-          <p:nvPr/>
-        </p:nvSpPr>
-        <p:spPr>
-          <a:xfrm>
-            <a:off x="1097280" y="2560320"/>
-            <a:ext cx="10058400" cy="457200"/>
-          </a:xfrm>
-          <a:prstGeom prst="rect">
-            <a:avLst/>
-          </a:prstGeom>
-          <a:noFill/>
-        </p:spPr>
-        <p:txBody>
-          <a:bodyPr wrap="square">
-            <a:spAutoFit/>
-          </a:bodyPr>
-          <a:lstStyle/>
-          <a:p>
-            <a:pPr algn="l">
-              <a:defRPr sz="1400" b="0">
-                <a:solidFill>
-                  <a:srgbClr val="FFFFFF"/>
-                </a:solidFill>
-              </a:defRPr>
-            </a:pPr>
-            <a:r>
-              <a:t>Shipment delay rate: 0% baseline to 4.5% recent</a:t>
-            </a:r>
-          </a:p>
-        </p:txBody>
-      </p:sp>
-      <p:sp>
-        <p:nvSpPr>
-          <p:cNvPr id="7" name="TextBox 6"/>
-          <p:cNvSpPr txBox="1"/>
-          <p:nvPr/>
-        </p:nvSpPr>
-        <p:spPr>
-          <a:xfrm>
-            <a:off x="1097280" y="3017520"/>
-            <a:ext cx="10058400" cy="457200"/>
-          </a:xfrm>
-          <a:prstGeom prst="rect">
-            <a:avLst/>
-          </a:prstGeom>
-          <a:noFill/>
-        </p:spPr>
-        <p:txBody>
-          <a:bodyPr wrap="square">
-            <a:spAutoFit/>
-          </a:bodyPr>
-          <a:lstStyle/>
-          <a:p>
-            <a:pPr algn="l">
-              <a:defRPr sz="1400" b="0">
-                <a:solidFill>
-                  <a:srgbClr val="FFFFFF"/>
-                </a:solidFill>
-              </a:defRPr>
-            </a:pPr>
-            <a:r>
-              <a:t>Transit time increasing: 3.0d to 4.5d</a:t>
-            </a:r>
-          </a:p>
-        </p:txBody>
-      </p:sp>
-      <p:sp>
-        <p:nvSpPr>
-          <p:cNvPr id="8" name="TextBox 7"/>
-          <p:cNvSpPr txBox="1"/>
-          <p:nvPr/>
-        </p:nvSpPr>
-        <p:spPr>
-          <a:xfrm>
-            <a:off x="1097280" y="3474720"/>
-            <a:ext cx="10058400" cy="457200"/>
-          </a:xfrm>
-          <a:prstGeom prst="rect">
-            <a:avLst/>
-          </a:prstGeom>
-          <a:noFill/>
-        </p:spPr>
-        <p:txBody>
-          <a:bodyPr wrap="square">
-            <a:spAutoFit/>
-          </a:bodyPr>
-          <a:lstStyle/>
-          <a:p>
-            <a:pPr algn="l">
-              <a:defRPr sz="1400" b="0">
-                <a:solidFill>
-                  <a:srgbClr val="FFFFFF"/>
-                </a:solidFill>
-              </a:defRPr>
-            </a:pPr>
-            <a:r>
-              <a:t>Signal: Possible production slowdown at Monterrey</a:t>
-            </a:r>
-          </a:p>
-        </p:txBody>
-      </p:sp>
-      <p:sp>
-        <p:nvSpPr>
-          <p:cNvPr id="9" name="Rounded Rectangle 8"/>
+      <p:pic>
+        <p:nvPicPr>
+          <p:cNvPr id="2" name="Picture 1" descr="snowflake_logo_white.png"/>
+          <p:cNvPicPr>
+            <a:picLocks noChangeAspect="1"/>
+          </p:cNvPicPr>
+          <p:nvPr/>
+        </p:nvPicPr>
+        <p:blipFill>
+          <a:blip r:embed="rId2"/>
+          <a:stretch>
+            <a:fillRect/>
+          </a:stretch>
+        </p:blipFill>
+        <p:spPr>
+          <a:xfrm>
+            <a:off x="457200" y="274320"/>
+            <a:ext cx="457200" cy="457200"/>
+          </a:xfrm>
+          <a:prstGeom prst="rect">
+            <a:avLst/>
+          </a:prstGeom>
+        </p:spPr>
+      </p:pic>
+      <p:sp>
+        <p:nvSpPr>
+          <p:cNvPr id="3" name="Rectangle 2"/>
           <p:cNvSpPr/>
           <p:nvPr/>
         </p:nvSpPr>
         <p:spPr>
           <a:xfrm>
-            <a:off x="457200" y="4114800"/>
-            <a:ext cx="11247120" cy="1645920"/>
-          </a:xfrm>
-          <a:prstGeom prst="roundRect">
+            <a:off x="457200" y="6446520"/>
+            <a:ext cx="11247120" cy="27432"/>
+          </a:xfrm>
+          <a:prstGeom prst="rect">
             <a:avLst/>
           </a:prstGeom>
           <a:solidFill>
-            <a:srgbClr val="7F0000"/>
+            <a:srgbClr val="29B5E8"/>
           </a:solidFill>
           <a:ln>
             <a:noFill/>
@@ -5643,44 +7134,75 @@
           </a:fontRef>
         </p:style>
         <p:txBody>
+          <a:bodyPr rtlCol="0" anchor="ctr"/>
+          <a:lstStyle/>
+          <a:p>
+            <a:pPr algn="ctr"/>
+          </a:p>
+        </p:txBody>
+      </p:sp>
+      <p:sp>
+        <p:nvSpPr>
+          <p:cNvPr id="4" name="Rounded Rectangle 3"/>
+          <p:cNvSpPr/>
+          <p:nvPr/>
+        </p:nvSpPr>
+        <p:spPr>
+          <a:xfrm>
+            <a:off x="731520" y="640080"/>
+            <a:ext cx="1645920" cy="548640"/>
+          </a:xfrm>
+          <a:prstGeom prst="roundRect">
+            <a:avLst/>
+          </a:prstGeom>
+          <a:solidFill>
+            <a:srgbClr val="E65100"/>
+          </a:solidFill>
+          <a:ln>
+            <a:noFill/>
+          </a:ln>
+        </p:spPr>
+        <p:style>
+          <a:lnRef idx="1">
+            <a:schemeClr val="accent1"/>
+          </a:lnRef>
+          <a:fillRef idx="3">
+            <a:schemeClr val="accent1"/>
+          </a:fillRef>
+          <a:effectRef idx="2">
+            <a:schemeClr val="accent1"/>
+          </a:effectRef>
+          <a:fontRef idx="minor">
+            <a:schemeClr val="lt1"/>
+          </a:fontRef>
+        </p:style>
+        <p:txBody>
           <a:bodyPr rtlCol="0" anchor="ctr" wrap="square"/>
           <a:lstStyle/>
           <a:p>
             <a:pPr algn="ctr">
-              <a:defRPr sz="1400" b="1">
+              <a:defRPr sz="1600" b="1">
                 <a:solidFill>
                   <a:srgbClr val="FFFFFF"/>
                 </a:solidFill>
               </a:defRPr>
             </a:pPr>
             <a:r>
-              <a:t>Alabama has ELEVATED substrate-glass supply risk.</a:t>
-            </a:r>
-            <a:br/>
-            <a:r>
-              <a:t>Inventory: 18 days. Oracle shows deliveries on schedule, but</a:t>
-            </a:r>
-            <a:br/>
-            <a:r>
-              <a:t>external data shows deteriorating lane activity. A 2-week</a:t>
-            </a:r>
-            <a:br/>
-            <a:r>
-              <a:t>delivery disruption puts ~134 MW of production at risk.</a:t>
-            </a:r>
-          </a:p>
-        </p:txBody>
-      </p:sp>
-      <p:sp>
-        <p:nvSpPr>
-          <p:cNvPr id="10" name="TextBox 9"/>
+              <a:t>ACT 3</a:t>
+            </a:r>
+          </a:p>
+        </p:txBody>
+      </p:sp>
+      <p:sp>
+        <p:nvSpPr>
+          <p:cNvPr id="5" name="TextBox 4"/>
           <p:cNvSpPr txBox="1"/>
           <p:nvPr/>
         </p:nvSpPr>
         <p:spPr>
           <a:xfrm>
-            <a:off x="914400" y="6035040"/>
-            <a:ext cx="10058400" cy="548640"/>
+            <a:off x="2560320" y="640080"/>
+            <a:ext cx="8229600" cy="548640"/>
           </a:xfrm>
           <a:prstGeom prst="rect">
             <a:avLst/>
@@ -5694,14 +7216,794 @@
           <a:lstStyle/>
           <a:p>
             <a:pPr algn="l">
-              <a:defRPr sz="1200" b="1">
+              <a:defRPr sz="2400" b="1">
                 <a:solidFill>
                   <a:srgbClr val="E65100"/>
                 </a:solidFill>
               </a:defRPr>
             </a:pPr>
             <a:r>
-              <a:t>Flag: External shipping signal is simulated. In production = live Marketplace trade dataset.</a:t>
+              <a:t>External Signal — THE REVEAL</a:t>
+            </a:r>
+          </a:p>
+        </p:txBody>
+      </p:sp>
+      <p:pic>
+        <p:nvPicPr>
+          <p:cNvPr id="6" name="Picture 5" descr="icon_external.png"/>
+          <p:cNvPicPr>
+            <a:picLocks noChangeAspect="1"/>
+          </p:cNvPicPr>
+          <p:nvPr/>
+        </p:nvPicPr>
+        <p:blipFill>
+          <a:blip r:embed="rId3"/>
+          <a:stretch>
+            <a:fillRect/>
+          </a:stretch>
+        </p:blipFill>
+        <p:spPr>
+          <a:xfrm>
+            <a:off x="10515600" y="548640"/>
+            <a:ext cx="731520" cy="731520"/>
+          </a:xfrm>
+          <a:prstGeom prst="rect">
+            <a:avLst/>
+          </a:prstGeom>
+        </p:spPr>
+      </p:pic>
+      <p:sp>
+        <p:nvSpPr>
+          <p:cNvPr id="7" name="TextBox 6"/>
+          <p:cNvSpPr txBox="1"/>
+          <p:nvPr/>
+        </p:nvSpPr>
+        <p:spPr>
+          <a:xfrm>
+            <a:off x="731520" y="1280160"/>
+            <a:ext cx="10058400" cy="365760"/>
+          </a:xfrm>
+          <a:prstGeom prst="rect">
+            <a:avLst/>
+          </a:prstGeom>
+          <a:noFill/>
+        </p:spPr>
+        <p:txBody>
+          <a:bodyPr wrap="square">
+            <a:spAutoFit/>
+          </a:bodyPr>
+          <a:lstStyle/>
+          <a:p>
+            <a:pPr algn="l">
+              <a:defRPr sz="1300" b="0">
+                <a:solidFill>
+                  <a:srgbClr val="8E9EAB"/>
+                </a:solidFill>
+              </a:defRPr>
+            </a:pPr>
+            <a:r>
+              <a:t>Snowflake Marketplace trade/shipping data:</a:t>
+            </a:r>
+          </a:p>
+        </p:txBody>
+      </p:sp>
+      <p:sp>
+        <p:nvSpPr>
+          <p:cNvPr id="8" name="Rounded Rectangle 7"/>
+          <p:cNvSpPr/>
+          <p:nvPr/>
+        </p:nvSpPr>
+        <p:spPr>
+          <a:xfrm>
+            <a:off x="731520" y="1828800"/>
+            <a:ext cx="2560320" cy="1371600"/>
+          </a:xfrm>
+          <a:prstGeom prst="roundRect">
+            <a:avLst/>
+          </a:prstGeom>
+          <a:solidFill>
+            <a:srgbClr val="0A1E38"/>
+          </a:solidFill>
+          <a:ln w="25400">
+            <a:solidFill>
+              <a:srgbClr val="C62828"/>
+            </a:solidFill>
+          </a:ln>
+        </p:spPr>
+        <p:style>
+          <a:lnRef idx="1">
+            <a:schemeClr val="accent1"/>
+          </a:lnRef>
+          <a:fillRef idx="3">
+            <a:schemeClr val="accent1"/>
+          </a:fillRef>
+          <a:effectRef idx="2">
+            <a:schemeClr val="accent1"/>
+          </a:effectRef>
+          <a:fontRef idx="minor">
+            <a:schemeClr val="lt1"/>
+          </a:fontRef>
+        </p:style>
+        <p:txBody>
+          <a:bodyPr rtlCol="0" anchor="ctr"/>
+          <a:lstStyle/>
+          <a:p>
+            <a:pPr algn="ctr"/>
+          </a:p>
+        </p:txBody>
+      </p:sp>
+      <p:sp>
+        <p:nvSpPr>
+          <p:cNvPr id="9" name="TextBox 8"/>
+          <p:cNvSpPr txBox="1"/>
+          <p:nvPr/>
+        </p:nvSpPr>
+        <p:spPr>
+          <a:xfrm>
+            <a:off x="914400" y="1920240"/>
+            <a:ext cx="2194560" cy="274320"/>
+          </a:xfrm>
+          <a:prstGeom prst="rect">
+            <a:avLst/>
+          </a:prstGeom>
+          <a:noFill/>
+        </p:spPr>
+        <p:txBody>
+          <a:bodyPr wrap="square">
+            <a:spAutoFit/>
+          </a:bodyPr>
+          <a:lstStyle/>
+          <a:p>
+            <a:pPr algn="ctr">
+              <a:defRPr sz="1000" b="0">
+                <a:solidFill>
+                  <a:srgbClr val="8E9EAB"/>
+                </a:solidFill>
+              </a:defRPr>
+            </a:pPr>
+            <a:r>
+              <a:t>Export Volume</a:t>
+            </a:r>
+          </a:p>
+        </p:txBody>
+      </p:sp>
+      <p:sp>
+        <p:nvSpPr>
+          <p:cNvPr id="10" name="TextBox 9"/>
+          <p:cNvSpPr txBox="1"/>
+          <p:nvPr/>
+        </p:nvSpPr>
+        <p:spPr>
+          <a:xfrm>
+            <a:off x="914400" y="2286000"/>
+            <a:ext cx="2194560" cy="548640"/>
+          </a:xfrm>
+          <a:prstGeom prst="rect">
+            <a:avLst/>
+          </a:prstGeom>
+          <a:noFill/>
+        </p:spPr>
+        <p:txBody>
+          <a:bodyPr wrap="square">
+            <a:spAutoFit/>
+          </a:bodyPr>
+          <a:lstStyle/>
+          <a:p>
+            <a:pPr algn="ctr">
+              <a:defRPr sz="2000" b="1">
+                <a:solidFill>
+                  <a:srgbClr val="C62828"/>
+                </a:solidFill>
+              </a:defRPr>
+            </a:pPr>
+            <a:r>
+              <a:t>DOWN 19%</a:t>
+            </a:r>
+          </a:p>
+        </p:txBody>
+      </p:sp>
+      <p:sp>
+        <p:nvSpPr>
+          <p:cNvPr id="11" name="TextBox 10"/>
+          <p:cNvSpPr txBox="1"/>
+          <p:nvPr/>
+        </p:nvSpPr>
+        <p:spPr>
+          <a:xfrm>
+            <a:off x="914400" y="2834640"/>
+            <a:ext cx="2194560" cy="274320"/>
+          </a:xfrm>
+          <a:prstGeom prst="rect">
+            <a:avLst/>
+          </a:prstGeom>
+          <a:noFill/>
+        </p:spPr>
+        <p:txBody>
+          <a:bodyPr wrap="square">
+            <a:spAutoFit/>
+          </a:bodyPr>
+          <a:lstStyle/>
+          <a:p>
+            <a:pPr algn="ctr">
+              <a:defRPr sz="1000" b="0">
+                <a:solidFill>
+                  <a:srgbClr val="FFFFFF"/>
+                </a:solidFill>
+              </a:defRPr>
+            </a:pPr>
+            <a:r>
+              <a:t>100 → 82</a:t>
+            </a:r>
+          </a:p>
+        </p:txBody>
+      </p:sp>
+      <p:sp>
+        <p:nvSpPr>
+          <p:cNvPr id="12" name="Rounded Rectangle 11"/>
+          <p:cNvSpPr/>
+          <p:nvPr/>
+        </p:nvSpPr>
+        <p:spPr>
+          <a:xfrm>
+            <a:off x="3566160" y="1828800"/>
+            <a:ext cx="2560320" cy="1371600"/>
+          </a:xfrm>
+          <a:prstGeom prst="roundRect">
+            <a:avLst/>
+          </a:prstGeom>
+          <a:solidFill>
+            <a:srgbClr val="0A1E38"/>
+          </a:solidFill>
+          <a:ln w="25400">
+            <a:solidFill>
+              <a:srgbClr val="C62828"/>
+            </a:solidFill>
+          </a:ln>
+        </p:spPr>
+        <p:style>
+          <a:lnRef idx="1">
+            <a:schemeClr val="accent1"/>
+          </a:lnRef>
+          <a:fillRef idx="3">
+            <a:schemeClr val="accent1"/>
+          </a:fillRef>
+          <a:effectRef idx="2">
+            <a:schemeClr val="accent1"/>
+          </a:effectRef>
+          <a:fontRef idx="minor">
+            <a:schemeClr val="lt1"/>
+          </a:fontRef>
+        </p:style>
+        <p:txBody>
+          <a:bodyPr rtlCol="0" anchor="ctr"/>
+          <a:lstStyle/>
+          <a:p>
+            <a:pPr algn="ctr"/>
+          </a:p>
+        </p:txBody>
+      </p:sp>
+      <p:sp>
+        <p:nvSpPr>
+          <p:cNvPr id="13" name="TextBox 12"/>
+          <p:cNvSpPr txBox="1"/>
+          <p:nvPr/>
+        </p:nvSpPr>
+        <p:spPr>
+          <a:xfrm>
+            <a:off x="3749040" y="1920240"/>
+            <a:ext cx="2194560" cy="274320"/>
+          </a:xfrm>
+          <a:prstGeom prst="rect">
+            <a:avLst/>
+          </a:prstGeom>
+          <a:noFill/>
+        </p:spPr>
+        <p:txBody>
+          <a:bodyPr wrap="square">
+            <a:spAutoFit/>
+          </a:bodyPr>
+          <a:lstStyle/>
+          <a:p>
+            <a:pPr algn="ctr">
+              <a:defRPr sz="1000" b="0">
+                <a:solidFill>
+                  <a:srgbClr val="8E9EAB"/>
+                </a:solidFill>
+              </a:defRPr>
+            </a:pPr>
+            <a:r>
+              <a:t>Port Dwell</a:t>
+            </a:r>
+          </a:p>
+        </p:txBody>
+      </p:sp>
+      <p:sp>
+        <p:nvSpPr>
+          <p:cNvPr id="14" name="TextBox 13"/>
+          <p:cNvSpPr txBox="1"/>
+          <p:nvPr/>
+        </p:nvSpPr>
+        <p:spPr>
+          <a:xfrm>
+            <a:off x="3749040" y="2286000"/>
+            <a:ext cx="2194560" cy="548640"/>
+          </a:xfrm>
+          <a:prstGeom prst="rect">
+            <a:avLst/>
+          </a:prstGeom>
+          <a:noFill/>
+        </p:spPr>
+        <p:txBody>
+          <a:bodyPr wrap="square">
+            <a:spAutoFit/>
+          </a:bodyPr>
+          <a:lstStyle/>
+          <a:p>
+            <a:pPr algn="ctr">
+              <a:defRPr sz="2000" b="1">
+                <a:solidFill>
+                  <a:srgbClr val="C62828"/>
+                </a:solidFill>
+              </a:defRPr>
+            </a:pPr>
+            <a:r>
+              <a:t>UP 71%</a:t>
+            </a:r>
+          </a:p>
+        </p:txBody>
+      </p:sp>
+      <p:sp>
+        <p:nvSpPr>
+          <p:cNvPr id="15" name="TextBox 14"/>
+          <p:cNvSpPr txBox="1"/>
+          <p:nvPr/>
+        </p:nvSpPr>
+        <p:spPr>
+          <a:xfrm>
+            <a:off x="3749040" y="2834640"/>
+            <a:ext cx="2194560" cy="274320"/>
+          </a:xfrm>
+          <a:prstGeom prst="rect">
+            <a:avLst/>
+          </a:prstGeom>
+          <a:noFill/>
+        </p:spPr>
+        <p:txBody>
+          <a:bodyPr wrap="square">
+            <a:spAutoFit/>
+          </a:bodyPr>
+          <a:lstStyle/>
+          <a:p>
+            <a:pPr algn="ctr">
+              <a:defRPr sz="1000" b="0">
+                <a:solidFill>
+                  <a:srgbClr val="FFFFFF"/>
+                </a:solidFill>
+              </a:defRPr>
+            </a:pPr>
+            <a:r>
+              <a:t>25hr → 43hr</a:t>
+            </a:r>
+          </a:p>
+        </p:txBody>
+      </p:sp>
+      <p:sp>
+        <p:nvSpPr>
+          <p:cNvPr id="16" name="Rounded Rectangle 15"/>
+          <p:cNvSpPr/>
+          <p:nvPr/>
+        </p:nvSpPr>
+        <p:spPr>
+          <a:xfrm>
+            <a:off x="6400800" y="1828800"/>
+            <a:ext cx="2560320" cy="1371600"/>
+          </a:xfrm>
+          <a:prstGeom prst="roundRect">
+            <a:avLst/>
+          </a:prstGeom>
+          <a:solidFill>
+            <a:srgbClr val="0A1E38"/>
+          </a:solidFill>
+          <a:ln w="25400">
+            <a:solidFill>
+              <a:srgbClr val="E65100"/>
+            </a:solidFill>
+          </a:ln>
+        </p:spPr>
+        <p:style>
+          <a:lnRef idx="1">
+            <a:schemeClr val="accent1"/>
+          </a:lnRef>
+          <a:fillRef idx="3">
+            <a:schemeClr val="accent1"/>
+          </a:fillRef>
+          <a:effectRef idx="2">
+            <a:schemeClr val="accent1"/>
+          </a:effectRef>
+          <a:fontRef idx="minor">
+            <a:schemeClr val="lt1"/>
+          </a:fontRef>
+        </p:style>
+        <p:txBody>
+          <a:bodyPr rtlCol="0" anchor="ctr"/>
+          <a:lstStyle/>
+          <a:p>
+            <a:pPr algn="ctr"/>
+          </a:p>
+        </p:txBody>
+      </p:sp>
+      <p:sp>
+        <p:nvSpPr>
+          <p:cNvPr id="17" name="TextBox 16"/>
+          <p:cNvSpPr txBox="1"/>
+          <p:nvPr/>
+        </p:nvSpPr>
+        <p:spPr>
+          <a:xfrm>
+            <a:off x="6583680" y="1920240"/>
+            <a:ext cx="2194560" cy="274320"/>
+          </a:xfrm>
+          <a:prstGeom prst="rect">
+            <a:avLst/>
+          </a:prstGeom>
+          <a:noFill/>
+        </p:spPr>
+        <p:txBody>
+          <a:bodyPr wrap="square">
+            <a:spAutoFit/>
+          </a:bodyPr>
+          <a:lstStyle/>
+          <a:p>
+            <a:pPr algn="ctr">
+              <a:defRPr sz="1000" b="0">
+                <a:solidFill>
+                  <a:srgbClr val="8E9EAB"/>
+                </a:solidFill>
+              </a:defRPr>
+            </a:pPr>
+            <a:r>
+              <a:t>Delay Rate</a:t>
+            </a:r>
+          </a:p>
+        </p:txBody>
+      </p:sp>
+      <p:sp>
+        <p:nvSpPr>
+          <p:cNvPr id="18" name="TextBox 17"/>
+          <p:cNvSpPr txBox="1"/>
+          <p:nvPr/>
+        </p:nvSpPr>
+        <p:spPr>
+          <a:xfrm>
+            <a:off x="6583680" y="2286000"/>
+            <a:ext cx="2194560" cy="548640"/>
+          </a:xfrm>
+          <a:prstGeom prst="rect">
+            <a:avLst/>
+          </a:prstGeom>
+          <a:noFill/>
+        </p:spPr>
+        <p:txBody>
+          <a:bodyPr wrap="square">
+            <a:spAutoFit/>
+          </a:bodyPr>
+          <a:lstStyle/>
+          <a:p>
+            <a:pPr algn="ctr">
+              <a:defRPr sz="2000" b="1">
+                <a:solidFill>
+                  <a:srgbClr val="E65100"/>
+                </a:solidFill>
+              </a:defRPr>
+            </a:pPr>
+            <a:r>
+              <a:t>0% → 4.5%</a:t>
+            </a:r>
+          </a:p>
+        </p:txBody>
+      </p:sp>
+      <p:sp>
+        <p:nvSpPr>
+          <p:cNvPr id="19" name="TextBox 18"/>
+          <p:cNvSpPr txBox="1"/>
+          <p:nvPr/>
+        </p:nvSpPr>
+        <p:spPr>
+          <a:xfrm>
+            <a:off x="6583680" y="2834640"/>
+            <a:ext cx="2194560" cy="274320"/>
+          </a:xfrm>
+          <a:prstGeom prst="rect">
+            <a:avLst/>
+          </a:prstGeom>
+          <a:noFill/>
+        </p:spPr>
+        <p:txBody>
+          <a:bodyPr wrap="square">
+            <a:spAutoFit/>
+          </a:bodyPr>
+          <a:lstStyle/>
+          <a:p>
+            <a:pPr algn="ctr">
+              <a:defRPr sz="1000" b="0">
+                <a:solidFill>
+                  <a:srgbClr val="FFFFFF"/>
+                </a:solidFill>
+              </a:defRPr>
+            </a:pPr>
+            <a:r>
+              <a:t>Emerging</a:t>
+            </a:r>
+          </a:p>
+        </p:txBody>
+      </p:sp>
+      <p:sp>
+        <p:nvSpPr>
+          <p:cNvPr id="20" name="Rounded Rectangle 19"/>
+          <p:cNvSpPr/>
+          <p:nvPr/>
+        </p:nvSpPr>
+        <p:spPr>
+          <a:xfrm>
+            <a:off x="9235440" y="1828800"/>
+            <a:ext cx="2560320" cy="1371600"/>
+          </a:xfrm>
+          <a:prstGeom prst="roundRect">
+            <a:avLst/>
+          </a:prstGeom>
+          <a:solidFill>
+            <a:srgbClr val="0A1E38"/>
+          </a:solidFill>
+          <a:ln w="25400">
+            <a:solidFill>
+              <a:srgbClr val="E65100"/>
+            </a:solidFill>
+          </a:ln>
+        </p:spPr>
+        <p:style>
+          <a:lnRef idx="1">
+            <a:schemeClr val="accent1"/>
+          </a:lnRef>
+          <a:fillRef idx="3">
+            <a:schemeClr val="accent1"/>
+          </a:fillRef>
+          <a:effectRef idx="2">
+            <a:schemeClr val="accent1"/>
+          </a:effectRef>
+          <a:fontRef idx="minor">
+            <a:schemeClr val="lt1"/>
+          </a:fontRef>
+        </p:style>
+        <p:txBody>
+          <a:bodyPr rtlCol="0" anchor="ctr"/>
+          <a:lstStyle/>
+          <a:p>
+            <a:pPr algn="ctr"/>
+          </a:p>
+        </p:txBody>
+      </p:sp>
+      <p:sp>
+        <p:nvSpPr>
+          <p:cNvPr id="21" name="TextBox 20"/>
+          <p:cNvSpPr txBox="1"/>
+          <p:nvPr/>
+        </p:nvSpPr>
+        <p:spPr>
+          <a:xfrm>
+            <a:off x="9418320" y="1920240"/>
+            <a:ext cx="2194560" cy="274320"/>
+          </a:xfrm>
+          <a:prstGeom prst="rect">
+            <a:avLst/>
+          </a:prstGeom>
+          <a:noFill/>
+        </p:spPr>
+        <p:txBody>
+          <a:bodyPr wrap="square">
+            <a:spAutoFit/>
+          </a:bodyPr>
+          <a:lstStyle/>
+          <a:p>
+            <a:pPr algn="ctr">
+              <a:defRPr sz="1000" b="0">
+                <a:solidFill>
+                  <a:srgbClr val="8E9EAB"/>
+                </a:solidFill>
+              </a:defRPr>
+            </a:pPr>
+            <a:r>
+              <a:t>Transit</a:t>
+            </a:r>
+          </a:p>
+        </p:txBody>
+      </p:sp>
+      <p:sp>
+        <p:nvSpPr>
+          <p:cNvPr id="22" name="TextBox 21"/>
+          <p:cNvSpPr txBox="1"/>
+          <p:nvPr/>
+        </p:nvSpPr>
+        <p:spPr>
+          <a:xfrm>
+            <a:off x="9418320" y="2286000"/>
+            <a:ext cx="2194560" cy="548640"/>
+          </a:xfrm>
+          <a:prstGeom prst="rect">
+            <a:avLst/>
+          </a:prstGeom>
+          <a:noFill/>
+        </p:spPr>
+        <p:txBody>
+          <a:bodyPr wrap="square">
+            <a:spAutoFit/>
+          </a:bodyPr>
+          <a:lstStyle/>
+          <a:p>
+            <a:pPr algn="ctr">
+              <a:defRPr sz="2000" b="1">
+                <a:solidFill>
+                  <a:srgbClr val="E65100"/>
+                </a:solidFill>
+              </a:defRPr>
+            </a:pPr>
+            <a:r>
+              <a:t>UP 50%</a:t>
+            </a:r>
+          </a:p>
+        </p:txBody>
+      </p:sp>
+      <p:sp>
+        <p:nvSpPr>
+          <p:cNvPr id="23" name="TextBox 22"/>
+          <p:cNvSpPr txBox="1"/>
+          <p:nvPr/>
+        </p:nvSpPr>
+        <p:spPr>
+          <a:xfrm>
+            <a:off x="9418320" y="2834640"/>
+            <a:ext cx="2194560" cy="274320"/>
+          </a:xfrm>
+          <a:prstGeom prst="rect">
+            <a:avLst/>
+          </a:prstGeom>
+          <a:noFill/>
+        </p:spPr>
+        <p:txBody>
+          <a:bodyPr wrap="square">
+            <a:spAutoFit/>
+          </a:bodyPr>
+          <a:lstStyle/>
+          <a:p>
+            <a:pPr algn="ctr">
+              <a:defRPr sz="1000" b="0">
+                <a:solidFill>
+                  <a:srgbClr val="FFFFFF"/>
+                </a:solidFill>
+              </a:defRPr>
+            </a:pPr>
+            <a:r>
+              <a:t>3.0d → 4.5d</a:t>
+            </a:r>
+          </a:p>
+        </p:txBody>
+      </p:sp>
+      <p:sp>
+        <p:nvSpPr>
+          <p:cNvPr id="24" name="Rounded Rectangle 23"/>
+          <p:cNvSpPr/>
+          <p:nvPr/>
+        </p:nvSpPr>
+        <p:spPr>
+          <a:xfrm>
+            <a:off x="457200" y="3566160"/>
+            <a:ext cx="11247120" cy="1554480"/>
+          </a:xfrm>
+          <a:prstGeom prst="roundRect">
+            <a:avLst/>
+          </a:prstGeom>
+          <a:solidFill>
+            <a:srgbClr val="C62828"/>
+          </a:solidFill>
+          <a:ln>
+            <a:noFill/>
+          </a:ln>
+        </p:spPr>
+        <p:style>
+          <a:lnRef idx="1">
+            <a:schemeClr val="accent1"/>
+          </a:lnRef>
+          <a:fillRef idx="3">
+            <a:schemeClr val="accent1"/>
+          </a:fillRef>
+          <a:effectRef idx="2">
+            <a:schemeClr val="accent1"/>
+          </a:effectRef>
+          <a:fontRef idx="minor">
+            <a:schemeClr val="lt1"/>
+          </a:fontRef>
+        </p:style>
+        <p:txBody>
+          <a:bodyPr rtlCol="0" anchor="ctr"/>
+          <a:lstStyle/>
+          <a:p>
+            <a:pPr algn="ctr"/>
+          </a:p>
+        </p:txBody>
+      </p:sp>
+      <p:sp>
+        <p:nvSpPr>
+          <p:cNvPr id="25" name="TextBox 24"/>
+          <p:cNvSpPr txBox="1"/>
+          <p:nvPr/>
+        </p:nvSpPr>
+        <p:spPr>
+          <a:xfrm>
+            <a:off x="914400" y="3657600"/>
+            <a:ext cx="10515600" cy="1371600"/>
+          </a:xfrm>
+          <a:prstGeom prst="rect">
+            <a:avLst/>
+          </a:prstGeom>
+          <a:noFill/>
+        </p:spPr>
+        <p:txBody>
+          <a:bodyPr wrap="square">
+            <a:spAutoFit/>
+          </a:bodyPr>
+          <a:lstStyle/>
+          <a:p>
+            <a:pPr algn="l">
+              <a:defRPr sz="1400" b="1">
+                <a:solidFill>
+                  <a:srgbClr val="FFFFFF"/>
+                </a:solidFill>
+              </a:defRPr>
+            </a:pPr>
+            <a:r>
+              <a:t>Agent: "Alabama has ELEVATED substrate-glass supply risk.</a:t>
+            </a:r>
+            <a:br/>
+            <a:r>
+              <a:t>Inventory: 18 days. External data shows deteriorating lane.</a:t>
+            </a:r>
+            <a:br/>
+            <a:r>
+              <a:t>A 2-week disruption puts ~134 MW of production at risk."</a:t>
+            </a:r>
+          </a:p>
+        </p:txBody>
+      </p:sp>
+      <p:sp>
+        <p:nvSpPr>
+          <p:cNvPr id="26" name="TextBox 25"/>
+          <p:cNvSpPr txBox="1"/>
+          <p:nvPr/>
+        </p:nvSpPr>
+        <p:spPr>
+          <a:xfrm>
+            <a:off x="731520" y="5394960"/>
+            <a:ext cx="10058400" cy="640080"/>
+          </a:xfrm>
+          <a:prstGeom prst="rect">
+            <a:avLst/>
+          </a:prstGeom>
+          <a:noFill/>
+        </p:spPr>
+        <p:txBody>
+          <a:bodyPr wrap="square">
+            <a:spAutoFit/>
+          </a:bodyPr>
+          <a:lstStyle/>
+          <a:p>
+            <a:pPr algn="l">
+              <a:defRPr sz="1100" b="1">
+                <a:solidFill>
+                  <a:srgbClr val="E65100"/>
+                </a:solidFill>
+              </a:defRPr>
+            </a:pPr>
+            <a:r>
+              <a:t>DIRECTOR: "External signal is simulated. In production = live Marketplace dataset."</a:t>
             </a:r>
           </a:p>
         </p:txBody>
@@ -5720,7 +8022,7 @@
     <p:bg>
       <p:bgPr>
         <a:solidFill>
-          <a:srgbClr val="11273F"/>
+          <a:srgbClr val="05142B"/>
         </a:solidFill>
         <a:effectLst/>
       </p:bgPr>
@@ -5732,149 +8034,42 @@
         <p:nvPr/>
       </p:nvGrpSpPr>
       <p:grpSpPr/>
-      <p:sp>
-        <p:nvSpPr>
-          <p:cNvPr id="2" name="TextBox 1"/>
-          <p:cNvSpPr txBox="1"/>
-          <p:nvPr/>
-        </p:nvSpPr>
-        <p:spPr>
-          <a:xfrm>
-            <a:off x="914400" y="365760"/>
-            <a:ext cx="10058400" cy="731520"/>
-          </a:xfrm>
-          <a:prstGeom prst="rect">
-            <a:avLst/>
-          </a:prstGeom>
-          <a:noFill/>
-        </p:spPr>
-        <p:txBody>
-          <a:bodyPr wrap="square">
-            <a:spAutoFit/>
-          </a:bodyPr>
-          <a:lstStyle/>
-          <a:p>
-            <a:pPr algn="l">
-              <a:defRPr sz="3200" b="1">
-                <a:solidFill>
-                  <a:srgbClr val="6A1B9A"/>
-                </a:solidFill>
-              </a:defRPr>
-            </a:pPr>
-            <a:r>
-              <a:t>Act 4 -- Operate the Business</a:t>
-            </a:r>
-          </a:p>
-        </p:txBody>
-      </p:sp>
-      <p:sp>
-        <p:nvSpPr>
-          <p:cNvPr id="3" name="TextBox 2"/>
-          <p:cNvSpPr txBox="1"/>
-          <p:nvPr/>
-        </p:nvSpPr>
-        <p:spPr>
-          <a:xfrm>
-            <a:off x="914400" y="1097280"/>
-            <a:ext cx="10058400" cy="457200"/>
-          </a:xfrm>
-          <a:prstGeom prst="rect">
-            <a:avLst/>
-          </a:prstGeom>
-          <a:noFill/>
-        </p:spPr>
-        <p:txBody>
-          <a:bodyPr wrap="square">
-            <a:spAutoFit/>
-          </a:bodyPr>
-          <a:lstStyle/>
-          <a:p>
-            <a:pPr algn="l">
-              <a:defRPr sz="1800" b="1">
-                <a:solidFill>
-                  <a:srgbClr val="FFFFFF"/>
-                </a:solidFill>
-              </a:defRPr>
-            </a:pPr>
-            <a:r>
-              <a:t>What should we do about the substrate glass risk?</a:t>
-            </a:r>
-          </a:p>
-        </p:txBody>
-      </p:sp>
-      <p:sp>
-        <p:nvSpPr>
-          <p:cNvPr id="4" name="Rounded Rectangle 3"/>
+      <p:pic>
+        <p:nvPicPr>
+          <p:cNvPr id="2" name="Picture 1" descr="snowflake_logo_white.png"/>
+          <p:cNvPicPr>
+            <a:picLocks noChangeAspect="1"/>
+          </p:cNvPicPr>
+          <p:nvPr/>
+        </p:nvPicPr>
+        <p:blipFill>
+          <a:blip r:embed="rId2"/>
+          <a:stretch>
+            <a:fillRect/>
+          </a:stretch>
+        </p:blipFill>
+        <p:spPr>
+          <a:xfrm>
+            <a:off x="457200" y="274320"/>
+            <a:ext cx="457200" cy="457200"/>
+          </a:xfrm>
+          <a:prstGeom prst="rect">
+            <a:avLst/>
+          </a:prstGeom>
+        </p:spPr>
+      </p:pic>
+      <p:sp>
+        <p:nvSpPr>
+          <p:cNvPr id="3" name="Rectangle 2"/>
           <p:cNvSpPr/>
           <p:nvPr/>
         </p:nvSpPr>
         <p:spPr>
           <a:xfrm>
-            <a:off x="457200" y="2011680"/>
-            <a:ext cx="2651760" cy="1645920"/>
-          </a:xfrm>
-          <a:prstGeom prst="roundRect">
-            <a:avLst/>
-          </a:prstGeom>
-          <a:solidFill>
-            <a:srgbClr val="2E7D32"/>
-          </a:solidFill>
-          <a:ln>
-            <a:noFill/>
-          </a:ln>
-        </p:spPr>
-        <p:style>
-          <a:lnRef idx="1">
-            <a:schemeClr val="accent1"/>
-          </a:lnRef>
-          <a:fillRef idx="3">
-            <a:schemeClr val="accent1"/>
-          </a:fillRef>
-          <a:effectRef idx="2">
-            <a:schemeClr val="accent1"/>
-          </a:effectRef>
-          <a:fontRef idx="minor">
-            <a:schemeClr val="lt1"/>
-          </a:fontRef>
-        </p:style>
-        <p:txBody>
-          <a:bodyPr rtlCol="0" anchor="ctr" wrap="square"/>
-          <a:lstStyle/>
-          <a:p>
-            <a:pPr algn="ctr">
-              <a:defRPr sz="1200" b="1">
-                <a:solidFill>
-                  <a:srgbClr val="FFFFFF"/>
-                </a:solidFill>
-              </a:defRPr>
-            </a:pPr>
-            <a:r>
-              <a:t>1. Expedite</a:t>
-            </a:r>
-            <a:br/>
-            <a:br/>
-            <a:r>
-              <a:t>ABC Glass -- expedite</a:t>
-            </a:r>
-            <a:br/>
-            <a:r>
-              <a:t>in-transit shipments</a:t>
-            </a:r>
-          </a:p>
-        </p:txBody>
-      </p:sp>
-      <p:sp>
-        <p:nvSpPr>
-          <p:cNvPr id="5" name="Rounded Rectangle 4"/>
-          <p:cNvSpPr/>
-          <p:nvPr/>
-        </p:nvSpPr>
-        <p:spPr>
-          <a:xfrm>
-            <a:off x="3383280" y="2011680"/>
-            <a:ext cx="2651760" cy="1645920"/>
-          </a:xfrm>
-          <a:prstGeom prst="roundRect">
+            <a:off x="457200" y="6446520"/>
+            <a:ext cx="11247120" cy="27432"/>
+          </a:xfrm>
+          <a:prstGeom prst="rect">
             <a:avLst/>
           </a:prstGeom>
           <a:solidFill>
@@ -5899,102 +8094,23 @@
           </a:fontRef>
         </p:style>
         <p:txBody>
-          <a:bodyPr rtlCol="0" anchor="ctr" wrap="square"/>
-          <a:lstStyle/>
-          <a:p>
-            <a:pPr algn="ctr">
-              <a:defRPr sz="1200" b="1">
-                <a:solidFill>
-                  <a:srgbClr val="FFFFFF"/>
-                </a:solidFill>
-              </a:defRPr>
-            </a:pPr>
-            <a:r>
-              <a:t>2. Transfer</a:t>
-            </a:r>
-            <a:br/>
-            <a:br/>
-            <a:r>
-              <a:t>Ohio has 45d surplus.</a:t>
-            </a:r>
-            <a:br/>
-            <a:r>
-              <a:t>2-day transit to AL.</a:t>
-            </a:r>
-          </a:p>
-        </p:txBody>
-      </p:sp>
-      <p:sp>
-        <p:nvSpPr>
-          <p:cNvPr id="6" name="Rounded Rectangle 5"/>
+          <a:bodyPr rtlCol="0" anchor="ctr"/>
+          <a:lstStyle/>
+          <a:p>
+            <a:pPr algn="ctr"/>
+          </a:p>
+        </p:txBody>
+      </p:sp>
+      <p:sp>
+        <p:nvSpPr>
+          <p:cNvPr id="4" name="Rounded Rectangle 3"/>
           <p:cNvSpPr/>
           <p:nvPr/>
         </p:nvSpPr>
         <p:spPr>
           <a:xfrm>
-            <a:off x="6309360" y="2011680"/>
-            <a:ext cx="2651760" cy="1645920"/>
-          </a:xfrm>
-          <a:prstGeom prst="roundRect">
-            <a:avLst/>
-          </a:prstGeom>
-          <a:solidFill>
-            <a:srgbClr val="E65100"/>
-          </a:solidFill>
-          <a:ln>
-            <a:noFill/>
-          </a:ln>
-        </p:spPr>
-        <p:style>
-          <a:lnRef idx="1">
-            <a:schemeClr val="accent1"/>
-          </a:lnRef>
-          <a:fillRef idx="3">
-            <a:schemeClr val="accent1"/>
-          </a:fillRef>
-          <a:effectRef idx="2">
-            <a:schemeClr val="accent1"/>
-          </a:effectRef>
-          <a:fontRef idx="minor">
-            <a:schemeClr val="lt1"/>
-          </a:fontRef>
-        </p:style>
-        <p:txBody>
-          <a:bodyPr rtlCol="0" anchor="ctr" wrap="square"/>
-          <a:lstStyle/>
-          <a:p>
-            <a:pPr algn="ctr">
-              <a:defRPr sz="1200" b="1">
-                <a:solidFill>
-                  <a:srgbClr val="FFFFFF"/>
-                </a:solidFill>
-              </a:defRPr>
-            </a:pPr>
-            <a:r>
-              <a:t>3. Qualify Alt</a:t>
-            </a:r>
-            <a:br/>
-            <a:br/>
-            <a:r>
-              <a:t>Guardian Glass (MI)</a:t>
-            </a:r>
-            <a:br/>
-            <a:r>
-              <a:t>as emergency alt.</a:t>
-            </a:r>
-          </a:p>
-        </p:txBody>
-      </p:sp>
-      <p:sp>
-        <p:nvSpPr>
-          <p:cNvPr id="7" name="Rounded Rectangle 6"/>
-          <p:cNvSpPr/>
-          <p:nvPr/>
-        </p:nvSpPr>
-        <p:spPr>
-          <a:xfrm>
-            <a:off x="9235440" y="2011680"/>
-            <a:ext cx="2651760" cy="1645920"/>
+            <a:off x="731520" y="640080"/>
+            <a:ext cx="1645920" cy="548640"/>
           </a:xfrm>
           <a:prstGeom prst="roundRect">
             <a:avLst/>
@@ -6025,37 +8141,28 @@
           <a:lstStyle/>
           <a:p>
             <a:pPr algn="ctr">
-              <a:defRPr sz="1200" b="1">
+              <a:defRPr sz="1600" b="1">
                 <a:solidFill>
                   <a:srgbClr val="FFFFFF"/>
                 </a:solidFill>
               </a:defRPr>
             </a:pPr>
             <a:r>
-              <a:t>4. Prioritize</a:t>
-            </a:r>
-            <a:br/>
-            <a:br/>
-            <a:r>
-              <a:t>Protect NextEra Q2,</a:t>
-            </a:r>
-            <a:br/>
-            <a:r>
-              <a:t>Invenergy Magnolia.</a:t>
-            </a:r>
-          </a:p>
-        </p:txBody>
-      </p:sp>
-      <p:sp>
-        <p:nvSpPr>
-          <p:cNvPr id="8" name="TextBox 7"/>
+              <a:t>ACT 4</a:t>
+            </a:r>
+          </a:p>
+        </p:txBody>
+      </p:sp>
+      <p:sp>
+        <p:nvSpPr>
+          <p:cNvPr id="5" name="TextBox 4"/>
           <p:cNvSpPr txBox="1"/>
           <p:nvPr/>
         </p:nvSpPr>
         <p:spPr>
           <a:xfrm>
-            <a:off x="914400" y="4114800"/>
-            <a:ext cx="10058400" cy="914400"/>
+            <a:off x="2560320" y="640080"/>
+            <a:ext cx="8229600" cy="548640"/>
           </a:xfrm>
           <a:prstGeom prst="rect">
             <a:avLst/>
@@ -6069,18 +8176,664 @@
           <a:lstStyle/>
           <a:p>
             <a:pPr algn="l">
-              <a:defRPr sz="1400" b="0">
+              <a:defRPr sz="2400" b="1">
+                <a:solidFill>
+                  <a:srgbClr val="FFFFFF"/>
+                </a:solidFill>
+              </a:defRPr>
+            </a:pPr>
+            <a:r>
+              <a:t>Operate the Business</a:t>
+            </a:r>
+          </a:p>
+        </p:txBody>
+      </p:sp>
+      <p:pic>
+        <p:nvPicPr>
+          <p:cNvPr id="6" name="Picture 5" descr="icon_agent.png"/>
+          <p:cNvPicPr>
+            <a:picLocks noChangeAspect="1"/>
+          </p:cNvPicPr>
+          <p:nvPr/>
+        </p:nvPicPr>
+        <p:blipFill>
+          <a:blip r:embed="rId3"/>
+          <a:stretch>
+            <a:fillRect/>
+          </a:stretch>
+        </p:blipFill>
+        <p:spPr>
+          <a:xfrm>
+            <a:off x="10515600" y="548640"/>
+            <a:ext cx="731520" cy="731520"/>
+          </a:xfrm>
+          <a:prstGeom prst="rect">
+            <a:avLst/>
+          </a:prstGeom>
+        </p:spPr>
+      </p:pic>
+      <p:sp>
+        <p:nvSpPr>
+          <p:cNvPr id="7" name="TextBox 6"/>
+          <p:cNvSpPr txBox="1"/>
+          <p:nvPr/>
+        </p:nvSpPr>
+        <p:spPr>
+          <a:xfrm>
+            <a:off x="731520" y="1280160"/>
+            <a:ext cx="10058400" cy="365760"/>
+          </a:xfrm>
+          <a:prstGeom prst="rect">
+            <a:avLst/>
+          </a:prstGeom>
+          <a:noFill/>
+        </p:spPr>
+        <p:txBody>
+          <a:bodyPr wrap="square">
+            <a:spAutoFit/>
+          </a:bodyPr>
+          <a:lstStyle/>
+          <a:p>
+            <a:pPr algn="l">
+              <a:defRPr sz="1600" b="1">
+                <a:solidFill>
+                  <a:srgbClr val="FFFFFF"/>
+                </a:solidFill>
+              </a:defRPr>
+            </a:pPr>
+            <a:r>
+              <a:t>"What should we do about the substrate glass risk?"</a:t>
+            </a:r>
+          </a:p>
+        </p:txBody>
+      </p:sp>
+      <p:sp>
+        <p:nvSpPr>
+          <p:cNvPr id="8" name="Rounded Rectangle 7"/>
+          <p:cNvSpPr/>
+          <p:nvPr/>
+        </p:nvSpPr>
+        <p:spPr>
+          <a:xfrm>
+            <a:off x="548640" y="1828800"/>
+            <a:ext cx="2651760" cy="2011680"/>
+          </a:xfrm>
+          <a:prstGeom prst="roundRect">
+            <a:avLst/>
+          </a:prstGeom>
+          <a:solidFill>
+            <a:srgbClr val="0A1E38"/>
+          </a:solidFill>
+          <a:ln w="25400">
+            <a:solidFill>
+              <a:srgbClr val="2E7D32"/>
+            </a:solidFill>
+          </a:ln>
+        </p:spPr>
+        <p:style>
+          <a:lnRef idx="1">
+            <a:schemeClr val="accent1"/>
+          </a:lnRef>
+          <a:fillRef idx="3">
+            <a:schemeClr val="accent1"/>
+          </a:fillRef>
+          <a:effectRef idx="2">
+            <a:schemeClr val="accent1"/>
+          </a:effectRef>
+          <a:fontRef idx="minor">
+            <a:schemeClr val="lt1"/>
+          </a:fontRef>
+        </p:style>
+        <p:txBody>
+          <a:bodyPr rtlCol="0" anchor="ctr"/>
+          <a:lstStyle/>
+          <a:p>
+            <a:pPr algn="ctr"/>
+          </a:p>
+        </p:txBody>
+      </p:sp>
+      <p:sp>
+        <p:nvSpPr>
+          <p:cNvPr id="9" name="TextBox 8"/>
+          <p:cNvSpPr txBox="1"/>
+          <p:nvPr/>
+        </p:nvSpPr>
+        <p:spPr>
+          <a:xfrm>
+            <a:off x="731520" y="1920240"/>
+            <a:ext cx="2286000" cy="365760"/>
+          </a:xfrm>
+          <a:prstGeom prst="rect">
+            <a:avLst/>
+          </a:prstGeom>
+          <a:noFill/>
+        </p:spPr>
+        <p:txBody>
+          <a:bodyPr wrap="square">
+            <a:spAutoFit/>
+          </a:bodyPr>
+          <a:lstStyle/>
+          <a:p>
+            <a:pPr algn="l">
+              <a:defRPr sz="1300" b="1">
+                <a:solidFill>
+                  <a:srgbClr val="2E7D32"/>
+                </a:solidFill>
+              </a:defRPr>
+            </a:pPr>
+            <a:r>
+              <a:t>1. EXPEDITE</a:t>
+            </a:r>
+          </a:p>
+        </p:txBody>
+      </p:sp>
+      <p:sp>
+        <p:nvSpPr>
+          <p:cNvPr id="10" name="TextBox 9"/>
+          <p:cNvSpPr txBox="1"/>
+          <p:nvPr/>
+        </p:nvSpPr>
+        <p:spPr>
+          <a:xfrm>
+            <a:off x="731520" y="2377440"/>
+            <a:ext cx="2286000" cy="1371600"/>
+          </a:xfrm>
+          <a:prstGeom prst="rect">
+            <a:avLst/>
+          </a:prstGeom>
+          <a:noFill/>
+        </p:spPr>
+        <p:txBody>
+          <a:bodyPr wrap="square">
+            <a:spAutoFit/>
+          </a:bodyPr>
+          <a:lstStyle/>
+          <a:p>
+            <a:pPr algn="l">
+              <a:defRPr sz="1200" b="0">
+                <a:solidFill>
+                  <a:srgbClr val="FFFFFF"/>
+                </a:solidFill>
+              </a:defRPr>
+            </a:pPr>
+            <a:r>
+              <a:t>ABC Glass</a:t>
+            </a:r>
+            <a:br/>
+            <a:r>
+              <a:t>in-transit</a:t>
+            </a:r>
+          </a:p>
+        </p:txBody>
+      </p:sp>
+      <p:sp>
+        <p:nvSpPr>
+          <p:cNvPr id="11" name="Rounded Rectangle 10"/>
+          <p:cNvSpPr/>
+          <p:nvPr/>
+        </p:nvSpPr>
+        <p:spPr>
+          <a:xfrm>
+            <a:off x="3429000" y="1828800"/>
+            <a:ext cx="2651760" cy="2011680"/>
+          </a:xfrm>
+          <a:prstGeom prst="roundRect">
+            <a:avLst/>
+          </a:prstGeom>
+          <a:solidFill>
+            <a:srgbClr val="0A1E38"/>
+          </a:solidFill>
+          <a:ln w="25400">
+            <a:solidFill>
+              <a:srgbClr val="29B5E8"/>
+            </a:solidFill>
+          </a:ln>
+        </p:spPr>
+        <p:style>
+          <a:lnRef idx="1">
+            <a:schemeClr val="accent1"/>
+          </a:lnRef>
+          <a:fillRef idx="3">
+            <a:schemeClr val="accent1"/>
+          </a:fillRef>
+          <a:effectRef idx="2">
+            <a:schemeClr val="accent1"/>
+          </a:effectRef>
+          <a:fontRef idx="minor">
+            <a:schemeClr val="lt1"/>
+          </a:fontRef>
+        </p:style>
+        <p:txBody>
+          <a:bodyPr rtlCol="0" anchor="ctr"/>
+          <a:lstStyle/>
+          <a:p>
+            <a:pPr algn="ctr"/>
+          </a:p>
+        </p:txBody>
+      </p:sp>
+      <p:sp>
+        <p:nvSpPr>
+          <p:cNvPr id="12" name="TextBox 11"/>
+          <p:cNvSpPr txBox="1"/>
+          <p:nvPr/>
+        </p:nvSpPr>
+        <p:spPr>
+          <a:xfrm>
+            <a:off x="3611880" y="1920240"/>
+            <a:ext cx="2286000" cy="365760"/>
+          </a:xfrm>
+          <a:prstGeom prst="rect">
+            <a:avLst/>
+          </a:prstGeom>
+          <a:noFill/>
+        </p:spPr>
+        <p:txBody>
+          <a:bodyPr wrap="square">
+            <a:spAutoFit/>
+          </a:bodyPr>
+          <a:lstStyle/>
+          <a:p>
+            <a:pPr algn="l">
+              <a:defRPr sz="1300" b="1">
+                <a:solidFill>
+                  <a:srgbClr val="29B5E8"/>
+                </a:solidFill>
+              </a:defRPr>
+            </a:pPr>
+            <a:r>
+              <a:t>2. TRANSFER</a:t>
+            </a:r>
+          </a:p>
+        </p:txBody>
+      </p:sp>
+      <p:sp>
+        <p:nvSpPr>
+          <p:cNvPr id="13" name="TextBox 12"/>
+          <p:cNvSpPr txBox="1"/>
+          <p:nvPr/>
+        </p:nvSpPr>
+        <p:spPr>
+          <a:xfrm>
+            <a:off x="3611880" y="2377440"/>
+            <a:ext cx="2286000" cy="1371600"/>
+          </a:xfrm>
+          <a:prstGeom prst="rect">
+            <a:avLst/>
+          </a:prstGeom>
+          <a:noFill/>
+        </p:spPr>
+        <p:txBody>
+          <a:bodyPr wrap="square">
+            <a:spAutoFit/>
+          </a:bodyPr>
+          <a:lstStyle/>
+          <a:p>
+            <a:pPr algn="l">
+              <a:defRPr sz="1200" b="0">
+                <a:solidFill>
+                  <a:srgbClr val="FFFFFF"/>
+                </a:solidFill>
+              </a:defRPr>
+            </a:pPr>
+            <a:r>
+              <a:t>Ohio → Alabama</a:t>
+            </a:r>
+            <a:br/>
+            <a:r>
+              <a:t>45d surplus, 2d</a:t>
+            </a:r>
+          </a:p>
+        </p:txBody>
+      </p:sp>
+      <p:sp>
+        <p:nvSpPr>
+          <p:cNvPr id="14" name="Rounded Rectangle 13"/>
+          <p:cNvSpPr/>
+          <p:nvPr/>
+        </p:nvSpPr>
+        <p:spPr>
+          <a:xfrm>
+            <a:off x="6309359" y="1828800"/>
+            <a:ext cx="2651760" cy="2011680"/>
+          </a:xfrm>
+          <a:prstGeom prst="roundRect">
+            <a:avLst/>
+          </a:prstGeom>
+          <a:solidFill>
+            <a:srgbClr val="0A1E38"/>
+          </a:solidFill>
+          <a:ln w="25400">
+            <a:solidFill>
+              <a:srgbClr val="E65100"/>
+            </a:solidFill>
+          </a:ln>
+        </p:spPr>
+        <p:style>
+          <a:lnRef idx="1">
+            <a:schemeClr val="accent1"/>
+          </a:lnRef>
+          <a:fillRef idx="3">
+            <a:schemeClr val="accent1"/>
+          </a:fillRef>
+          <a:effectRef idx="2">
+            <a:schemeClr val="accent1"/>
+          </a:effectRef>
+          <a:fontRef idx="minor">
+            <a:schemeClr val="lt1"/>
+          </a:fontRef>
+        </p:style>
+        <p:txBody>
+          <a:bodyPr rtlCol="0" anchor="ctr"/>
+          <a:lstStyle/>
+          <a:p>
+            <a:pPr algn="ctr"/>
+          </a:p>
+        </p:txBody>
+      </p:sp>
+      <p:sp>
+        <p:nvSpPr>
+          <p:cNvPr id="15" name="TextBox 14"/>
+          <p:cNvSpPr txBox="1"/>
+          <p:nvPr/>
+        </p:nvSpPr>
+        <p:spPr>
+          <a:xfrm>
+            <a:off x="6492240" y="1920240"/>
+            <a:ext cx="2286000" cy="365760"/>
+          </a:xfrm>
+          <a:prstGeom prst="rect">
+            <a:avLst/>
+          </a:prstGeom>
+          <a:noFill/>
+        </p:spPr>
+        <p:txBody>
+          <a:bodyPr wrap="square">
+            <a:spAutoFit/>
+          </a:bodyPr>
+          <a:lstStyle/>
+          <a:p>
+            <a:pPr algn="l">
+              <a:defRPr sz="1300" b="1">
                 <a:solidFill>
                   <a:srgbClr val="E65100"/>
                 </a:solidFill>
               </a:defRPr>
             </a:pPr>
             <a:r>
-              <a:t>Close: "Because the data and its context stay in Snowflake, you choose the model,</a:t>
+              <a:t>3. QUALIFY ALT</a:t>
+            </a:r>
+          </a:p>
+        </p:txBody>
+      </p:sp>
+      <p:sp>
+        <p:nvSpPr>
+          <p:cNvPr id="16" name="TextBox 15"/>
+          <p:cNvSpPr txBox="1"/>
+          <p:nvPr/>
+        </p:nvSpPr>
+        <p:spPr>
+          <a:xfrm>
+            <a:off x="6492240" y="2377440"/>
+            <a:ext cx="2286000" cy="1371600"/>
+          </a:xfrm>
+          <a:prstGeom prst="rect">
+            <a:avLst/>
+          </a:prstGeom>
+          <a:noFill/>
+        </p:spPr>
+        <p:txBody>
+          <a:bodyPr wrap="square">
+            <a:spAutoFit/>
+          </a:bodyPr>
+          <a:lstStyle/>
+          <a:p>
+            <a:pPr algn="l">
+              <a:defRPr sz="1200" b="0">
+                <a:solidFill>
+                  <a:srgbClr val="FFFFFF"/>
+                </a:solidFill>
+              </a:defRPr>
+            </a:pPr>
+            <a:r>
+              <a:t>Guardian Glass</a:t>
             </a:r>
             <a:br/>
             <a:r>
-              <a:t>control the cost, and keep a human in the loop on the high-dollar calls."</a:t>
+              <a:t>Emergency</a:t>
+            </a:r>
+          </a:p>
+        </p:txBody>
+      </p:sp>
+      <p:sp>
+        <p:nvSpPr>
+          <p:cNvPr id="17" name="Rounded Rectangle 16"/>
+          <p:cNvSpPr/>
+          <p:nvPr/>
+        </p:nvSpPr>
+        <p:spPr>
+          <a:xfrm>
+            <a:off x="9189719" y="1828800"/>
+            <a:ext cx="2651760" cy="2011680"/>
+          </a:xfrm>
+          <a:prstGeom prst="roundRect">
+            <a:avLst/>
+          </a:prstGeom>
+          <a:solidFill>
+            <a:srgbClr val="0A1E38"/>
+          </a:solidFill>
+          <a:ln w="25400">
+            <a:solidFill>
+              <a:srgbClr val="6A1B9A"/>
+            </a:solidFill>
+          </a:ln>
+        </p:spPr>
+        <p:style>
+          <a:lnRef idx="1">
+            <a:schemeClr val="accent1"/>
+          </a:lnRef>
+          <a:fillRef idx="3">
+            <a:schemeClr val="accent1"/>
+          </a:fillRef>
+          <a:effectRef idx="2">
+            <a:schemeClr val="accent1"/>
+          </a:effectRef>
+          <a:fontRef idx="minor">
+            <a:schemeClr val="lt1"/>
+          </a:fontRef>
+        </p:style>
+        <p:txBody>
+          <a:bodyPr rtlCol="0" anchor="ctr"/>
+          <a:lstStyle/>
+          <a:p>
+            <a:pPr algn="ctr"/>
+          </a:p>
+        </p:txBody>
+      </p:sp>
+      <p:sp>
+        <p:nvSpPr>
+          <p:cNvPr id="18" name="TextBox 17"/>
+          <p:cNvSpPr txBox="1"/>
+          <p:nvPr/>
+        </p:nvSpPr>
+        <p:spPr>
+          <a:xfrm>
+            <a:off x="9372600" y="1920240"/>
+            <a:ext cx="2286000" cy="365760"/>
+          </a:xfrm>
+          <a:prstGeom prst="rect">
+            <a:avLst/>
+          </a:prstGeom>
+          <a:noFill/>
+        </p:spPr>
+        <p:txBody>
+          <a:bodyPr wrap="square">
+            <a:spAutoFit/>
+          </a:bodyPr>
+          <a:lstStyle/>
+          <a:p>
+            <a:pPr algn="l">
+              <a:defRPr sz="1300" b="1">
+                <a:solidFill>
+                  <a:srgbClr val="6A1B9A"/>
+                </a:solidFill>
+              </a:defRPr>
+            </a:pPr>
+            <a:r>
+              <a:t>4. PRIORITIZE</a:t>
+            </a:r>
+          </a:p>
+        </p:txBody>
+      </p:sp>
+      <p:sp>
+        <p:nvSpPr>
+          <p:cNvPr id="19" name="TextBox 18"/>
+          <p:cNvSpPr txBox="1"/>
+          <p:nvPr/>
+        </p:nvSpPr>
+        <p:spPr>
+          <a:xfrm>
+            <a:off x="9372600" y="2377440"/>
+            <a:ext cx="2286000" cy="1371600"/>
+          </a:xfrm>
+          <a:prstGeom prst="rect">
+            <a:avLst/>
+          </a:prstGeom>
+          <a:noFill/>
+        </p:spPr>
+        <p:txBody>
+          <a:bodyPr wrap="square">
+            <a:spAutoFit/>
+          </a:bodyPr>
+          <a:lstStyle/>
+          <a:p>
+            <a:pPr algn="l">
+              <a:defRPr sz="1200" b="0">
+                <a:solidFill>
+                  <a:srgbClr val="FFFFFF"/>
+                </a:solidFill>
+              </a:defRPr>
+            </a:pPr>
+            <a:r>
+              <a:t>NextEra Q2</a:t>
+            </a:r>
+            <a:br/>
+            <a:r>
+              <a:t>Invenergy</a:t>
+            </a:r>
+          </a:p>
+        </p:txBody>
+      </p:sp>
+      <p:sp>
+        <p:nvSpPr>
+          <p:cNvPr id="20" name="Rounded Rectangle 19"/>
+          <p:cNvSpPr/>
+          <p:nvPr/>
+        </p:nvSpPr>
+        <p:spPr>
+          <a:xfrm>
+            <a:off x="731520" y="4206240"/>
+            <a:ext cx="10515600" cy="914400"/>
+          </a:xfrm>
+          <a:prstGeom prst="roundRect">
+            <a:avLst/>
+          </a:prstGeom>
+          <a:solidFill>
+            <a:srgbClr val="0A1E38"/>
+          </a:solidFill>
+          <a:ln w="25400">
+            <a:solidFill>
+              <a:srgbClr val="29B5E8"/>
+            </a:solidFill>
+          </a:ln>
+        </p:spPr>
+        <p:style>
+          <a:lnRef idx="1">
+            <a:schemeClr val="accent1"/>
+          </a:lnRef>
+          <a:fillRef idx="3">
+            <a:schemeClr val="accent1"/>
+          </a:fillRef>
+          <a:effectRef idx="2">
+            <a:schemeClr val="accent1"/>
+          </a:effectRef>
+          <a:fontRef idx="minor">
+            <a:schemeClr val="lt1"/>
+          </a:fontRef>
+        </p:style>
+        <p:txBody>
+          <a:bodyPr rtlCol="0" anchor="ctr"/>
+          <a:lstStyle/>
+          <a:p>
+            <a:pPr algn="ctr"/>
+          </a:p>
+        </p:txBody>
+      </p:sp>
+      <p:sp>
+        <p:nvSpPr>
+          <p:cNvPr id="21" name="TextBox 20"/>
+          <p:cNvSpPr txBox="1"/>
+          <p:nvPr/>
+        </p:nvSpPr>
+        <p:spPr>
+          <a:xfrm>
+            <a:off x="1188720" y="4297680"/>
+            <a:ext cx="9601200" cy="822960"/>
+          </a:xfrm>
+          <a:prstGeom prst="rect">
+            <a:avLst/>
+          </a:prstGeom>
+          <a:noFill/>
+        </p:spPr>
+        <p:txBody>
+          <a:bodyPr wrap="square">
+            <a:spAutoFit/>
+          </a:bodyPr>
+          <a:lstStyle/>
+          <a:p>
+            <a:pPr algn="l">
+              <a:defRPr sz="1400" b="1">
+                <a:solidFill>
+                  <a:srgbClr val="29B5E8"/>
+                </a:solidFill>
+              </a:defRPr>
+            </a:pPr>
+            <a:r>
+              <a:t>CLOSE: "You choose the model, control the cost, human in the loop."</a:t>
+            </a:r>
+          </a:p>
+        </p:txBody>
+      </p:sp>
+      <p:sp>
+        <p:nvSpPr>
+          <p:cNvPr id="22" name="TextBox 21"/>
+          <p:cNvSpPr txBox="1"/>
+          <p:nvPr/>
+        </p:nvSpPr>
+        <p:spPr>
+          <a:xfrm>
+            <a:off x="731520" y="5303520"/>
+            <a:ext cx="10058400" cy="365760"/>
+          </a:xfrm>
+          <a:prstGeom prst="rect">
+            <a:avLst/>
+          </a:prstGeom>
+          <a:noFill/>
+        </p:spPr>
+        <p:txBody>
+          <a:bodyPr wrap="square">
+            <a:spAutoFit/>
+          </a:bodyPr>
+          <a:lstStyle/>
+          <a:p>
+            <a:pPr algn="l">
+              <a:defRPr sz="1100" b="1">
+                <a:solidFill>
+                  <a:srgbClr val="E65100"/>
+                </a:solidFill>
+              </a:defRPr>
+            </a:pPr>
+            <a:r>
+              <a:t>AI that operates the business, not just answers questions.</a:t>
             </a:r>
           </a:p>
         </p:txBody>
@@ -6099,7 +8852,7 @@
     <p:bg>
       <p:bgPr>
         <a:solidFill>
-          <a:srgbClr val="11273F"/>
+          <a:srgbClr val="05142B"/>
         </a:solidFill>
         <a:effectLst/>
       </p:bgPr>
@@ -6111,16 +8864,83 @@
         <p:nvPr/>
       </p:nvGrpSpPr>
       <p:grpSpPr/>
-      <p:sp>
-        <p:nvSpPr>
-          <p:cNvPr id="2" name="TextBox 1"/>
+      <p:pic>
+        <p:nvPicPr>
+          <p:cNvPr id="2" name="Picture 1" descr="snowflake_logo_white.png"/>
+          <p:cNvPicPr>
+            <a:picLocks noChangeAspect="1"/>
+          </p:cNvPicPr>
+          <p:nvPr/>
+        </p:nvPicPr>
+        <p:blipFill>
+          <a:blip r:embed="rId2"/>
+          <a:stretch>
+            <a:fillRect/>
+          </a:stretch>
+        </p:blipFill>
+        <p:spPr>
+          <a:xfrm>
+            <a:off x="457200" y="274320"/>
+            <a:ext cx="457200" cy="457200"/>
+          </a:xfrm>
+          <a:prstGeom prst="rect">
+            <a:avLst/>
+          </a:prstGeom>
+        </p:spPr>
+      </p:pic>
+      <p:sp>
+        <p:nvSpPr>
+          <p:cNvPr id="3" name="Rectangle 2"/>
+          <p:cNvSpPr/>
+          <p:nvPr/>
+        </p:nvSpPr>
+        <p:spPr>
+          <a:xfrm>
+            <a:off x="457200" y="6446520"/>
+            <a:ext cx="11247120" cy="27432"/>
+          </a:xfrm>
+          <a:prstGeom prst="rect">
+            <a:avLst/>
+          </a:prstGeom>
+          <a:solidFill>
+            <a:srgbClr val="29B5E8"/>
+          </a:solidFill>
+          <a:ln>
+            <a:noFill/>
+          </a:ln>
+        </p:spPr>
+        <p:style>
+          <a:lnRef idx="1">
+            <a:schemeClr val="accent1"/>
+          </a:lnRef>
+          <a:fillRef idx="3">
+            <a:schemeClr val="accent1"/>
+          </a:fillRef>
+          <a:effectRef idx="2">
+            <a:schemeClr val="accent1"/>
+          </a:effectRef>
+          <a:fontRef idx="minor">
+            <a:schemeClr val="lt1"/>
+          </a:fontRef>
+        </p:style>
+        <p:txBody>
+          <a:bodyPr rtlCol="0" anchor="ctr"/>
+          <a:lstStyle/>
+          <a:p>
+            <a:pPr algn="ctr"/>
+          </a:p>
+        </p:txBody>
+      </p:sp>
+      <p:sp>
+        <p:nvSpPr>
+          <p:cNvPr id="4" name="TextBox 3"/>
           <p:cNvSpPr txBox="1"/>
           <p:nvPr/>
         </p:nvSpPr>
         <p:spPr>
           <a:xfrm>
-            <a:off x="914400" y="457200"/>
-            <a:ext cx="10058400" cy="731520"/>
+            <a:off x="731520" y="731520"/>
+            <a:ext cx="10058400" cy="548640"/>
           </a:xfrm>
           <a:prstGeom prst="rect">
             <a:avLst/>
@@ -6141,21 +8961,66 @@
               </a:defRPr>
             </a:pPr>
             <a:r>
-              <a:t>Impact Quantification</a:t>
-            </a:r>
-          </a:p>
-        </p:txBody>
-      </p:sp>
-      <p:sp>
-        <p:nvSpPr>
-          <p:cNvPr id="3" name="TextBox 2"/>
+              <a:t>Impact — Land It in MW</a:t>
+            </a:r>
+          </a:p>
+        </p:txBody>
+      </p:sp>
+      <p:sp>
+        <p:nvSpPr>
+          <p:cNvPr id="5" name="Rounded Rectangle 4"/>
+          <p:cNvSpPr/>
+          <p:nvPr/>
+        </p:nvSpPr>
+        <p:spPr>
+          <a:xfrm>
+            <a:off x="731520" y="1554480"/>
+            <a:ext cx="5029200" cy="3200400"/>
+          </a:xfrm>
+          <a:prstGeom prst="roundRect">
+            <a:avLst/>
+          </a:prstGeom>
+          <a:solidFill>
+            <a:srgbClr val="0A1E38"/>
+          </a:solidFill>
+          <a:ln w="25400">
+            <a:solidFill>
+              <a:srgbClr val="C62828"/>
+            </a:solidFill>
+          </a:ln>
+        </p:spPr>
+        <p:style>
+          <a:lnRef idx="1">
+            <a:schemeClr val="accent1"/>
+          </a:lnRef>
+          <a:fillRef idx="3">
+            <a:schemeClr val="accent1"/>
+          </a:fillRef>
+          <a:effectRef idx="2">
+            <a:schemeClr val="accent1"/>
+          </a:effectRef>
+          <a:fontRef idx="minor">
+            <a:schemeClr val="lt1"/>
+          </a:fontRef>
+        </p:style>
+        <p:txBody>
+          <a:bodyPr rtlCol="0" anchor="ctr"/>
+          <a:lstStyle/>
+          <a:p>
+            <a:pPr algn="ctr"/>
+          </a:p>
+        </p:txBody>
+      </p:sp>
+      <p:sp>
+        <p:nvSpPr>
+          <p:cNvPr id="6" name="TextBox 5"/>
           <p:cNvSpPr txBox="1"/>
           <p:nvPr/>
         </p:nvSpPr>
         <p:spPr>
           <a:xfrm>
-            <a:off x="914400" y="1645920"/>
-            <a:ext cx="10058400" cy="4114800"/>
+            <a:off x="1188720" y="1645920"/>
+            <a:ext cx="4114800" cy="365760"/>
           </a:xfrm>
           <a:prstGeom prst="rect">
             <a:avLst/>
@@ -6168,44 +9033,226 @@
           </a:bodyPr>
           <a:lstStyle/>
           <a:p>
+            <a:pPr algn="ctr">
+              <a:defRPr sz="1300" b="0">
+                <a:solidFill>
+                  <a:srgbClr val="8E9EAB"/>
+                </a:solidFill>
+              </a:defRPr>
+            </a:pPr>
+            <a:r>
+              <a:t>Production at Risk</a:t>
+            </a:r>
+          </a:p>
+        </p:txBody>
+      </p:sp>
+      <p:sp>
+        <p:nvSpPr>
+          <p:cNvPr id="7" name="TextBox 6"/>
+          <p:cNvSpPr txBox="1"/>
+          <p:nvPr/>
+        </p:nvSpPr>
+        <p:spPr>
+          <a:xfrm>
+            <a:off x="1188720" y="2103120"/>
+            <a:ext cx="4114800" cy="1097280"/>
+          </a:xfrm>
+          <a:prstGeom prst="rect">
+            <a:avLst/>
+          </a:prstGeom>
+          <a:noFill/>
+        </p:spPr>
+        <p:txBody>
+          <a:bodyPr wrap="square">
+            <a:spAutoFit/>
+          </a:bodyPr>
+          <a:lstStyle/>
+          <a:p>
+            <a:pPr algn="ctr">
+              <a:defRPr sz="5600" b="1">
+                <a:solidFill>
+                  <a:srgbClr val="C62828"/>
+                </a:solidFill>
+              </a:defRPr>
+            </a:pPr>
+            <a:r>
+              <a:t>~134 MW</a:t>
+            </a:r>
+          </a:p>
+        </p:txBody>
+      </p:sp>
+      <p:sp>
+        <p:nvSpPr>
+          <p:cNvPr id="8" name="TextBox 7"/>
+          <p:cNvSpPr txBox="1"/>
+          <p:nvPr/>
+        </p:nvSpPr>
+        <p:spPr>
+          <a:xfrm>
+            <a:off x="1188720" y="3291840"/>
+            <a:ext cx="4114800" cy="457200"/>
+          </a:xfrm>
+          <a:prstGeom prst="rect">
+            <a:avLst/>
+          </a:prstGeom>
+          <a:noFill/>
+        </p:spPr>
+        <p:txBody>
+          <a:bodyPr wrap="square">
+            <a:spAutoFit/>
+          </a:bodyPr>
+          <a:lstStyle/>
+          <a:p>
+            <a:pPr algn="ctr">
+              <a:defRPr sz="1800" b="1">
+                <a:solidFill>
+                  <a:srgbClr val="FFFFFF"/>
+                </a:solidFill>
+              </a:defRPr>
+            </a:pPr>
+            <a:r>
+              <a:t>~$40M Revenue</a:t>
+            </a:r>
+          </a:p>
+        </p:txBody>
+      </p:sp>
+      <p:sp>
+        <p:nvSpPr>
+          <p:cNvPr id="9" name="TextBox 8"/>
+          <p:cNvSpPr txBox="1"/>
+          <p:nvPr/>
+        </p:nvSpPr>
+        <p:spPr>
+          <a:xfrm>
+            <a:off x="1188720" y="3840480"/>
+            <a:ext cx="4114800" cy="548640"/>
+          </a:xfrm>
+          <a:prstGeom prst="rect">
+            <a:avLst/>
+          </a:prstGeom>
+          <a:noFill/>
+        </p:spPr>
+        <p:txBody>
+          <a:bodyPr wrap="square">
+            <a:spAutoFit/>
+          </a:bodyPr>
+          <a:lstStyle/>
+          <a:p>
+            <a:pPr algn="ctr">
+              <a:defRPr sz="1200" b="0">
+                <a:solidFill>
+                  <a:srgbClr val="8E9EAB"/>
+                </a:solidFill>
+              </a:defRPr>
+            </a:pPr>
+            <a:r>
+              <a:t>14d × 9.6 MW/day</a:t>
+            </a:r>
+          </a:p>
+        </p:txBody>
+      </p:sp>
+      <p:sp>
+        <p:nvSpPr>
+          <p:cNvPr id="10" name="TextBox 9"/>
+          <p:cNvSpPr txBox="1"/>
+          <p:nvPr/>
+        </p:nvSpPr>
+        <p:spPr>
+          <a:xfrm>
+            <a:off x="6400800" y="1645920"/>
+            <a:ext cx="5029200" cy="3200400"/>
+          </a:xfrm>
+          <a:prstGeom prst="rect">
+            <a:avLst/>
+          </a:prstGeom>
+          <a:noFill/>
+        </p:spPr>
+        <p:txBody>
+          <a:bodyPr wrap="square">
+            <a:spAutoFit/>
+          </a:bodyPr>
+          <a:lstStyle/>
+          <a:p>
             <a:pPr algn="l">
-              <a:defRPr sz="1700" b="0">
+              <a:defRPr sz="1300" b="0">
                 <a:solidFill>
                   <a:srgbClr val="FFFFFF"/>
                 </a:solidFill>
               </a:defRPr>
             </a:pPr>
             <a:r>
-              <a:t>Alabama daily production:  9.6 MW/day</a:t>
+              <a:t>Alabama: 9.6 MW/day</a:t>
             </a:r>
             <a:br/>
             <a:br/>
             <a:r>
-              <a:t>Glass coverage:  18 days</a:t>
+              <a:t>Glass coverage: 18 days</a:t>
             </a:r>
             <a:br/>
             <a:br/>
             <a:r>
-              <a:t>If delivery delayed 2 weeks beyond coverage:</a:t>
+              <a:t>2-week delay:</a:t>
             </a:r>
             <a:br/>
             <a:r>
-              <a:t>   14 days x 9.6 MW/day = 134 MW at risk</a:t>
+              <a:t>  14 × 9.6 = 134 MW</a:t>
             </a:r>
             <a:br/>
             <a:br/>
             <a:r>
-              <a:t>At /bin/zsh.30/W module ASP:  134 MW = ~M revenue exposure</a:t>
+              <a:t>At $0.30/W:</a:t>
+            </a:r>
+            <a:br/>
+            <a:r>
+              <a:t>  134 MW = ~$40M</a:t>
             </a:r>
             <a:br/>
             <a:br/>
             <a:r>
-              <a:t>Customer impact: NextEra Q2 commissioning, Invenergy Magnolia</a:t>
+              <a:t>Customers at risk:</a:t>
             </a:r>
             <a:br/>
+            <a:r>
+              <a:t>  NextEra Q2</a:t>
+            </a:r>
             <a:br/>
             <a:r>
-              <a:t>Always land the number in MW and $ -- that is how they think.</a:t>
+              <a:t>  Invenergy Magnolia</a:t>
+            </a:r>
+          </a:p>
+        </p:txBody>
+      </p:sp>
+      <p:sp>
+        <p:nvSpPr>
+          <p:cNvPr id="11" name="TextBox 10"/>
+          <p:cNvSpPr txBox="1"/>
+          <p:nvPr/>
+        </p:nvSpPr>
+        <p:spPr>
+          <a:xfrm>
+            <a:off x="731520" y="5029200"/>
+            <a:ext cx="10058400" cy="457200"/>
+          </a:xfrm>
+          <a:prstGeom prst="rect">
+            <a:avLst/>
+          </a:prstGeom>
+          <a:noFill/>
+        </p:spPr>
+        <p:txBody>
+          <a:bodyPr wrap="square">
+            <a:spAutoFit/>
+          </a:bodyPr>
+          <a:lstStyle/>
+          <a:p>
+            <a:pPr algn="l">
+              <a:defRPr sz="1200" b="1">
+                <a:solidFill>
+                  <a:srgbClr val="E65100"/>
+                </a:solidFill>
+              </a:defRPr>
+            </a:pPr>
+            <a:r>
+              <a:t>ALWAYS quantify in MW and $. That makes them lean in.</a:t>
             </a:r>
           </a:p>
         </p:txBody>
@@ -6224,7 +9271,7 @@
     <p:bg>
       <p:bgPr>
         <a:solidFill>
-          <a:srgbClr val="11273F"/>
+          <a:srgbClr val="05142B"/>
         </a:solidFill>
         <a:effectLst/>
       </p:bgPr>
@@ -6236,88 +9283,42 @@
         <p:nvPr/>
       </p:nvGrpSpPr>
       <p:grpSpPr/>
-      <p:sp>
-        <p:nvSpPr>
-          <p:cNvPr id="2" name="TextBox 1"/>
-          <p:cNvSpPr txBox="1"/>
-          <p:nvPr/>
-        </p:nvSpPr>
-        <p:spPr>
-          <a:xfrm>
-            <a:off x="914400" y="457200"/>
-            <a:ext cx="10058400" cy="731520"/>
-          </a:xfrm>
-          <a:prstGeom prst="rect">
-            <a:avLst/>
-          </a:prstGeom>
-          <a:noFill/>
-        </p:spPr>
-        <p:txBody>
-          <a:bodyPr wrap="square">
-            <a:spAutoFit/>
-          </a:bodyPr>
-          <a:lstStyle/>
-          <a:p>
-            <a:pPr algn="l">
-              <a:defRPr sz="3200" b="1">
-                <a:solidFill>
-                  <a:srgbClr val="29B5E8"/>
-                </a:solidFill>
-              </a:defRPr>
-            </a:pPr>
-            <a:r>
-              <a:t>Agent Architecture -- 11 Tools</a:t>
-            </a:r>
-          </a:p>
-        </p:txBody>
-      </p:sp>
-      <p:sp>
-        <p:nvSpPr>
-          <p:cNvPr id="3" name="TextBox 2"/>
-          <p:cNvSpPr txBox="1"/>
-          <p:nvPr/>
-        </p:nvSpPr>
-        <p:spPr>
-          <a:xfrm>
-            <a:off x="731520" y="1554480"/>
-            <a:ext cx="3474720" cy="457200"/>
-          </a:xfrm>
-          <a:prstGeom prst="rect">
-            <a:avLst/>
-          </a:prstGeom>
-          <a:noFill/>
-        </p:spPr>
-        <p:txBody>
-          <a:bodyPr wrap="square">
-            <a:spAutoFit/>
-          </a:bodyPr>
-          <a:lstStyle/>
-          <a:p>
-            <a:pPr algn="l">
-              <a:defRPr sz="1400" b="1">
-                <a:solidFill>
-                  <a:srgbClr val="29B5E8"/>
-                </a:solidFill>
-              </a:defRPr>
-            </a:pPr>
-            <a:r>
-              <a:t>Cortex Analyst (3)</a:t>
-            </a:r>
-          </a:p>
-        </p:txBody>
-      </p:sp>
-      <p:sp>
-        <p:nvSpPr>
-          <p:cNvPr id="4" name="Rounded Rectangle 3"/>
+      <p:pic>
+        <p:nvPicPr>
+          <p:cNvPr id="2" name="Picture 1" descr="snowflake_logo_white.png"/>
+          <p:cNvPicPr>
+            <a:picLocks noChangeAspect="1"/>
+          </p:cNvPicPr>
+          <p:nvPr/>
+        </p:nvPicPr>
+        <p:blipFill>
+          <a:blip r:embed="rId2"/>
+          <a:stretch>
+            <a:fillRect/>
+          </a:stretch>
+        </p:blipFill>
+        <p:spPr>
+          <a:xfrm>
+            <a:off x="457200" y="274320"/>
+            <a:ext cx="457200" cy="457200"/>
+          </a:xfrm>
+          <a:prstGeom prst="rect">
+            <a:avLst/>
+          </a:prstGeom>
+        </p:spPr>
+      </p:pic>
+      <p:sp>
+        <p:nvSpPr>
+          <p:cNvPr id="3" name="Rectangle 2"/>
           <p:cNvSpPr/>
           <p:nvPr/>
         </p:nvSpPr>
         <p:spPr>
           <a:xfrm>
-            <a:off x="731520" y="2103120"/>
-            <a:ext cx="3291840" cy="594360"/>
-          </a:xfrm>
-          <a:prstGeom prst="roundRect">
+            <a:off x="457200" y="6446520"/>
+            <a:ext cx="11247120" cy="27432"/>
+          </a:xfrm>
+          <a:prstGeom prst="rect">
             <a:avLst/>
           </a:prstGeom>
           <a:solidFill>
@@ -6342,18 +9343,44 @@
           </a:fontRef>
         </p:style>
         <p:txBody>
-          <a:bodyPr rtlCol="0" anchor="ctr" wrap="square"/>
-          <a:lstStyle/>
-          <a:p>
-            <a:pPr algn="ctr">
-              <a:defRPr sz="1100" b="1">
-                <a:solidFill>
-                  <a:srgbClr val="FFFFFF"/>
-                </a:solidFill>
-              </a:defRPr>
-            </a:pPr>
-            <a:r>
-              <a:t>SupplyChainOps</a:t>
+          <a:bodyPr rtlCol="0" anchor="ctr"/>
+          <a:lstStyle/>
+          <a:p>
+            <a:pPr algn="ctr"/>
+          </a:p>
+        </p:txBody>
+      </p:sp>
+      <p:sp>
+        <p:nvSpPr>
+          <p:cNvPr id="4" name="TextBox 3"/>
+          <p:cNvSpPr txBox="1"/>
+          <p:nvPr/>
+        </p:nvSpPr>
+        <p:spPr>
+          <a:xfrm>
+            <a:off x="731520" y="731520"/>
+            <a:ext cx="10058400" cy="548640"/>
+          </a:xfrm>
+          <a:prstGeom prst="rect">
+            <a:avLst/>
+          </a:prstGeom>
+          <a:noFill/>
+        </p:spPr>
+        <p:txBody>
+          <a:bodyPr wrap="square">
+            <a:spAutoFit/>
+          </a:bodyPr>
+          <a:lstStyle/>
+          <a:p>
+            <a:pPr algn="l">
+              <a:defRPr sz="3200" b="1">
+                <a:solidFill>
+                  <a:srgbClr val="29B5E8"/>
+                </a:solidFill>
+              </a:defRPr>
+            </a:pPr>
+            <a:r>
+              <a:t>Architecture — 11 Tools</a:t>
             </a:r>
           </a:p>
         </p:txBody>
@@ -6366,8 +9393,8 @@
         </p:nvSpPr>
         <p:spPr>
           <a:xfrm>
-            <a:off x="731520" y="2880360"/>
-            <a:ext cx="3291840" cy="594360"/>
+            <a:off x="731520" y="1371600"/>
+            <a:ext cx="10515600" cy="640080"/>
           </a:xfrm>
           <a:prstGeom prst="roundRect">
             <a:avLst/>
@@ -6398,37 +9425,74 @@
           <a:lstStyle/>
           <a:p>
             <a:pPr algn="ctr">
-              <a:defRPr sz="1100" b="1">
+              <a:defRPr sz="1200" b="1">
                 <a:solidFill>
                   <a:srgbClr val="FFFFFF"/>
                 </a:solidFill>
               </a:defRPr>
             </a:pPr>
             <a:r>
-              <a:t>ManufacturingDemand</a:t>
-            </a:r>
-          </a:p>
-        </p:txBody>
-      </p:sp>
-      <p:sp>
-        <p:nvSpPr>
-          <p:cNvPr id="6" name="Rounded Rectangle 5"/>
+              <a:t>FIRST_SOLAR_AGENT | YAML | 15 Questions | 60s/32K</a:t>
+            </a:r>
+          </a:p>
+        </p:txBody>
+      </p:sp>
+      <p:sp>
+        <p:nvSpPr>
+          <p:cNvPr id="6" name="TextBox 5"/>
+          <p:cNvSpPr txBox="1"/>
+          <p:nvPr/>
+        </p:nvSpPr>
+        <p:spPr>
+          <a:xfrm>
+            <a:off x="731520" y="2194560"/>
+            <a:ext cx="3474720" cy="365760"/>
+          </a:xfrm>
+          <a:prstGeom prst="rect">
+            <a:avLst/>
+          </a:prstGeom>
+          <a:noFill/>
+        </p:spPr>
+        <p:txBody>
+          <a:bodyPr wrap="square">
+            <a:spAutoFit/>
+          </a:bodyPr>
+          <a:lstStyle/>
+          <a:p>
+            <a:pPr algn="l">
+              <a:defRPr sz="1200" b="1">
+                <a:solidFill>
+                  <a:srgbClr val="29B5E8"/>
+                </a:solidFill>
+              </a:defRPr>
+            </a:pPr>
+            <a:r>
+              <a:t>Cortex Analyst (3)</a:t>
+            </a:r>
+          </a:p>
+        </p:txBody>
+      </p:sp>
+      <p:sp>
+        <p:nvSpPr>
+          <p:cNvPr id="7" name="Rounded Rectangle 6"/>
           <p:cNvSpPr/>
           <p:nvPr/>
         </p:nvSpPr>
         <p:spPr>
           <a:xfrm>
-            <a:off x="731520" y="3657600"/>
-            <a:ext cx="3291840" cy="594360"/>
+            <a:off x="731520" y="2651760"/>
+            <a:ext cx="3383280" cy="640080"/>
           </a:xfrm>
           <a:prstGeom prst="roundRect">
             <a:avLst/>
           </a:prstGeom>
           <a:solidFill>
-            <a:srgbClr val="29B5E8"/>
+            <a:srgbClr val="0A1E38"/>
           </a:solidFill>
-          <a:ln>
-            <a:noFill/>
+          <a:ln w="25400">
+            <a:solidFill>
+              <a:srgbClr val="29B5E8"/>
+            </a:solidFill>
           </a:ln>
         </p:spPr>
         <p:style>
@@ -6450,49 +9514,14 @@
           <a:lstStyle/>
           <a:p>
             <a:pPr algn="ctr">
-              <a:defRPr sz="1100" b="1">
+              <a:defRPr sz="1000" b="1">
                 <a:solidFill>
                   <a:srgbClr val="FFFFFF"/>
                 </a:solidFill>
               </a:defRPr>
             </a:pPr>
             <a:r>
-              <a:t>RiskIntelligence</a:t>
-            </a:r>
-          </a:p>
-        </p:txBody>
-      </p:sp>
-      <p:sp>
-        <p:nvSpPr>
-          <p:cNvPr id="7" name="TextBox 6"/>
-          <p:cNvSpPr txBox="1"/>
-          <p:nvPr/>
-        </p:nvSpPr>
-        <p:spPr>
-          <a:xfrm>
-            <a:off x="4572000" y="1554480"/>
-            <a:ext cx="3474720" cy="457200"/>
-          </a:xfrm>
-          <a:prstGeom prst="rect">
-            <a:avLst/>
-          </a:prstGeom>
-          <a:noFill/>
-        </p:spPr>
-        <p:txBody>
-          <a:bodyPr wrap="square">
-            <a:spAutoFit/>
-          </a:bodyPr>
-          <a:lstStyle/>
-          <a:p>
-            <a:pPr algn="l">
-              <a:defRPr sz="1400" b="1">
-                <a:solidFill>
-                  <a:srgbClr val="2E7D32"/>
-                </a:solidFill>
-              </a:defRPr>
-            </a:pPr>
-            <a:r>
-              <a:t>Cortex Search (4)</a:t>
+              <a:t>SupplyChainOps</a:t>
             </a:r>
           </a:p>
         </p:txBody>
@@ -6505,17 +9534,19 @@
         </p:nvSpPr>
         <p:spPr>
           <a:xfrm>
-            <a:off x="4572000" y="2103120"/>
-            <a:ext cx="3291840" cy="594360"/>
+            <a:off x="731520" y="3429000"/>
+            <a:ext cx="3383280" cy="640080"/>
           </a:xfrm>
           <a:prstGeom prst="roundRect">
             <a:avLst/>
           </a:prstGeom>
           <a:solidFill>
-            <a:srgbClr val="2E7D32"/>
+            <a:srgbClr val="0A1E38"/>
           </a:solidFill>
-          <a:ln>
-            <a:noFill/>
+          <a:ln w="25400">
+            <a:solidFill>
+              <a:srgbClr val="29B5E8"/>
+            </a:solidFill>
           </a:ln>
         </p:spPr>
         <p:style>
@@ -6537,14 +9568,14 @@
           <a:lstStyle/>
           <a:p>
             <a:pPr algn="ctr">
-              <a:defRPr sz="1100" b="1">
+              <a:defRPr sz="1000" b="1">
                 <a:solidFill>
                   <a:srgbClr val="FFFFFF"/>
                 </a:solidFill>
               </a:defRPr>
             </a:pPr>
             <a:r>
-              <a:t>OperationalNotes</a:t>
+              <a:t>ManufacturingDemand</a:t>
             </a:r>
           </a:p>
         </p:txBody>
@@ -6557,17 +9588,19 @@
         </p:nvSpPr>
         <p:spPr>
           <a:xfrm>
-            <a:off x="4572000" y="2880360"/>
-            <a:ext cx="3291840" cy="594360"/>
+            <a:off x="731520" y="4206240"/>
+            <a:ext cx="3383280" cy="640080"/>
           </a:xfrm>
           <a:prstGeom prst="roundRect">
             <a:avLst/>
           </a:prstGeom>
           <a:solidFill>
-            <a:srgbClr val="2E7D32"/>
+            <a:srgbClr val="0A1E38"/>
           </a:solidFill>
-          <a:ln>
-            <a:noFill/>
+          <a:ln w="25400">
+            <a:solidFill>
+              <a:srgbClr val="29B5E8"/>
+            </a:solidFill>
           </a:ln>
         </p:spPr>
         <p:style>
@@ -6589,37 +9622,74 @@
           <a:lstStyle/>
           <a:p>
             <a:pPr algn="ctr">
-              <a:defRPr sz="1100" b="1">
+              <a:defRPr sz="1000" b="1">
                 <a:solidFill>
                   <a:srgbClr val="FFFFFF"/>
                 </a:solidFill>
               </a:defRPr>
             </a:pPr>
             <a:r>
-              <a:t>SupplierEvents</a:t>
-            </a:r>
-          </a:p>
-        </p:txBody>
-      </p:sp>
-      <p:sp>
-        <p:nvSpPr>
-          <p:cNvPr id="10" name="Rounded Rectangle 9"/>
+              <a:t>RiskIntelligence</a:t>
+            </a:r>
+          </a:p>
+        </p:txBody>
+      </p:sp>
+      <p:sp>
+        <p:nvSpPr>
+          <p:cNvPr id="10" name="TextBox 9"/>
+          <p:cNvSpPr txBox="1"/>
+          <p:nvPr/>
+        </p:nvSpPr>
+        <p:spPr>
+          <a:xfrm>
+            <a:off x="4480559" y="2194560"/>
+            <a:ext cx="3474720" cy="365760"/>
+          </a:xfrm>
+          <a:prstGeom prst="rect">
+            <a:avLst/>
+          </a:prstGeom>
+          <a:noFill/>
+        </p:spPr>
+        <p:txBody>
+          <a:bodyPr wrap="square">
+            <a:spAutoFit/>
+          </a:bodyPr>
+          <a:lstStyle/>
+          <a:p>
+            <a:pPr algn="l">
+              <a:defRPr sz="1200" b="1">
+                <a:solidFill>
+                  <a:srgbClr val="2E7D32"/>
+                </a:solidFill>
+              </a:defRPr>
+            </a:pPr>
+            <a:r>
+              <a:t>Cortex Search (4)</a:t>
+            </a:r>
+          </a:p>
+        </p:txBody>
+      </p:sp>
+      <p:sp>
+        <p:nvSpPr>
+          <p:cNvPr id="11" name="Rounded Rectangle 10"/>
           <p:cNvSpPr/>
           <p:nvPr/>
         </p:nvSpPr>
         <p:spPr>
           <a:xfrm>
-            <a:off x="4572000" y="3657600"/>
-            <a:ext cx="3291840" cy="594360"/>
+            <a:off x="4480559" y="2651760"/>
+            <a:ext cx="3383280" cy="640080"/>
           </a:xfrm>
           <a:prstGeom prst="roundRect">
             <a:avLst/>
           </a:prstGeom>
           <a:solidFill>
-            <a:srgbClr val="2E7D32"/>
+            <a:srgbClr val="0A1E38"/>
           </a:solidFill>
-          <a:ln>
-            <a:noFill/>
+          <a:ln w="25400">
+            <a:solidFill>
+              <a:srgbClr val="2E7D32"/>
+            </a:solidFill>
           </a:ln>
         </p:spPr>
         <p:style>
@@ -6641,37 +9711,39 @@
           <a:lstStyle/>
           <a:p>
             <a:pPr algn="ctr">
-              <a:defRPr sz="1100" b="1">
+              <a:defRPr sz="1000" b="1">
                 <a:solidFill>
                   <a:srgbClr val="FFFFFF"/>
                 </a:solidFill>
               </a:defRPr>
             </a:pPr>
             <a:r>
-              <a:t>RiskProfiles</a:t>
-            </a:r>
-          </a:p>
-        </p:txBody>
-      </p:sp>
-      <p:sp>
-        <p:nvSpPr>
-          <p:cNvPr id="11" name="Rounded Rectangle 10"/>
+              <a:t>OperationalNotes</a:t>
+            </a:r>
+          </a:p>
+        </p:txBody>
+      </p:sp>
+      <p:sp>
+        <p:nvSpPr>
+          <p:cNvPr id="12" name="Rounded Rectangle 11"/>
           <p:cNvSpPr/>
           <p:nvPr/>
         </p:nvSpPr>
         <p:spPr>
           <a:xfrm>
-            <a:off x="4572000" y="4434840"/>
-            <a:ext cx="3291840" cy="594360"/>
+            <a:off x="4480559" y="3429000"/>
+            <a:ext cx="3383280" cy="640080"/>
           </a:xfrm>
           <a:prstGeom prst="roundRect">
             <a:avLst/>
           </a:prstGeom>
           <a:solidFill>
-            <a:srgbClr val="2E7D32"/>
+            <a:srgbClr val="0A1E38"/>
           </a:solidFill>
-          <a:ln>
-            <a:noFill/>
+          <a:ln w="25400">
+            <a:solidFill>
+              <a:srgbClr val="2E7D32"/>
+            </a:solidFill>
           </a:ln>
         </p:spPr>
         <p:style>
@@ -6693,49 +9765,14 @@
           <a:lstStyle/>
           <a:p>
             <a:pPr algn="ctr">
-              <a:defRPr sz="1100" b="1">
+              <a:defRPr sz="1000" b="1">
                 <a:solidFill>
                   <a:srgbClr val="FFFFFF"/>
                 </a:solidFill>
               </a:defRPr>
             </a:pPr>
             <a:r>
-              <a:t>ExternalSignals</a:t>
-            </a:r>
-          </a:p>
-        </p:txBody>
-      </p:sp>
-      <p:sp>
-        <p:nvSpPr>
-          <p:cNvPr id="12" name="TextBox 11"/>
-          <p:cNvSpPr txBox="1"/>
-          <p:nvPr/>
-        </p:nvSpPr>
-        <p:spPr>
-          <a:xfrm>
-            <a:off x="8412480" y="1554480"/>
-            <a:ext cx="3474720" cy="457200"/>
-          </a:xfrm>
-          <a:prstGeom prst="rect">
-            <a:avLst/>
-          </a:prstGeom>
-          <a:noFill/>
-        </p:spPr>
-        <p:txBody>
-          <a:bodyPr wrap="square">
-            <a:spAutoFit/>
-          </a:bodyPr>
-          <a:lstStyle/>
-          <a:p>
-            <a:pPr algn="l">
-              <a:defRPr sz="1400" b="1">
-                <a:solidFill>
-                  <a:srgbClr val="E65100"/>
-                </a:solidFill>
-              </a:defRPr>
-            </a:pPr>
-            <a:r>
-              <a:t>UDF Functions (4)</a:t>
+              <a:t>SupplierEvents</a:t>
             </a:r>
           </a:p>
         </p:txBody>
@@ -6748,17 +9785,19 @@
         </p:nvSpPr>
         <p:spPr>
           <a:xfrm>
-            <a:off x="8412480" y="2103120"/>
-            <a:ext cx="3291840" cy="594360"/>
+            <a:off x="4480559" y="4206240"/>
+            <a:ext cx="3383280" cy="640080"/>
           </a:xfrm>
           <a:prstGeom prst="roundRect">
             <a:avLst/>
           </a:prstGeom>
           <a:solidFill>
-            <a:srgbClr val="E65100"/>
+            <a:srgbClr val="0A1E38"/>
           </a:solidFill>
-          <a:ln>
-            <a:noFill/>
+          <a:ln w="25400">
+            <a:solidFill>
+              <a:srgbClr val="2E7D32"/>
+            </a:solidFill>
           </a:ln>
         </p:spPr>
         <p:style>
@@ -6780,14 +9819,14 @@
           <a:lstStyle/>
           <a:p>
             <a:pPr algn="ctr">
-              <a:defRPr sz="1100" b="1">
+              <a:defRPr sz="1000" b="1">
                 <a:solidFill>
                   <a:srgbClr val="FFFFFF"/>
                 </a:solidFill>
               </a:defRPr>
             </a:pPr>
             <a:r>
-              <a:t>StockoutPredictor</a:t>
+              <a:t>RiskProfiles</a:t>
             </a:r>
           </a:p>
         </p:txBody>
@@ -6800,17 +9839,19 @@
         </p:nvSpPr>
         <p:spPr>
           <a:xfrm>
-            <a:off x="8412480" y="2880360"/>
-            <a:ext cx="3291840" cy="594360"/>
+            <a:off x="4480559" y="4983479"/>
+            <a:ext cx="3383280" cy="640080"/>
           </a:xfrm>
           <a:prstGeom prst="roundRect">
             <a:avLst/>
           </a:prstGeom>
           <a:solidFill>
-            <a:srgbClr val="E65100"/>
+            <a:srgbClr val="0A1E38"/>
           </a:solidFill>
-          <a:ln>
-            <a:noFill/>
+          <a:ln w="25400">
+            <a:solidFill>
+              <a:srgbClr val="2E7D32"/>
+            </a:solidFill>
           </a:ln>
         </p:spPr>
         <p:style>
@@ -6832,37 +9873,74 @@
           <a:lstStyle/>
           <a:p>
             <a:pPr algn="ctr">
-              <a:defRPr sz="1100" b="1">
+              <a:defRPr sz="1000" b="1">
                 <a:solidFill>
                   <a:srgbClr val="FFFFFF"/>
                 </a:solidFill>
               </a:defRPr>
             </a:pPr>
             <a:r>
-              <a:t>DemandForecast</a:t>
-            </a:r>
-          </a:p>
-        </p:txBody>
-      </p:sp>
-      <p:sp>
-        <p:nvSpPr>
-          <p:cNvPr id="15" name="Rounded Rectangle 14"/>
+              <a:t>ExternalSignals</a:t>
+            </a:r>
+          </a:p>
+        </p:txBody>
+      </p:sp>
+      <p:sp>
+        <p:nvSpPr>
+          <p:cNvPr id="15" name="TextBox 14"/>
+          <p:cNvSpPr txBox="1"/>
+          <p:nvPr/>
+        </p:nvSpPr>
+        <p:spPr>
+          <a:xfrm>
+            <a:off x="8229600" y="2194560"/>
+            <a:ext cx="3474720" cy="365760"/>
+          </a:xfrm>
+          <a:prstGeom prst="rect">
+            <a:avLst/>
+          </a:prstGeom>
+          <a:noFill/>
+        </p:spPr>
+        <p:txBody>
+          <a:bodyPr wrap="square">
+            <a:spAutoFit/>
+          </a:bodyPr>
+          <a:lstStyle/>
+          <a:p>
+            <a:pPr algn="l">
+              <a:defRPr sz="1200" b="1">
+                <a:solidFill>
+                  <a:srgbClr val="E65100"/>
+                </a:solidFill>
+              </a:defRPr>
+            </a:pPr>
+            <a:r>
+              <a:t>UDF Functions (4)</a:t>
+            </a:r>
+          </a:p>
+        </p:txBody>
+      </p:sp>
+      <p:sp>
+        <p:nvSpPr>
+          <p:cNvPr id="16" name="Rounded Rectangle 15"/>
           <p:cNvSpPr/>
           <p:nvPr/>
         </p:nvSpPr>
         <p:spPr>
           <a:xfrm>
-            <a:off x="8412480" y="3657600"/>
-            <a:ext cx="3291840" cy="594360"/>
+            <a:off x="8229600" y="2651760"/>
+            <a:ext cx="3383280" cy="640080"/>
           </a:xfrm>
           <a:prstGeom prst="roundRect">
             <a:avLst/>
           </a:prstGeom>
           <a:solidFill>
-            <a:srgbClr val="E65100"/>
+            <a:srgbClr val="0A1E38"/>
           </a:solidFill>
-          <a:ln>
-            <a:noFill/>
+          <a:ln w="25400">
+            <a:solidFill>
+              <a:srgbClr val="E65100"/>
+            </a:solidFill>
           </a:ln>
         </p:spPr>
         <p:style>
@@ -6884,37 +9962,39 @@
           <a:lstStyle/>
           <a:p>
             <a:pPr algn="ctr">
-              <a:defRPr sz="1100" b="1">
+              <a:defRPr sz="1000" b="1">
                 <a:solidFill>
                   <a:srgbClr val="FFFFFF"/>
                 </a:solidFill>
               </a:defRPr>
             </a:pPr>
             <a:r>
-              <a:t>MaterialRisk</a:t>
-            </a:r>
-          </a:p>
-        </p:txBody>
-      </p:sp>
-      <p:sp>
-        <p:nvSpPr>
-          <p:cNvPr id="16" name="Rounded Rectangle 15"/>
+              <a:t>StockoutPredictor</a:t>
+            </a:r>
+          </a:p>
+        </p:txBody>
+      </p:sp>
+      <p:sp>
+        <p:nvSpPr>
+          <p:cNvPr id="17" name="Rounded Rectangle 16"/>
           <p:cNvSpPr/>
           <p:nvPr/>
         </p:nvSpPr>
         <p:spPr>
           <a:xfrm>
-            <a:off x="8412480" y="4434840"/>
-            <a:ext cx="3291840" cy="594360"/>
+            <a:off x="8229600" y="3429000"/>
+            <a:ext cx="3383280" cy="640080"/>
           </a:xfrm>
           <a:prstGeom prst="roundRect">
             <a:avLst/>
           </a:prstGeom>
           <a:solidFill>
-            <a:srgbClr val="E65100"/>
+            <a:srgbClr val="0A1E38"/>
           </a:solidFill>
-          <a:ln>
-            <a:noFill/>
+          <a:ln w="25400">
+            <a:solidFill>
+              <a:srgbClr val="E65100"/>
+            </a:solidFill>
           </a:ln>
         </p:spPr>
         <p:style>
@@ -6936,7 +10016,115 @@
           <a:lstStyle/>
           <a:p>
             <a:pPr algn="ctr">
-              <a:defRPr sz="1100" b="1">
+              <a:defRPr sz="1000" b="1">
+                <a:solidFill>
+                  <a:srgbClr val="FFFFFF"/>
+                </a:solidFill>
+              </a:defRPr>
+            </a:pPr>
+            <a:r>
+              <a:t>DemandForecast</a:t>
+            </a:r>
+          </a:p>
+        </p:txBody>
+      </p:sp>
+      <p:sp>
+        <p:nvSpPr>
+          <p:cNvPr id="18" name="Rounded Rectangle 17"/>
+          <p:cNvSpPr/>
+          <p:nvPr/>
+        </p:nvSpPr>
+        <p:spPr>
+          <a:xfrm>
+            <a:off x="8229600" y="4206240"/>
+            <a:ext cx="3383280" cy="640080"/>
+          </a:xfrm>
+          <a:prstGeom prst="roundRect">
+            <a:avLst/>
+          </a:prstGeom>
+          <a:solidFill>
+            <a:srgbClr val="0A1E38"/>
+          </a:solidFill>
+          <a:ln w="25400">
+            <a:solidFill>
+              <a:srgbClr val="E65100"/>
+            </a:solidFill>
+          </a:ln>
+        </p:spPr>
+        <p:style>
+          <a:lnRef idx="1">
+            <a:schemeClr val="accent1"/>
+          </a:lnRef>
+          <a:fillRef idx="3">
+            <a:schemeClr val="accent1"/>
+          </a:fillRef>
+          <a:effectRef idx="2">
+            <a:schemeClr val="accent1"/>
+          </a:effectRef>
+          <a:fontRef idx="minor">
+            <a:schemeClr val="lt1"/>
+          </a:fontRef>
+        </p:style>
+        <p:txBody>
+          <a:bodyPr rtlCol="0" anchor="ctr" wrap="square"/>
+          <a:lstStyle/>
+          <a:p>
+            <a:pPr algn="ctr">
+              <a:defRPr sz="1000" b="1">
+                <a:solidFill>
+                  <a:srgbClr val="FFFFFF"/>
+                </a:solidFill>
+              </a:defRPr>
+            </a:pPr>
+            <a:r>
+              <a:t>MaterialRisk</a:t>
+            </a:r>
+          </a:p>
+        </p:txBody>
+      </p:sp>
+      <p:sp>
+        <p:nvSpPr>
+          <p:cNvPr id="19" name="Rounded Rectangle 18"/>
+          <p:cNvSpPr/>
+          <p:nvPr/>
+        </p:nvSpPr>
+        <p:spPr>
+          <a:xfrm>
+            <a:off x="8229600" y="4983479"/>
+            <a:ext cx="3383280" cy="640080"/>
+          </a:xfrm>
+          <a:prstGeom prst="roundRect">
+            <a:avLst/>
+          </a:prstGeom>
+          <a:solidFill>
+            <a:srgbClr val="0A1E38"/>
+          </a:solidFill>
+          <a:ln w="25400">
+            <a:solidFill>
+              <a:srgbClr val="E65100"/>
+            </a:solidFill>
+          </a:ln>
+        </p:spPr>
+        <p:style>
+          <a:lnRef idx="1">
+            <a:schemeClr val="accent1"/>
+          </a:lnRef>
+          <a:fillRef idx="3">
+            <a:schemeClr val="accent1"/>
+          </a:fillRef>
+          <a:effectRef idx="2">
+            <a:schemeClr val="accent1"/>
+          </a:effectRef>
+          <a:fontRef idx="minor">
+            <a:schemeClr val="lt1"/>
+          </a:fontRef>
+        </p:style>
+        <p:txBody>
+          <a:bodyPr rtlCol="0" anchor="ctr" wrap="square"/>
+          <a:lstStyle/>
+          <a:p>
+            <a:pPr algn="ctr">
+              <a:defRPr sz="1000" b="1">
                 <a:solidFill>
                   <a:srgbClr val="FFFFFF"/>
                 </a:solidFill>

--- a/docs/First_Solar_Demo_Narrative.pptx
+++ b/docs/First_Solar_Demo_Narrative.pptx
@@ -3095,7 +3095,7 @@
     <p:bg>
       <p:bgPr>
         <a:solidFill>
-          <a:srgbClr val="05142B"/>
+          <a:srgbClr val="11273F"/>
         </a:solidFill>
         <a:effectLst/>
       </p:bgPr>
@@ -3109,7 +3109,7 @@
       <p:grpSpPr/>
       <p:pic>
         <p:nvPicPr>
-          <p:cNvPr id="2" name="Picture 1" descr="snowflake_logo_white.png"/>
+          <p:cNvPr id="2" name="Picture 1" descr="sf_logo_combined.png"/>
           <p:cNvPicPr>
             <a:picLocks noChangeAspect="1"/>
           </p:cNvPicPr>
@@ -3123,8 +3123,8 @@
         </p:blipFill>
         <p:spPr>
           <a:xfrm>
-            <a:off x="457200" y="274320"/>
-            <a:ext cx="457200" cy="457200"/>
+            <a:off x="365760" y="228600"/>
+            <a:ext cx="2468880" cy="411480"/>
           </a:xfrm>
           <a:prstGeom prst="rect">
             <a:avLst/>
@@ -3139,8 +3139,8 @@
         </p:nvSpPr>
         <p:spPr>
           <a:xfrm>
-            <a:off x="457200" y="6446520"/>
-            <a:ext cx="11247120" cy="27432"/>
+            <a:off x="0" y="6583680"/>
+            <a:ext cx="12191695" cy="36576"/>
           </a:xfrm>
           <a:prstGeom prst="rect">
             <a:avLst/>
@@ -3176,22 +3176,22 @@
       </p:sp>
       <p:pic>
         <p:nvPicPr>
-          <p:cNvPr id="4" name="Picture 3" descr="snowflake_logo_white.png"/>
+          <p:cNvPr id="4" name="Picture 3" descr="sf_icon_400.png"/>
           <p:cNvPicPr>
             <a:picLocks noChangeAspect="1"/>
           </p:cNvPicPr>
           <p:nvPr/>
         </p:nvPicPr>
         <p:blipFill>
-          <a:blip r:embed="rId2"/>
+          <a:blip r:embed="rId3"/>
           <a:stretch>
             <a:fillRect/>
           </a:stretch>
         </p:blipFill>
         <p:spPr>
           <a:xfrm>
-            <a:off x="7772400" y="1371600"/>
-            <a:ext cx="4114800" cy="4114800"/>
+            <a:off x="8229600" y="1097280"/>
+            <a:ext cx="7734132" cy="4389120"/>
           </a:xfrm>
           <a:prstGeom prst="rect">
             <a:avLst/>
@@ -3241,7 +3241,7 @@
         </p:nvSpPr>
         <p:spPr>
           <a:xfrm>
-            <a:off x="731520" y="2560320"/>
+            <a:off x="731520" y="2651760"/>
             <a:ext cx="6400800" cy="914400"/>
           </a:xfrm>
           <a:prstGeom prst="rect">
@@ -3256,7 +3256,7 @@
           <a:lstStyle/>
           <a:p>
             <a:pPr algn="l">
-              <a:defRPr sz="3200" b="1">
+              <a:defRPr sz="3000" b="1">
                 <a:solidFill>
                   <a:srgbClr val="29B5E8"/>
                 </a:solidFill>
@@ -3276,8 +3276,8 @@
         </p:nvSpPr>
         <p:spPr>
           <a:xfrm>
-            <a:off x="731520" y="3474720"/>
-            <a:ext cx="6400800" cy="731520"/>
+            <a:off x="731520" y="3566160"/>
+            <a:ext cx="6400800" cy="548640"/>
           </a:xfrm>
           <a:prstGeom prst="rect">
             <a:avLst/>
@@ -3291,9 +3291,9 @@
           <a:lstStyle/>
           <a:p>
             <a:pPr algn="l">
-              <a:defRPr sz="1800" b="0">
-                <a:solidFill>
-                  <a:srgbClr val="8E9EAB"/>
+              <a:defRPr sz="1700" b="0">
+                <a:solidFill>
+                  <a:srgbClr val="6B7B8D"/>
                 </a:solidFill>
               </a:defRPr>
             </a:pPr>
@@ -3311,7 +3311,7 @@
         </p:nvSpPr>
         <p:spPr>
           <a:xfrm>
-            <a:off x="731520" y="4206240"/>
+            <a:off x="731520" y="4114800"/>
             <a:ext cx="6400800" cy="457200"/>
           </a:xfrm>
           <a:prstGeom prst="rect">
@@ -3326,9 +3326,9 @@
           <a:lstStyle/>
           <a:p>
             <a:pPr algn="l">
-              <a:defRPr sz="1600" b="0">
-                <a:solidFill>
-                  <a:srgbClr val="8E9EAB"/>
+              <a:defRPr sz="1500" b="0">
+                <a:solidFill>
+                  <a:srgbClr val="6B7B8D"/>
                 </a:solidFill>
               </a:defRPr>
             </a:pPr>
@@ -3347,18 +3347,16 @@
         <p:spPr>
           <a:xfrm>
             <a:off x="731520" y="5303520"/>
-            <a:ext cx="3200400" cy="822960"/>
+            <a:ext cx="3200400" cy="731520"/>
           </a:xfrm>
           <a:prstGeom prst="roundRect">
             <a:avLst/>
           </a:prstGeom>
           <a:solidFill>
-            <a:srgbClr val="11273F"/>
+            <a:srgbClr val="29B5E8"/>
           </a:solidFill>
-          <a:ln w="25400">
-            <a:solidFill>
-              <a:srgbClr val="29B5E8"/>
-            </a:solidFill>
+          <a:ln>
+            <a:noFill/>
           </a:ln>
         </p:spPr>
         <p:style>
@@ -3401,18 +3399,16 @@
         <p:spPr>
           <a:xfrm>
             <a:off x="4206240" y="5303520"/>
-            <a:ext cx="3200400" cy="822960"/>
+            <a:ext cx="3200400" cy="731520"/>
           </a:xfrm>
           <a:prstGeom prst="roundRect">
             <a:avLst/>
           </a:prstGeom>
           <a:solidFill>
-            <a:srgbClr val="11273F"/>
+            <a:srgbClr val="29B5E8"/>
           </a:solidFill>
-          <a:ln w="25400">
-            <a:solidFill>
-              <a:srgbClr val="29B5E8"/>
-            </a:solidFill>
+          <a:ln>
+            <a:noFill/>
           </a:ln>
         </p:spPr>
         <p:style>
@@ -3455,18 +3451,16 @@
         <p:spPr>
           <a:xfrm>
             <a:off x="7680960" y="5303520"/>
-            <a:ext cx="3200400" cy="822960"/>
+            <a:ext cx="3200400" cy="731520"/>
           </a:xfrm>
           <a:prstGeom prst="roundRect">
             <a:avLst/>
           </a:prstGeom>
           <a:solidFill>
-            <a:srgbClr val="11273F"/>
+            <a:srgbClr val="29B5E8"/>
           </a:solidFill>
-          <a:ln w="25400">
-            <a:solidFill>
-              <a:srgbClr val="29B5E8"/>
-            </a:solidFill>
+          <a:ln>
+            <a:noFill/>
           </a:ln>
         </p:spPr>
         <p:style>
@@ -3514,7 +3508,7 @@
     <p:bg>
       <p:bgPr>
         <a:solidFill>
-          <a:srgbClr val="05142B"/>
+          <a:srgbClr val="F8FAFC"/>
         </a:solidFill>
         <a:effectLst/>
       </p:bgPr>
@@ -3528,7 +3522,7 @@
       <p:grpSpPr/>
       <p:pic>
         <p:nvPicPr>
-          <p:cNvPr id="2" name="Picture 1" descr="snowflake_logo_white.png"/>
+          <p:cNvPr id="2" name="Picture 1" descr="sf_logo_combined.png"/>
           <p:cNvPicPr>
             <a:picLocks noChangeAspect="1"/>
           </p:cNvPicPr>
@@ -3542,8 +3536,8 @@
         </p:blipFill>
         <p:spPr>
           <a:xfrm>
-            <a:off x="457200" y="274320"/>
-            <a:ext cx="457200" cy="457200"/>
+            <a:off x="365760" y="228600"/>
+            <a:ext cx="2468880" cy="411480"/>
           </a:xfrm>
           <a:prstGeom prst="rect">
             <a:avLst/>
@@ -3558,8 +3552,8 @@
         </p:nvSpPr>
         <p:spPr>
           <a:xfrm>
-            <a:off x="457200" y="6446520"/>
-            <a:ext cx="11247120" cy="27432"/>
+            <a:off x="0" y="6583680"/>
+            <a:ext cx="12191695" cy="36576"/>
           </a:xfrm>
           <a:prstGeom prst="rect">
             <a:avLst/>
@@ -3601,7 +3595,7 @@
         </p:nvSpPr>
         <p:spPr>
           <a:xfrm>
-            <a:off x="731520" y="731520"/>
+            <a:off x="731520" y="777240"/>
             <a:ext cx="10058400" cy="548640"/>
           </a:xfrm>
           <a:prstGeom prst="rect">
@@ -3616,14 +3610,14 @@
           <a:lstStyle/>
           <a:p>
             <a:pPr algn="l">
-              <a:defRPr sz="3200" b="1">
-                <a:solidFill>
-                  <a:srgbClr val="29B5E8"/>
-                </a:solidFill>
-              </a:defRPr>
-            </a:pPr>
-            <a:r>
-              <a:t>Demo Flow</a:t>
+              <a:defRPr sz="3000" b="1">
+                <a:solidFill>
+                  <a:srgbClr val="11273F"/>
+                </a:solidFill>
+              </a:defRPr>
+            </a:pPr>
+            <a:r>
+              <a:t>Demo Flow — The Arc</a:t>
             </a:r>
           </a:p>
         </p:txBody>
@@ -3637,7 +3631,7 @@
         <p:spPr>
           <a:xfrm>
             <a:off x="457200" y="1645920"/>
-            <a:ext cx="2560320" cy="1828800"/>
+            <a:ext cx="2560320" cy="1645920"/>
           </a:xfrm>
           <a:prstGeom prst="roundRect">
             <a:avLst/>
@@ -3668,7 +3662,7 @@
           <a:lstStyle/>
           <a:p>
             <a:pPr algn="ctr">
-              <a:defRPr sz="1400" b="1">
+              <a:defRPr sz="1300" b="1">
                 <a:solidFill>
                   <a:srgbClr val="FFFFFF"/>
                 </a:solidFill>
@@ -3696,7 +3690,7 @@
         </p:nvSpPr>
         <p:spPr>
           <a:xfrm>
-            <a:off x="3063240" y="2377440"/>
+            <a:off x="3063240" y="2286000"/>
             <a:ext cx="274320" cy="274320"/>
           </a:xfrm>
           <a:prstGeom prst="rightArrow">
@@ -3740,7 +3734,7 @@
         <p:spPr>
           <a:xfrm>
             <a:off x="3383280" y="1645920"/>
-            <a:ext cx="2560320" cy="1828800"/>
+            <a:ext cx="2560320" cy="1645920"/>
           </a:xfrm>
           <a:prstGeom prst="roundRect">
             <a:avLst/>
@@ -3771,7 +3765,7 @@
           <a:lstStyle/>
           <a:p>
             <a:pPr algn="ctr">
-              <a:defRPr sz="1400" b="1">
+              <a:defRPr sz="1300" b="1">
                 <a:solidFill>
                   <a:srgbClr val="FFFFFF"/>
                 </a:solidFill>
@@ -3799,7 +3793,7 @@
         </p:nvSpPr>
         <p:spPr>
           <a:xfrm>
-            <a:off x="5989320" y="2377440"/>
+            <a:off x="5989320" y="2286000"/>
             <a:ext cx="274320" cy="274320"/>
           </a:xfrm>
           <a:prstGeom prst="rightArrow">
@@ -3843,7 +3837,7 @@
         <p:spPr>
           <a:xfrm>
             <a:off x="6309360" y="1645920"/>
-            <a:ext cx="2560320" cy="1828800"/>
+            <a:ext cx="2560320" cy="1645920"/>
           </a:xfrm>
           <a:prstGeom prst="roundRect">
             <a:avLst/>
@@ -3874,7 +3868,7 @@
           <a:lstStyle/>
           <a:p>
             <a:pPr algn="ctr">
-              <a:defRPr sz="1400" b="1">
+              <a:defRPr sz="1300" b="1">
                 <a:solidFill>
                   <a:srgbClr val="FFFFFF"/>
                 </a:solidFill>
@@ -3902,7 +3896,7 @@
         </p:nvSpPr>
         <p:spPr>
           <a:xfrm>
-            <a:off x="8915400" y="2377440"/>
+            <a:off x="8915400" y="2286000"/>
             <a:ext cx="274320" cy="274320"/>
           </a:xfrm>
           <a:prstGeom prst="rightArrow">
@@ -3946,7 +3940,7 @@
         <p:spPr>
           <a:xfrm>
             <a:off x="9235440" y="1645920"/>
-            <a:ext cx="2560320" cy="1828800"/>
+            <a:ext cx="2560320" cy="1645920"/>
           </a:xfrm>
           <a:prstGeom prst="roundRect">
             <a:avLst/>
@@ -3977,7 +3971,7 @@
           <a:lstStyle/>
           <a:p>
             <a:pPr algn="ctr">
-              <a:defRPr sz="1400" b="1">
+              <a:defRPr sz="1300" b="1">
                 <a:solidFill>
                   <a:srgbClr val="FFFFFF"/>
                 </a:solidFill>
@@ -4005,19 +3999,17 @@
         </p:nvSpPr>
         <p:spPr>
           <a:xfrm>
-            <a:off x="457200" y="3931920"/>
-            <a:ext cx="11155680" cy="2011680"/>
+            <a:off x="457200" y="3749039"/>
+            <a:ext cx="11155680" cy="2103120"/>
           </a:xfrm>
           <a:prstGeom prst="roundRect">
             <a:avLst/>
           </a:prstGeom>
           <a:solidFill>
-            <a:srgbClr val="0A1E38"/>
+            <a:srgbClr val="11273F"/>
           </a:solidFill>
-          <a:ln w="25400">
-            <a:solidFill>
-              <a:srgbClr val="29B5E8"/>
-            </a:solidFill>
+          <a:ln>
+            <a:noFill/>
           </a:ln>
         </p:spPr>
         <p:style>
@@ -4050,8 +4042,8 @@
         </p:nvSpPr>
         <p:spPr>
           <a:xfrm>
-            <a:off x="914400" y="4023360"/>
-            <a:ext cx="10241280" cy="1828800"/>
+            <a:off x="914400" y="3840480"/>
+            <a:ext cx="10241280" cy="1920240"/>
           </a:xfrm>
           <a:prstGeom prst="rect">
             <a:avLst/>
@@ -4065,7 +4057,7 @@
           <a:lstStyle/>
           <a:p>
             <a:pPr algn="l">
-              <a:defRPr sz="1400" b="0">
+              <a:defRPr sz="1300" b="0">
                 <a:solidFill>
                   <a:srgbClr val="FFFFFF"/>
                 </a:solidFill>
@@ -4077,11 +4069,15 @@
             <a:br/>
             <a:br/>
             <a:r>
-              <a:t>Oracle says no risk → add manufacturing + external context → same question,</a:t>
+              <a:t>Oracle says no risk → add manufacturing + external context →</a:t>
             </a:r>
             <a:br/>
             <a:r>
-              <a:t>real risk surfaced and quantified → agent recommends cross-site action →</a:t>
+              <a:t>same question, real risk surfaced and quantified in MW →</a:t>
+            </a:r>
+            <a:br/>
+            <a:r>
+              <a:t>agent recommends cross-site action →</a:t>
             </a:r>
             <a:br/>
             <a:r>
@@ -4104,7 +4100,7 @@
     <p:bg>
       <p:bgPr>
         <a:solidFill>
-          <a:srgbClr val="05142B"/>
+          <a:srgbClr val="F8FAFC"/>
         </a:solidFill>
         <a:effectLst/>
       </p:bgPr>
@@ -4118,7 +4114,7 @@
       <p:grpSpPr/>
       <p:pic>
         <p:nvPicPr>
-          <p:cNvPr id="2" name="Picture 1" descr="snowflake_logo_white.png"/>
+          <p:cNvPr id="2" name="Picture 1" descr="sf_logo_combined.png"/>
           <p:cNvPicPr>
             <a:picLocks noChangeAspect="1"/>
           </p:cNvPicPr>
@@ -4132,8 +4128,8 @@
         </p:blipFill>
         <p:spPr>
           <a:xfrm>
-            <a:off x="457200" y="274320"/>
-            <a:ext cx="457200" cy="457200"/>
+            <a:off x="365760" y="228600"/>
+            <a:ext cx="2468880" cy="411480"/>
           </a:xfrm>
           <a:prstGeom prst="rect">
             <a:avLst/>
@@ -4148,8 +4144,8 @@
         </p:nvSpPr>
         <p:spPr>
           <a:xfrm>
-            <a:off x="457200" y="6446520"/>
-            <a:ext cx="11247120" cy="27432"/>
+            <a:off x="0" y="6583680"/>
+            <a:ext cx="12191695" cy="36576"/>
           </a:xfrm>
           <a:prstGeom prst="rect">
             <a:avLst/>
@@ -4191,7 +4187,7 @@
         </p:nvSpPr>
         <p:spPr>
           <a:xfrm>
-            <a:off x="731520" y="731520"/>
+            <a:off x="731520" y="777240"/>
             <a:ext cx="10058400" cy="548640"/>
           </a:xfrm>
           <a:prstGeom prst="rect">
@@ -4206,9 +4202,9 @@
           <a:lstStyle/>
           <a:p>
             <a:pPr algn="l">
-              <a:defRPr sz="3200" b="1">
-                <a:solidFill>
-                  <a:srgbClr val="29B5E8"/>
+              <a:defRPr sz="3000" b="1">
+                <a:solidFill>
+                  <a:srgbClr val="11273F"/>
                 </a:solidFill>
               </a:defRPr>
             </a:pPr>
@@ -4227,7 +4223,7 @@
         <p:spPr>
           <a:xfrm>
             <a:off x="914400" y="1463040"/>
-            <a:ext cx="2286000" cy="457200"/>
+            <a:ext cx="2560320" cy="457200"/>
           </a:xfrm>
           <a:prstGeom prst="rect">
             <a:avLst/>
@@ -4241,7 +4237,7 @@
           <a:lstStyle/>
           <a:p>
             <a:pPr algn="l">
-              <a:defRPr sz="1200" b="1">
+              <a:defRPr sz="1100" b="1">
                 <a:solidFill>
                   <a:srgbClr val="29B5E8"/>
                 </a:solidFill>
@@ -4261,7 +4257,7 @@
         </p:nvSpPr>
         <p:spPr>
           <a:xfrm>
-            <a:off x="3200400" y="1463040"/>
+            <a:off x="3474720" y="1463040"/>
             <a:ext cx="8229600" cy="457200"/>
           </a:xfrm>
           <a:prstGeom prst="rect">
@@ -4276,9 +4272,9 @@
           <a:lstStyle/>
           <a:p>
             <a:pPr algn="l">
-              <a:defRPr sz="1200" b="0">
-                <a:solidFill>
-                  <a:srgbClr val="FFFFFF"/>
+              <a:defRPr sz="1100" b="0">
+                <a:solidFill>
+                  <a:srgbClr val="333333"/>
                 </a:solidFill>
               </a:defRPr>
             </a:pPr>
@@ -4296,8 +4292,8 @@
         </p:nvSpPr>
         <p:spPr>
           <a:xfrm>
-            <a:off x="914400" y="2011680"/>
-            <a:ext cx="2286000" cy="457200"/>
+            <a:off x="914400" y="2039112"/>
+            <a:ext cx="2560320" cy="457200"/>
           </a:xfrm>
           <a:prstGeom prst="rect">
             <a:avLst/>
@@ -4311,7 +4307,7 @@
           <a:lstStyle/>
           <a:p>
             <a:pPr algn="l">
-              <a:defRPr sz="1200" b="1">
+              <a:defRPr sz="1100" b="1">
                 <a:solidFill>
                   <a:srgbClr val="29B5E8"/>
                 </a:solidFill>
@@ -4331,7 +4327,7 @@
         </p:nvSpPr>
         <p:spPr>
           <a:xfrm>
-            <a:off x="3200400" y="2011680"/>
+            <a:off x="3474720" y="2039112"/>
             <a:ext cx="8229600" cy="457200"/>
           </a:xfrm>
           <a:prstGeom prst="rect">
@@ -4346,14 +4342,14 @@
           <a:lstStyle/>
           <a:p>
             <a:pPr algn="l">
-              <a:defRPr sz="1200" b="0">
-                <a:solidFill>
-                  <a:srgbClr val="FFFFFF"/>
-                </a:solidFill>
-              </a:defRPr>
-            </a:pPr>
-            <a:r>
-              <a:t>Core message slide 2</a:t>
+              <a:defRPr sz="1100" b="0">
+                <a:solidFill>
+                  <a:srgbClr val="333333"/>
+                </a:solidFill>
+              </a:defRPr>
+            </a:pPr>
+            <a:r>
+              <a:t>Lead and close with the core message (Slide 2)</a:t>
             </a:r>
           </a:p>
         </p:txBody>
@@ -4366,8 +4362,8 @@
         </p:nvSpPr>
         <p:spPr>
           <a:xfrm>
-            <a:off x="914400" y="2560320"/>
-            <a:ext cx="2286000" cy="457200"/>
+            <a:off x="914400" y="2615184"/>
+            <a:ext cx="2560320" cy="457200"/>
           </a:xfrm>
           <a:prstGeom prst="rect">
             <a:avLst/>
@@ -4381,7 +4377,7 @@
           <a:lstStyle/>
           <a:p>
             <a:pPr algn="l">
-              <a:defRPr sz="1200" b="1">
+              <a:defRPr sz="1100" b="1">
                 <a:solidFill>
                   <a:srgbClr val="29B5E8"/>
                 </a:solidFill>
@@ -4401,7 +4397,7 @@
         </p:nvSpPr>
         <p:spPr>
           <a:xfrm>
-            <a:off x="3200400" y="2560320"/>
+            <a:off x="3474720" y="2615184"/>
             <a:ext cx="8229600" cy="457200"/>
           </a:xfrm>
           <a:prstGeom prst="rect">
@@ -4416,14 +4412,14 @@
           <a:lstStyle/>
           <a:p>
             <a:pPr algn="l">
-              <a:defRPr sz="1200" b="0">
-                <a:solidFill>
-                  <a:srgbClr val="FFFFFF"/>
-                </a:solidFill>
-              </a:defRPr>
-            </a:pPr>
-            <a:r>
-              <a:t>Data boundary, not failure</a:t>
+              <a:defRPr sz="1100" b="0">
+                <a:solidFill>
+                  <a:srgbClr val="333333"/>
+                </a:solidFill>
+              </a:defRPr>
+            </a:pPr>
+            <a:r>
+              <a:t>"That's a data boundary, not a failure" — say it out loud</a:t>
             </a:r>
           </a:p>
         </p:txBody>
@@ -4436,8 +4432,8 @@
         </p:nvSpPr>
         <p:spPr>
           <a:xfrm>
-            <a:off x="914400" y="3108960"/>
-            <a:ext cx="2286000" cy="457200"/>
+            <a:off x="914400" y="3191256"/>
+            <a:ext cx="2560320" cy="457200"/>
           </a:xfrm>
           <a:prstGeom prst="rect">
             <a:avLst/>
@@ -4451,7 +4447,7 @@
           <a:lstStyle/>
           <a:p>
             <a:pPr algn="l">
-              <a:defRPr sz="1200" b="1">
+              <a:defRPr sz="1100" b="1">
                 <a:solidFill>
                   <a:srgbClr val="29B5E8"/>
                 </a:solidFill>
@@ -4471,7 +4467,7 @@
         </p:nvSpPr>
         <p:spPr>
           <a:xfrm>
-            <a:off x="3200400" y="3108960"/>
+            <a:off x="3474720" y="3191256"/>
             <a:ext cx="8229600" cy="457200"/>
           </a:xfrm>
           <a:prstGeom prst="rect">
@@ -4486,14 +4482,14 @@
           <a:lstStyle/>
           <a:p>
             <a:pPr algn="l">
-              <a:defRPr sz="1200" b="0">
-                <a:solidFill>
-                  <a:srgbClr val="FFFFFF"/>
-                </a:solidFill>
-              </a:defRPr>
-            </a:pPr>
-            <a:r>
-              <a:t>External = simulated Marketplace</a:t>
+              <a:defRPr sz="1100" b="0">
+                <a:solidFill>
+                  <a:srgbClr val="333333"/>
+                </a:solidFill>
+              </a:defRPr>
+            </a:pPr>
+            <a:r>
+              <a:t>"External signal is simulated; in production = live Marketplace"</a:t>
             </a:r>
           </a:p>
         </p:txBody>
@@ -4506,8 +4502,8 @@
         </p:nvSpPr>
         <p:spPr>
           <a:xfrm>
-            <a:off x="914400" y="3657600"/>
-            <a:ext cx="2286000" cy="457200"/>
+            <a:off x="914400" y="3767328"/>
+            <a:ext cx="2560320" cy="457200"/>
           </a:xfrm>
           <a:prstGeom prst="rect">
             <a:avLst/>
@@ -4521,7 +4517,7 @@
           <a:lstStyle/>
           <a:p>
             <a:pPr algn="l">
-              <a:defRPr sz="1200" b="1">
+              <a:defRPr sz="1100" b="1">
                 <a:solidFill>
                   <a:srgbClr val="29B5E8"/>
                 </a:solidFill>
@@ -4541,7 +4537,7 @@
         </p:nvSpPr>
         <p:spPr>
           <a:xfrm>
-            <a:off x="3200400" y="3657600"/>
+            <a:off x="3474720" y="3767328"/>
             <a:ext cx="8229600" cy="457200"/>
           </a:xfrm>
           <a:prstGeom prst="rect">
@@ -4556,14 +4552,14 @@
           <a:lstStyle/>
           <a:p>
             <a:pPr algn="l">
-              <a:defRPr sz="1200" b="0">
-                <a:solidFill>
-                  <a:srgbClr val="FFFFFF"/>
-                </a:solidFill>
-              </a:defRPr>
-            </a:pPr>
-            <a:r>
-              <a:t>MW and $ always</a:t>
+              <a:defRPr sz="1100" b="0">
+                <a:solidFill>
+                  <a:srgbClr val="333333"/>
+                </a:solidFill>
+              </a:defRPr>
+            </a:pPr>
+            <a:r>
+              <a:t>Always land in MW and $ — that makes the CSCO lean in</a:t>
             </a:r>
           </a:p>
         </p:txBody>
@@ -4576,8 +4572,8 @@
         </p:nvSpPr>
         <p:spPr>
           <a:xfrm>
-            <a:off x="914400" y="4206240"/>
-            <a:ext cx="2286000" cy="457200"/>
+            <a:off x="914400" y="4343400"/>
+            <a:ext cx="2560320" cy="457200"/>
           </a:xfrm>
           <a:prstGeom prst="rect">
             <a:avLst/>
@@ -4591,7 +4587,7 @@
           <a:lstStyle/>
           <a:p>
             <a:pPr algn="l">
-              <a:defRPr sz="1200" b="1">
+              <a:defRPr sz="1100" b="1">
                 <a:solidFill>
                   <a:srgbClr val="29B5E8"/>
                 </a:solidFill>
@@ -4611,7 +4607,7 @@
         </p:nvSpPr>
         <p:spPr>
           <a:xfrm>
-            <a:off x="3200400" y="4206240"/>
+            <a:off x="3474720" y="4343400"/>
             <a:ext cx="8229600" cy="457200"/>
           </a:xfrm>
           <a:prstGeom prst="rect">
@@ -4626,14 +4622,14 @@
           <a:lstStyle/>
           <a:p>
             <a:pPr algn="l">
-              <a:defRPr sz="1200" b="0">
-                <a:solidFill>
-                  <a:srgbClr val="FFFFFF"/>
-                </a:solidFill>
-              </a:defRPr>
-            </a:pPr>
-            <a:r>
-              <a:t>Model choice, cost control, human loop</a:t>
+              <a:defRPr sz="1100" b="0">
+                <a:solidFill>
+                  <a:srgbClr val="333333"/>
+                </a:solidFill>
+              </a:defRPr>
+            </a:pPr>
+            <a:r>
+              <a:t>"You choose the model, control the cost, human in the loop"</a:t>
             </a:r>
           </a:p>
         </p:txBody>
@@ -4646,8 +4642,8 @@
         </p:nvSpPr>
         <p:spPr>
           <a:xfrm>
-            <a:off x="914400" y="4754879"/>
-            <a:ext cx="2286000" cy="457200"/>
+            <a:off x="914400" y="4919472"/>
+            <a:ext cx="2560320" cy="457200"/>
           </a:xfrm>
           <a:prstGeom prst="rect">
             <a:avLst/>
@@ -4661,14 +4657,14 @@
           <a:lstStyle/>
           <a:p>
             <a:pPr algn="l">
-              <a:defRPr sz="1200" b="1">
+              <a:defRPr sz="1100" b="1">
                 <a:solidFill>
                   <a:srgbClr val="29B5E8"/>
                 </a:solidFill>
               </a:defRPr>
             </a:pPr>
             <a:r>
-              <a:t>Label</a:t>
+              <a:t>Label Data</a:t>
             </a:r>
           </a:p>
         </p:txBody>
@@ -4681,7 +4677,7 @@
         </p:nvSpPr>
         <p:spPr>
           <a:xfrm>
-            <a:off x="3200400" y="4754879"/>
+            <a:off x="3474720" y="4919472"/>
             <a:ext cx="8229600" cy="457200"/>
           </a:xfrm>
           <a:prstGeom prst="rect">
@@ -4696,14 +4692,14 @@
           <a:lstStyle/>
           <a:p>
             <a:pPr algn="l">
-              <a:defRPr sz="1200" b="0">
-                <a:solidFill>
-                  <a:srgbClr val="FFFFFF"/>
-                </a:solidFill>
-              </a:defRPr>
-            </a:pPr>
-            <a:r>
-              <a:t>Plants real, data simulated</a:t>
+              <a:defRPr sz="1100" b="0">
+                <a:solidFill>
+                  <a:srgbClr val="333333"/>
+                </a:solidFill>
+              </a:defRPr>
+            </a:pPr>
+            <a:r>
+              <a:t>Plants are real (AL, OH, LA). Data is simulated but labeled.</a:t>
             </a:r>
           </a:p>
         </p:txBody>
@@ -4716,8 +4712,8 @@
         </p:nvSpPr>
         <p:spPr>
           <a:xfrm>
-            <a:off x="914400" y="5303520"/>
-            <a:ext cx="2286000" cy="457200"/>
+            <a:off x="914400" y="5495544"/>
+            <a:ext cx="2560320" cy="457200"/>
           </a:xfrm>
           <a:prstGeom prst="rect">
             <a:avLst/>
@@ -4731,7 +4727,7 @@
           <a:lstStyle/>
           <a:p>
             <a:pPr algn="l">
-              <a:defRPr sz="1200" b="1">
+              <a:defRPr sz="1100" b="1">
                 <a:solidFill>
                   <a:srgbClr val="29B5E8"/>
                 </a:solidFill>
@@ -4751,7 +4747,7 @@
         </p:nvSpPr>
         <p:spPr>
           <a:xfrm>
-            <a:off x="3200400" y="5303520"/>
+            <a:off x="3474720" y="5495544"/>
             <a:ext cx="8229600" cy="457200"/>
           </a:xfrm>
           <a:prstGeom prst="rect">
@@ -4766,14 +4762,14 @@
           <a:lstStyle/>
           <a:p>
             <a:pPr algn="l">
-              <a:defRPr sz="1200" b="0">
-                <a:solidFill>
-                  <a:srgbClr val="FFFFFF"/>
-                </a:solidFill>
-              </a:defRPr>
-            </a:pPr>
-            <a:r>
-              <a:t>Glass + tellurium = public risk</a:t>
+              <a:defRPr sz="1100" b="0">
+                <a:solidFill>
+                  <a:srgbClr val="333333"/>
+                </a:solidFill>
+              </a:defRPr>
+            </a:pPr>
+            <a:r>
+              <a:t>Substrate glass + tellurium = publicly disclosed risk factors</a:t>
             </a:r>
           </a:p>
         </p:txBody>
@@ -4792,7 +4788,7 @@
     <p:bg>
       <p:bgPr>
         <a:solidFill>
-          <a:srgbClr val="05142B"/>
+          <a:srgbClr val="11273F"/>
         </a:solidFill>
         <a:effectLst/>
       </p:bgPr>
@@ -4806,7 +4802,7 @@
       <p:grpSpPr/>
       <p:pic>
         <p:nvPicPr>
-          <p:cNvPr id="2" name="Picture 1" descr="snowflake_logo_white.png"/>
+          <p:cNvPr id="2" name="Picture 1" descr="sf_logo_combined.png"/>
           <p:cNvPicPr>
             <a:picLocks noChangeAspect="1"/>
           </p:cNvPicPr>
@@ -4820,8 +4816,8 @@
         </p:blipFill>
         <p:spPr>
           <a:xfrm>
-            <a:off x="457200" y="274320"/>
-            <a:ext cx="457200" cy="457200"/>
+            <a:off x="365760" y="228600"/>
+            <a:ext cx="2468880" cy="411480"/>
           </a:xfrm>
           <a:prstGeom prst="rect">
             <a:avLst/>
@@ -4836,8 +4832,8 @@
         </p:nvSpPr>
         <p:spPr>
           <a:xfrm>
-            <a:off x="457200" y="6446520"/>
-            <a:ext cx="11247120" cy="27432"/>
+            <a:off x="0" y="6583680"/>
+            <a:ext cx="12191695" cy="36576"/>
           </a:xfrm>
           <a:prstGeom prst="rect">
             <a:avLst/>
@@ -4873,22 +4869,22 @@
       </p:sp>
       <p:pic>
         <p:nvPicPr>
-          <p:cNvPr id="4" name="Picture 3" descr="snowflake_logo_white.png"/>
+          <p:cNvPr id="4" name="Picture 3" descr="sf_icon_400.png"/>
           <p:cNvPicPr>
             <a:picLocks noChangeAspect="1"/>
           </p:cNvPicPr>
           <p:nvPr/>
         </p:nvPicPr>
         <p:blipFill>
-          <a:blip r:embed="rId2"/>
+          <a:blip r:embed="rId3"/>
           <a:stretch>
             <a:fillRect/>
           </a:stretch>
         </p:blipFill>
         <p:spPr>
           <a:xfrm>
-            <a:off x="8229600" y="1828800"/>
-            <a:ext cx="3200400" cy="3200400"/>
+            <a:off x="8686800" y="1371600"/>
+            <a:ext cx="6445110" cy="3657600"/>
           </a:xfrm>
           <a:prstGeom prst="rect">
             <a:avLst/>
@@ -4903,7 +4899,7 @@
         </p:nvSpPr>
         <p:spPr>
           <a:xfrm>
-            <a:off x="731520" y="731520"/>
+            <a:off x="731520" y="777240"/>
             <a:ext cx="10058400" cy="548640"/>
           </a:xfrm>
           <a:prstGeom prst="rect">
@@ -4918,7 +4914,7 @@
           <a:lstStyle/>
           <a:p>
             <a:pPr algn="l">
-              <a:defRPr sz="3200" b="1">
+              <a:defRPr sz="3000" b="1">
                 <a:solidFill>
                   <a:srgbClr val="29B5E8"/>
                 </a:solidFill>
@@ -4953,7 +4949,7 @@
           <a:lstStyle/>
           <a:p>
             <a:pPr algn="l">
-              <a:defRPr sz="1300" b="0">
+              <a:defRPr sz="1200" b="0">
                 <a:solidFill>
                   <a:srgbClr val="FFFFFF"/>
                 </a:solidFill>
@@ -4977,11 +4973,7 @@
             </a:r>
             <a:br/>
             <a:r>
-              <a:t>  11 tools | 15 sample questions</a:t>
-            </a:r>
-            <a:br/>
-            <a:r>
-              <a:t>  Budget: 60s / 32K tokens</a:t>
+              <a:t>  11 tools | 15 sample questions | 60s / 32K</a:t>
             </a:r>
             <a:br/>
             <a:br/>
@@ -4998,24 +4990,28 @@
             </a:r>
             <a:br/>
             <a:r>
-              <a:t>  RISK_INTELLIGENCE_SV (8 tables + ext)</a:t>
+              <a:t>  RISK_INTELLIGENCE_SV (8 tables + ext signals)</a:t>
             </a:r>
             <a:br/>
             <a:br/>
             <a:r>
-              <a:t>Scenario Data:</a:t>
+              <a:t>Key Scenario Data:</a:t>
             </a:r>
             <a:br/>
             <a:r>
-              <a:t>  Alabama glass: 18d | Ohio: 45d</a:t>
+              <a:t>  Alabama glass: 18 days (tight)</a:t>
             </a:r>
             <a:br/>
             <a:r>
-              <a:t>  ABC Glass OTD: 97%</a:t>
+              <a:t>  Ohio glass: 45 days (surplus)</a:t>
             </a:r>
             <a:br/>
             <a:r>
-              <a:t>  External: -19% vol, +71% dwell</a:t>
+              <a:t>  ABC Glass OTD: 97% historical</a:t>
+            </a:r>
+            <a:br/>
+            <a:r>
+              <a:t>  External: -19% vol, +71% dwell time</a:t>
             </a:r>
             <a:br/>
             <a:br/>
@@ -5039,7 +5035,7 @@
     <p:bg>
       <p:bgPr>
         <a:solidFill>
-          <a:srgbClr val="05142B"/>
+          <a:srgbClr val="F8FAFC"/>
         </a:solidFill>
         <a:effectLst/>
       </p:bgPr>
@@ -5053,7 +5049,7 @@
       <p:grpSpPr/>
       <p:pic>
         <p:nvPicPr>
-          <p:cNvPr id="2" name="Picture 1" descr="snowflake_logo_white.png"/>
+          <p:cNvPr id="2" name="Picture 1" descr="sf_logo_combined.png"/>
           <p:cNvPicPr>
             <a:picLocks noChangeAspect="1"/>
           </p:cNvPicPr>
@@ -5067,8 +5063,8 @@
         </p:blipFill>
         <p:spPr>
           <a:xfrm>
-            <a:off x="457200" y="274320"/>
-            <a:ext cx="457200" cy="457200"/>
+            <a:off x="365760" y="228600"/>
+            <a:ext cx="2468880" cy="411480"/>
           </a:xfrm>
           <a:prstGeom prst="rect">
             <a:avLst/>
@@ -5083,8 +5079,8 @@
         </p:nvSpPr>
         <p:spPr>
           <a:xfrm>
-            <a:off x="457200" y="6446520"/>
-            <a:ext cx="11247120" cy="27432"/>
+            <a:off x="0" y="6583680"/>
+            <a:ext cx="12191695" cy="36576"/>
           </a:xfrm>
           <a:prstGeom prst="rect">
             <a:avLst/>
@@ -5127,7 +5123,7 @@
         <p:spPr>
           <a:xfrm>
             <a:off x="731520" y="914400"/>
-            <a:ext cx="10058400" cy="731520"/>
+            <a:ext cx="10058400" cy="640080"/>
           </a:xfrm>
           <a:prstGeom prst="rect">
             <a:avLst/>
@@ -5141,9 +5137,9 @@
           <a:lstStyle/>
           <a:p>
             <a:pPr algn="l">
-              <a:defRPr sz="3600" b="1">
-                <a:solidFill>
-                  <a:srgbClr val="29B5E8"/>
+              <a:defRPr sz="3400" b="1">
+                <a:solidFill>
+                  <a:srgbClr val="11273F"/>
                 </a:solidFill>
               </a:defRPr>
             </a:pPr>
@@ -5161,19 +5157,17 @@
         </p:nvSpPr>
         <p:spPr>
           <a:xfrm>
-            <a:off x="731520" y="1828800"/>
-            <a:ext cx="10515600" cy="3474720"/>
+            <a:off x="731520" y="1737360"/>
+            <a:ext cx="10515600" cy="3657600"/>
           </a:xfrm>
           <a:prstGeom prst="roundRect">
             <a:avLst/>
           </a:prstGeom>
           <a:solidFill>
-            <a:srgbClr val="0A1E38"/>
+            <a:srgbClr val="11273F"/>
           </a:solidFill>
-          <a:ln w="25400">
-            <a:solidFill>
-              <a:srgbClr val="29B5E8"/>
-            </a:solidFill>
+          <a:ln>
+            <a:noFill/>
           </a:ln>
         </p:spPr>
         <p:style>
@@ -5206,7 +5200,7 @@
         </p:nvSpPr>
         <p:spPr>
           <a:xfrm>
-            <a:off x="1188720" y="2103120"/>
+            <a:off x="1188720" y="2011680"/>
             <a:ext cx="9601200" cy="3200400"/>
           </a:xfrm>
           <a:prstGeom prst="rect">
@@ -5248,81 +5242,9 @@
           </a:p>
         </p:txBody>
       </p:sp>
-      <p:pic>
-        <p:nvPicPr>
-          <p:cNvPr id="7" name="Picture 6" descr="icon_oracle.png"/>
-          <p:cNvPicPr>
-            <a:picLocks noChangeAspect="1"/>
-          </p:cNvPicPr>
-          <p:nvPr/>
-        </p:nvPicPr>
-        <p:blipFill>
-          <a:blip r:embed="rId3"/>
-          <a:stretch>
-            <a:fillRect/>
-          </a:stretch>
-        </p:blipFill>
-        <p:spPr>
-          <a:xfrm>
-            <a:off x="9601200" y="2103120"/>
-            <a:ext cx="548640" cy="548640"/>
-          </a:xfrm>
-          <a:prstGeom prst="rect">
-            <a:avLst/>
-          </a:prstGeom>
-        </p:spPr>
-      </p:pic>
-      <p:pic>
-        <p:nvPicPr>
-          <p:cNvPr id="8" name="Picture 7" descr="icon_mfg.png"/>
-          <p:cNvPicPr>
-            <a:picLocks noChangeAspect="1"/>
-          </p:cNvPicPr>
-          <p:nvPr/>
-        </p:nvPicPr>
-        <p:blipFill>
-          <a:blip r:embed="rId4"/>
-          <a:stretch>
-            <a:fillRect/>
-          </a:stretch>
-        </p:blipFill>
-        <p:spPr>
-          <a:xfrm>
-            <a:off x="9601200" y="2926080"/>
-            <a:ext cx="548640" cy="548640"/>
-          </a:xfrm>
-          <a:prstGeom prst="rect">
-            <a:avLst/>
-          </a:prstGeom>
-        </p:spPr>
-      </p:pic>
-      <p:pic>
-        <p:nvPicPr>
-          <p:cNvPr id="9" name="Picture 8" descr="icon_external.png"/>
-          <p:cNvPicPr>
-            <a:picLocks noChangeAspect="1"/>
-          </p:cNvPicPr>
-          <p:nvPr/>
-        </p:nvPicPr>
-        <p:blipFill>
-          <a:blip r:embed="rId5"/>
-          <a:stretch>
-            <a:fillRect/>
-          </a:stretch>
-        </p:blipFill>
-        <p:spPr>
-          <a:xfrm>
-            <a:off x="9601200" y="3749039"/>
-            <a:ext cx="548640" cy="548640"/>
-          </a:xfrm>
-          <a:prstGeom prst="rect">
-            <a:avLst/>
-          </a:prstGeom>
-        </p:spPr>
-      </p:pic>
-      <p:sp>
-        <p:nvSpPr>
-          <p:cNvPr id="10" name="TextBox 9"/>
+      <p:sp>
+        <p:nvSpPr>
+          <p:cNvPr id="7" name="TextBox 6"/>
           <p:cNvSpPr txBox="1"/>
           <p:nvPr/>
         </p:nvSpPr>
@@ -5369,7 +5291,7 @@
     <p:bg>
       <p:bgPr>
         <a:solidFill>
-          <a:srgbClr val="05142B"/>
+          <a:srgbClr val="F8FAFC"/>
         </a:solidFill>
         <a:effectLst/>
       </p:bgPr>
@@ -5383,7 +5305,7 @@
       <p:grpSpPr/>
       <p:pic>
         <p:nvPicPr>
-          <p:cNvPr id="2" name="Picture 1" descr="snowflake_logo_white.png"/>
+          <p:cNvPr id="2" name="Picture 1" descr="sf_logo_combined.png"/>
           <p:cNvPicPr>
             <a:picLocks noChangeAspect="1"/>
           </p:cNvPicPr>
@@ -5397,8 +5319,8 @@
         </p:blipFill>
         <p:spPr>
           <a:xfrm>
-            <a:off x="457200" y="274320"/>
-            <a:ext cx="457200" cy="457200"/>
+            <a:off x="365760" y="228600"/>
+            <a:ext cx="2468880" cy="411480"/>
           </a:xfrm>
           <a:prstGeom prst="rect">
             <a:avLst/>
@@ -5413,8 +5335,8 @@
         </p:nvSpPr>
         <p:spPr>
           <a:xfrm>
-            <a:off x="457200" y="6446520"/>
-            <a:ext cx="11247120" cy="27432"/>
+            <a:off x="0" y="6583680"/>
+            <a:ext cx="12191695" cy="36576"/>
           </a:xfrm>
           <a:prstGeom prst="rect">
             <a:avLst/>
@@ -5457,7 +5379,7 @@
         <p:spPr>
           <a:xfrm>
             <a:off x="731520" y="822960"/>
-            <a:ext cx="10058400" cy="731520"/>
+            <a:ext cx="10058400" cy="640080"/>
           </a:xfrm>
           <a:prstGeom prst="rect">
             <a:avLst/>
@@ -5471,9 +5393,9 @@
           <a:lstStyle/>
           <a:p>
             <a:pPr algn="l">
-              <a:defRPr sz="3600" b="1">
-                <a:solidFill>
-                  <a:srgbClr val="29B5E8"/>
+              <a:defRPr sz="3400" b="1">
+                <a:solidFill>
+                  <a:srgbClr val="11273F"/>
                 </a:solidFill>
               </a:defRPr>
             </a:pPr>
@@ -5491,8 +5413,8 @@
         </p:nvSpPr>
         <p:spPr>
           <a:xfrm>
-            <a:off x="731520" y="1554480"/>
-            <a:ext cx="10058400" cy="457200"/>
+            <a:off x="731520" y="1463040"/>
+            <a:ext cx="10058400" cy="365760"/>
           </a:xfrm>
           <a:prstGeom prst="rect">
             <a:avLst/>
@@ -5506,9 +5428,9 @@
           <a:lstStyle/>
           <a:p>
             <a:pPr algn="l">
-              <a:defRPr sz="1500" b="0">
-                <a:solidFill>
-                  <a:srgbClr val="8E9EAB"/>
+              <a:defRPr sz="1400" b="0">
+                <a:solidFill>
+                  <a:srgbClr val="6B7B8D"/>
                 </a:solidFill>
               </a:defRPr>
             </a:pPr>
@@ -5526,19 +5448,17 @@
         </p:nvSpPr>
         <p:spPr>
           <a:xfrm>
-            <a:off x="548640" y="2286000"/>
-            <a:ext cx="10972800" cy="1463040"/>
+            <a:off x="548640" y="2103120"/>
+            <a:ext cx="10972800" cy="1371600"/>
           </a:xfrm>
           <a:prstGeom prst="roundRect">
             <a:avLst/>
           </a:prstGeom>
           <a:solidFill>
-            <a:srgbClr val="0A1E38"/>
+            <a:srgbClr val="11273F"/>
           </a:solidFill>
-          <a:ln w="25400">
-            <a:solidFill>
-              <a:srgbClr val="29B5E8"/>
-            </a:solidFill>
+          <a:ln>
+            <a:noFill/>
           </a:ln>
         </p:spPr>
         <p:style>
@@ -5571,7 +5491,7 @@
         </p:nvSpPr>
         <p:spPr>
           <a:xfrm>
-            <a:off x="1097280" y="2560320"/>
+            <a:off x="1097280" y="2286000"/>
             <a:ext cx="10058400" cy="1097280"/>
           </a:xfrm>
           <a:prstGeom prst="rect">
@@ -5586,7 +5506,7 @@
           <a:lstStyle/>
           <a:p>
             <a:pPr algn="ctr">
-              <a:defRPr sz="2200" b="1">
+              <a:defRPr sz="2100" b="1">
                 <a:solidFill>
                   <a:srgbClr val="FFFFFF"/>
                 </a:solidFill>
@@ -5602,30 +5522,49 @@
           </a:p>
         </p:txBody>
       </p:sp>
-      <p:pic>
-        <p:nvPicPr>
-          <p:cNvPr id="8" name="Picture 7" descr="icon_check.png"/>
-          <p:cNvPicPr>
-            <a:picLocks noChangeAspect="1"/>
-          </p:cNvPicPr>
-          <p:nvPr/>
-        </p:nvPicPr>
-        <p:blipFill>
-          <a:blip r:embed="rId3"/>
-          <a:stretch>
-            <a:fillRect/>
-          </a:stretch>
-        </p:blipFill>
-        <p:spPr>
-          <a:xfrm>
-            <a:off x="914400" y="4206240"/>
+      <p:sp>
+        <p:nvSpPr>
+          <p:cNvPr id="8" name="Rounded Rectangle 7"/>
+          <p:cNvSpPr/>
+          <p:nvPr/>
+        </p:nvSpPr>
+        <p:spPr>
+          <a:xfrm>
+            <a:off x="731520" y="3931920"/>
             <a:ext cx="457200" cy="457200"/>
           </a:xfrm>
-          <a:prstGeom prst="rect">
-            <a:avLst/>
-          </a:prstGeom>
-        </p:spPr>
-      </p:pic>
+          <a:prstGeom prst="roundRect">
+            <a:avLst/>
+          </a:prstGeom>
+          <a:solidFill>
+            <a:srgbClr val="2E7D32"/>
+          </a:solidFill>
+          <a:ln>
+            <a:noFill/>
+          </a:ln>
+        </p:spPr>
+        <p:style>
+          <a:lnRef idx="1">
+            <a:schemeClr val="accent1"/>
+          </a:lnRef>
+          <a:fillRef idx="3">
+            <a:schemeClr val="accent1"/>
+          </a:fillRef>
+          <a:effectRef idx="2">
+            <a:schemeClr val="accent1"/>
+          </a:effectRef>
+          <a:fontRef idx="minor">
+            <a:schemeClr val="lt1"/>
+          </a:fontRef>
+        </p:style>
+        <p:txBody>
+          <a:bodyPr rtlCol="0" anchor="ctr"/>
+          <a:lstStyle/>
+          <a:p>
+            <a:pPr algn="ctr"/>
+          </a:p>
+        </p:txBody>
+      </p:sp>
       <p:sp>
         <p:nvSpPr>
           <p:cNvPr id="9" name="TextBox 8"/>
@@ -5634,7 +5573,7 @@
         </p:nvSpPr>
         <p:spPr>
           <a:xfrm>
-            <a:off x="1463040" y="4206240"/>
+            <a:off x="1371600" y="3931920"/>
             <a:ext cx="9144000" cy="457200"/>
           </a:xfrm>
           <a:prstGeom prst="rect">
@@ -5649,7 +5588,7 @@
           <a:lstStyle/>
           <a:p>
             <a:pPr algn="l">
-              <a:defRPr sz="1500" b="0">
+              <a:defRPr sz="1400" b="0">
                 <a:solidFill>
                   <a:srgbClr val="2E7D32"/>
                 </a:solidFill>
@@ -5661,30 +5600,49 @@
           </a:p>
         </p:txBody>
       </p:sp>
-      <p:pic>
-        <p:nvPicPr>
-          <p:cNvPr id="10" name="Picture 9" descr="icon_alert.png"/>
-          <p:cNvPicPr>
-            <a:picLocks noChangeAspect="1"/>
-          </p:cNvPicPr>
-          <p:nvPr/>
-        </p:nvPicPr>
-        <p:blipFill>
-          <a:blip r:embed="rId4"/>
-          <a:stretch>
-            <a:fillRect/>
-          </a:stretch>
-        </p:blipFill>
-        <p:spPr>
-          <a:xfrm>
-            <a:off x="914400" y="4846320"/>
+      <p:sp>
+        <p:nvSpPr>
+          <p:cNvPr id="10" name="Rounded Rectangle 9"/>
+          <p:cNvSpPr/>
+          <p:nvPr/>
+        </p:nvSpPr>
+        <p:spPr>
+          <a:xfrm>
+            <a:off x="731520" y="4572000"/>
             <a:ext cx="457200" cy="457200"/>
           </a:xfrm>
-          <a:prstGeom prst="rect">
-            <a:avLst/>
-          </a:prstGeom>
-        </p:spPr>
-      </p:pic>
+          <a:prstGeom prst="roundRect">
+            <a:avLst/>
+          </a:prstGeom>
+          <a:solidFill>
+            <a:srgbClr val="E65100"/>
+          </a:solidFill>
+          <a:ln>
+            <a:noFill/>
+          </a:ln>
+        </p:spPr>
+        <p:style>
+          <a:lnRef idx="1">
+            <a:schemeClr val="accent1"/>
+          </a:lnRef>
+          <a:fillRef idx="3">
+            <a:schemeClr val="accent1"/>
+          </a:fillRef>
+          <a:effectRef idx="2">
+            <a:schemeClr val="accent1"/>
+          </a:effectRef>
+          <a:fontRef idx="minor">
+            <a:schemeClr val="lt1"/>
+          </a:fontRef>
+        </p:style>
+        <p:txBody>
+          <a:bodyPr rtlCol="0" anchor="ctr"/>
+          <a:lstStyle/>
+          <a:p>
+            <a:pPr algn="ctr"/>
+          </a:p>
+        </p:txBody>
+      </p:sp>
       <p:sp>
         <p:nvSpPr>
           <p:cNvPr id="11" name="TextBox 10"/>
@@ -5693,7 +5651,7 @@
         </p:nvSpPr>
         <p:spPr>
           <a:xfrm>
-            <a:off x="1463040" y="4846320"/>
+            <a:off x="1371600" y="4572000"/>
             <a:ext cx="9144000" cy="457200"/>
           </a:xfrm>
           <a:prstGeom prst="rect">
@@ -5708,7 +5666,7 @@
           <a:lstStyle/>
           <a:p>
             <a:pPr algn="l">
-              <a:defRPr sz="1500" b="0">
+              <a:defRPr sz="1400" b="0">
                 <a:solidFill>
                   <a:srgbClr val="E65100"/>
                 </a:solidFill>
@@ -5720,30 +5678,49 @@
           </a:p>
         </p:txBody>
       </p:sp>
-      <p:pic>
-        <p:nvPicPr>
-          <p:cNvPr id="12" name="Picture 11" descr="icon_transfer.png"/>
-          <p:cNvPicPr>
-            <a:picLocks noChangeAspect="1"/>
-          </p:cNvPicPr>
-          <p:nvPr/>
-        </p:nvPicPr>
-        <p:blipFill>
-          <a:blip r:embed="rId5"/>
-          <a:stretch>
-            <a:fillRect/>
-          </a:stretch>
-        </p:blipFill>
-        <p:spPr>
-          <a:xfrm>
-            <a:off x="914400" y="5486400"/>
+      <p:sp>
+        <p:nvSpPr>
+          <p:cNvPr id="12" name="Rounded Rectangle 11"/>
+          <p:cNvSpPr/>
+          <p:nvPr/>
+        </p:nvSpPr>
+        <p:spPr>
+          <a:xfrm>
+            <a:off x="731520" y="5212080"/>
             <a:ext cx="457200" cy="457200"/>
           </a:xfrm>
-          <a:prstGeom prst="rect">
-            <a:avLst/>
-          </a:prstGeom>
-        </p:spPr>
-      </p:pic>
+          <a:prstGeom prst="roundRect">
+            <a:avLst/>
+          </a:prstGeom>
+          <a:solidFill>
+            <a:srgbClr val="6A1B9A"/>
+          </a:solidFill>
+          <a:ln>
+            <a:noFill/>
+          </a:ln>
+        </p:spPr>
+        <p:style>
+          <a:lnRef idx="1">
+            <a:schemeClr val="accent1"/>
+          </a:lnRef>
+          <a:fillRef idx="3">
+            <a:schemeClr val="accent1"/>
+          </a:fillRef>
+          <a:effectRef idx="2">
+            <a:schemeClr val="accent1"/>
+          </a:effectRef>
+          <a:fontRef idx="minor">
+            <a:schemeClr val="lt1"/>
+          </a:fontRef>
+        </p:style>
+        <p:txBody>
+          <a:bodyPr rtlCol="0" anchor="ctr"/>
+          <a:lstStyle/>
+          <a:p>
+            <a:pPr algn="ctr"/>
+          </a:p>
+        </p:txBody>
+      </p:sp>
       <p:sp>
         <p:nvSpPr>
           <p:cNvPr id="13" name="TextBox 12"/>
@@ -5752,7 +5729,7 @@
         </p:nvSpPr>
         <p:spPr>
           <a:xfrm>
-            <a:off x="1463040" y="5486400"/>
+            <a:off x="1371600" y="5212080"/>
             <a:ext cx="9144000" cy="457200"/>
           </a:xfrm>
           <a:prstGeom prst="rect">
@@ -5767,7 +5744,7 @@
           <a:lstStyle/>
           <a:p>
             <a:pPr algn="l">
-              <a:defRPr sz="1500" b="0">
+              <a:defRPr sz="1400" b="0">
                 <a:solidFill>
                   <a:srgbClr val="6A1B9A"/>
                 </a:solidFill>
@@ -5793,7 +5770,7 @@
     <p:bg>
       <p:bgPr>
         <a:solidFill>
-          <a:srgbClr val="05142B"/>
+          <a:srgbClr val="F8FAFC"/>
         </a:solidFill>
         <a:effectLst/>
       </p:bgPr>
@@ -5807,7 +5784,7 @@
       <p:grpSpPr/>
       <p:pic>
         <p:nvPicPr>
-          <p:cNvPr id="2" name="Picture 1" descr="snowflake_logo_white.png"/>
+          <p:cNvPr id="2" name="Picture 1" descr="sf_logo_combined.png"/>
           <p:cNvPicPr>
             <a:picLocks noChangeAspect="1"/>
           </p:cNvPicPr>
@@ -5821,8 +5798,8 @@
         </p:blipFill>
         <p:spPr>
           <a:xfrm>
-            <a:off x="457200" y="274320"/>
-            <a:ext cx="457200" cy="457200"/>
+            <a:off x="365760" y="228600"/>
+            <a:ext cx="2468880" cy="411480"/>
           </a:xfrm>
           <a:prstGeom prst="rect">
             <a:avLst/>
@@ -5837,8 +5814,8 @@
         </p:nvSpPr>
         <p:spPr>
           <a:xfrm>
-            <a:off x="457200" y="6446520"/>
-            <a:ext cx="11247120" cy="27432"/>
+            <a:off x="0" y="6583680"/>
+            <a:ext cx="12191695" cy="36576"/>
           </a:xfrm>
           <a:prstGeom prst="rect">
             <a:avLst/>
@@ -5880,8 +5857,8 @@
         </p:nvSpPr>
         <p:spPr>
           <a:xfrm>
-            <a:off x="731520" y="731520"/>
-            <a:ext cx="1645920" cy="548640"/>
+            <a:off x="731520" y="777240"/>
+            <a:ext cx="1463040" cy="457200"/>
           </a:xfrm>
           <a:prstGeom prst="roundRect">
             <a:avLst/>
@@ -5912,7 +5889,7 @@
           <a:lstStyle/>
           <a:p>
             <a:pPr algn="ctr">
-              <a:defRPr sz="1600" b="1">
+              <a:defRPr sz="1300" b="1">
                 <a:solidFill>
                   <a:srgbClr val="FFFFFF"/>
                 </a:solidFill>
@@ -5932,8 +5909,8 @@
         </p:nvSpPr>
         <p:spPr>
           <a:xfrm>
-            <a:off x="2560320" y="731520"/>
-            <a:ext cx="8229600" cy="548640"/>
+            <a:off x="2377440" y="777240"/>
+            <a:ext cx="8229600" cy="457200"/>
           </a:xfrm>
           <a:prstGeom prst="rect">
             <a:avLst/>
@@ -5947,9 +5924,9 @@
           <a:lstStyle/>
           <a:p>
             <a:pPr algn="l">
-              <a:defRPr sz="2400" b="1">
-                <a:solidFill>
-                  <a:srgbClr val="FFFFFF"/>
+              <a:defRPr sz="2200" b="1">
+                <a:solidFill>
+                  <a:srgbClr val="11273F"/>
                 </a:solidFill>
               </a:defRPr>
             </a:pPr>
@@ -5959,51 +5936,25 @@
           </a:p>
         </p:txBody>
       </p:sp>
-      <p:pic>
-        <p:nvPicPr>
-          <p:cNvPr id="6" name="Picture 5" descr="icon_oracle.png"/>
-          <p:cNvPicPr>
-            <a:picLocks noChangeAspect="1"/>
-          </p:cNvPicPr>
-          <p:nvPr/>
-        </p:nvPicPr>
-        <p:blipFill>
-          <a:blip r:embed="rId3"/>
-          <a:stretch>
-            <a:fillRect/>
-          </a:stretch>
-        </p:blipFill>
-        <p:spPr>
-          <a:xfrm>
-            <a:off x="10515600" y="640080"/>
-            <a:ext cx="731520" cy="731520"/>
-          </a:xfrm>
-          <a:prstGeom prst="rect">
-            <a:avLst/>
-          </a:prstGeom>
-        </p:spPr>
-      </p:pic>
-      <p:sp>
-        <p:nvSpPr>
-          <p:cNvPr id="7" name="Rounded Rectangle 6"/>
+      <p:sp>
+        <p:nvSpPr>
+          <p:cNvPr id="6" name="Rounded Rectangle 5"/>
           <p:cNvSpPr/>
           <p:nvPr/>
         </p:nvSpPr>
         <p:spPr>
           <a:xfrm>
-            <a:off x="731520" y="1645920"/>
-            <a:ext cx="5303520" cy="1371600"/>
+            <a:off x="731520" y="1554480"/>
+            <a:ext cx="10515600" cy="868680"/>
           </a:xfrm>
           <a:prstGeom prst="roundRect">
             <a:avLst/>
           </a:prstGeom>
           <a:solidFill>
-            <a:srgbClr val="0A1E38"/>
+            <a:srgbClr val="FFFFFF"/>
           </a:solidFill>
-          <a:ln w="25400">
-            <a:solidFill>
-              <a:srgbClr val="29B5E8"/>
-            </a:solidFill>
+          <a:ln>
+            <a:noFill/>
           </a:ln>
         </p:spPr>
         <p:style>
@@ -6030,14 +5981,14 @@
       </p:sp>
       <p:sp>
         <p:nvSpPr>
-          <p:cNvPr id="8" name="TextBox 7"/>
+          <p:cNvPr id="7" name="TextBox 6"/>
           <p:cNvSpPr txBox="1"/>
           <p:nvPr/>
         </p:nvSpPr>
         <p:spPr>
           <a:xfrm>
-            <a:off x="1005840" y="1737360"/>
-            <a:ext cx="4754880" cy="457200"/>
+            <a:off x="1005840" y="1645920"/>
+            <a:ext cx="4572000" cy="365760"/>
           </a:xfrm>
           <a:prstGeom prst="rect">
             <a:avLst/>
@@ -6051,9 +6002,9 @@
           <a:lstStyle/>
           <a:p>
             <a:pPr algn="l">
-              <a:defRPr sz="1500" b="1">
-                <a:solidFill>
-                  <a:srgbClr val="29B5E8"/>
+              <a:defRPr sz="1400" b="1">
+                <a:solidFill>
+                  <a:srgbClr val="11273F"/>
                 </a:solidFill>
               </a:defRPr>
             </a:pPr>
@@ -6065,14 +6016,14 @@
       </p:sp>
       <p:sp>
         <p:nvSpPr>
-          <p:cNvPr id="9" name="TextBox 8"/>
+          <p:cNvPr id="8" name="TextBox 7"/>
           <p:cNvSpPr txBox="1"/>
           <p:nvPr/>
         </p:nvSpPr>
         <p:spPr>
           <a:xfrm>
-            <a:off x="1005840" y="2194560"/>
-            <a:ext cx="4754880" cy="457200"/>
+            <a:off x="1005840" y="2011680"/>
+            <a:ext cx="9144000" cy="365760"/>
           </a:xfrm>
           <a:prstGeom prst="rect">
             <a:avLst/>
@@ -6088,37 +6039,35 @@
             <a:pPr algn="l">
               <a:defRPr sz="1200" b="0">
                 <a:solidFill>
-                  <a:srgbClr val="FFFFFF"/>
-                </a:solidFill>
-              </a:defRPr>
-            </a:pPr>
-            <a:r>
-              <a:t>Primary glass | Monterrey MX</a:t>
-            </a:r>
-          </a:p>
-        </p:txBody>
-      </p:sp>
-      <p:sp>
-        <p:nvSpPr>
-          <p:cNvPr id="10" name="Rounded Rectangle 9"/>
+                  <a:srgbClr val="6B7B8D"/>
+                </a:solidFill>
+              </a:defRPr>
+            </a:pPr>
+            <a:r>
+              <a:t>Primary substrate glass supplier — Monterrey, Mexico</a:t>
+            </a:r>
+          </a:p>
+        </p:txBody>
+      </p:sp>
+      <p:sp>
+        <p:nvSpPr>
+          <p:cNvPr id="9" name="Rounded Rectangle 8"/>
           <p:cNvSpPr/>
           <p:nvPr/>
         </p:nvSpPr>
         <p:spPr>
           <a:xfrm>
-            <a:off x="6400800" y="1645920"/>
-            <a:ext cx="5303520" cy="1371600"/>
+            <a:off x="731520" y="2560320"/>
+            <a:ext cx="10515600" cy="868680"/>
           </a:xfrm>
           <a:prstGeom prst="roundRect">
             <a:avLst/>
           </a:prstGeom>
           <a:solidFill>
-            <a:srgbClr val="0A1E38"/>
+            <a:srgbClr val="F0F7FF"/>
           </a:solidFill>
-          <a:ln w="25400">
-            <a:solidFill>
-              <a:srgbClr val="2E7D32"/>
-            </a:solidFill>
+          <a:ln>
+            <a:noFill/>
           </a:ln>
         </p:spPr>
         <p:style>
@@ -6145,14 +6094,14 @@
       </p:sp>
       <p:sp>
         <p:nvSpPr>
-          <p:cNvPr id="11" name="TextBox 10"/>
+          <p:cNvPr id="10" name="TextBox 9"/>
           <p:cNvSpPr txBox="1"/>
           <p:nvPr/>
         </p:nvSpPr>
         <p:spPr>
           <a:xfrm>
-            <a:off x="6675120" y="1737360"/>
-            <a:ext cx="4754880" cy="457200"/>
+            <a:off x="1005840" y="2651760"/>
+            <a:ext cx="4572000" cy="365760"/>
           </a:xfrm>
           <a:prstGeom prst="rect">
             <a:avLst/>
@@ -6166,28 +6115,28 @@
           <a:lstStyle/>
           <a:p>
             <a:pPr algn="l">
-              <a:defRPr sz="1500" b="1">
-                <a:solidFill>
-                  <a:srgbClr val="2E7D32"/>
-                </a:solidFill>
-              </a:defRPr>
-            </a:pPr>
-            <a:r>
-              <a:t>On-Time: 97%</a:t>
-            </a:r>
-          </a:p>
-        </p:txBody>
-      </p:sp>
-      <p:sp>
-        <p:nvSpPr>
-          <p:cNvPr id="12" name="TextBox 11"/>
+              <a:defRPr sz="1400" b="1">
+                <a:solidFill>
+                  <a:srgbClr val="11273F"/>
+                </a:solidFill>
+              </a:defRPr>
+            </a:pPr>
+            <a:r>
+              <a:t>On-Time Delivery: 97%</a:t>
+            </a:r>
+          </a:p>
+        </p:txBody>
+      </p:sp>
+      <p:sp>
+        <p:nvSpPr>
+          <p:cNvPr id="11" name="TextBox 10"/>
           <p:cNvSpPr txBox="1"/>
           <p:nvPr/>
         </p:nvSpPr>
         <p:spPr>
           <a:xfrm>
-            <a:off x="6675120" y="2194560"/>
-            <a:ext cx="4754880" cy="457200"/>
+            <a:off x="1005840" y="3017520"/>
+            <a:ext cx="9144000" cy="365760"/>
           </a:xfrm>
           <a:prstGeom prst="rect">
             <a:avLst/>
@@ -6203,37 +6152,35 @@
             <a:pPr algn="l">
               <a:defRPr sz="1200" b="0">
                 <a:solidFill>
-                  <a:srgbClr val="FFFFFF"/>
-                </a:solidFill>
-              </a:defRPr>
-            </a:pPr>
-            <a:r>
-              <a:t>Quality: 99.5% | Risk: 2.0</a:t>
-            </a:r>
-          </a:p>
-        </p:txBody>
-      </p:sp>
-      <p:sp>
-        <p:nvSpPr>
-          <p:cNvPr id="13" name="Rounded Rectangle 12"/>
+                  <a:srgbClr val="6B7B8D"/>
+                </a:solidFill>
+              </a:defRPr>
+            </a:pPr>
+            <a:r>
+              <a:t>Quality pass rate: 99.5%  |  Risk score: 2.0/10</a:t>
+            </a:r>
+          </a:p>
+        </p:txBody>
+      </p:sp>
+      <p:sp>
+        <p:nvSpPr>
+          <p:cNvPr id="12" name="Rounded Rectangle 11"/>
           <p:cNvSpPr/>
           <p:nvPr/>
         </p:nvSpPr>
         <p:spPr>
           <a:xfrm>
-            <a:off x="731520" y="3200400"/>
-            <a:ext cx="5303520" cy="1371600"/>
+            <a:off x="731520" y="3566160"/>
+            <a:ext cx="10515600" cy="868680"/>
           </a:xfrm>
           <a:prstGeom prst="roundRect">
             <a:avLst/>
           </a:prstGeom>
           <a:solidFill>
-            <a:srgbClr val="0A1E38"/>
+            <a:srgbClr val="FFFFFF"/>
           </a:solidFill>
-          <a:ln w="25400">
-            <a:solidFill>
-              <a:srgbClr val="29B5E8"/>
-            </a:solidFill>
+          <a:ln>
+            <a:noFill/>
           </a:ln>
         </p:spPr>
         <p:style>
@@ -6260,14 +6207,14 @@
       </p:sp>
       <p:sp>
         <p:nvSpPr>
-          <p:cNvPr id="14" name="TextBox 13"/>
+          <p:cNvPr id="13" name="TextBox 12"/>
           <p:cNvSpPr txBox="1"/>
           <p:nvPr/>
         </p:nvSpPr>
         <p:spPr>
           <a:xfrm>
-            <a:off x="1005840" y="3291839"/>
-            <a:ext cx="4754880" cy="457200"/>
+            <a:off x="1005840" y="3657600"/>
+            <a:ext cx="4572000" cy="365760"/>
           </a:xfrm>
           <a:prstGeom prst="rect">
             <a:avLst/>
@@ -6281,28 +6228,28 @@
           <a:lstStyle/>
           <a:p>
             <a:pPr algn="l">
-              <a:defRPr sz="1500" b="1">
-                <a:solidFill>
-                  <a:srgbClr val="29B5E8"/>
-                </a:solidFill>
-              </a:defRPr>
-            </a:pPr>
-            <a:r>
-              <a:t>Open POs: On Schedule</a:t>
-            </a:r>
-          </a:p>
-        </p:txBody>
-      </p:sp>
-      <p:sp>
-        <p:nvSpPr>
-          <p:cNvPr id="15" name="TextBox 14"/>
+              <a:defRPr sz="1400" b="1">
+                <a:solidFill>
+                  <a:srgbClr val="11273F"/>
+                </a:solidFill>
+              </a:defRPr>
+            </a:pPr>
+            <a:r>
+              <a:t>Open POs: All On Schedule</a:t>
+            </a:r>
+          </a:p>
+        </p:txBody>
+      </p:sp>
+      <p:sp>
+        <p:nvSpPr>
+          <p:cNvPr id="14" name="TextBox 13"/>
           <p:cNvSpPr txBox="1"/>
           <p:nvPr/>
         </p:nvSpPr>
         <p:spPr>
           <a:xfrm>
-            <a:off x="1005840" y="3749039"/>
-            <a:ext cx="4754880" cy="457200"/>
+            <a:off x="1005840" y="4023360"/>
+            <a:ext cx="9144000" cy="365760"/>
           </a:xfrm>
           <a:prstGeom prst="rect">
             <a:avLst/>
@@ -6318,37 +6265,35 @@
             <a:pPr algn="l">
               <a:defRPr sz="1200" b="0">
                 <a:solidFill>
-                  <a:srgbClr val="FFFFFF"/>
-                </a:solidFill>
-              </a:defRPr>
-            </a:pPr>
-            <a:r>
-              <a:t>All delivery dates confirmed</a:t>
-            </a:r>
-          </a:p>
-        </p:txBody>
-      </p:sp>
-      <p:sp>
-        <p:nvSpPr>
-          <p:cNvPr id="16" name="Rounded Rectangle 15"/>
+                  <a:srgbClr val="6B7B8D"/>
+                </a:solidFill>
+              </a:defRPr>
+            </a:pPr>
+            <a:r>
+              <a:t>Expected delivery dates confirmed, no TMS flags</a:t>
+            </a:r>
+          </a:p>
+        </p:txBody>
+      </p:sp>
+      <p:sp>
+        <p:nvSpPr>
+          <p:cNvPr id="15" name="Rounded Rectangle 14"/>
           <p:cNvSpPr/>
           <p:nvPr/>
         </p:nvSpPr>
         <p:spPr>
           <a:xfrm>
-            <a:off x="6400800" y="3200400"/>
-            <a:ext cx="5303520" cy="1371600"/>
+            <a:off x="731520" y="4572000"/>
+            <a:ext cx="10515600" cy="868680"/>
           </a:xfrm>
           <a:prstGeom prst="roundRect">
             <a:avLst/>
           </a:prstGeom>
           <a:solidFill>
-            <a:srgbClr val="0A1E38"/>
+            <a:srgbClr val="F0F7FF"/>
           </a:solidFill>
-          <a:ln w="25400">
-            <a:solidFill>
-              <a:srgbClr val="2E7D32"/>
-            </a:solidFill>
+          <a:ln>
+            <a:noFill/>
           </a:ln>
         </p:spPr>
         <p:style>
@@ -6375,14 +6320,14 @@
       </p:sp>
       <p:sp>
         <p:nvSpPr>
-          <p:cNvPr id="17" name="TextBox 16"/>
+          <p:cNvPr id="16" name="TextBox 15"/>
           <p:cNvSpPr txBox="1"/>
           <p:nvPr/>
         </p:nvSpPr>
         <p:spPr>
           <a:xfrm>
-            <a:off x="6675120" y="3291839"/>
-            <a:ext cx="4754880" cy="457200"/>
+            <a:off x="1005840" y="4663440"/>
+            <a:ext cx="4572000" cy="365760"/>
           </a:xfrm>
           <a:prstGeom prst="rect">
             <a:avLst/>
@@ -6396,28 +6341,28 @@
           <a:lstStyle/>
           <a:p>
             <a:pPr algn="l">
-              <a:defRPr sz="1500" b="1">
-                <a:solidFill>
-                  <a:srgbClr val="2E7D32"/>
-                </a:solidFill>
-              </a:defRPr>
-            </a:pPr>
-            <a:r>
-              <a:t>Inventory: 18 Days</a:t>
-            </a:r>
-          </a:p>
-        </p:txBody>
-      </p:sp>
-      <p:sp>
-        <p:nvSpPr>
-          <p:cNvPr id="18" name="TextBox 17"/>
+              <a:defRPr sz="1400" b="1">
+                <a:solidFill>
+                  <a:srgbClr val="11273F"/>
+                </a:solidFill>
+              </a:defRPr>
+            </a:pPr>
+            <a:r>
+              <a:t>Alabama Glass Inventory: 18 Days</a:t>
+            </a:r>
+          </a:p>
+        </p:txBody>
+      </p:sp>
+      <p:sp>
+        <p:nvSpPr>
+          <p:cNvPr id="17" name="TextBox 16"/>
           <p:cNvSpPr txBox="1"/>
           <p:nvPr/>
         </p:nvSpPr>
         <p:spPr>
           <a:xfrm>
-            <a:off x="6675120" y="3749039"/>
-            <a:ext cx="4754880" cy="457200"/>
+            <a:off x="1005840" y="5029200"/>
+            <a:ext cx="9144000" cy="365760"/>
           </a:xfrm>
           <a:prstGeom prst="rect">
             <a:avLst/>
@@ -6433,26 +6378,26 @@
             <a:pPr algn="l">
               <a:defRPr sz="1200" b="0">
                 <a:solidFill>
-                  <a:srgbClr val="FFFFFF"/>
-                </a:solidFill>
-              </a:defRPr>
-            </a:pPr>
-            <a:r>
-              <a:t>Alabama forward coverage</a:t>
-            </a:r>
-          </a:p>
-        </p:txBody>
-      </p:sp>
-      <p:sp>
-        <p:nvSpPr>
-          <p:cNvPr id="19" name="Rounded Rectangle 18"/>
+                  <a:srgbClr val="6B7B8D"/>
+                </a:solidFill>
+              </a:defRPr>
+            </a:pPr>
+            <a:r>
+              <a:t>Forward coverage above minimum threshold</a:t>
+            </a:r>
+          </a:p>
+        </p:txBody>
+      </p:sp>
+      <p:sp>
+        <p:nvSpPr>
+          <p:cNvPr id="18" name="Rounded Rectangle 17"/>
           <p:cNvSpPr/>
           <p:nvPr/>
         </p:nvSpPr>
         <p:spPr>
           <a:xfrm>
-            <a:off x="731520" y="4846320"/>
-            <a:ext cx="10515600" cy="914400"/>
+            <a:off x="731520" y="5120640"/>
+            <a:ext cx="10515600" cy="822960"/>
           </a:xfrm>
           <a:prstGeom prst="roundRect">
             <a:avLst/>
@@ -6488,14 +6433,14 @@
       </p:sp>
       <p:sp>
         <p:nvSpPr>
-          <p:cNvPr id="20" name="TextBox 19"/>
+          <p:cNvPr id="19" name="TextBox 18"/>
           <p:cNvSpPr txBox="1"/>
           <p:nvPr/>
         </p:nvSpPr>
         <p:spPr>
           <a:xfrm>
-            <a:off x="1188720" y="4937760"/>
-            <a:ext cx="9601200" cy="822960"/>
+            <a:off x="1188720" y="5212080"/>
+            <a:ext cx="9601200" cy="640080"/>
           </a:xfrm>
           <a:prstGeom prst="rect">
             <a:avLst/>
@@ -6523,14 +6468,14 @@
       </p:sp>
       <p:sp>
         <p:nvSpPr>
-          <p:cNvPr id="21" name="TextBox 20"/>
+          <p:cNvPr id="20" name="TextBox 19"/>
           <p:cNvSpPr txBox="1"/>
           <p:nvPr/>
         </p:nvSpPr>
         <p:spPr>
           <a:xfrm>
-            <a:off x="731520" y="5943600"/>
-            <a:ext cx="10058400" cy="457200"/>
+            <a:off x="731520" y="6126480"/>
+            <a:ext cx="10058400" cy="365760"/>
           </a:xfrm>
           <a:prstGeom prst="rect">
             <a:avLst/>
@@ -6551,7 +6496,7 @@
               </a:defRPr>
             </a:pPr>
             <a:r>
-              <a:t>Oracle is RIGHT here. Data boundary, not failure.</a:t>
+              <a:t>DIRECTOR: Oracle is RIGHT here. Data boundary, not failure.</a:t>
             </a:r>
           </a:p>
         </p:txBody>
@@ -6570,7 +6515,7 @@
     <p:bg>
       <p:bgPr>
         <a:solidFill>
-          <a:srgbClr val="05142B"/>
+          <a:srgbClr val="F8FAFC"/>
         </a:solidFill>
         <a:effectLst/>
       </p:bgPr>
@@ -6584,7 +6529,7 @@
       <p:grpSpPr/>
       <p:pic>
         <p:nvPicPr>
-          <p:cNvPr id="2" name="Picture 1" descr="snowflake_logo_white.png"/>
+          <p:cNvPr id="2" name="Picture 1" descr="sf_logo_combined.png"/>
           <p:cNvPicPr>
             <a:picLocks noChangeAspect="1"/>
           </p:cNvPicPr>
@@ -6598,8 +6543,8 @@
         </p:blipFill>
         <p:spPr>
           <a:xfrm>
-            <a:off x="457200" y="274320"/>
-            <a:ext cx="457200" cy="457200"/>
+            <a:off x="365760" y="228600"/>
+            <a:ext cx="2468880" cy="411480"/>
           </a:xfrm>
           <a:prstGeom prst="rect">
             <a:avLst/>
@@ -6614,8 +6559,8 @@
         </p:nvSpPr>
         <p:spPr>
           <a:xfrm>
-            <a:off x="457200" y="6446520"/>
-            <a:ext cx="11247120" cy="27432"/>
+            <a:off x="0" y="6583680"/>
+            <a:ext cx="12191695" cy="36576"/>
           </a:xfrm>
           <a:prstGeom prst="rect">
             <a:avLst/>
@@ -6657,8 +6602,8 @@
         </p:nvSpPr>
         <p:spPr>
           <a:xfrm>
-            <a:off x="731520" y="731520"/>
-            <a:ext cx="1645920" cy="548640"/>
+            <a:off x="731520" y="777240"/>
+            <a:ext cx="1463040" cy="457200"/>
           </a:xfrm>
           <a:prstGeom prst="roundRect">
             <a:avLst/>
@@ -6689,7 +6634,7 @@
           <a:lstStyle/>
           <a:p>
             <a:pPr algn="ctr">
-              <a:defRPr sz="1600" b="1">
+              <a:defRPr sz="1300" b="1">
                 <a:solidFill>
                   <a:srgbClr val="FFFFFF"/>
                 </a:solidFill>
@@ -6709,8 +6654,8 @@
         </p:nvSpPr>
         <p:spPr>
           <a:xfrm>
-            <a:off x="2560320" y="731520"/>
-            <a:ext cx="8229600" cy="548640"/>
+            <a:off x="2377440" y="777240"/>
+            <a:ext cx="8229600" cy="457200"/>
           </a:xfrm>
           <a:prstGeom prst="rect">
             <a:avLst/>
@@ -6724,9 +6669,9 @@
           <a:lstStyle/>
           <a:p>
             <a:pPr algn="l">
-              <a:defRPr sz="2400" b="1">
-                <a:solidFill>
-                  <a:srgbClr val="FFFFFF"/>
+              <a:defRPr sz="2200" b="1">
+                <a:solidFill>
+                  <a:srgbClr val="11273F"/>
                 </a:solidFill>
               </a:defRPr>
             </a:pPr>
@@ -6736,39 +6681,15 @@
           </a:p>
         </p:txBody>
       </p:sp>
-      <p:pic>
-        <p:nvPicPr>
-          <p:cNvPr id="6" name="Picture 5" descr="icon_mfg.png"/>
-          <p:cNvPicPr>
-            <a:picLocks noChangeAspect="1"/>
-          </p:cNvPicPr>
-          <p:nvPr/>
-        </p:nvPicPr>
-        <p:blipFill>
-          <a:blip r:embed="rId3"/>
-          <a:stretch>
-            <a:fillRect/>
-          </a:stretch>
-        </p:blipFill>
-        <p:spPr>
-          <a:xfrm>
-            <a:off x="10515600" y="640080"/>
-            <a:ext cx="731520" cy="731520"/>
-          </a:xfrm>
-          <a:prstGeom prst="rect">
-            <a:avLst/>
-          </a:prstGeom>
-        </p:spPr>
-      </p:pic>
-      <p:sp>
-        <p:nvSpPr>
-          <p:cNvPr id="7" name="TextBox 6"/>
+      <p:sp>
+        <p:nvSpPr>
+          <p:cNvPr id="6" name="TextBox 5"/>
           <p:cNvSpPr txBox="1"/>
           <p:nvPr/>
         </p:nvSpPr>
         <p:spPr>
           <a:xfrm>
-            <a:off x="1097280" y="1645920"/>
+            <a:off x="1097280" y="1554480"/>
             <a:ext cx="9144000" cy="457200"/>
           </a:xfrm>
           <a:prstGeom prst="rect">
@@ -6785,25 +6706,25 @@
             <a:pPr algn="l">
               <a:defRPr sz="1400" b="0">
                 <a:solidFill>
-                  <a:srgbClr val="FFFFFF"/>
-                </a:solidFill>
-              </a:defRPr>
-            </a:pPr>
-            <a:r>
-              <a:t>Daily consumption: 530 panels/day at Alabama</a:t>
-            </a:r>
-          </a:p>
-        </p:txBody>
-      </p:sp>
-      <p:sp>
-        <p:nvSpPr>
-          <p:cNvPr id="8" name="TextBox 7"/>
+                  <a:srgbClr val="333333"/>
+                </a:solidFill>
+              </a:defRPr>
+            </a:pPr>
+            <a:r>
+              <a:t>Daily glass consumption: ~530 panels/day at Alabama</a:t>
+            </a:r>
+          </a:p>
+        </p:txBody>
+      </p:sp>
+      <p:sp>
+        <p:nvSpPr>
+          <p:cNvPr id="7" name="TextBox 6"/>
           <p:cNvSpPr txBox="1"/>
           <p:nvPr/>
         </p:nvSpPr>
         <p:spPr>
           <a:xfrm>
-            <a:off x="1097280" y="2286000"/>
+            <a:off x="1097280" y="2194560"/>
             <a:ext cx="9144000" cy="457200"/>
           </a:xfrm>
           <a:prstGeom prst="rect">
@@ -6820,25 +6741,25 @@
             <a:pPr algn="l">
               <a:defRPr sz="1400" b="0">
                 <a:solidFill>
-                  <a:srgbClr val="FFFFFF"/>
-                </a:solidFill>
-              </a:defRPr>
-            </a:pPr>
-            <a:r>
-              <a:t>Series 7 ramping — NextEra, Invenergy Q2 commitments</a:t>
-            </a:r>
-          </a:p>
-        </p:txBody>
-      </p:sp>
-      <p:sp>
-        <p:nvSpPr>
-          <p:cNvPr id="9" name="TextBox 8"/>
+                  <a:srgbClr val="333333"/>
+                </a:solidFill>
+              </a:defRPr>
+            </a:pPr>
+            <a:r>
+              <a:t>Series 7 ramping for Q2 — NextEra, Invenergy commitments</a:t>
+            </a:r>
+          </a:p>
+        </p:txBody>
+      </p:sp>
+      <p:sp>
+        <p:nvSpPr>
+          <p:cNvPr id="8" name="TextBox 7"/>
           <p:cNvSpPr txBox="1"/>
           <p:nvPr/>
         </p:nvSpPr>
         <p:spPr>
           <a:xfrm>
-            <a:off x="1097280" y="2926080"/>
+            <a:off x="1097280" y="2834639"/>
             <a:ext cx="9144000" cy="457200"/>
           </a:xfrm>
           <a:prstGeom prst="rect">
@@ -6855,25 +6776,25 @@
             <a:pPr algn="l">
               <a:defRPr sz="1400" b="0">
                 <a:solidFill>
-                  <a:srgbClr val="FFFFFF"/>
-                </a:solidFill>
-              </a:defRPr>
-            </a:pPr>
-            <a:r>
-              <a:t>BOM: 1 glass/module, NO substitute exists</a:t>
-            </a:r>
-          </a:p>
-        </p:txBody>
-      </p:sp>
-      <p:sp>
-        <p:nvSpPr>
-          <p:cNvPr id="10" name="TextBox 9"/>
+                  <a:srgbClr val="333333"/>
+                </a:solidFill>
+              </a:defRPr>
+            </a:pPr>
+            <a:r>
+              <a:t>BOM constraint: 1 substrate glass per module, NO substitute</a:t>
+            </a:r>
+          </a:p>
+        </p:txBody>
+      </p:sp>
+      <p:sp>
+        <p:nvSpPr>
+          <p:cNvPr id="9" name="TextBox 8"/>
           <p:cNvSpPr txBox="1"/>
           <p:nvPr/>
         </p:nvSpPr>
         <p:spPr>
           <a:xfrm>
-            <a:off x="1097280" y="3566159"/>
+            <a:off x="1097280" y="3474720"/>
             <a:ext cx="9144000" cy="457200"/>
           </a:xfrm>
           <a:prstGeom prst="rect">
@@ -6890,25 +6811,25 @@
             <a:pPr algn="l">
               <a:defRPr sz="1400" b="0">
                 <a:solidFill>
-                  <a:srgbClr val="FFFFFF"/>
-                </a:solidFill>
-              </a:defRPr>
-            </a:pPr>
-            <a:r>
-              <a:t>18 days coverage = zero buffer for disruption</a:t>
-            </a:r>
-          </a:p>
-        </p:txBody>
-      </p:sp>
-      <p:sp>
-        <p:nvSpPr>
-          <p:cNvPr id="11" name="TextBox 10"/>
+                  <a:srgbClr val="333333"/>
+                </a:solidFill>
+              </a:defRPr>
+            </a:pPr>
+            <a:r>
+              <a:t>18 days coverage at burn rate = zero buffer for disruption</a:t>
+            </a:r>
+          </a:p>
+        </p:txBody>
+      </p:sp>
+      <p:sp>
+        <p:nvSpPr>
+          <p:cNvPr id="10" name="TextBox 9"/>
           <p:cNvSpPr txBox="1"/>
           <p:nvPr/>
         </p:nvSpPr>
         <p:spPr>
           <a:xfrm>
-            <a:off x="1097280" y="4206240"/>
+            <a:off x="1097280" y="4114800"/>
             <a:ext cx="9144000" cy="457200"/>
           </a:xfrm>
           <a:prstGeom prst="rect">
@@ -6925,26 +6846,26 @@
             <a:pPr algn="l">
               <a:defRPr sz="1400" b="0">
                 <a:solidFill>
-                  <a:srgbClr val="FFFFFF"/>
-                </a:solidFill>
-              </a:defRPr>
-            </a:pPr>
-            <a:r>
-              <a:t>Deliveries MUST arrive on time to maintain plan</a:t>
-            </a:r>
-          </a:p>
-        </p:txBody>
-      </p:sp>
-      <p:sp>
-        <p:nvSpPr>
-          <p:cNvPr id="12" name="Rounded Rectangle 11"/>
+                  <a:srgbClr val="333333"/>
+                </a:solidFill>
+              </a:defRPr>
+            </a:pPr>
+            <a:r>
+              <a:t>Deliveries MUST arrive on time to maintain production plan</a:t>
+            </a:r>
+          </a:p>
+        </p:txBody>
+      </p:sp>
+      <p:sp>
+        <p:nvSpPr>
+          <p:cNvPr id="11" name="Rounded Rectangle 10"/>
           <p:cNvSpPr/>
           <p:nvPr/>
         </p:nvSpPr>
         <p:spPr>
           <a:xfrm>
-            <a:off x="731520" y="5029200"/>
-            <a:ext cx="10515600" cy="914400"/>
+            <a:off x="731520" y="4937760"/>
+            <a:ext cx="10515600" cy="822960"/>
           </a:xfrm>
           <a:prstGeom prst="roundRect">
             <a:avLst/>
@@ -6980,14 +6901,14 @@
       </p:sp>
       <p:sp>
         <p:nvSpPr>
-          <p:cNvPr id="13" name="TextBox 12"/>
+          <p:cNvPr id="12" name="TextBox 11"/>
           <p:cNvSpPr txBox="1"/>
           <p:nvPr/>
         </p:nvSpPr>
         <p:spPr>
           <a:xfrm>
-            <a:off x="1188720" y="5120640"/>
-            <a:ext cx="9601200" cy="822960"/>
+            <a:off x="1188720" y="5029200"/>
+            <a:ext cx="9601200" cy="640080"/>
           </a:xfrm>
           <a:prstGeom prst="rect">
             <a:avLst/>
@@ -7015,13 +6936,13 @@
       </p:sp>
       <p:sp>
         <p:nvSpPr>
-          <p:cNvPr id="14" name="TextBox 13"/>
+          <p:cNvPr id="13" name="TextBox 12"/>
           <p:cNvSpPr txBox="1"/>
           <p:nvPr/>
         </p:nvSpPr>
         <p:spPr>
           <a:xfrm>
-            <a:off x="731520" y="6126480"/>
+            <a:off x="731520" y="5943600"/>
             <a:ext cx="10058400" cy="365760"/>
           </a:xfrm>
           <a:prstGeom prst="rect">
@@ -7043,7 +6964,7 @@
               </a:defRPr>
             </a:pPr>
             <a:r>
-              <a:t>Sets up WHY external layer is the unlock.</a:t>
+              <a:t>Sets up WHY the external layer is the unlock.</a:t>
             </a:r>
           </a:p>
         </p:txBody>
@@ -7062,7 +6983,7 @@
     <p:bg>
       <p:bgPr>
         <a:solidFill>
-          <a:srgbClr val="05142B"/>
+          <a:srgbClr val="11273F"/>
         </a:solidFill>
         <a:effectLst/>
       </p:bgPr>
@@ -7076,7 +6997,7 @@
       <p:grpSpPr/>
       <p:pic>
         <p:nvPicPr>
-          <p:cNvPr id="2" name="Picture 1" descr="snowflake_logo_white.png"/>
+          <p:cNvPr id="2" name="Picture 1" descr="sf_logo_combined.png"/>
           <p:cNvPicPr>
             <a:picLocks noChangeAspect="1"/>
           </p:cNvPicPr>
@@ -7090,8 +7011,8 @@
         </p:blipFill>
         <p:spPr>
           <a:xfrm>
-            <a:off x="457200" y="274320"/>
-            <a:ext cx="457200" cy="457200"/>
+            <a:off x="365760" y="228600"/>
+            <a:ext cx="2468880" cy="411480"/>
           </a:xfrm>
           <a:prstGeom prst="rect">
             <a:avLst/>
@@ -7106,8 +7027,8 @@
         </p:nvSpPr>
         <p:spPr>
           <a:xfrm>
-            <a:off x="457200" y="6446520"/>
-            <a:ext cx="11247120" cy="27432"/>
+            <a:off x="0" y="6583680"/>
+            <a:ext cx="12191695" cy="36576"/>
           </a:xfrm>
           <a:prstGeom prst="rect">
             <a:avLst/>
@@ -7149,8 +7070,8 @@
         </p:nvSpPr>
         <p:spPr>
           <a:xfrm>
-            <a:off x="731520" y="640080"/>
-            <a:ext cx="1645920" cy="548640"/>
+            <a:off x="731520" y="731520"/>
+            <a:ext cx="1463040" cy="457200"/>
           </a:xfrm>
           <a:prstGeom prst="roundRect">
             <a:avLst/>
@@ -7181,7 +7102,7 @@
           <a:lstStyle/>
           <a:p>
             <a:pPr algn="ctr">
-              <a:defRPr sz="1600" b="1">
+              <a:defRPr sz="1300" b="1">
                 <a:solidFill>
                   <a:srgbClr val="FFFFFF"/>
                 </a:solidFill>
@@ -7201,8 +7122,8 @@
         </p:nvSpPr>
         <p:spPr>
           <a:xfrm>
-            <a:off x="2560320" y="640080"/>
-            <a:ext cx="8229600" cy="548640"/>
+            <a:off x="2377440" y="731520"/>
+            <a:ext cx="8229600" cy="457200"/>
           </a:xfrm>
           <a:prstGeom prst="rect">
             <a:avLst/>
@@ -7216,52 +7137,28 @@
           <a:lstStyle/>
           <a:p>
             <a:pPr algn="l">
-              <a:defRPr sz="2400" b="1">
+              <a:defRPr sz="2200" b="1">
                 <a:solidFill>
                   <a:srgbClr val="E65100"/>
                 </a:solidFill>
               </a:defRPr>
             </a:pPr>
             <a:r>
-              <a:t>External Signal — THE REVEAL</a:t>
-            </a:r>
-          </a:p>
-        </p:txBody>
-      </p:sp>
-      <p:pic>
-        <p:nvPicPr>
-          <p:cNvPr id="6" name="Picture 5" descr="icon_external.png"/>
-          <p:cNvPicPr>
-            <a:picLocks noChangeAspect="1"/>
-          </p:cNvPicPr>
-          <p:nvPr/>
-        </p:nvPicPr>
-        <p:blipFill>
-          <a:blip r:embed="rId3"/>
-          <a:stretch>
-            <a:fillRect/>
-          </a:stretch>
-        </p:blipFill>
-        <p:spPr>
-          <a:xfrm>
-            <a:off x="10515600" y="548640"/>
-            <a:ext cx="731520" cy="731520"/>
-          </a:xfrm>
-          <a:prstGeom prst="rect">
-            <a:avLst/>
-          </a:prstGeom>
-        </p:spPr>
-      </p:pic>
-      <p:sp>
-        <p:nvSpPr>
-          <p:cNvPr id="7" name="TextBox 6"/>
+              <a:t>External Marketplace Signal — THE REVEAL</a:t>
+            </a:r>
+          </a:p>
+        </p:txBody>
+      </p:sp>
+      <p:sp>
+        <p:nvSpPr>
+          <p:cNvPr id="6" name="TextBox 5"/>
           <p:cNvSpPr txBox="1"/>
           <p:nvPr/>
         </p:nvSpPr>
         <p:spPr>
           <a:xfrm>
-            <a:off x="731520" y="1280160"/>
-            <a:ext cx="10058400" cy="365760"/>
+            <a:off x="731520" y="1371600"/>
+            <a:ext cx="10058400" cy="274320"/>
           </a:xfrm>
           <a:prstGeom prst="rect">
             <a:avLst/>
@@ -7275,39 +7172,37 @@
           <a:lstStyle/>
           <a:p>
             <a:pPr algn="l">
-              <a:defRPr sz="1300" b="0">
-                <a:solidFill>
-                  <a:srgbClr val="8E9EAB"/>
-                </a:solidFill>
-              </a:defRPr>
-            </a:pPr>
-            <a:r>
-              <a:t>Snowflake Marketplace trade/shipping data:</a:t>
-            </a:r>
-          </a:p>
-        </p:txBody>
-      </p:sp>
-      <p:sp>
-        <p:nvSpPr>
-          <p:cNvPr id="8" name="Rounded Rectangle 7"/>
+              <a:defRPr sz="1200" b="0">
+                <a:solidFill>
+                  <a:srgbClr val="6B7B8D"/>
+                </a:solidFill>
+              </a:defRPr>
+            </a:pPr>
+            <a:r>
+              <a:t>Snowflake Marketplace trade/shipping data surfaces lane deterioration:</a:t>
+            </a:r>
+          </a:p>
+        </p:txBody>
+      </p:sp>
+      <p:sp>
+        <p:nvSpPr>
+          <p:cNvPr id="7" name="Rounded Rectangle 6"/>
           <p:cNvSpPr/>
           <p:nvPr/>
         </p:nvSpPr>
         <p:spPr>
           <a:xfrm>
-            <a:off x="731520" y="1828800"/>
+            <a:off x="731520" y="1737360"/>
             <a:ext cx="2560320" cy="1371600"/>
           </a:xfrm>
           <a:prstGeom prst="roundRect">
             <a:avLst/>
           </a:prstGeom>
           <a:solidFill>
-            <a:srgbClr val="0A1E38"/>
+            <a:srgbClr val="1A2E45"/>
           </a:solidFill>
-          <a:ln w="25400">
-            <a:solidFill>
-              <a:srgbClr val="C62828"/>
-            </a:solidFill>
+          <a:ln>
+            <a:noFill/>
           </a:ln>
         </p:spPr>
         <p:style>
@@ -7334,13 +7229,13 @@
       </p:sp>
       <p:sp>
         <p:nvSpPr>
-          <p:cNvPr id="9" name="TextBox 8"/>
+          <p:cNvPr id="8" name="TextBox 7"/>
           <p:cNvSpPr txBox="1"/>
           <p:nvPr/>
         </p:nvSpPr>
         <p:spPr>
           <a:xfrm>
-            <a:off x="914400" y="1920240"/>
+            <a:off x="914400" y="1828800"/>
             <a:ext cx="2194560" cy="274320"/>
           </a:xfrm>
           <a:prstGeom prst="rect">
@@ -7357,7 +7252,7 @@
             <a:pPr algn="ctr">
               <a:defRPr sz="1000" b="0">
                 <a:solidFill>
-                  <a:srgbClr val="8E9EAB"/>
+                  <a:srgbClr val="6B7B8D"/>
                 </a:solidFill>
               </a:defRPr>
             </a:pPr>
@@ -7369,14 +7264,14 @@
       </p:sp>
       <p:sp>
         <p:nvSpPr>
-          <p:cNvPr id="10" name="TextBox 9"/>
+          <p:cNvPr id="9" name="TextBox 8"/>
           <p:cNvSpPr txBox="1"/>
           <p:nvPr/>
         </p:nvSpPr>
         <p:spPr>
           <a:xfrm>
-            <a:off x="914400" y="2286000"/>
-            <a:ext cx="2194560" cy="548640"/>
+            <a:off x="914400" y="2103120"/>
+            <a:ext cx="2194560" cy="640080"/>
           </a:xfrm>
           <a:prstGeom prst="rect">
             <a:avLst/>
@@ -7390,7 +7285,7 @@
           <a:lstStyle/>
           <a:p>
             <a:pPr algn="ctr">
-              <a:defRPr sz="2000" b="1">
+              <a:defRPr sz="2200" b="1">
                 <a:solidFill>
                   <a:srgbClr val="C62828"/>
                 </a:solidFill>
@@ -7404,13 +7299,13 @@
       </p:sp>
       <p:sp>
         <p:nvSpPr>
-          <p:cNvPr id="11" name="TextBox 10"/>
+          <p:cNvPr id="10" name="TextBox 9"/>
           <p:cNvSpPr txBox="1"/>
           <p:nvPr/>
         </p:nvSpPr>
         <p:spPr>
           <a:xfrm>
-            <a:off x="914400" y="2834640"/>
+            <a:off x="914400" y="2743200"/>
             <a:ext cx="2194560" cy="274320"/>
           </a:xfrm>
           <a:prstGeom prst="rect">
@@ -7439,25 +7334,23 @@
       </p:sp>
       <p:sp>
         <p:nvSpPr>
-          <p:cNvPr id="12" name="Rounded Rectangle 11"/>
+          <p:cNvPr id="11" name="Rounded Rectangle 10"/>
           <p:cNvSpPr/>
           <p:nvPr/>
         </p:nvSpPr>
         <p:spPr>
           <a:xfrm>
-            <a:off x="3566160" y="1828800"/>
+            <a:off x="3566160" y="1737360"/>
             <a:ext cx="2560320" cy="1371600"/>
           </a:xfrm>
           <a:prstGeom prst="roundRect">
             <a:avLst/>
           </a:prstGeom>
           <a:solidFill>
-            <a:srgbClr val="0A1E38"/>
+            <a:srgbClr val="1A2E45"/>
           </a:solidFill>
-          <a:ln w="25400">
-            <a:solidFill>
-              <a:srgbClr val="C62828"/>
-            </a:solidFill>
+          <a:ln>
+            <a:noFill/>
           </a:ln>
         </p:spPr>
         <p:style>
@@ -7484,13 +7377,13 @@
       </p:sp>
       <p:sp>
         <p:nvSpPr>
-          <p:cNvPr id="13" name="TextBox 12"/>
+          <p:cNvPr id="12" name="TextBox 11"/>
           <p:cNvSpPr txBox="1"/>
           <p:nvPr/>
         </p:nvSpPr>
         <p:spPr>
           <a:xfrm>
-            <a:off x="3749040" y="1920240"/>
+            <a:off x="3749040" y="1828800"/>
             <a:ext cx="2194560" cy="274320"/>
           </a:xfrm>
           <a:prstGeom prst="rect">
@@ -7507,7 +7400,7 @@
             <a:pPr algn="ctr">
               <a:defRPr sz="1000" b="0">
                 <a:solidFill>
-                  <a:srgbClr val="8E9EAB"/>
+                  <a:srgbClr val="6B7B8D"/>
                 </a:solidFill>
               </a:defRPr>
             </a:pPr>
@@ -7519,14 +7412,14 @@
       </p:sp>
       <p:sp>
         <p:nvSpPr>
-          <p:cNvPr id="14" name="TextBox 13"/>
+          <p:cNvPr id="13" name="TextBox 12"/>
           <p:cNvSpPr txBox="1"/>
           <p:nvPr/>
         </p:nvSpPr>
         <p:spPr>
           <a:xfrm>
-            <a:off x="3749040" y="2286000"/>
-            <a:ext cx="2194560" cy="548640"/>
+            <a:off x="3749040" y="2103120"/>
+            <a:ext cx="2194560" cy="640080"/>
           </a:xfrm>
           <a:prstGeom prst="rect">
             <a:avLst/>
@@ -7540,7 +7433,7 @@
           <a:lstStyle/>
           <a:p>
             <a:pPr algn="ctr">
-              <a:defRPr sz="2000" b="1">
+              <a:defRPr sz="2200" b="1">
                 <a:solidFill>
                   <a:srgbClr val="C62828"/>
                 </a:solidFill>
@@ -7554,13 +7447,13 @@
       </p:sp>
       <p:sp>
         <p:nvSpPr>
-          <p:cNvPr id="15" name="TextBox 14"/>
+          <p:cNvPr id="14" name="TextBox 13"/>
           <p:cNvSpPr txBox="1"/>
           <p:nvPr/>
         </p:nvSpPr>
         <p:spPr>
           <a:xfrm>
-            <a:off x="3749040" y="2834640"/>
+            <a:off x="3749040" y="2743200"/>
             <a:ext cx="2194560" cy="274320"/>
           </a:xfrm>
           <a:prstGeom prst="rect">
@@ -7582,32 +7475,30 @@
               </a:defRPr>
             </a:pPr>
             <a:r>
-              <a:t>25hr → 43hr</a:t>
-            </a:r>
-          </a:p>
-        </p:txBody>
-      </p:sp>
-      <p:sp>
-        <p:nvSpPr>
-          <p:cNvPr id="16" name="Rounded Rectangle 15"/>
+              <a:t>25h → 43h</a:t>
+            </a:r>
+          </a:p>
+        </p:txBody>
+      </p:sp>
+      <p:sp>
+        <p:nvSpPr>
+          <p:cNvPr id="15" name="Rounded Rectangle 14"/>
           <p:cNvSpPr/>
           <p:nvPr/>
         </p:nvSpPr>
         <p:spPr>
           <a:xfrm>
-            <a:off x="6400800" y="1828800"/>
+            <a:off x="6400800" y="1737360"/>
             <a:ext cx="2560320" cy="1371600"/>
           </a:xfrm>
           <a:prstGeom prst="roundRect">
             <a:avLst/>
           </a:prstGeom>
           <a:solidFill>
-            <a:srgbClr val="0A1E38"/>
+            <a:srgbClr val="1A2E45"/>
           </a:solidFill>
-          <a:ln w="25400">
-            <a:solidFill>
-              <a:srgbClr val="E65100"/>
-            </a:solidFill>
+          <a:ln>
+            <a:noFill/>
           </a:ln>
         </p:spPr>
         <p:style>
@@ -7634,13 +7525,13 @@
       </p:sp>
       <p:sp>
         <p:nvSpPr>
-          <p:cNvPr id="17" name="TextBox 16"/>
+          <p:cNvPr id="16" name="TextBox 15"/>
           <p:cNvSpPr txBox="1"/>
           <p:nvPr/>
         </p:nvSpPr>
         <p:spPr>
           <a:xfrm>
-            <a:off x="6583680" y="1920240"/>
+            <a:off x="6583680" y="1828800"/>
             <a:ext cx="2194560" cy="274320"/>
           </a:xfrm>
           <a:prstGeom prst="rect">
@@ -7657,7 +7548,7 @@
             <a:pPr algn="ctr">
               <a:defRPr sz="1000" b="0">
                 <a:solidFill>
-                  <a:srgbClr val="8E9EAB"/>
+                  <a:srgbClr val="6B7B8D"/>
                 </a:solidFill>
               </a:defRPr>
             </a:pPr>
@@ -7669,14 +7560,14 @@
       </p:sp>
       <p:sp>
         <p:nvSpPr>
-          <p:cNvPr id="18" name="TextBox 17"/>
+          <p:cNvPr id="17" name="TextBox 16"/>
           <p:cNvSpPr txBox="1"/>
           <p:nvPr/>
         </p:nvSpPr>
         <p:spPr>
           <a:xfrm>
-            <a:off x="6583680" y="2286000"/>
-            <a:ext cx="2194560" cy="548640"/>
+            <a:off x="6583680" y="2103120"/>
+            <a:ext cx="2194560" cy="640080"/>
           </a:xfrm>
           <a:prstGeom prst="rect">
             <a:avLst/>
@@ -7690,9 +7581,9 @@
           <a:lstStyle/>
           <a:p>
             <a:pPr algn="ctr">
-              <a:defRPr sz="2000" b="1">
-                <a:solidFill>
-                  <a:srgbClr val="E65100"/>
+              <a:defRPr sz="2200" b="1">
+                <a:solidFill>
+                  <a:srgbClr val="C62828"/>
                 </a:solidFill>
               </a:defRPr>
             </a:pPr>
@@ -7704,13 +7595,13 @@
       </p:sp>
       <p:sp>
         <p:nvSpPr>
-          <p:cNvPr id="19" name="TextBox 18"/>
+          <p:cNvPr id="18" name="TextBox 17"/>
           <p:cNvSpPr txBox="1"/>
           <p:nvPr/>
         </p:nvSpPr>
         <p:spPr>
           <a:xfrm>
-            <a:off x="6583680" y="2834640"/>
+            <a:off x="6583680" y="2743200"/>
             <a:ext cx="2194560" cy="274320"/>
           </a:xfrm>
           <a:prstGeom prst="rect">
@@ -7732,32 +7623,30 @@
               </a:defRPr>
             </a:pPr>
             <a:r>
-              <a:t>Emerging</a:t>
-            </a:r>
-          </a:p>
-        </p:txBody>
-      </p:sp>
-      <p:sp>
-        <p:nvSpPr>
-          <p:cNvPr id="20" name="Rounded Rectangle 19"/>
+              <a:t>Emerging risk</a:t>
+            </a:r>
+          </a:p>
+        </p:txBody>
+      </p:sp>
+      <p:sp>
+        <p:nvSpPr>
+          <p:cNvPr id="19" name="Rounded Rectangle 18"/>
           <p:cNvSpPr/>
           <p:nvPr/>
         </p:nvSpPr>
         <p:spPr>
           <a:xfrm>
-            <a:off x="9235440" y="1828800"/>
+            <a:off x="9235440" y="1737360"/>
             <a:ext cx="2560320" cy="1371600"/>
           </a:xfrm>
           <a:prstGeom prst="roundRect">
             <a:avLst/>
           </a:prstGeom>
           <a:solidFill>
-            <a:srgbClr val="0A1E38"/>
+            <a:srgbClr val="1A2E45"/>
           </a:solidFill>
-          <a:ln w="25400">
-            <a:solidFill>
-              <a:srgbClr val="E65100"/>
-            </a:solidFill>
+          <a:ln>
+            <a:noFill/>
           </a:ln>
         </p:spPr>
         <p:style>
@@ -7784,13 +7673,13 @@
       </p:sp>
       <p:sp>
         <p:nvSpPr>
-          <p:cNvPr id="21" name="TextBox 20"/>
+          <p:cNvPr id="20" name="TextBox 19"/>
           <p:cNvSpPr txBox="1"/>
           <p:nvPr/>
         </p:nvSpPr>
         <p:spPr>
           <a:xfrm>
-            <a:off x="9418320" y="1920240"/>
+            <a:off x="9418320" y="1828800"/>
             <a:ext cx="2194560" cy="274320"/>
           </a:xfrm>
           <a:prstGeom prst="rect">
@@ -7807,26 +7696,26 @@
             <a:pPr algn="ctr">
               <a:defRPr sz="1000" b="0">
                 <a:solidFill>
-                  <a:srgbClr val="8E9EAB"/>
-                </a:solidFill>
-              </a:defRPr>
-            </a:pPr>
-            <a:r>
-              <a:t>Transit</a:t>
-            </a:r>
-          </a:p>
-        </p:txBody>
-      </p:sp>
-      <p:sp>
-        <p:nvSpPr>
-          <p:cNvPr id="22" name="TextBox 21"/>
+                  <a:srgbClr val="6B7B8D"/>
+                </a:solidFill>
+              </a:defRPr>
+            </a:pPr>
+            <a:r>
+              <a:t>Transit Time</a:t>
+            </a:r>
+          </a:p>
+        </p:txBody>
+      </p:sp>
+      <p:sp>
+        <p:nvSpPr>
+          <p:cNvPr id="21" name="TextBox 20"/>
           <p:cNvSpPr txBox="1"/>
           <p:nvPr/>
         </p:nvSpPr>
         <p:spPr>
           <a:xfrm>
-            <a:off x="9418320" y="2286000"/>
-            <a:ext cx="2194560" cy="548640"/>
+            <a:off x="9418320" y="2103120"/>
+            <a:ext cx="2194560" cy="640080"/>
           </a:xfrm>
           <a:prstGeom prst="rect">
             <a:avLst/>
@@ -7840,9 +7729,9 @@
           <a:lstStyle/>
           <a:p>
             <a:pPr algn="ctr">
-              <a:defRPr sz="2000" b="1">
-                <a:solidFill>
-                  <a:srgbClr val="E65100"/>
+              <a:defRPr sz="2200" b="1">
+                <a:solidFill>
+                  <a:srgbClr val="C62828"/>
                 </a:solidFill>
               </a:defRPr>
             </a:pPr>
@@ -7854,13 +7743,13 @@
       </p:sp>
       <p:sp>
         <p:nvSpPr>
-          <p:cNvPr id="23" name="TextBox 22"/>
+          <p:cNvPr id="22" name="TextBox 21"/>
           <p:cNvSpPr txBox="1"/>
           <p:nvPr/>
         </p:nvSpPr>
         <p:spPr>
           <a:xfrm>
-            <a:off x="9418320" y="2834640"/>
+            <a:off x="9418320" y="2743200"/>
             <a:ext cx="2194560" cy="274320"/>
           </a:xfrm>
           <a:prstGeom prst="rect">
@@ -7889,14 +7778,14 @@
       </p:sp>
       <p:sp>
         <p:nvSpPr>
-          <p:cNvPr id="24" name="Rounded Rectangle 23"/>
+          <p:cNvPr id="23" name="Rounded Rectangle 22"/>
           <p:cNvSpPr/>
           <p:nvPr/>
         </p:nvSpPr>
         <p:spPr>
           <a:xfrm>
-            <a:off x="457200" y="3566160"/>
-            <a:ext cx="11247120" cy="1554480"/>
+            <a:off x="457200" y="3383280"/>
+            <a:ext cx="11247120" cy="1645920"/>
           </a:xfrm>
           <a:prstGeom prst="roundRect">
             <a:avLst/>
@@ -7932,14 +7821,14 @@
       </p:sp>
       <p:sp>
         <p:nvSpPr>
-          <p:cNvPr id="25" name="TextBox 24"/>
+          <p:cNvPr id="24" name="TextBox 23"/>
           <p:cNvSpPr txBox="1"/>
           <p:nvPr/>
         </p:nvSpPr>
         <p:spPr>
           <a:xfrm>
-            <a:off x="914400" y="3657600"/>
-            <a:ext cx="10515600" cy="1371600"/>
+            <a:off x="914400" y="3474720"/>
+            <a:ext cx="10515600" cy="1463040"/>
           </a:xfrm>
           <a:prstGeom prst="rect">
             <a:avLst/>
@@ -7953,7 +7842,7 @@
           <a:lstStyle/>
           <a:p>
             <a:pPr algn="l">
-              <a:defRPr sz="1400" b="1">
+              <a:defRPr sz="1300" b="1">
                 <a:solidFill>
                   <a:srgbClr val="FFFFFF"/>
                 </a:solidFill>
@@ -7964,10 +7853,14 @@
             </a:r>
             <a:br/>
             <a:r>
-              <a:t>Inventory: 18 days. External data shows deteriorating lane.</a:t>
+              <a:t>Inventory: 18 days. Oracle shows on-schedule, but external shipping data</a:t>
             </a:r>
             <a:br/>
             <a:r>
+              <a:t>indicates deteriorating activity on the ABC Glass lane.</a:t>
+            </a:r>
+            <a:br/>
+            <a:r>
               <a:t>A 2-week disruption puts ~134 MW of production at risk."</a:t>
             </a:r>
           </a:p>
@@ -7975,14 +7868,14 @@
       </p:sp>
       <p:sp>
         <p:nvSpPr>
-          <p:cNvPr id="26" name="TextBox 25"/>
+          <p:cNvPr id="25" name="TextBox 24"/>
           <p:cNvSpPr txBox="1"/>
           <p:nvPr/>
         </p:nvSpPr>
         <p:spPr>
           <a:xfrm>
-            <a:off x="731520" y="5394960"/>
-            <a:ext cx="10058400" cy="640080"/>
+            <a:off x="731520" y="5303520"/>
+            <a:ext cx="10058400" cy="548640"/>
           </a:xfrm>
           <a:prstGeom prst="rect">
             <a:avLst/>
@@ -8022,7 +7915,7 @@
     <p:bg>
       <p:bgPr>
         <a:solidFill>
-          <a:srgbClr val="05142B"/>
+          <a:srgbClr val="F8FAFC"/>
         </a:solidFill>
         <a:effectLst/>
       </p:bgPr>
@@ -8036,7 +7929,7 @@
       <p:grpSpPr/>
       <p:pic>
         <p:nvPicPr>
-          <p:cNvPr id="2" name="Picture 1" descr="snowflake_logo_white.png"/>
+          <p:cNvPr id="2" name="Picture 1" descr="sf_logo_combined.png"/>
           <p:cNvPicPr>
             <a:picLocks noChangeAspect="1"/>
           </p:cNvPicPr>
@@ -8050,8 +7943,8 @@
         </p:blipFill>
         <p:spPr>
           <a:xfrm>
-            <a:off x="457200" y="274320"/>
-            <a:ext cx="457200" cy="457200"/>
+            <a:off x="365760" y="228600"/>
+            <a:ext cx="2468880" cy="411480"/>
           </a:xfrm>
           <a:prstGeom prst="rect">
             <a:avLst/>
@@ -8066,8 +7959,8 @@
         </p:nvSpPr>
         <p:spPr>
           <a:xfrm>
-            <a:off x="457200" y="6446520"/>
-            <a:ext cx="11247120" cy="27432"/>
+            <a:off x="0" y="6583680"/>
+            <a:ext cx="12191695" cy="36576"/>
           </a:xfrm>
           <a:prstGeom prst="rect">
             <a:avLst/>
@@ -8109,8 +8002,8 @@
         </p:nvSpPr>
         <p:spPr>
           <a:xfrm>
-            <a:off x="731520" y="640080"/>
-            <a:ext cx="1645920" cy="548640"/>
+            <a:off x="731520" y="777240"/>
+            <a:ext cx="1463040" cy="457200"/>
           </a:xfrm>
           <a:prstGeom prst="roundRect">
             <a:avLst/>
@@ -8141,7 +8034,7 @@
           <a:lstStyle/>
           <a:p>
             <a:pPr algn="ctr">
-              <a:defRPr sz="1600" b="1">
+              <a:defRPr sz="1300" b="1">
                 <a:solidFill>
                   <a:srgbClr val="FFFFFF"/>
                 </a:solidFill>
@@ -8161,8 +8054,8 @@
         </p:nvSpPr>
         <p:spPr>
           <a:xfrm>
-            <a:off x="2560320" y="640080"/>
-            <a:ext cx="8229600" cy="548640"/>
+            <a:off x="2377440" y="777240"/>
+            <a:ext cx="8229600" cy="457200"/>
           </a:xfrm>
           <a:prstGeom prst="rect">
             <a:avLst/>
@@ -8176,51 +8069,27 @@
           <a:lstStyle/>
           <a:p>
             <a:pPr algn="l">
-              <a:defRPr sz="2400" b="1">
-                <a:solidFill>
-                  <a:srgbClr val="FFFFFF"/>
-                </a:solidFill>
-              </a:defRPr>
-            </a:pPr>
-            <a:r>
-              <a:t>Operate the Business</a:t>
-            </a:r>
-          </a:p>
-        </p:txBody>
-      </p:sp>
-      <p:pic>
-        <p:nvPicPr>
-          <p:cNvPr id="6" name="Picture 5" descr="icon_agent.png"/>
-          <p:cNvPicPr>
-            <a:picLocks noChangeAspect="1"/>
-          </p:cNvPicPr>
-          <p:nvPr/>
-        </p:nvPicPr>
-        <p:blipFill>
-          <a:blip r:embed="rId3"/>
-          <a:stretch>
-            <a:fillRect/>
-          </a:stretch>
-        </p:blipFill>
-        <p:spPr>
-          <a:xfrm>
-            <a:off x="10515600" y="548640"/>
-            <a:ext cx="731520" cy="731520"/>
-          </a:xfrm>
-          <a:prstGeom prst="rect">
-            <a:avLst/>
-          </a:prstGeom>
-        </p:spPr>
-      </p:pic>
-      <p:sp>
-        <p:nvSpPr>
-          <p:cNvPr id="7" name="TextBox 6"/>
+              <a:defRPr sz="2200" b="1">
+                <a:solidFill>
+                  <a:srgbClr val="11273F"/>
+                </a:solidFill>
+              </a:defRPr>
+            </a:pPr>
+            <a:r>
+              <a:t>Operate the Business — Action Plan</a:t>
+            </a:r>
+          </a:p>
+        </p:txBody>
+      </p:sp>
+      <p:sp>
+        <p:nvSpPr>
+          <p:cNvPr id="6" name="TextBox 5"/>
           <p:cNvSpPr txBox="1"/>
           <p:nvPr/>
         </p:nvSpPr>
         <p:spPr>
           <a:xfrm>
-            <a:off x="731520" y="1280160"/>
+            <a:off x="731520" y="1371600"/>
             <a:ext cx="10058400" cy="365760"/>
           </a:xfrm>
           <a:prstGeom prst="rect">
@@ -8235,9 +8104,9 @@
           <a:lstStyle/>
           <a:p>
             <a:pPr algn="l">
-              <a:defRPr sz="1600" b="1">
-                <a:solidFill>
-                  <a:srgbClr val="FFFFFF"/>
+              <a:defRPr sz="1500" b="1">
+                <a:solidFill>
+                  <a:srgbClr val="333333"/>
                 </a:solidFill>
               </a:defRPr>
             </a:pPr>
@@ -8249,25 +8118,23 @@
       </p:sp>
       <p:sp>
         <p:nvSpPr>
-          <p:cNvPr id="8" name="Rounded Rectangle 7"/>
+          <p:cNvPr id="7" name="Rounded Rectangle 6"/>
           <p:cNvSpPr/>
           <p:nvPr/>
         </p:nvSpPr>
         <p:spPr>
           <a:xfrm>
-            <a:off x="548640" y="1828800"/>
+            <a:off x="548640" y="1920240"/>
             <a:ext cx="2651760" cy="2011680"/>
           </a:xfrm>
           <a:prstGeom prst="roundRect">
             <a:avLst/>
           </a:prstGeom>
           <a:solidFill>
-            <a:srgbClr val="0A1E38"/>
+            <a:srgbClr val="2E7D32"/>
           </a:solidFill>
-          <a:ln w="25400">
-            <a:solidFill>
-              <a:srgbClr val="2E7D32"/>
-            </a:solidFill>
+          <a:ln>
+            <a:noFill/>
           </a:ln>
         </p:spPr>
         <p:style>
@@ -8294,13 +8161,13 @@
       </p:sp>
       <p:sp>
         <p:nvSpPr>
-          <p:cNvPr id="9" name="TextBox 8"/>
+          <p:cNvPr id="8" name="TextBox 7"/>
           <p:cNvSpPr txBox="1"/>
           <p:nvPr/>
         </p:nvSpPr>
         <p:spPr>
           <a:xfrm>
-            <a:off x="731520" y="1920240"/>
+            <a:off x="731520" y="2011680"/>
             <a:ext cx="2286000" cy="365760"/>
           </a:xfrm>
           <a:prstGeom prst="rect">
@@ -8315,9 +8182,9 @@
           <a:lstStyle/>
           <a:p>
             <a:pPr algn="l">
-              <a:defRPr sz="1300" b="1">
-                <a:solidFill>
-                  <a:srgbClr val="2E7D32"/>
+              <a:defRPr sz="1200" b="1">
+                <a:solidFill>
+                  <a:srgbClr val="FFFFFF"/>
                 </a:solidFill>
               </a:defRPr>
             </a:pPr>
@@ -8329,14 +8196,14 @@
       </p:sp>
       <p:sp>
         <p:nvSpPr>
-          <p:cNvPr id="10" name="TextBox 9"/>
+          <p:cNvPr id="9" name="TextBox 8"/>
           <p:cNvSpPr txBox="1"/>
           <p:nvPr/>
         </p:nvSpPr>
         <p:spPr>
           <a:xfrm>
-            <a:off x="731520" y="2377440"/>
-            <a:ext cx="2286000" cy="1371600"/>
+            <a:off x="731520" y="2468880"/>
+            <a:ext cx="2286000" cy="1280160"/>
           </a:xfrm>
           <a:prstGeom prst="rect">
             <a:avLst/>
@@ -8350,43 +8217,41 @@
           <a:lstStyle/>
           <a:p>
             <a:pPr algn="l">
-              <a:defRPr sz="1200" b="0">
+              <a:defRPr sz="1100" b="0">
                 <a:solidFill>
                   <a:srgbClr val="FFFFFF"/>
                 </a:solidFill>
               </a:defRPr>
             </a:pPr>
             <a:r>
-              <a:t>ABC Glass</a:t>
+              <a:t>ABC Glass — expedite</a:t>
             </a:r>
             <a:br/>
             <a:r>
-              <a:t>in-transit</a:t>
-            </a:r>
-          </a:p>
-        </p:txBody>
-      </p:sp>
-      <p:sp>
-        <p:nvSpPr>
-          <p:cNvPr id="11" name="Rounded Rectangle 10"/>
+              <a:t>in-transit shipments</a:t>
+            </a:r>
+          </a:p>
+        </p:txBody>
+      </p:sp>
+      <p:sp>
+        <p:nvSpPr>
+          <p:cNvPr id="10" name="Rounded Rectangle 9"/>
           <p:cNvSpPr/>
           <p:nvPr/>
         </p:nvSpPr>
         <p:spPr>
           <a:xfrm>
-            <a:off x="3429000" y="1828800"/>
+            <a:off x="3429000" y="1920240"/>
             <a:ext cx="2651760" cy="2011680"/>
           </a:xfrm>
           <a:prstGeom prst="roundRect">
             <a:avLst/>
           </a:prstGeom>
           <a:solidFill>
-            <a:srgbClr val="0A1E38"/>
+            <a:srgbClr val="29B5E8"/>
           </a:solidFill>
-          <a:ln w="25400">
-            <a:solidFill>
-              <a:srgbClr val="29B5E8"/>
-            </a:solidFill>
+          <a:ln>
+            <a:noFill/>
           </a:ln>
         </p:spPr>
         <p:style>
@@ -8413,13 +8278,13 @@
       </p:sp>
       <p:sp>
         <p:nvSpPr>
-          <p:cNvPr id="12" name="TextBox 11"/>
+          <p:cNvPr id="11" name="TextBox 10"/>
           <p:cNvSpPr txBox="1"/>
           <p:nvPr/>
         </p:nvSpPr>
         <p:spPr>
           <a:xfrm>
-            <a:off x="3611880" y="1920240"/>
+            <a:off x="3611880" y="2011680"/>
             <a:ext cx="2286000" cy="365760"/>
           </a:xfrm>
           <a:prstGeom prst="rect">
@@ -8434,9 +8299,9 @@
           <a:lstStyle/>
           <a:p>
             <a:pPr algn="l">
-              <a:defRPr sz="1300" b="1">
-                <a:solidFill>
-                  <a:srgbClr val="29B5E8"/>
+              <a:defRPr sz="1200" b="1">
+                <a:solidFill>
+                  <a:srgbClr val="FFFFFF"/>
                 </a:solidFill>
               </a:defRPr>
             </a:pPr>
@@ -8448,14 +8313,14 @@
       </p:sp>
       <p:sp>
         <p:nvSpPr>
-          <p:cNvPr id="13" name="TextBox 12"/>
+          <p:cNvPr id="12" name="TextBox 11"/>
           <p:cNvSpPr txBox="1"/>
           <p:nvPr/>
         </p:nvSpPr>
         <p:spPr>
           <a:xfrm>
-            <a:off x="3611880" y="2377440"/>
-            <a:ext cx="2286000" cy="1371600"/>
+            <a:off x="3611880" y="2468880"/>
+            <a:ext cx="2286000" cy="1280160"/>
           </a:xfrm>
           <a:prstGeom prst="rect">
             <a:avLst/>
@@ -8469,7 +8334,7 @@
           <a:lstStyle/>
           <a:p>
             <a:pPr algn="l">
-              <a:defRPr sz="1200" b="0">
+              <a:defRPr sz="1100" b="0">
                 <a:solidFill>
                   <a:srgbClr val="FFFFFF"/>
                 </a:solidFill>
@@ -8480,32 +8345,30 @@
             </a:r>
             <a:br/>
             <a:r>
-              <a:t>45d surplus, 2d</a:t>
-            </a:r>
-          </a:p>
-        </p:txBody>
-      </p:sp>
-      <p:sp>
-        <p:nvSpPr>
-          <p:cNvPr id="14" name="Rounded Rectangle 13"/>
+              <a:t>45d surplus, 2-day transit</a:t>
+            </a:r>
+          </a:p>
+        </p:txBody>
+      </p:sp>
+      <p:sp>
+        <p:nvSpPr>
+          <p:cNvPr id="13" name="Rounded Rectangle 12"/>
           <p:cNvSpPr/>
           <p:nvPr/>
         </p:nvSpPr>
         <p:spPr>
           <a:xfrm>
-            <a:off x="6309359" y="1828800"/>
+            <a:off x="6309359" y="1920240"/>
             <a:ext cx="2651760" cy="2011680"/>
           </a:xfrm>
           <a:prstGeom prst="roundRect">
             <a:avLst/>
           </a:prstGeom>
           <a:solidFill>
-            <a:srgbClr val="0A1E38"/>
+            <a:srgbClr val="E65100"/>
           </a:solidFill>
-          <a:ln w="25400">
-            <a:solidFill>
-              <a:srgbClr val="E65100"/>
-            </a:solidFill>
+          <a:ln>
+            <a:noFill/>
           </a:ln>
         </p:spPr>
         <p:style>
@@ -8532,13 +8395,13 @@
       </p:sp>
       <p:sp>
         <p:nvSpPr>
-          <p:cNvPr id="15" name="TextBox 14"/>
+          <p:cNvPr id="14" name="TextBox 13"/>
           <p:cNvSpPr txBox="1"/>
           <p:nvPr/>
         </p:nvSpPr>
         <p:spPr>
           <a:xfrm>
-            <a:off x="6492240" y="1920240"/>
+            <a:off x="6492240" y="2011680"/>
             <a:ext cx="2286000" cy="365760"/>
           </a:xfrm>
           <a:prstGeom prst="rect">
@@ -8553,9 +8416,9 @@
           <a:lstStyle/>
           <a:p>
             <a:pPr algn="l">
-              <a:defRPr sz="1300" b="1">
-                <a:solidFill>
-                  <a:srgbClr val="E65100"/>
+              <a:defRPr sz="1200" b="1">
+                <a:solidFill>
+                  <a:srgbClr val="FFFFFF"/>
                 </a:solidFill>
               </a:defRPr>
             </a:pPr>
@@ -8567,14 +8430,14 @@
       </p:sp>
       <p:sp>
         <p:nvSpPr>
-          <p:cNvPr id="16" name="TextBox 15"/>
+          <p:cNvPr id="15" name="TextBox 14"/>
           <p:cNvSpPr txBox="1"/>
           <p:nvPr/>
         </p:nvSpPr>
         <p:spPr>
           <a:xfrm>
-            <a:off x="6492240" y="2377440"/>
-            <a:ext cx="2286000" cy="1371600"/>
+            <a:off x="6492240" y="2468880"/>
+            <a:ext cx="2286000" cy="1280160"/>
           </a:xfrm>
           <a:prstGeom prst="rect">
             <a:avLst/>
@@ -8588,43 +8451,41 @@
           <a:lstStyle/>
           <a:p>
             <a:pPr algn="l">
-              <a:defRPr sz="1200" b="0">
+              <a:defRPr sz="1100" b="0">
                 <a:solidFill>
                   <a:srgbClr val="FFFFFF"/>
                 </a:solidFill>
               </a:defRPr>
             </a:pPr>
             <a:r>
-              <a:t>Guardian Glass</a:t>
+              <a:t>Guardian Glass (MI)</a:t>
             </a:r>
             <a:br/>
             <a:r>
-              <a:t>Emergency</a:t>
-            </a:r>
-          </a:p>
-        </p:txBody>
-      </p:sp>
-      <p:sp>
-        <p:nvSpPr>
-          <p:cNvPr id="17" name="Rounded Rectangle 16"/>
+              <a:t>emergency supply</a:t>
+            </a:r>
+          </a:p>
+        </p:txBody>
+      </p:sp>
+      <p:sp>
+        <p:nvSpPr>
+          <p:cNvPr id="16" name="Rounded Rectangle 15"/>
           <p:cNvSpPr/>
           <p:nvPr/>
         </p:nvSpPr>
         <p:spPr>
           <a:xfrm>
-            <a:off x="9189719" y="1828800"/>
+            <a:off x="9189719" y="1920240"/>
             <a:ext cx="2651760" cy="2011680"/>
           </a:xfrm>
           <a:prstGeom prst="roundRect">
             <a:avLst/>
           </a:prstGeom>
           <a:solidFill>
-            <a:srgbClr val="0A1E38"/>
+            <a:srgbClr val="6A1B9A"/>
           </a:solidFill>
-          <a:ln w="25400">
-            <a:solidFill>
-              <a:srgbClr val="6A1B9A"/>
-            </a:solidFill>
+          <a:ln>
+            <a:noFill/>
           </a:ln>
         </p:spPr>
         <p:style>
@@ -8651,13 +8512,13 @@
       </p:sp>
       <p:sp>
         <p:nvSpPr>
-          <p:cNvPr id="18" name="TextBox 17"/>
+          <p:cNvPr id="17" name="TextBox 16"/>
           <p:cNvSpPr txBox="1"/>
           <p:nvPr/>
         </p:nvSpPr>
         <p:spPr>
           <a:xfrm>
-            <a:off x="9372600" y="1920240"/>
+            <a:off x="9372600" y="2011680"/>
             <a:ext cx="2286000" cy="365760"/>
           </a:xfrm>
           <a:prstGeom prst="rect">
@@ -8672,9 +8533,9 @@
           <a:lstStyle/>
           <a:p>
             <a:pPr algn="l">
-              <a:defRPr sz="1300" b="1">
-                <a:solidFill>
-                  <a:srgbClr val="6A1B9A"/>
+              <a:defRPr sz="1200" b="1">
+                <a:solidFill>
+                  <a:srgbClr val="FFFFFF"/>
                 </a:solidFill>
               </a:defRPr>
             </a:pPr>
@@ -8686,14 +8547,14 @@
       </p:sp>
       <p:sp>
         <p:nvSpPr>
-          <p:cNvPr id="19" name="TextBox 18"/>
+          <p:cNvPr id="18" name="TextBox 17"/>
           <p:cNvSpPr txBox="1"/>
           <p:nvPr/>
         </p:nvSpPr>
         <p:spPr>
           <a:xfrm>
-            <a:off x="9372600" y="2377440"/>
-            <a:ext cx="2286000" cy="1371600"/>
+            <a:off x="9372600" y="2468880"/>
+            <a:ext cx="2286000" cy="1280160"/>
           </a:xfrm>
           <a:prstGeom prst="rect">
             <a:avLst/>
@@ -8707,43 +8568,41 @@
           <a:lstStyle/>
           <a:p>
             <a:pPr algn="l">
-              <a:defRPr sz="1200" b="0">
+              <a:defRPr sz="1100" b="0">
                 <a:solidFill>
                   <a:srgbClr val="FFFFFF"/>
                 </a:solidFill>
               </a:defRPr>
             </a:pPr>
             <a:r>
-              <a:t>NextEra Q2</a:t>
+              <a:t>NextEra Q2, Invenergy</a:t>
             </a:r>
             <a:br/>
             <a:r>
-              <a:t>Invenergy</a:t>
-            </a:r>
-          </a:p>
-        </p:txBody>
-      </p:sp>
-      <p:sp>
-        <p:nvSpPr>
-          <p:cNvPr id="20" name="Rounded Rectangle 19"/>
+              <a:t>Magnolia commitments</a:t>
+            </a:r>
+          </a:p>
+        </p:txBody>
+      </p:sp>
+      <p:sp>
+        <p:nvSpPr>
+          <p:cNvPr id="19" name="Rounded Rectangle 18"/>
           <p:cNvSpPr/>
           <p:nvPr/>
         </p:nvSpPr>
         <p:spPr>
           <a:xfrm>
-            <a:off x="731520" y="4206240"/>
-            <a:ext cx="10515600" cy="914400"/>
+            <a:off x="731520" y="4297680"/>
+            <a:ext cx="10515600" cy="822960"/>
           </a:xfrm>
           <a:prstGeom prst="roundRect">
             <a:avLst/>
           </a:prstGeom>
           <a:solidFill>
-            <a:srgbClr val="0A1E38"/>
+            <a:srgbClr val="11273F"/>
           </a:solidFill>
-          <a:ln w="25400">
-            <a:solidFill>
-              <a:srgbClr val="29B5E8"/>
-            </a:solidFill>
+          <a:ln>
+            <a:noFill/>
           </a:ln>
         </p:spPr>
         <p:style>
@@ -8770,14 +8629,14 @@
       </p:sp>
       <p:sp>
         <p:nvSpPr>
-          <p:cNvPr id="21" name="TextBox 20"/>
+          <p:cNvPr id="20" name="TextBox 19"/>
           <p:cNvSpPr txBox="1"/>
           <p:nvPr/>
         </p:nvSpPr>
         <p:spPr>
           <a:xfrm>
-            <a:off x="1188720" y="4297680"/>
-            <a:ext cx="9601200" cy="822960"/>
+            <a:off x="1188720" y="4389120"/>
+            <a:ext cx="9601200" cy="640080"/>
           </a:xfrm>
           <a:prstGeom prst="rect">
             <a:avLst/>
@@ -8791,7 +8650,7 @@
           <a:lstStyle/>
           <a:p>
             <a:pPr algn="l">
-              <a:defRPr sz="1400" b="1">
+              <a:defRPr sz="1300" b="1">
                 <a:solidFill>
                   <a:srgbClr val="29B5E8"/>
                 </a:solidFill>
@@ -8805,7 +8664,7 @@
       </p:sp>
       <p:sp>
         <p:nvSpPr>
-          <p:cNvPr id="22" name="TextBox 21"/>
+          <p:cNvPr id="21" name="TextBox 20"/>
           <p:cNvSpPr txBox="1"/>
           <p:nvPr/>
         </p:nvSpPr>
@@ -8852,7 +8711,7 @@
     <p:bg>
       <p:bgPr>
         <a:solidFill>
-          <a:srgbClr val="05142B"/>
+          <a:srgbClr val="F8FAFC"/>
         </a:solidFill>
         <a:effectLst/>
       </p:bgPr>
@@ -8866,7 +8725,7 @@
       <p:grpSpPr/>
       <p:pic>
         <p:nvPicPr>
-          <p:cNvPr id="2" name="Picture 1" descr="snowflake_logo_white.png"/>
+          <p:cNvPr id="2" name="Picture 1" descr="sf_logo_combined.png"/>
           <p:cNvPicPr>
             <a:picLocks noChangeAspect="1"/>
           </p:cNvPicPr>
@@ -8880,8 +8739,8 @@
         </p:blipFill>
         <p:spPr>
           <a:xfrm>
-            <a:off x="457200" y="274320"/>
-            <a:ext cx="457200" cy="457200"/>
+            <a:off x="365760" y="228600"/>
+            <a:ext cx="2468880" cy="411480"/>
           </a:xfrm>
           <a:prstGeom prst="rect">
             <a:avLst/>
@@ -8896,8 +8755,8 @@
         </p:nvSpPr>
         <p:spPr>
           <a:xfrm>
-            <a:off x="457200" y="6446520"/>
-            <a:ext cx="11247120" cy="27432"/>
+            <a:off x="0" y="6583680"/>
+            <a:ext cx="12191695" cy="36576"/>
           </a:xfrm>
           <a:prstGeom prst="rect">
             <a:avLst/>
@@ -8939,7 +8798,7 @@
         </p:nvSpPr>
         <p:spPr>
           <a:xfrm>
-            <a:off x="731520" y="731520"/>
+            <a:off x="731520" y="777240"/>
             <a:ext cx="10058400" cy="548640"/>
           </a:xfrm>
           <a:prstGeom prst="rect">
@@ -8954,14 +8813,14 @@
           <a:lstStyle/>
           <a:p>
             <a:pPr algn="l">
-              <a:defRPr sz="3200" b="1">
-                <a:solidFill>
-                  <a:srgbClr val="29B5E8"/>
-                </a:solidFill>
-              </a:defRPr>
-            </a:pPr>
-            <a:r>
-              <a:t>Impact — Land It in MW</a:t>
+              <a:defRPr sz="3000" b="1">
+                <a:solidFill>
+                  <a:srgbClr val="11273F"/>
+                </a:solidFill>
+              </a:defRPr>
+            </a:pPr>
+            <a:r>
+              <a:t>Impact — Land It in Their Units</a:t>
             </a:r>
           </a:p>
         </p:txBody>
@@ -8975,18 +8834,16 @@
         <p:spPr>
           <a:xfrm>
             <a:off x="731520" y="1554480"/>
-            <a:ext cx="5029200" cy="3200400"/>
+            <a:ext cx="5029200" cy="3474720"/>
           </a:xfrm>
           <a:prstGeom prst="roundRect">
             <a:avLst/>
           </a:prstGeom>
           <a:solidFill>
-            <a:srgbClr val="0A1E38"/>
+            <a:srgbClr val="11273F"/>
           </a:solidFill>
-          <a:ln w="25400">
-            <a:solidFill>
-              <a:srgbClr val="C62828"/>
-            </a:solidFill>
+          <a:ln>
+            <a:noFill/>
           </a:ln>
         </p:spPr>
         <p:style>
@@ -9034,9 +8891,9 @@
           <a:lstStyle/>
           <a:p>
             <a:pPr algn="ctr">
-              <a:defRPr sz="1300" b="0">
-                <a:solidFill>
-                  <a:srgbClr val="8E9EAB"/>
+              <a:defRPr sz="1200" b="0">
+                <a:solidFill>
+                  <a:srgbClr val="6B7B8D"/>
                 </a:solidFill>
               </a:defRPr>
             </a:pPr>
@@ -9089,7 +8946,7 @@
         </p:nvSpPr>
         <p:spPr>
           <a:xfrm>
-            <a:off x="1188720" y="3291840"/>
+            <a:off x="1188720" y="3383280"/>
             <a:ext cx="4114800" cy="457200"/>
           </a:xfrm>
           <a:prstGeom prst="rect">
@@ -9104,14 +8961,14 @@
           <a:lstStyle/>
           <a:p>
             <a:pPr algn="ctr">
-              <a:defRPr sz="1800" b="1">
+              <a:defRPr sz="1700" b="1">
                 <a:solidFill>
                   <a:srgbClr val="FFFFFF"/>
                 </a:solidFill>
               </a:defRPr>
             </a:pPr>
             <a:r>
-              <a:t>~$40M Revenue</a:t>
+              <a:t>~$40M Revenue Exposure</a:t>
             </a:r>
           </a:p>
         </p:txBody>
@@ -9124,8 +8981,8 @@
         </p:nvSpPr>
         <p:spPr>
           <a:xfrm>
-            <a:off x="1188720" y="3840480"/>
-            <a:ext cx="4114800" cy="548640"/>
+            <a:off x="1188720" y="4023360"/>
+            <a:ext cx="4114800" cy="457200"/>
           </a:xfrm>
           <a:prstGeom prst="rect">
             <a:avLst/>
@@ -9139,14 +8996,14 @@
           <a:lstStyle/>
           <a:p>
             <a:pPr algn="ctr">
-              <a:defRPr sz="1200" b="0">
-                <a:solidFill>
-                  <a:srgbClr val="8E9EAB"/>
-                </a:solidFill>
-              </a:defRPr>
-            </a:pPr>
-            <a:r>
-              <a:t>14d × 9.6 MW/day</a:t>
+              <a:defRPr sz="1100" b="0">
+                <a:solidFill>
+                  <a:srgbClr val="6B7B8D"/>
+                </a:solidFill>
+              </a:defRPr>
+            </a:pPr>
+            <a:r>
+              <a:t>14d × 9.6 MW/day @ $0.30/W</a:t>
             </a:r>
           </a:p>
         </p:txBody>
@@ -9160,7 +9017,7 @@
         <p:spPr>
           <a:xfrm>
             <a:off x="6400800" y="1645920"/>
-            <a:ext cx="5029200" cy="3200400"/>
+            <a:ext cx="5029200" cy="3474720"/>
           </a:xfrm>
           <a:prstGeom prst="rect">
             <a:avLst/>
@@ -9176,12 +9033,12 @@
             <a:pPr algn="l">
               <a:defRPr sz="1300" b="0">
                 <a:solidFill>
-                  <a:srgbClr val="FFFFFF"/>
-                </a:solidFill>
-              </a:defRPr>
-            </a:pPr>
-            <a:r>
-              <a:t>Alabama: 9.6 MW/day</a:t>
+                  <a:srgbClr val="333333"/>
+                </a:solidFill>
+              </a:defRPr>
+            </a:pPr>
+            <a:r>
+              <a:t>Alabama: 3,500 MW ÷ 365 = 9.6 MW/day</a:t>
             </a:r>
             <a:br/>
             <a:br/>
@@ -9191,7 +9048,7 @@
             <a:br/>
             <a:br/>
             <a:r>
-              <a:t>2-week delay:</a:t>
+              <a:t>2-week delay beyond coverage:</a:t>
             </a:r>
             <a:br/>
             <a:r>
@@ -9200,24 +9057,24 @@
             <a:br/>
             <a:br/>
             <a:r>
-              <a:t>At $0.30/W:</a:t>
+              <a:t>At $0.30/W ASP:</a:t>
             </a:r>
             <a:br/>
             <a:r>
-              <a:t>  134 MW = ~$40M</a:t>
+              <a:t>  134 MW × $300K = ~$40M</a:t>
             </a:r>
             <a:br/>
             <a:br/>
             <a:r>
-              <a:t>Customers at risk:</a:t>
+              <a:t>Customers:</a:t>
             </a:r>
             <a:br/>
             <a:r>
-              <a:t>  NextEra Q2</a:t>
+              <a:t>  NextEra Q2 commissioning</a:t>
             </a:r>
             <a:br/>
             <a:r>
-              <a:t>  Invenergy Magnolia</a:t>
+              <a:t>  Invenergy Magnolia Solar</a:t>
             </a:r>
           </a:p>
         </p:txBody>
@@ -9230,8 +9087,8 @@
         </p:nvSpPr>
         <p:spPr>
           <a:xfrm>
-            <a:off x="731520" y="5029200"/>
-            <a:ext cx="10058400" cy="457200"/>
+            <a:off x="731520" y="5303520"/>
+            <a:ext cx="10058400" cy="365760"/>
           </a:xfrm>
           <a:prstGeom prst="rect">
             <a:avLst/>
@@ -9245,14 +9102,14 @@
           <a:lstStyle/>
           <a:p>
             <a:pPr algn="l">
-              <a:defRPr sz="1200" b="1">
+              <a:defRPr sz="1100" b="1">
                 <a:solidFill>
                   <a:srgbClr val="E65100"/>
                 </a:solidFill>
               </a:defRPr>
             </a:pPr>
             <a:r>
-              <a:t>ALWAYS quantify in MW and $. That makes them lean in.</a:t>
+              <a:t>ALWAYS land in MW and $. That makes the CSCO lean in.</a:t>
             </a:r>
           </a:p>
         </p:txBody>
@@ -9271,7 +9128,7 @@
     <p:bg>
       <p:bgPr>
         <a:solidFill>
-          <a:srgbClr val="05142B"/>
+          <a:srgbClr val="F8FAFC"/>
         </a:solidFill>
         <a:effectLst/>
       </p:bgPr>
@@ -9285,7 +9142,7 @@
       <p:grpSpPr/>
       <p:pic>
         <p:nvPicPr>
-          <p:cNvPr id="2" name="Picture 1" descr="snowflake_logo_white.png"/>
+          <p:cNvPr id="2" name="Picture 1" descr="sf_logo_combined.png"/>
           <p:cNvPicPr>
             <a:picLocks noChangeAspect="1"/>
           </p:cNvPicPr>
@@ -9299,8 +9156,8 @@
         </p:blipFill>
         <p:spPr>
           <a:xfrm>
-            <a:off x="457200" y="274320"/>
-            <a:ext cx="457200" cy="457200"/>
+            <a:off x="365760" y="228600"/>
+            <a:ext cx="2468880" cy="411480"/>
           </a:xfrm>
           <a:prstGeom prst="rect">
             <a:avLst/>
@@ -9315,8 +9172,8 @@
         </p:nvSpPr>
         <p:spPr>
           <a:xfrm>
-            <a:off x="457200" y="6446520"/>
-            <a:ext cx="11247120" cy="27432"/>
+            <a:off x="0" y="6583680"/>
+            <a:ext cx="12191695" cy="36576"/>
           </a:xfrm>
           <a:prstGeom prst="rect">
             <a:avLst/>
@@ -9358,7 +9215,7 @@
         </p:nvSpPr>
         <p:spPr>
           <a:xfrm>
-            <a:off x="731520" y="731520"/>
+            <a:off x="731520" y="777240"/>
             <a:ext cx="10058400" cy="548640"/>
           </a:xfrm>
           <a:prstGeom prst="rect">
@@ -9373,14 +9230,14 @@
           <a:lstStyle/>
           <a:p>
             <a:pPr algn="l">
-              <a:defRPr sz="3200" b="1">
-                <a:solidFill>
-                  <a:srgbClr val="29B5E8"/>
-                </a:solidFill>
-              </a:defRPr>
-            </a:pPr>
-            <a:r>
-              <a:t>Architecture — 11 Tools</a:t>
+              <a:defRPr sz="3000" b="1">
+                <a:solidFill>
+                  <a:srgbClr val="11273F"/>
+                </a:solidFill>
+              </a:defRPr>
+            </a:pPr>
+            <a:r>
+              <a:t>Agent Architecture — 11 Tools</a:t>
             </a:r>
           </a:p>
         </p:txBody>
@@ -9394,7 +9251,7 @@
         <p:spPr>
           <a:xfrm>
             <a:off x="731520" y="1371600"/>
-            <a:ext cx="10515600" cy="640080"/>
+            <a:ext cx="10515600" cy="548640"/>
           </a:xfrm>
           <a:prstGeom prst="roundRect">
             <a:avLst/>
@@ -9425,14 +9282,14 @@
           <a:lstStyle/>
           <a:p>
             <a:pPr algn="ctr">
-              <a:defRPr sz="1200" b="1">
+              <a:defRPr sz="1100" b="1">
                 <a:solidFill>
                   <a:srgbClr val="FFFFFF"/>
                 </a:solidFill>
               </a:defRPr>
             </a:pPr>
             <a:r>
-              <a:t>FIRST_SOLAR_AGENT | YAML | 15 Questions | 60s/32K</a:t>
+              <a:t>FIRST_SOLAR_AGENT  |  YAML  |  15 Sample Questions  |  60s / 32K tokens</a:t>
             </a:r>
           </a:p>
         </p:txBody>
@@ -9445,7 +9302,7 @@
         </p:nvSpPr>
         <p:spPr>
           <a:xfrm>
-            <a:off x="731520" y="2194560"/>
+            <a:off x="731520" y="2103120"/>
             <a:ext cx="3474720" cy="365760"/>
           </a:xfrm>
           <a:prstGeom prst="rect">
@@ -9460,7 +9317,7 @@
           <a:lstStyle/>
           <a:p>
             <a:pPr algn="l">
-              <a:defRPr sz="1200" b="1">
+              <a:defRPr sz="1100" b="1">
                 <a:solidFill>
                   <a:srgbClr val="29B5E8"/>
                 </a:solidFill>
@@ -9480,19 +9337,17 @@
         </p:nvSpPr>
         <p:spPr>
           <a:xfrm>
-            <a:off x="731520" y="2651760"/>
-            <a:ext cx="3383280" cy="640080"/>
+            <a:off x="731520" y="2560320"/>
+            <a:ext cx="3383280" cy="594360"/>
           </a:xfrm>
           <a:prstGeom prst="roundRect">
             <a:avLst/>
           </a:prstGeom>
           <a:solidFill>
-            <a:srgbClr val="0A1E38"/>
+            <a:srgbClr val="29B5E8"/>
           </a:solidFill>
-          <a:ln w="25400">
-            <a:solidFill>
-              <a:srgbClr val="29B5E8"/>
-            </a:solidFill>
+          <a:ln>
+            <a:noFill/>
           </a:ln>
         </p:spPr>
         <p:style>
@@ -9534,19 +9389,17 @@
         </p:nvSpPr>
         <p:spPr>
           <a:xfrm>
-            <a:off x="731520" y="3429000"/>
-            <a:ext cx="3383280" cy="640080"/>
+            <a:off x="731520" y="3291839"/>
+            <a:ext cx="3383280" cy="594360"/>
           </a:xfrm>
           <a:prstGeom prst="roundRect">
             <a:avLst/>
           </a:prstGeom>
           <a:solidFill>
-            <a:srgbClr val="0A1E38"/>
+            <a:srgbClr val="29B5E8"/>
           </a:solidFill>
-          <a:ln w="25400">
-            <a:solidFill>
-              <a:srgbClr val="29B5E8"/>
-            </a:solidFill>
+          <a:ln>
+            <a:noFill/>
           </a:ln>
         </p:spPr>
         <p:style>
@@ -9588,19 +9441,17 @@
         </p:nvSpPr>
         <p:spPr>
           <a:xfrm>
-            <a:off x="731520" y="4206240"/>
-            <a:ext cx="3383280" cy="640080"/>
+            <a:off x="731520" y="4023360"/>
+            <a:ext cx="3383280" cy="594360"/>
           </a:xfrm>
           <a:prstGeom prst="roundRect">
             <a:avLst/>
           </a:prstGeom>
           <a:solidFill>
-            <a:srgbClr val="0A1E38"/>
+            <a:srgbClr val="29B5E8"/>
           </a:solidFill>
-          <a:ln w="25400">
-            <a:solidFill>
-              <a:srgbClr val="29B5E8"/>
-            </a:solidFill>
+          <a:ln>
+            <a:noFill/>
           </a:ln>
         </p:spPr>
         <p:style>
@@ -9642,7 +9493,7 @@
         </p:nvSpPr>
         <p:spPr>
           <a:xfrm>
-            <a:off x="4480559" y="2194560"/>
+            <a:off x="4480559" y="2103120"/>
             <a:ext cx="3474720" cy="365760"/>
           </a:xfrm>
           <a:prstGeom prst="rect">
@@ -9657,7 +9508,7 @@
           <a:lstStyle/>
           <a:p>
             <a:pPr algn="l">
-              <a:defRPr sz="1200" b="1">
+              <a:defRPr sz="1100" b="1">
                 <a:solidFill>
                   <a:srgbClr val="2E7D32"/>
                 </a:solidFill>
@@ -9677,19 +9528,17 @@
         </p:nvSpPr>
         <p:spPr>
           <a:xfrm>
-            <a:off x="4480559" y="2651760"/>
-            <a:ext cx="3383280" cy="640080"/>
+            <a:off x="4480559" y="2560320"/>
+            <a:ext cx="3383280" cy="594360"/>
           </a:xfrm>
           <a:prstGeom prst="roundRect">
             <a:avLst/>
           </a:prstGeom>
           <a:solidFill>
-            <a:srgbClr val="0A1E38"/>
+            <a:srgbClr val="2E7D32"/>
           </a:solidFill>
-          <a:ln w="25400">
-            <a:solidFill>
-              <a:srgbClr val="2E7D32"/>
-            </a:solidFill>
+          <a:ln>
+            <a:noFill/>
           </a:ln>
         </p:spPr>
         <p:style>
@@ -9731,19 +9580,17 @@
         </p:nvSpPr>
         <p:spPr>
           <a:xfrm>
-            <a:off x="4480559" y="3429000"/>
-            <a:ext cx="3383280" cy="640080"/>
+            <a:off x="4480559" y="3291839"/>
+            <a:ext cx="3383280" cy="594360"/>
           </a:xfrm>
           <a:prstGeom prst="roundRect">
             <a:avLst/>
           </a:prstGeom>
           <a:solidFill>
-            <a:srgbClr val="0A1E38"/>
+            <a:srgbClr val="2E7D32"/>
           </a:solidFill>
-          <a:ln w="25400">
-            <a:solidFill>
-              <a:srgbClr val="2E7D32"/>
-            </a:solidFill>
+          <a:ln>
+            <a:noFill/>
           </a:ln>
         </p:spPr>
         <p:style>
@@ -9785,19 +9632,17 @@
         </p:nvSpPr>
         <p:spPr>
           <a:xfrm>
-            <a:off x="4480559" y="4206240"/>
-            <a:ext cx="3383280" cy="640080"/>
+            <a:off x="4480559" y="4023360"/>
+            <a:ext cx="3383280" cy="594360"/>
           </a:xfrm>
           <a:prstGeom prst="roundRect">
             <a:avLst/>
           </a:prstGeom>
           <a:solidFill>
-            <a:srgbClr val="0A1E38"/>
+            <a:srgbClr val="2E7D32"/>
           </a:solidFill>
-          <a:ln w="25400">
-            <a:solidFill>
-              <a:srgbClr val="2E7D32"/>
-            </a:solidFill>
+          <a:ln>
+            <a:noFill/>
           </a:ln>
         </p:spPr>
         <p:style>
@@ -9839,19 +9684,17 @@
         </p:nvSpPr>
         <p:spPr>
           <a:xfrm>
-            <a:off x="4480559" y="4983479"/>
-            <a:ext cx="3383280" cy="640080"/>
+            <a:off x="4480559" y="4754880"/>
+            <a:ext cx="3383280" cy="594360"/>
           </a:xfrm>
           <a:prstGeom prst="roundRect">
             <a:avLst/>
           </a:prstGeom>
           <a:solidFill>
-            <a:srgbClr val="0A1E38"/>
+            <a:srgbClr val="2E7D32"/>
           </a:solidFill>
-          <a:ln w="25400">
-            <a:solidFill>
-              <a:srgbClr val="2E7D32"/>
-            </a:solidFill>
+          <a:ln>
+            <a:noFill/>
           </a:ln>
         </p:spPr>
         <p:style>
@@ -9893,7 +9736,7 @@
         </p:nvSpPr>
         <p:spPr>
           <a:xfrm>
-            <a:off x="8229600" y="2194560"/>
+            <a:off x="8229600" y="2103120"/>
             <a:ext cx="3474720" cy="365760"/>
           </a:xfrm>
           <a:prstGeom prst="rect">
@@ -9908,7 +9751,7 @@
           <a:lstStyle/>
           <a:p>
             <a:pPr algn="l">
-              <a:defRPr sz="1200" b="1">
+              <a:defRPr sz="1100" b="1">
                 <a:solidFill>
                   <a:srgbClr val="E65100"/>
                 </a:solidFill>
@@ -9928,19 +9771,17 @@
         </p:nvSpPr>
         <p:spPr>
           <a:xfrm>
-            <a:off x="8229600" y="2651760"/>
-            <a:ext cx="3383280" cy="640080"/>
+            <a:off x="8229600" y="2560320"/>
+            <a:ext cx="3383280" cy="594360"/>
           </a:xfrm>
           <a:prstGeom prst="roundRect">
             <a:avLst/>
           </a:prstGeom>
           <a:solidFill>
-            <a:srgbClr val="0A1E38"/>
+            <a:srgbClr val="E65100"/>
           </a:solidFill>
-          <a:ln w="25400">
-            <a:solidFill>
-              <a:srgbClr val="E65100"/>
-            </a:solidFill>
+          <a:ln>
+            <a:noFill/>
           </a:ln>
         </p:spPr>
         <p:style>
@@ -9982,19 +9823,17 @@
         </p:nvSpPr>
         <p:spPr>
           <a:xfrm>
-            <a:off x="8229600" y="3429000"/>
-            <a:ext cx="3383280" cy="640080"/>
+            <a:off x="8229600" y="3291839"/>
+            <a:ext cx="3383280" cy="594360"/>
           </a:xfrm>
           <a:prstGeom prst="roundRect">
             <a:avLst/>
           </a:prstGeom>
           <a:solidFill>
-            <a:srgbClr val="0A1E38"/>
+            <a:srgbClr val="E65100"/>
           </a:solidFill>
-          <a:ln w="25400">
-            <a:solidFill>
-              <a:srgbClr val="E65100"/>
-            </a:solidFill>
+          <a:ln>
+            <a:noFill/>
           </a:ln>
         </p:spPr>
         <p:style>
@@ -10036,19 +9875,17 @@
         </p:nvSpPr>
         <p:spPr>
           <a:xfrm>
-            <a:off x="8229600" y="4206240"/>
-            <a:ext cx="3383280" cy="640080"/>
+            <a:off x="8229600" y="4023360"/>
+            <a:ext cx="3383280" cy="594360"/>
           </a:xfrm>
           <a:prstGeom prst="roundRect">
             <a:avLst/>
           </a:prstGeom>
           <a:solidFill>
-            <a:srgbClr val="0A1E38"/>
+            <a:srgbClr val="E65100"/>
           </a:solidFill>
-          <a:ln w="25400">
-            <a:solidFill>
-              <a:srgbClr val="E65100"/>
-            </a:solidFill>
+          <a:ln>
+            <a:noFill/>
           </a:ln>
         </p:spPr>
         <p:style>
@@ -10090,19 +9927,17 @@
         </p:nvSpPr>
         <p:spPr>
           <a:xfrm>
-            <a:off x="8229600" y="4983479"/>
-            <a:ext cx="3383280" cy="640080"/>
+            <a:off x="8229600" y="4754880"/>
+            <a:ext cx="3383280" cy="594360"/>
           </a:xfrm>
           <a:prstGeom prst="roundRect">
             <a:avLst/>
           </a:prstGeom>
           <a:solidFill>
-            <a:srgbClr val="0A1E38"/>
+            <a:srgbClr val="E65100"/>
           </a:solidFill>
-          <a:ln w="25400">
-            <a:solidFill>
-              <a:srgbClr val="E65100"/>
-            </a:solidFill>
+          <a:ln>
+            <a:noFill/>
           </a:ln>
         </p:spPr>
         <p:style>
